--- a/material/5_AI/09_회귀와경사하강법.pptx
+++ b/material/5_AI/09_회귀와경사하강법.pptx
@@ -5,46 +5,49 @@
     <p:sldMasterId id="2147483660" r:id="rId1"/>
   </p:sldMasterIdLst>
   <p:notesMasterIdLst>
-    <p:notesMasterId r:id="rId39"/>
+    <p:notesMasterId r:id="rId42"/>
   </p:notesMasterIdLst>
   <p:sldIdLst>
     <p:sldId id="1013" r:id="rId2"/>
     <p:sldId id="601" r:id="rId3"/>
-    <p:sldId id="563" r:id="rId4"/>
-    <p:sldId id="1005" r:id="rId5"/>
-    <p:sldId id="671" r:id="rId6"/>
-    <p:sldId id="670" r:id="rId7"/>
-    <p:sldId id="602" r:id="rId8"/>
-    <p:sldId id="672" r:id="rId9"/>
-    <p:sldId id="625" r:id="rId10"/>
-    <p:sldId id="644" r:id="rId11"/>
-    <p:sldId id="653" r:id="rId12"/>
-    <p:sldId id="673" r:id="rId13"/>
-    <p:sldId id="654" r:id="rId14"/>
-    <p:sldId id="655" r:id="rId15"/>
-    <p:sldId id="604" r:id="rId16"/>
-    <p:sldId id="603" r:id="rId17"/>
-    <p:sldId id="677" r:id="rId18"/>
-    <p:sldId id="674" r:id="rId19"/>
-    <p:sldId id="605" r:id="rId20"/>
-    <p:sldId id="675" r:id="rId21"/>
-    <p:sldId id="1006" r:id="rId22"/>
-    <p:sldId id="678" r:id="rId23"/>
-    <p:sldId id="627" r:id="rId24"/>
-    <p:sldId id="606" r:id="rId25"/>
-    <p:sldId id="646" r:id="rId26"/>
-    <p:sldId id="645" r:id="rId27"/>
-    <p:sldId id="679" r:id="rId28"/>
-    <p:sldId id="676" r:id="rId29"/>
-    <p:sldId id="647" r:id="rId30"/>
-    <p:sldId id="608" r:id="rId31"/>
-    <p:sldId id="607" r:id="rId32"/>
-    <p:sldId id="613" r:id="rId33"/>
-    <p:sldId id="648" r:id="rId34"/>
-    <p:sldId id="680" r:id="rId35"/>
-    <p:sldId id="695" r:id="rId36"/>
-    <p:sldId id="1007" r:id="rId37"/>
-    <p:sldId id="836" r:id="rId38"/>
+    <p:sldId id="1014" r:id="rId4"/>
+    <p:sldId id="563" r:id="rId5"/>
+    <p:sldId id="1005" r:id="rId6"/>
+    <p:sldId id="671" r:id="rId7"/>
+    <p:sldId id="670" r:id="rId8"/>
+    <p:sldId id="602" r:id="rId9"/>
+    <p:sldId id="672" r:id="rId10"/>
+    <p:sldId id="625" r:id="rId11"/>
+    <p:sldId id="644" r:id="rId12"/>
+    <p:sldId id="653" r:id="rId13"/>
+    <p:sldId id="673" r:id="rId14"/>
+    <p:sldId id="654" r:id="rId15"/>
+    <p:sldId id="655" r:id="rId16"/>
+    <p:sldId id="604" r:id="rId17"/>
+    <p:sldId id="603" r:id="rId18"/>
+    <p:sldId id="677" r:id="rId19"/>
+    <p:sldId id="674" r:id="rId20"/>
+    <p:sldId id="605" r:id="rId21"/>
+    <p:sldId id="1015" r:id="rId22"/>
+    <p:sldId id="675" r:id="rId23"/>
+    <p:sldId id="1006" r:id="rId24"/>
+    <p:sldId id="678" r:id="rId25"/>
+    <p:sldId id="627" r:id="rId26"/>
+    <p:sldId id="606" r:id="rId27"/>
+    <p:sldId id="646" r:id="rId28"/>
+    <p:sldId id="645" r:id="rId29"/>
+    <p:sldId id="679" r:id="rId30"/>
+    <p:sldId id="676" r:id="rId31"/>
+    <p:sldId id="647" r:id="rId32"/>
+    <p:sldId id="608" r:id="rId33"/>
+    <p:sldId id="607" r:id="rId34"/>
+    <p:sldId id="613" r:id="rId35"/>
+    <p:sldId id="648" r:id="rId36"/>
+    <p:sldId id="680" r:id="rId37"/>
+    <p:sldId id="695" r:id="rId38"/>
+    <p:sldId id="1007" r:id="rId39"/>
+    <p:sldId id="1016" r:id="rId40"/>
+    <p:sldId id="836" r:id="rId41"/>
   </p:sldIdLst>
   <p:sldSz cx="12192000" cy="6858000"/>
   <p:notesSz cx="6858000" cy="9144000"/>
@@ -283,7 +286,7 @@
             <a:fld id="{A13A867C-D490-40C2-AB8D-A60FA70A9BF5}" type="datetimeFigureOut">
               <a:rPr lang="ko-KR" altLang="en-US" smtClean="0"/>
               <a:pPr/>
-              <a:t>2026-02-10</a:t>
+              <a:t>2026-02-12</a:t>
             </a:fld>
             <a:endParaRPr lang="ko-KR" altLang="en-US" dirty="0"/>
           </a:p>
@@ -658,7 +661,7 @@
 </p:notes>
 </file>
 
-<file path=ppt/notesSlides/notesSlide2.xml><?xml version="1.0" encoding="utf-8"?>
+<file path=ppt/notesSlides/notesSlide10.xml><?xml version="1.0" encoding="utf-8"?>
 <p:notes xmlns:a="http://schemas.openxmlformats.org/drawingml/2006/main" xmlns:r="http://schemas.openxmlformats.org/officeDocument/2006/relationships" xmlns:p="http://schemas.openxmlformats.org/presentationml/2006/main">
   <p:cSld>
     <p:spTree>
@@ -702,123 +705,157 @@
           <a:bodyPr/>
           <a:lstStyle/>
           <a:p>
-            <a:pPr marL="0" marR="0" indent="0" algn="l" defTabSz="914400" rtl="0" eaLnBrk="1" fontAlgn="auto" latinLnBrk="1" hangingPunct="1">
-              <a:lnSpc>
-                <a:spcPct val="100000"/>
-              </a:lnSpc>
-              <a:spcBef>
-                <a:spcPts val="0"/>
-              </a:spcBef>
-              <a:spcAft>
-                <a:spcPts val="0"/>
-              </a:spcAft>
-              <a:buClrTx/>
-              <a:buSzTx/>
-              <a:buFontTx/>
-              <a:buNone/>
-              <a:tabLst/>
-              <a:defRPr/>
-            </a:pPr>
+            <a:r>
+              <a:rPr lang="ko-KR" altLang="en-US" dirty="0"/>
+              <a:t>손실을 가장 빠르게 줄이는 방향으로</a:t>
+            </a:r>
+            <a:br>
+              <a:rPr lang="ko-KR" altLang="en-US" dirty="0"/>
+            </a:br>
+            <a:r>
+              <a:rPr lang="ko-KR" altLang="en-US" dirty="0"/>
+              <a:t>가중치를 조금씩 수정하는 규칙</a:t>
+            </a:r>
+            <a:endParaRPr lang="en-US" altLang="ko-KR" dirty="0"/>
+          </a:p>
+          <a:p>
+            <a:endParaRPr lang="en-US" altLang="ko-KR" dirty="0"/>
+          </a:p>
+          <a:p>
+            <a:r>
+              <a:rPr lang="en-US" altLang="ko-KR" dirty="0"/>
+              <a:t>L(w): </a:t>
+            </a:r>
+            <a:r>
+              <a:rPr lang="ko-KR" altLang="en-US" dirty="0"/>
+              <a:t>손실 함수</a:t>
+            </a:r>
+          </a:p>
+          <a:p>
+            <a:r>
+              <a:rPr lang="en-US" altLang="ko-KR" dirty="0"/>
+              <a:t>wᵢ: </a:t>
+            </a:r>
+            <a:r>
+              <a:rPr lang="en-US" altLang="ko-KR" dirty="0" err="1"/>
+              <a:t>i</a:t>
+            </a:r>
+            <a:r>
+              <a:rPr lang="ko-KR" altLang="en-US" dirty="0"/>
+              <a:t>번째 가중치</a:t>
+            </a:r>
+          </a:p>
+          <a:p>
+            <a:r>
+              <a:rPr lang="ko-KR" altLang="en-US" dirty="0"/>
+              <a:t>∂</a:t>
+            </a:r>
+            <a:r>
+              <a:rPr lang="en-US" altLang="ko-KR" dirty="0"/>
+              <a:t>L / ∂wᵢ:</a:t>
+            </a:r>
+            <a:br>
+              <a:rPr lang="en-US" altLang="ko-KR" dirty="0"/>
+            </a:br>
+            <a:r>
+              <a:rPr lang="ko-KR" altLang="en-US" dirty="0"/>
+              <a:t>👉 </a:t>
+            </a:r>
+            <a:r>
+              <a:rPr lang="en-US" altLang="ko-KR" b="1" dirty="0"/>
+              <a:t>wᵢ</a:t>
+            </a:r>
             <a:r>
               <a:rPr lang="ko-KR" altLang="en-US" b="1" dirty="0"/>
-              <a:t>입력 변수</a:t>
-            </a:r>
-            <a:r>
-              <a:rPr lang="en-US" altLang="ko-KR" b="1" dirty="0"/>
-              <a:t>(</a:t>
-            </a:r>
-            <a:r>
-              <a:rPr lang="ko-KR" altLang="en-US" b="1" dirty="0"/>
-              <a:t>특성</a:t>
-            </a:r>
-            <a:r>
-              <a:rPr lang="en-US" altLang="ko-KR" b="1" dirty="0"/>
-              <a:t>)</a:t>
-            </a:r>
+              <a:t>를 아주 조금 바꿨을 때 손실이 얼마나 변하는지</a:t>
+            </a:r>
+            <a:endParaRPr lang="ko-KR" altLang="en-US" dirty="0"/>
+          </a:p>
+          <a:p>
+            <a:endParaRPr lang="en-US" altLang="ko-KR" dirty="0"/>
+          </a:p>
+          <a:p>
             <a:r>
               <a:rPr lang="ko-KR" altLang="en-US" dirty="0"/>
-              <a:t>와 출력 </a:t>
-            </a:r>
-            <a:r>
-              <a:rPr lang="ko-KR" altLang="en-US" b="1" dirty="0"/>
-              <a:t>변수</a:t>
-            </a:r>
-            <a:r>
-              <a:rPr lang="en-US" altLang="ko-KR" b="1" dirty="0"/>
-              <a:t>(</a:t>
-            </a:r>
-            <a:r>
-              <a:rPr lang="ko-KR" altLang="en-US" b="1" dirty="0"/>
-              <a:t>목표 값</a:t>
-            </a:r>
-            <a:r>
-              <a:rPr lang="en-US" altLang="ko-KR" b="1" dirty="0"/>
-              <a:t>) </a:t>
-            </a:r>
-            <a:r>
-              <a:rPr lang="ko-KR" altLang="en-US" b="1" dirty="0"/>
-              <a:t>사이의 관계를 알아 내서</a:t>
-            </a:r>
-            <a:r>
-              <a:rPr lang="en-US" altLang="ko-KR" b="1" dirty="0"/>
-              <a:t>, </a:t>
-            </a:r>
-            <a:r>
-              <a:rPr lang="ko-KR" altLang="en-US" b="1" dirty="0"/>
-              <a:t>새로운 입력 데이터에 대해 적절한 출력을 얻어내는 것</a:t>
-            </a:r>
-            <a:r>
-              <a:rPr lang="en-US" altLang="ko-KR" b="1" dirty="0"/>
-              <a:t>.</a:t>
-            </a:r>
-          </a:p>
-          <a:p>
-            <a:pPr marL="0" marR="0" indent="0" algn="l" defTabSz="914400" rtl="0" eaLnBrk="1" fontAlgn="auto" latinLnBrk="1" hangingPunct="1">
-              <a:lnSpc>
-                <a:spcPct val="100000"/>
-              </a:lnSpc>
-              <a:spcBef>
-                <a:spcPts val="0"/>
-              </a:spcBef>
-              <a:spcAft>
-                <a:spcPts val="0"/>
-              </a:spcAft>
-              <a:buClrTx/>
-              <a:buSzTx/>
-              <a:buFontTx/>
-              <a:buNone/>
-              <a:tabLst/>
-              <a:defRPr/>
-            </a:pPr>
-            <a:r>
-              <a:rPr lang="en-US" altLang="ko-KR" dirty="0">
-                <a:latin typeface="+mn-ea"/>
-              </a:rPr>
-              <a:t>A</a:t>
-            </a:r>
-            <a:r>
-              <a:rPr lang="ko-KR" altLang="en-US" dirty="0">
-                <a:latin typeface="+mn-ea"/>
-              </a:rPr>
-              <a:t>와 </a:t>
-            </a:r>
-            <a:r>
-              <a:rPr lang="en-US" altLang="ko-KR" dirty="0">
-                <a:latin typeface="+mn-ea"/>
-              </a:rPr>
-              <a:t>B</a:t>
-            </a:r>
-            <a:r>
-              <a:rPr lang="ko-KR" altLang="en-US" dirty="0">
-                <a:latin typeface="+mn-ea"/>
-              </a:rPr>
-              <a:t>에 대해 좋은지 나쁜지를 평가할 수 있어야 함</a:t>
-            </a:r>
-            <a:endParaRPr lang="en-US" altLang="ko-KR" dirty="0">
-              <a:latin typeface="+mn-ea"/>
-            </a:endParaRPr>
-          </a:p>
-          <a:p>
+              <a:t>“이 수식은</a:t>
+            </a:r>
+            <a:br>
+              <a:rPr lang="ko-KR" altLang="en-US" dirty="0"/>
+            </a:br>
+            <a:r>
+              <a:rPr lang="ko-KR" altLang="en-US" dirty="0"/>
+              <a:t>모델이 어떻게 스스로 고쳐지는지를 나타냅니다</a:t>
+            </a:r>
+            <a:r>
+              <a:rPr lang="en-US" altLang="ko-KR" dirty="0"/>
+              <a:t>.”</a:t>
+            </a:r>
+          </a:p>
+          <a:p>
+            <a:r>
+              <a:rPr lang="en-US" altLang="ko-KR" dirty="0"/>
+              <a:t>“</a:t>
+            </a:r>
+            <a:r>
+              <a:rPr lang="ko-KR" altLang="en-US" dirty="0"/>
+              <a:t>틀린 정도를 계산하고</a:t>
+            </a:r>
+            <a:br>
+              <a:rPr lang="ko-KR" altLang="en-US" dirty="0"/>
+            </a:br>
+            <a:r>
+              <a:rPr lang="ko-KR" altLang="en-US" dirty="0"/>
+              <a:t>틀린 방향을 찾고</a:t>
+            </a:r>
+            <a:br>
+              <a:rPr lang="ko-KR" altLang="en-US" dirty="0"/>
+            </a:br>
+            <a:r>
+              <a:rPr lang="ko-KR" altLang="en-US" dirty="0"/>
+              <a:t>그 반대로 조금 움직입니다</a:t>
+            </a:r>
+            <a:r>
+              <a:rPr lang="en-US" altLang="ko-KR" dirty="0"/>
+              <a:t>.”</a:t>
+            </a:r>
+          </a:p>
+          <a:p>
+            <a:endParaRPr lang="en-US" altLang="ko-KR" dirty="0"/>
+          </a:p>
+          <a:p>
+            <a:endParaRPr lang="en-US" altLang="ko-KR" dirty="0"/>
+          </a:p>
+          <a:p>
+            <a:r>
+              <a:rPr lang="en-US" altLang="ko-KR" dirty="0" err="1"/>
+              <a:t>loss.backward</a:t>
+            </a:r>
+            <a:r>
+              <a:rPr lang="en-US" altLang="ko-KR" dirty="0"/>
+              <a:t>()      # ∇L(w) </a:t>
+            </a:r>
+            <a:r>
+              <a:rPr lang="ko-KR" altLang="en-US" dirty="0"/>
+              <a:t>계산</a:t>
+            </a:r>
+          </a:p>
+          <a:p>
+            <a:r>
+              <a:rPr lang="en-US" altLang="ko-KR" dirty="0" err="1"/>
+              <a:t>optimizer.step</a:t>
+            </a:r>
+            <a:r>
+              <a:rPr lang="en-US" altLang="ko-KR" dirty="0"/>
+              <a:t>()     # w ← w - </a:t>
+            </a:r>
+            <a:r>
+              <a:rPr lang="el-GR" altLang="ko-KR" dirty="0"/>
+              <a:t>η∇</a:t>
+            </a:r>
+            <a:r>
+              <a:rPr lang="en-US" altLang="ko-KR" dirty="0"/>
+              <a:t>L(w)</a:t>
+            </a:r>
             <a:endParaRPr lang="ko-KR" altLang="en-US" dirty="0"/>
           </a:p>
         </p:txBody>
@@ -830,7 +867,7 @@
             <a:spLocks noGrp="1"/>
           </p:cNvSpPr>
           <p:nvPr>
-            <p:ph type="sldNum" sz="quarter" idx="10"/>
+            <p:ph type="sldNum" sz="quarter" idx="5"/>
           </p:nvPr>
         </p:nvSpPr>
         <p:spPr/>
@@ -838,18 +875,19 @@
           <a:bodyPr/>
           <a:lstStyle/>
           <a:p>
-            <a:fld id="{C09E5BFC-1559-42F1-8940-AB342D56BF02}" type="slidenum">
+            <a:fld id="{3E35EA20-6519-4513-9EDC-C89C5369BAEC}" type="slidenum">
               <a:rPr lang="ko-KR" altLang="en-US" smtClean="0"/>
-              <a:t>6</a:t>
+              <a:pPr/>
+              <a:t>22</a:t>
             </a:fld>
-            <a:endParaRPr lang="ko-KR" altLang="en-US"/>
+            <a:endParaRPr lang="ko-KR" altLang="en-US" dirty="0"/>
           </a:p>
         </p:txBody>
       </p:sp>
     </p:spTree>
     <p:extLst>
       <p:ext uri="{BB962C8B-B14F-4D97-AF65-F5344CB8AC3E}">
-        <p14:creationId xmlns:p14="http://schemas.microsoft.com/office/powerpoint/2010/main" val="3403531308"/>
+        <p14:creationId xmlns:p14="http://schemas.microsoft.com/office/powerpoint/2010/main" val="3381628791"/>
       </p:ext>
     </p:extLst>
   </p:cSld>
@@ -859,7 +897,7 @@
 </p:notes>
 </file>
 
-<file path=ppt/notesSlides/notesSlide3.xml><?xml version="1.0" encoding="utf-8"?>
+<file path=ppt/notesSlides/notesSlide11.xml><?xml version="1.0" encoding="utf-8"?>
 <p:notes xmlns:a="http://schemas.openxmlformats.org/drawingml/2006/main" xmlns:r="http://schemas.openxmlformats.org/officeDocument/2006/relationships" xmlns:p="http://schemas.openxmlformats.org/presentationml/2006/main">
   <p:cSld>
     <p:spTree>
@@ -903,6 +941,28 @@
           <a:bodyPr/>
           <a:lstStyle/>
           <a:p>
+            <a:r>
+              <a:rPr lang="ko-KR" altLang="en-US" dirty="0" err="1"/>
+              <a:t>학습률</a:t>
+            </a:r>
+            <a:r>
+              <a:rPr lang="ko-KR" altLang="en-US" dirty="0"/>
+              <a:t> 문제</a:t>
+            </a:r>
+          </a:p>
+          <a:p>
+            <a:r>
+              <a:rPr lang="ko-KR" altLang="en-US" dirty="0"/>
+              <a:t>진동</a:t>
+            </a:r>
+          </a:p>
+          <a:p>
+            <a:r>
+              <a:rPr lang="ko-KR" altLang="en-US" dirty="0"/>
+              <a:t>느린 수렴</a:t>
+            </a:r>
+          </a:p>
+          <a:p>
             <a:endParaRPr lang="ko-KR" altLang="en-US" dirty="0"/>
           </a:p>
         </p:txBody>
@@ -914,7 +974,7 @@
             <a:spLocks noGrp="1"/>
           </p:cNvSpPr>
           <p:nvPr>
-            <p:ph type="sldNum" sz="quarter" idx="10"/>
+            <p:ph type="sldNum" sz="quarter" idx="5"/>
           </p:nvPr>
         </p:nvSpPr>
         <p:spPr/>
@@ -922,18 +982,19 @@
           <a:bodyPr/>
           <a:lstStyle/>
           <a:p>
-            <a:fld id="{C09E5BFC-1559-42F1-8940-AB342D56BF02}" type="slidenum">
+            <a:fld id="{3E35EA20-6519-4513-9EDC-C89C5369BAEC}" type="slidenum">
               <a:rPr lang="ko-KR" altLang="en-US" smtClean="0"/>
-              <a:t>8</a:t>
+              <a:pPr/>
+              <a:t>33</a:t>
             </a:fld>
-            <a:endParaRPr lang="ko-KR" altLang="en-US"/>
+            <a:endParaRPr lang="ko-KR" altLang="en-US" dirty="0"/>
           </a:p>
         </p:txBody>
       </p:sp>
     </p:spTree>
     <p:extLst>
       <p:ext uri="{BB962C8B-B14F-4D97-AF65-F5344CB8AC3E}">
-        <p14:creationId xmlns:p14="http://schemas.microsoft.com/office/powerpoint/2010/main" val="3136640640"/>
+        <p14:creationId xmlns:p14="http://schemas.microsoft.com/office/powerpoint/2010/main" val="619502907"/>
       </p:ext>
     </p:extLst>
   </p:cSld>
@@ -943,7 +1004,7 @@
 </p:notes>
 </file>
 
-<file path=ppt/notesSlides/notesSlide4.xml><?xml version="1.0" encoding="utf-8"?>
+<file path=ppt/notesSlides/notesSlide12.xml><?xml version="1.0" encoding="utf-8"?>
 <p:notes xmlns:a="http://schemas.openxmlformats.org/drawingml/2006/main" xmlns:r="http://schemas.openxmlformats.org/officeDocument/2006/relationships" xmlns:p="http://schemas.openxmlformats.org/presentationml/2006/main">
   <p:cSld>
     <p:spTree>
@@ -987,24 +1048,221 @@
           <a:bodyPr/>
           <a:lstStyle/>
           <a:p>
-            <a:pPr marL="0" marR="0" indent="0" algn="l" defTabSz="914400" rtl="0" eaLnBrk="1" fontAlgn="auto" latinLnBrk="1" hangingPunct="1">
-              <a:lnSpc>
-                <a:spcPct val="100000"/>
-              </a:lnSpc>
-              <a:spcBef>
-                <a:spcPts val="0"/>
-              </a:spcBef>
-              <a:spcAft>
-                <a:spcPts val="0"/>
-              </a:spcAft>
-              <a:buClrTx/>
-              <a:buSzTx/>
+            <a:r>
+              <a:rPr lang="ko-KR" altLang="en-US" b="1" dirty="0"/>
+              <a:t>파란색 화살표 </a:t>
+            </a:r>
+            <a:r>
+              <a:rPr lang="en-US" altLang="ko-KR" b="1" dirty="0"/>
+              <a:t>– </a:t>
+            </a:r>
+            <a:r>
+              <a:rPr lang="ko-KR" altLang="en-US" b="1" dirty="0"/>
+              <a:t>기본 </a:t>
+            </a:r>
+            <a:r>
+              <a:rPr lang="ko-KR" altLang="en-US" b="1" dirty="0" err="1"/>
+              <a:t>경사하강법</a:t>
+            </a:r>
+            <a:r>
+              <a:rPr lang="ko-KR" altLang="en-US" b="1" dirty="0"/>
+              <a:t> 이동 경</a:t>
+            </a:r>
+            <a:r>
+              <a:rPr lang="ko-KR" altLang="en-US" dirty="0"/>
+              <a:t>로</a:t>
+            </a:r>
+            <a:endParaRPr lang="en-US" altLang="ko-KR" dirty="0"/>
+          </a:p>
+          <a:p>
+            <a:pPr marL="171450" indent="-171450">
+              <a:buFontTx/>
+              <a:buChar char="-"/>
+            </a:pPr>
+            <a:r>
+              <a:rPr lang="ko-KR" altLang="en-US" dirty="0"/>
+              <a:t>지그재그로 움직임</a:t>
+            </a:r>
+            <a:endParaRPr lang="en-US" altLang="ko-KR" dirty="0"/>
+          </a:p>
+          <a:p>
+            <a:pPr marL="171450" indent="-171450">
+              <a:buFontTx/>
+              <a:buChar char="-"/>
+            </a:pPr>
+            <a:r>
+              <a:rPr lang="ko-KR" altLang="en-US" dirty="0"/>
+              <a:t>좌우로 크게 진동</a:t>
+            </a:r>
+            <a:endParaRPr lang="en-US" altLang="ko-KR" dirty="0"/>
+          </a:p>
+          <a:p>
+            <a:pPr marL="171450" indent="-171450">
+              <a:buFontTx/>
+              <a:buChar char="-"/>
+            </a:pPr>
+            <a:r>
+              <a:rPr lang="ko-KR" altLang="en-US" dirty="0"/>
+              <a:t>최적점으로 가긴 하지만 비효율적</a:t>
+            </a:r>
+            <a:endParaRPr lang="en-US" altLang="ko-KR" dirty="0"/>
+          </a:p>
+          <a:p>
+            <a:pPr marL="171450" indent="-171450">
+              <a:buFontTx/>
+              <a:buChar char="-"/>
+            </a:pPr>
+            <a:endParaRPr lang="en-US" altLang="ko-KR" dirty="0"/>
+          </a:p>
+          <a:p>
+            <a:pPr marL="0" indent="0">
               <a:buFontTx/>
               <a:buNone/>
-              <a:tabLst/>
-              <a:defRPr/>
             </a:pPr>
-            <a:endParaRPr lang="ko-KR" altLang="en-US" dirty="0"/>
+            <a:r>
+              <a:rPr lang="ko-KR" altLang="en-US" dirty="0"/>
+              <a:t>왜 이런 현상이 생기나</a:t>
+            </a:r>
+            <a:r>
+              <a:rPr lang="en-US" altLang="ko-KR" dirty="0"/>
+              <a:t>?</a:t>
+            </a:r>
+          </a:p>
+          <a:p>
+            <a:pPr marL="0" indent="0">
+              <a:buFontTx/>
+              <a:buNone/>
+            </a:pPr>
+            <a:r>
+              <a:rPr lang="ko-KR" altLang="en-US" dirty="0"/>
+              <a:t>기울기가 한 방향에서는 매우 크고 다른 방향에서는 작기 때문</a:t>
+            </a:r>
+            <a:endParaRPr lang="en-US" altLang="ko-KR" dirty="0"/>
+          </a:p>
+          <a:p>
+            <a:pPr marL="0" indent="0">
+              <a:buFontTx/>
+              <a:buNone/>
+            </a:pPr>
+            <a:r>
+              <a:rPr lang="ko-KR" altLang="en-US" dirty="0"/>
+              <a:t>그래서 가파른 방향으로는 크게 튀고 완만한 방향으로는 천천히 이동</a:t>
+            </a:r>
+            <a:endParaRPr lang="en-US" altLang="ko-KR" dirty="0"/>
+          </a:p>
+          <a:p>
+            <a:pPr marL="0" indent="0">
+              <a:buFontTx/>
+              <a:buNone/>
+            </a:pPr>
+            <a:endParaRPr lang="en-US" altLang="ko-KR" dirty="0"/>
+          </a:p>
+          <a:p>
+            <a:pPr marL="0" indent="0">
+              <a:buFontTx/>
+              <a:buNone/>
+            </a:pPr>
+            <a:r>
+              <a:rPr lang="ko-KR" altLang="en-US" b="1" dirty="0"/>
+              <a:t>빨간색 화살표 </a:t>
+            </a:r>
+            <a:endParaRPr lang="en-US" altLang="ko-KR" b="1" dirty="0"/>
+          </a:p>
+          <a:p>
+            <a:pPr marL="0" indent="0">
+              <a:buFontTx/>
+              <a:buNone/>
+            </a:pPr>
+            <a:r>
+              <a:rPr lang="ko-KR" altLang="en-US" dirty="0"/>
+              <a:t>훨씬 부드럽게 이동</a:t>
+            </a:r>
+            <a:r>
+              <a:rPr lang="en-US" altLang="ko-KR" dirty="0"/>
+              <a:t>, </a:t>
+            </a:r>
+            <a:r>
+              <a:rPr lang="ko-KR" altLang="en-US" dirty="0"/>
+              <a:t>진동 줄어듦</a:t>
+            </a:r>
+            <a:r>
+              <a:rPr lang="en-US" altLang="ko-KR" dirty="0"/>
+              <a:t>, </a:t>
+            </a:r>
+            <a:r>
+              <a:rPr lang="ko-KR" altLang="en-US" dirty="0"/>
+              <a:t>더 빠르게 </a:t>
+            </a:r>
+            <a:r>
+              <a:rPr lang="ko-KR" altLang="en-US" dirty="0" err="1"/>
+              <a:t>최적점</a:t>
+            </a:r>
+            <a:r>
+              <a:rPr lang="ko-KR" altLang="en-US" dirty="0"/>
+              <a:t> 도달</a:t>
+            </a:r>
+            <a:endParaRPr lang="en-US" altLang="ko-KR" dirty="0"/>
+          </a:p>
+          <a:p>
+            <a:pPr marL="0" indent="0">
+              <a:buFontTx/>
+              <a:buNone/>
+            </a:pPr>
+            <a:r>
+              <a:rPr lang="ko-KR" altLang="en-US" dirty="0"/>
+              <a:t>방향을 기억해서 더 안정적으로 이동</a:t>
+            </a:r>
+            <a:endParaRPr lang="en-US" altLang="ko-KR" dirty="0"/>
+          </a:p>
+          <a:p>
+            <a:pPr marL="0" indent="0">
+              <a:buFontTx/>
+              <a:buNone/>
+            </a:pPr>
+            <a:endParaRPr lang="en-US" altLang="ko-KR" dirty="0"/>
+          </a:p>
+          <a:p>
+            <a:pPr marL="0" indent="0">
+              <a:buFontTx/>
+              <a:buNone/>
+            </a:pPr>
+            <a:endParaRPr lang="en-US" altLang="ko-KR" dirty="0"/>
+          </a:p>
+          <a:p>
+            <a:pPr marL="0" indent="0">
+              <a:buFontTx/>
+              <a:buNone/>
+            </a:pPr>
+            <a:r>
+              <a:rPr lang="en-US" altLang="ko-KR" dirty="0"/>
+              <a:t>Optimizer</a:t>
+            </a:r>
+            <a:r>
+              <a:rPr lang="ko-KR" altLang="en-US" dirty="0"/>
+              <a:t>는</a:t>
+            </a:r>
+            <a:br>
+              <a:rPr lang="ko-KR" altLang="en-US" dirty="0"/>
+            </a:br>
+            <a:r>
+              <a:rPr lang="ko-KR" altLang="en-US" dirty="0" err="1"/>
+              <a:t>경사하강법을</a:t>
+            </a:r>
+            <a:r>
+              <a:rPr lang="ko-KR" altLang="en-US" dirty="0"/>
+              <a:t> 더 빠르고 안정적으로 만들어주는 방법이다</a:t>
+            </a:r>
+            <a:r>
+              <a:rPr lang="en-US" altLang="ko-KR" dirty="0"/>
+              <a:t>.</a:t>
+            </a:r>
+          </a:p>
+          <a:p>
+            <a:pPr marL="0" indent="0">
+              <a:buFontTx/>
+              <a:buNone/>
+            </a:pPr>
+            <a:endParaRPr lang="en-US" altLang="ko-KR" dirty="0"/>
           </a:p>
         </p:txBody>
       </p:sp>
@@ -1015,7 +1273,7 @@
             <a:spLocks noGrp="1"/>
           </p:cNvSpPr>
           <p:nvPr>
-            <p:ph type="sldNum" sz="quarter" idx="10"/>
+            <p:ph type="sldNum" sz="quarter" idx="5"/>
           </p:nvPr>
         </p:nvSpPr>
         <p:spPr/>
@@ -1023,18 +1281,19 @@
           <a:bodyPr/>
           <a:lstStyle/>
           <a:p>
-            <a:fld id="{C09E5BFC-1559-42F1-8940-AB342D56BF02}" type="slidenum">
+            <a:fld id="{3E35EA20-6519-4513-9EDC-C89C5369BAEC}" type="slidenum">
               <a:rPr lang="ko-KR" altLang="en-US" smtClean="0"/>
-              <a:t>9</a:t>
+              <a:pPr/>
+              <a:t>36</a:t>
             </a:fld>
-            <a:endParaRPr lang="ko-KR" altLang="en-US"/>
+            <a:endParaRPr lang="ko-KR" altLang="en-US" dirty="0"/>
           </a:p>
         </p:txBody>
       </p:sp>
     </p:spTree>
     <p:extLst>
       <p:ext uri="{BB962C8B-B14F-4D97-AF65-F5344CB8AC3E}">
-        <p14:creationId xmlns:p14="http://schemas.microsoft.com/office/powerpoint/2010/main" val="3666006663"/>
+        <p14:creationId xmlns:p14="http://schemas.microsoft.com/office/powerpoint/2010/main" val="2067704802"/>
       </p:ext>
     </p:extLst>
   </p:cSld>
@@ -1044,134 +1303,7 @@
 </p:notes>
 </file>
 
-<file path=ppt/notesSlides/notesSlide5.xml><?xml version="1.0" encoding="utf-8"?>
-<p:notes xmlns:a="http://schemas.openxmlformats.org/drawingml/2006/main" xmlns:r="http://schemas.openxmlformats.org/officeDocument/2006/relationships" xmlns:p="http://schemas.openxmlformats.org/presentationml/2006/main">
-  <p:cSld>
-    <p:spTree>
-      <p:nvGrpSpPr>
-        <p:cNvPr id="1" name=""/>
-        <p:cNvGrpSpPr/>
-        <p:nvPr/>
-      </p:nvGrpSpPr>
-      <p:grpSpPr>
-        <a:xfrm>
-          <a:off x="0" y="0"/>
-          <a:ext cx="0" cy="0"/>
-          <a:chOff x="0" y="0"/>
-          <a:chExt cx="0" cy="0"/>
-        </a:xfrm>
-      </p:grpSpPr>
-      <p:sp>
-        <p:nvSpPr>
-          <p:cNvPr id="2" name="슬라이드 이미지 개체 틀 1"/>
-          <p:cNvSpPr>
-            <a:spLocks noGrp="1" noRot="1" noChangeAspect="1"/>
-          </p:cNvSpPr>
-          <p:nvPr>
-            <p:ph type="sldImg"/>
-          </p:nvPr>
-        </p:nvSpPr>
-        <p:spPr/>
-      </p:sp>
-      <p:sp>
-        <p:nvSpPr>
-          <p:cNvPr id="3" name="슬라이드 노트 개체 틀 2"/>
-          <p:cNvSpPr>
-            <a:spLocks noGrp="1"/>
-          </p:cNvSpPr>
-          <p:nvPr>
-            <p:ph type="body" idx="1"/>
-          </p:nvPr>
-        </p:nvSpPr>
-        <p:spPr/>
-        <p:txBody>
-          <a:bodyPr/>
-          <a:lstStyle/>
-          <a:p>
-            <a:pPr marL="0" marR="0" indent="0" algn="l" defTabSz="914400" rtl="0" eaLnBrk="1" fontAlgn="auto" latinLnBrk="1" hangingPunct="1">
-              <a:lnSpc>
-                <a:spcPct val="100000"/>
-              </a:lnSpc>
-              <a:spcBef>
-                <a:spcPts val="0"/>
-              </a:spcBef>
-              <a:spcAft>
-                <a:spcPts val="0"/>
-              </a:spcAft>
-              <a:buClrTx/>
-              <a:buSzTx/>
-              <a:buFontTx/>
-              <a:buNone/>
-              <a:tabLst/>
-              <a:defRPr/>
-            </a:pPr>
-            <a:r>
-              <a:rPr lang="en-US" altLang="ko-KR" dirty="0"/>
-              <a:t>Loss</a:t>
-            </a:r>
-            <a:r>
-              <a:rPr lang="ko-KR" altLang="en-US" dirty="0"/>
-              <a:t>를 최소화 하는 </a:t>
-            </a:r>
-            <a:r>
-              <a:rPr lang="en-US" altLang="ko-KR" dirty="0" err="1"/>
-              <a:t>a,b</a:t>
-            </a:r>
-            <a:r>
-              <a:rPr lang="ko-KR" altLang="en-US" dirty="0"/>
-              <a:t>가 최적의 </a:t>
-            </a:r>
-            <a:r>
-              <a:rPr lang="en-US" altLang="ko-KR" dirty="0" err="1"/>
-              <a:t>a,b</a:t>
-            </a:r>
-            <a:r>
-              <a:rPr lang="ko-KR" altLang="en-US" dirty="0"/>
-              <a:t>가 되는 것</a:t>
-            </a:r>
-          </a:p>
-          <a:p>
-            <a:endParaRPr lang="ko-KR" altLang="en-US" dirty="0"/>
-          </a:p>
-        </p:txBody>
-      </p:sp>
-      <p:sp>
-        <p:nvSpPr>
-          <p:cNvPr id="4" name="슬라이드 번호 개체 틀 3"/>
-          <p:cNvSpPr>
-            <a:spLocks noGrp="1"/>
-          </p:cNvSpPr>
-          <p:nvPr>
-            <p:ph type="sldNum" sz="quarter" idx="10"/>
-          </p:nvPr>
-        </p:nvSpPr>
-        <p:spPr/>
-        <p:txBody>
-          <a:bodyPr/>
-          <a:lstStyle/>
-          <a:p>
-            <a:fld id="{C09E5BFC-1559-42F1-8940-AB342D56BF02}" type="slidenum">
-              <a:rPr lang="ko-KR" altLang="en-US" smtClean="0"/>
-              <a:t>17</a:t>
-            </a:fld>
-            <a:endParaRPr lang="ko-KR" altLang="en-US"/>
-          </a:p>
-        </p:txBody>
-      </p:sp>
-    </p:spTree>
-    <p:extLst>
-      <p:ext uri="{BB962C8B-B14F-4D97-AF65-F5344CB8AC3E}">
-        <p14:creationId xmlns:p14="http://schemas.microsoft.com/office/powerpoint/2010/main" val="3666006663"/>
-      </p:ext>
-    </p:extLst>
-  </p:cSld>
-  <p:clrMapOvr>
-    <a:masterClrMapping/>
-  </p:clrMapOvr>
-</p:notes>
-</file>
-
-<file path=ppt/notesSlides/notesSlide6.xml><?xml version="1.0" encoding="utf-8"?>
+<file path=ppt/notesSlides/notesSlide13.xml><?xml version="1.0" encoding="utf-8"?>
 <p:notes xmlns:a="http://schemas.openxmlformats.org/drawingml/2006/main" xmlns:r="http://schemas.openxmlformats.org/officeDocument/2006/relationships" xmlns:p="http://schemas.openxmlformats.org/presentationml/2006/main">
   <p:cSld>
     <p:spTree>
@@ -1260,7 +1392,7 @@
           <a:p>
             <a:fld id="{A0085365-8376-4996-BDD6-F39608FADAF3}" type="slidenum">
               <a:rPr lang="ko-KR" altLang="en-US" smtClean="0"/>
-              <a:t>37</a:t>
+              <a:t>40</a:t>
             </a:fld>
             <a:endParaRPr lang="ko-KR" altLang="en-US"/>
           </a:p>
@@ -1270,6 +1402,851 @@
     <p:extLst>
       <p:ext uri="{BB962C8B-B14F-4D97-AF65-F5344CB8AC3E}">
         <p14:creationId xmlns:p14="http://schemas.microsoft.com/office/powerpoint/2010/main" val="2391645545"/>
+      </p:ext>
+    </p:extLst>
+  </p:cSld>
+  <p:clrMapOvr>
+    <a:masterClrMapping/>
+  </p:clrMapOvr>
+</p:notes>
+</file>
+
+<file path=ppt/notesSlides/notesSlide2.xml><?xml version="1.0" encoding="utf-8"?>
+<p:notes xmlns:a="http://schemas.openxmlformats.org/drawingml/2006/main" xmlns:r="http://schemas.openxmlformats.org/officeDocument/2006/relationships" xmlns:p="http://schemas.openxmlformats.org/presentationml/2006/main">
+  <p:cSld>
+    <p:spTree>
+      <p:nvGrpSpPr>
+        <p:cNvPr id="1" name=""/>
+        <p:cNvGrpSpPr/>
+        <p:nvPr/>
+      </p:nvGrpSpPr>
+      <p:grpSpPr>
+        <a:xfrm>
+          <a:off x="0" y="0"/>
+          <a:ext cx="0" cy="0"/>
+          <a:chOff x="0" y="0"/>
+          <a:chExt cx="0" cy="0"/>
+        </a:xfrm>
+      </p:grpSpPr>
+      <p:sp>
+        <p:nvSpPr>
+          <p:cNvPr id="2" name="슬라이드 이미지 개체 틀 1"/>
+          <p:cNvSpPr>
+            <a:spLocks noGrp="1" noRot="1" noChangeAspect="1"/>
+          </p:cNvSpPr>
+          <p:nvPr>
+            <p:ph type="sldImg"/>
+          </p:nvPr>
+        </p:nvSpPr>
+        <p:spPr/>
+      </p:sp>
+      <p:sp>
+        <p:nvSpPr>
+          <p:cNvPr id="3" name="슬라이드 노트 개체 틀 2"/>
+          <p:cNvSpPr>
+            <a:spLocks noGrp="1"/>
+          </p:cNvSpPr>
+          <p:nvPr>
+            <p:ph type="body" idx="1"/>
+          </p:nvPr>
+        </p:nvSpPr>
+        <p:spPr/>
+        <p:txBody>
+          <a:bodyPr/>
+          <a:lstStyle/>
+          <a:p>
+            <a:r>
+              <a:rPr lang="ko-KR" altLang="en-US" dirty="0"/>
+              <a:t>모델이 “어떻게 학습되는지” 처음 보여주는 강의</a:t>
+            </a:r>
+            <a:endParaRPr lang="en-US" altLang="ko-KR" dirty="0"/>
+          </a:p>
+          <a:p>
+            <a:endParaRPr lang="en-US" altLang="ko-KR" dirty="0"/>
+          </a:p>
+          <a:p>
+            <a:r>
+              <a:rPr lang="ko-KR" altLang="en-US" dirty="0"/>
+              <a:t>회귀는 숫자를 예측하는 모델이다</a:t>
+            </a:r>
+          </a:p>
+          <a:p>
+            <a:r>
+              <a:rPr lang="ko-KR" altLang="en-US" dirty="0"/>
+              <a:t>학습은 오차를 줄이는 과정이다</a:t>
+            </a:r>
+          </a:p>
+          <a:p>
+            <a:r>
+              <a:rPr lang="ko-KR" altLang="en-US" dirty="0" err="1"/>
+              <a:t>경사하강법은</a:t>
+            </a:r>
+            <a:r>
+              <a:rPr lang="ko-KR" altLang="en-US" dirty="0"/>
+              <a:t> 그 조정 규칙이다</a:t>
+            </a:r>
+          </a:p>
+          <a:p>
+            <a:endParaRPr lang="ko-KR" altLang="en-US" dirty="0"/>
+          </a:p>
+        </p:txBody>
+      </p:sp>
+      <p:sp>
+        <p:nvSpPr>
+          <p:cNvPr id="4" name="슬라이드 번호 개체 틀 3"/>
+          <p:cNvSpPr>
+            <a:spLocks noGrp="1"/>
+          </p:cNvSpPr>
+          <p:nvPr>
+            <p:ph type="sldNum" sz="quarter" idx="5"/>
+          </p:nvPr>
+        </p:nvSpPr>
+        <p:spPr/>
+        <p:txBody>
+          <a:bodyPr/>
+          <a:lstStyle/>
+          <a:p>
+            <a:fld id="{3E35EA20-6519-4513-9EDC-C89C5369BAEC}" type="slidenum">
+              <a:rPr lang="ko-KR" altLang="en-US" smtClean="0"/>
+              <a:pPr/>
+              <a:t>2</a:t>
+            </a:fld>
+            <a:endParaRPr lang="ko-KR" altLang="en-US" dirty="0"/>
+          </a:p>
+        </p:txBody>
+      </p:sp>
+    </p:spTree>
+    <p:extLst>
+      <p:ext uri="{BB962C8B-B14F-4D97-AF65-F5344CB8AC3E}">
+        <p14:creationId xmlns:p14="http://schemas.microsoft.com/office/powerpoint/2010/main" val="1593775512"/>
+      </p:ext>
+    </p:extLst>
+  </p:cSld>
+  <p:clrMapOvr>
+    <a:masterClrMapping/>
+  </p:clrMapOvr>
+</p:notes>
+</file>
+
+<file path=ppt/notesSlides/notesSlide3.xml><?xml version="1.0" encoding="utf-8"?>
+<p:notes xmlns:a="http://schemas.openxmlformats.org/drawingml/2006/main" xmlns:r="http://schemas.openxmlformats.org/officeDocument/2006/relationships" xmlns:p="http://schemas.openxmlformats.org/presentationml/2006/main">
+  <p:cSld>
+    <p:spTree>
+      <p:nvGrpSpPr>
+        <p:cNvPr id="1" name=""/>
+        <p:cNvGrpSpPr/>
+        <p:nvPr/>
+      </p:nvGrpSpPr>
+      <p:grpSpPr>
+        <a:xfrm>
+          <a:off x="0" y="0"/>
+          <a:ext cx="0" cy="0"/>
+          <a:chOff x="0" y="0"/>
+          <a:chExt cx="0" cy="0"/>
+        </a:xfrm>
+      </p:grpSpPr>
+      <p:sp>
+        <p:nvSpPr>
+          <p:cNvPr id="2" name="슬라이드 이미지 개체 틀 1"/>
+          <p:cNvSpPr>
+            <a:spLocks noGrp="1" noRot="1" noChangeAspect="1"/>
+          </p:cNvSpPr>
+          <p:nvPr>
+            <p:ph type="sldImg"/>
+          </p:nvPr>
+        </p:nvSpPr>
+        <p:spPr/>
+      </p:sp>
+      <p:sp>
+        <p:nvSpPr>
+          <p:cNvPr id="3" name="슬라이드 노트 개체 틀 2"/>
+          <p:cNvSpPr>
+            <a:spLocks noGrp="1"/>
+          </p:cNvSpPr>
+          <p:nvPr>
+            <p:ph type="body" idx="1"/>
+          </p:nvPr>
+        </p:nvSpPr>
+        <p:spPr/>
+        <p:txBody>
+          <a:bodyPr/>
+          <a:lstStyle/>
+          <a:p>
+            <a:r>
+              <a:rPr lang="ko-KR" altLang="en-US" dirty="0"/>
+              <a:t>지금 배우는 건</a:t>
+            </a:r>
+            <a:br>
+              <a:rPr lang="ko-KR" altLang="en-US" dirty="0"/>
+            </a:br>
+            <a:r>
+              <a:rPr lang="ko-KR" altLang="en-US" dirty="0"/>
+              <a:t>선형 회귀 자체가 아니라</a:t>
+            </a:r>
+            <a:br>
+              <a:rPr lang="ko-KR" altLang="en-US" dirty="0"/>
+            </a:br>
+            <a:r>
+              <a:rPr lang="ko-KR" altLang="en-US" dirty="0"/>
+              <a:t>모델이 어떻게 </a:t>
+            </a:r>
+            <a:r>
+              <a:rPr lang="ko-KR" altLang="en-US" dirty="0" err="1"/>
+              <a:t>학습되는지의</a:t>
+            </a:r>
+            <a:r>
+              <a:rPr lang="ko-KR" altLang="en-US" dirty="0"/>
+              <a:t> 구조입니다</a:t>
+            </a:r>
+          </a:p>
+        </p:txBody>
+      </p:sp>
+      <p:sp>
+        <p:nvSpPr>
+          <p:cNvPr id="4" name="슬라이드 번호 개체 틀 3"/>
+          <p:cNvSpPr>
+            <a:spLocks noGrp="1"/>
+          </p:cNvSpPr>
+          <p:nvPr>
+            <p:ph type="sldNum" sz="quarter" idx="5"/>
+          </p:nvPr>
+        </p:nvSpPr>
+        <p:spPr/>
+        <p:txBody>
+          <a:bodyPr/>
+          <a:lstStyle/>
+          <a:p>
+            <a:fld id="{3E35EA20-6519-4513-9EDC-C89C5369BAEC}" type="slidenum">
+              <a:rPr lang="ko-KR" altLang="en-US" smtClean="0"/>
+              <a:pPr/>
+              <a:t>3</a:t>
+            </a:fld>
+            <a:endParaRPr lang="ko-KR" altLang="en-US" dirty="0"/>
+          </a:p>
+        </p:txBody>
+      </p:sp>
+    </p:spTree>
+    <p:extLst>
+      <p:ext uri="{BB962C8B-B14F-4D97-AF65-F5344CB8AC3E}">
+        <p14:creationId xmlns:p14="http://schemas.microsoft.com/office/powerpoint/2010/main" val="3477187959"/>
+      </p:ext>
+    </p:extLst>
+  </p:cSld>
+  <p:clrMapOvr>
+    <a:masterClrMapping/>
+  </p:clrMapOvr>
+</p:notes>
+</file>
+
+<file path=ppt/notesSlides/notesSlide4.xml><?xml version="1.0" encoding="utf-8"?>
+<p:notes xmlns:a="http://schemas.openxmlformats.org/drawingml/2006/main" xmlns:r="http://schemas.openxmlformats.org/officeDocument/2006/relationships" xmlns:p="http://schemas.openxmlformats.org/presentationml/2006/main">
+  <p:cSld>
+    <p:spTree>
+      <p:nvGrpSpPr>
+        <p:cNvPr id="1" name=""/>
+        <p:cNvGrpSpPr/>
+        <p:nvPr/>
+      </p:nvGrpSpPr>
+      <p:grpSpPr>
+        <a:xfrm>
+          <a:off x="0" y="0"/>
+          <a:ext cx="0" cy="0"/>
+          <a:chOff x="0" y="0"/>
+          <a:chExt cx="0" cy="0"/>
+        </a:xfrm>
+      </p:grpSpPr>
+      <p:sp>
+        <p:nvSpPr>
+          <p:cNvPr id="2" name="슬라이드 이미지 개체 틀 1"/>
+          <p:cNvSpPr>
+            <a:spLocks noGrp="1" noRot="1" noChangeAspect="1"/>
+          </p:cNvSpPr>
+          <p:nvPr>
+            <p:ph type="sldImg"/>
+          </p:nvPr>
+        </p:nvSpPr>
+        <p:spPr/>
+      </p:sp>
+      <p:sp>
+        <p:nvSpPr>
+          <p:cNvPr id="3" name="슬라이드 노트 개체 틀 2"/>
+          <p:cNvSpPr>
+            <a:spLocks noGrp="1"/>
+          </p:cNvSpPr>
+          <p:nvPr>
+            <p:ph type="body" idx="1"/>
+          </p:nvPr>
+        </p:nvSpPr>
+        <p:spPr/>
+        <p:txBody>
+          <a:bodyPr/>
+          <a:lstStyle/>
+          <a:p>
+            <a:r>
+              <a:rPr lang="ko-KR" altLang="en-US" dirty="0"/>
+              <a:t>분류와 대비된다</a:t>
+            </a:r>
+          </a:p>
+        </p:txBody>
+      </p:sp>
+      <p:sp>
+        <p:nvSpPr>
+          <p:cNvPr id="4" name="슬라이드 번호 개체 틀 3"/>
+          <p:cNvSpPr>
+            <a:spLocks noGrp="1"/>
+          </p:cNvSpPr>
+          <p:nvPr>
+            <p:ph type="sldNum" sz="quarter" idx="5"/>
+          </p:nvPr>
+        </p:nvSpPr>
+        <p:spPr/>
+        <p:txBody>
+          <a:bodyPr/>
+          <a:lstStyle/>
+          <a:p>
+            <a:fld id="{3E35EA20-6519-4513-9EDC-C89C5369BAEC}" type="slidenum">
+              <a:rPr lang="ko-KR" altLang="en-US" smtClean="0"/>
+              <a:pPr/>
+              <a:t>6</a:t>
+            </a:fld>
+            <a:endParaRPr lang="ko-KR" altLang="en-US" dirty="0"/>
+          </a:p>
+        </p:txBody>
+      </p:sp>
+    </p:spTree>
+    <p:extLst>
+      <p:ext uri="{BB962C8B-B14F-4D97-AF65-F5344CB8AC3E}">
+        <p14:creationId xmlns:p14="http://schemas.microsoft.com/office/powerpoint/2010/main" val="1854574106"/>
+      </p:ext>
+    </p:extLst>
+  </p:cSld>
+  <p:clrMapOvr>
+    <a:masterClrMapping/>
+  </p:clrMapOvr>
+</p:notes>
+</file>
+
+<file path=ppt/notesSlides/notesSlide5.xml><?xml version="1.0" encoding="utf-8"?>
+<p:notes xmlns:a="http://schemas.openxmlformats.org/drawingml/2006/main" xmlns:r="http://schemas.openxmlformats.org/officeDocument/2006/relationships" xmlns:p="http://schemas.openxmlformats.org/presentationml/2006/main">
+  <p:cSld>
+    <p:spTree>
+      <p:nvGrpSpPr>
+        <p:cNvPr id="1" name=""/>
+        <p:cNvGrpSpPr/>
+        <p:nvPr/>
+      </p:nvGrpSpPr>
+      <p:grpSpPr>
+        <a:xfrm>
+          <a:off x="0" y="0"/>
+          <a:ext cx="0" cy="0"/>
+          <a:chOff x="0" y="0"/>
+          <a:chExt cx="0" cy="0"/>
+        </a:xfrm>
+      </p:grpSpPr>
+      <p:sp>
+        <p:nvSpPr>
+          <p:cNvPr id="2" name="슬라이드 이미지 개체 틀 1"/>
+          <p:cNvSpPr>
+            <a:spLocks noGrp="1" noRot="1" noChangeAspect="1"/>
+          </p:cNvSpPr>
+          <p:nvPr>
+            <p:ph type="sldImg"/>
+          </p:nvPr>
+        </p:nvSpPr>
+        <p:spPr/>
+      </p:sp>
+      <p:sp>
+        <p:nvSpPr>
+          <p:cNvPr id="3" name="슬라이드 노트 개체 틀 2"/>
+          <p:cNvSpPr>
+            <a:spLocks noGrp="1"/>
+          </p:cNvSpPr>
+          <p:nvPr>
+            <p:ph type="body" idx="1"/>
+          </p:nvPr>
+        </p:nvSpPr>
+        <p:spPr/>
+        <p:txBody>
+          <a:bodyPr/>
+          <a:lstStyle/>
+          <a:p>
+            <a:pPr marL="0" marR="0" indent="0" algn="l" defTabSz="914400" rtl="0" eaLnBrk="1" fontAlgn="auto" latinLnBrk="1" hangingPunct="1">
+              <a:lnSpc>
+                <a:spcPct val="100000"/>
+              </a:lnSpc>
+              <a:spcBef>
+                <a:spcPts val="0"/>
+              </a:spcBef>
+              <a:spcAft>
+                <a:spcPts val="0"/>
+              </a:spcAft>
+              <a:buClrTx/>
+              <a:buSzTx/>
+              <a:buFontTx/>
+              <a:buNone/>
+              <a:tabLst/>
+              <a:defRPr/>
+            </a:pPr>
+            <a:r>
+              <a:rPr lang="en-US" altLang="ko-KR" dirty="0">
+                <a:latin typeface="+mn-ea"/>
+              </a:rPr>
+              <a:t>A</a:t>
+            </a:r>
+            <a:r>
+              <a:rPr lang="ko-KR" altLang="en-US" dirty="0">
+                <a:latin typeface="+mn-ea"/>
+              </a:rPr>
+              <a:t>와 </a:t>
+            </a:r>
+            <a:r>
+              <a:rPr lang="en-US" altLang="ko-KR" dirty="0">
+                <a:latin typeface="+mn-ea"/>
+              </a:rPr>
+              <a:t>B</a:t>
+            </a:r>
+            <a:r>
+              <a:rPr lang="ko-KR" altLang="en-US" dirty="0">
+                <a:latin typeface="+mn-ea"/>
+              </a:rPr>
+              <a:t>에 대해 좋은지 나쁜지를 평가할 수 있어야 함</a:t>
+            </a:r>
+            <a:endParaRPr lang="en-US" altLang="ko-KR" dirty="0">
+              <a:latin typeface="+mn-ea"/>
+            </a:endParaRPr>
+          </a:p>
+          <a:p>
+            <a:endParaRPr lang="ko-KR" altLang="en-US" dirty="0"/>
+          </a:p>
+        </p:txBody>
+      </p:sp>
+      <p:sp>
+        <p:nvSpPr>
+          <p:cNvPr id="4" name="슬라이드 번호 개체 틀 3"/>
+          <p:cNvSpPr>
+            <a:spLocks noGrp="1"/>
+          </p:cNvSpPr>
+          <p:nvPr>
+            <p:ph type="sldNum" sz="quarter" idx="10"/>
+          </p:nvPr>
+        </p:nvSpPr>
+        <p:spPr/>
+        <p:txBody>
+          <a:bodyPr/>
+          <a:lstStyle/>
+          <a:p>
+            <a:fld id="{C09E5BFC-1559-42F1-8940-AB342D56BF02}" type="slidenum">
+              <a:rPr lang="ko-KR" altLang="en-US" smtClean="0"/>
+              <a:t>7</a:t>
+            </a:fld>
+            <a:endParaRPr lang="ko-KR" altLang="en-US"/>
+          </a:p>
+        </p:txBody>
+      </p:sp>
+    </p:spTree>
+    <p:extLst>
+      <p:ext uri="{BB962C8B-B14F-4D97-AF65-F5344CB8AC3E}">
+        <p14:creationId xmlns:p14="http://schemas.microsoft.com/office/powerpoint/2010/main" val="3403531308"/>
+      </p:ext>
+    </p:extLst>
+  </p:cSld>
+  <p:clrMapOvr>
+    <a:masterClrMapping/>
+  </p:clrMapOvr>
+</p:notes>
+</file>
+
+<file path=ppt/notesSlides/notesSlide6.xml><?xml version="1.0" encoding="utf-8"?>
+<p:notes xmlns:a="http://schemas.openxmlformats.org/drawingml/2006/main" xmlns:r="http://schemas.openxmlformats.org/officeDocument/2006/relationships" xmlns:p="http://schemas.openxmlformats.org/presentationml/2006/main">
+  <p:cSld>
+    <p:spTree>
+      <p:nvGrpSpPr>
+        <p:cNvPr id="1" name=""/>
+        <p:cNvGrpSpPr/>
+        <p:nvPr/>
+      </p:nvGrpSpPr>
+      <p:grpSpPr>
+        <a:xfrm>
+          <a:off x="0" y="0"/>
+          <a:ext cx="0" cy="0"/>
+          <a:chOff x="0" y="0"/>
+          <a:chExt cx="0" cy="0"/>
+        </a:xfrm>
+      </p:grpSpPr>
+      <p:sp>
+        <p:nvSpPr>
+          <p:cNvPr id="2" name="슬라이드 이미지 개체 틀 1"/>
+          <p:cNvSpPr>
+            <a:spLocks noGrp="1" noRot="1" noChangeAspect="1"/>
+          </p:cNvSpPr>
+          <p:nvPr>
+            <p:ph type="sldImg"/>
+          </p:nvPr>
+        </p:nvSpPr>
+        <p:spPr/>
+      </p:sp>
+      <p:sp>
+        <p:nvSpPr>
+          <p:cNvPr id="3" name="슬라이드 노트 개체 틀 2"/>
+          <p:cNvSpPr>
+            <a:spLocks noGrp="1"/>
+          </p:cNvSpPr>
+          <p:nvPr>
+            <p:ph type="body" idx="1"/>
+          </p:nvPr>
+        </p:nvSpPr>
+        <p:spPr/>
+        <p:txBody>
+          <a:bodyPr/>
+          <a:lstStyle/>
+          <a:p>
+            <a:endParaRPr lang="ko-KR" altLang="en-US" dirty="0"/>
+          </a:p>
+        </p:txBody>
+      </p:sp>
+      <p:sp>
+        <p:nvSpPr>
+          <p:cNvPr id="4" name="슬라이드 번호 개체 틀 3"/>
+          <p:cNvSpPr>
+            <a:spLocks noGrp="1"/>
+          </p:cNvSpPr>
+          <p:nvPr>
+            <p:ph type="sldNum" sz="quarter" idx="10"/>
+          </p:nvPr>
+        </p:nvSpPr>
+        <p:spPr/>
+        <p:txBody>
+          <a:bodyPr/>
+          <a:lstStyle/>
+          <a:p>
+            <a:fld id="{C09E5BFC-1559-42F1-8940-AB342D56BF02}" type="slidenum">
+              <a:rPr lang="ko-KR" altLang="en-US" smtClean="0"/>
+              <a:t>9</a:t>
+            </a:fld>
+            <a:endParaRPr lang="ko-KR" altLang="en-US"/>
+          </a:p>
+        </p:txBody>
+      </p:sp>
+    </p:spTree>
+    <p:extLst>
+      <p:ext uri="{BB962C8B-B14F-4D97-AF65-F5344CB8AC3E}">
+        <p14:creationId xmlns:p14="http://schemas.microsoft.com/office/powerpoint/2010/main" val="3136640640"/>
+      </p:ext>
+    </p:extLst>
+  </p:cSld>
+  <p:clrMapOvr>
+    <a:masterClrMapping/>
+  </p:clrMapOvr>
+</p:notes>
+</file>
+
+<file path=ppt/notesSlides/notesSlide7.xml><?xml version="1.0" encoding="utf-8"?>
+<p:notes xmlns:a="http://schemas.openxmlformats.org/drawingml/2006/main" xmlns:r="http://schemas.openxmlformats.org/officeDocument/2006/relationships" xmlns:p="http://schemas.openxmlformats.org/presentationml/2006/main">
+  <p:cSld>
+    <p:spTree>
+      <p:nvGrpSpPr>
+        <p:cNvPr id="1" name=""/>
+        <p:cNvGrpSpPr/>
+        <p:nvPr/>
+      </p:nvGrpSpPr>
+      <p:grpSpPr>
+        <a:xfrm>
+          <a:off x="0" y="0"/>
+          <a:ext cx="0" cy="0"/>
+          <a:chOff x="0" y="0"/>
+          <a:chExt cx="0" cy="0"/>
+        </a:xfrm>
+      </p:grpSpPr>
+      <p:sp>
+        <p:nvSpPr>
+          <p:cNvPr id="2" name="슬라이드 이미지 개체 틀 1"/>
+          <p:cNvSpPr>
+            <a:spLocks noGrp="1" noRot="1" noChangeAspect="1"/>
+          </p:cNvSpPr>
+          <p:nvPr>
+            <p:ph type="sldImg"/>
+          </p:nvPr>
+        </p:nvSpPr>
+        <p:spPr/>
+      </p:sp>
+      <p:sp>
+        <p:nvSpPr>
+          <p:cNvPr id="3" name="슬라이드 노트 개체 틀 2"/>
+          <p:cNvSpPr>
+            <a:spLocks noGrp="1"/>
+          </p:cNvSpPr>
+          <p:nvPr>
+            <p:ph type="body" idx="1"/>
+          </p:nvPr>
+        </p:nvSpPr>
+        <p:spPr/>
+        <p:txBody>
+          <a:bodyPr/>
+          <a:lstStyle/>
+          <a:p>
+            <a:pPr marL="0" marR="0" indent="0" algn="l" defTabSz="914400" rtl="0" eaLnBrk="1" fontAlgn="auto" latinLnBrk="1" hangingPunct="1">
+              <a:lnSpc>
+                <a:spcPct val="100000"/>
+              </a:lnSpc>
+              <a:spcBef>
+                <a:spcPts val="0"/>
+              </a:spcBef>
+              <a:spcAft>
+                <a:spcPts val="0"/>
+              </a:spcAft>
+              <a:buClrTx/>
+              <a:buSzTx/>
+              <a:buFontTx/>
+              <a:buNone/>
+              <a:tabLst/>
+              <a:defRPr/>
+            </a:pPr>
+            <a:endParaRPr lang="ko-KR" altLang="en-US" dirty="0"/>
+          </a:p>
+        </p:txBody>
+      </p:sp>
+      <p:sp>
+        <p:nvSpPr>
+          <p:cNvPr id="4" name="슬라이드 번호 개체 틀 3"/>
+          <p:cNvSpPr>
+            <a:spLocks noGrp="1"/>
+          </p:cNvSpPr>
+          <p:nvPr>
+            <p:ph type="sldNum" sz="quarter" idx="10"/>
+          </p:nvPr>
+        </p:nvSpPr>
+        <p:spPr/>
+        <p:txBody>
+          <a:bodyPr/>
+          <a:lstStyle/>
+          <a:p>
+            <a:fld id="{C09E5BFC-1559-42F1-8940-AB342D56BF02}" type="slidenum">
+              <a:rPr lang="ko-KR" altLang="en-US" smtClean="0"/>
+              <a:t>10</a:t>
+            </a:fld>
+            <a:endParaRPr lang="ko-KR" altLang="en-US"/>
+          </a:p>
+        </p:txBody>
+      </p:sp>
+    </p:spTree>
+    <p:extLst>
+      <p:ext uri="{BB962C8B-B14F-4D97-AF65-F5344CB8AC3E}">
+        <p14:creationId xmlns:p14="http://schemas.microsoft.com/office/powerpoint/2010/main" val="3666006663"/>
+      </p:ext>
+    </p:extLst>
+  </p:cSld>
+  <p:clrMapOvr>
+    <a:masterClrMapping/>
+  </p:clrMapOvr>
+</p:notes>
+</file>
+
+<file path=ppt/notesSlides/notesSlide8.xml><?xml version="1.0" encoding="utf-8"?>
+<p:notes xmlns:a="http://schemas.openxmlformats.org/drawingml/2006/main" xmlns:r="http://schemas.openxmlformats.org/officeDocument/2006/relationships" xmlns:p="http://schemas.openxmlformats.org/presentationml/2006/main">
+  <p:cSld>
+    <p:spTree>
+      <p:nvGrpSpPr>
+        <p:cNvPr id="1" name=""/>
+        <p:cNvGrpSpPr/>
+        <p:nvPr/>
+      </p:nvGrpSpPr>
+      <p:grpSpPr>
+        <a:xfrm>
+          <a:off x="0" y="0"/>
+          <a:ext cx="0" cy="0"/>
+          <a:chOff x="0" y="0"/>
+          <a:chExt cx="0" cy="0"/>
+        </a:xfrm>
+      </p:grpSpPr>
+      <p:sp>
+        <p:nvSpPr>
+          <p:cNvPr id="2" name="슬라이드 이미지 개체 틀 1"/>
+          <p:cNvSpPr>
+            <a:spLocks noGrp="1" noRot="1" noChangeAspect="1"/>
+          </p:cNvSpPr>
+          <p:nvPr>
+            <p:ph type="sldImg"/>
+          </p:nvPr>
+        </p:nvSpPr>
+        <p:spPr/>
+      </p:sp>
+      <p:sp>
+        <p:nvSpPr>
+          <p:cNvPr id="3" name="슬라이드 노트 개체 틀 2"/>
+          <p:cNvSpPr>
+            <a:spLocks noGrp="1"/>
+          </p:cNvSpPr>
+          <p:nvPr>
+            <p:ph type="body" idx="1"/>
+          </p:nvPr>
+        </p:nvSpPr>
+        <p:spPr/>
+        <p:txBody>
+          <a:bodyPr/>
+          <a:lstStyle/>
+          <a:p>
+            <a:pPr marL="0" marR="0" indent="0" algn="l" defTabSz="914400" rtl="0" eaLnBrk="1" fontAlgn="auto" latinLnBrk="1" hangingPunct="1">
+              <a:lnSpc>
+                <a:spcPct val="100000"/>
+              </a:lnSpc>
+              <a:spcBef>
+                <a:spcPts val="0"/>
+              </a:spcBef>
+              <a:spcAft>
+                <a:spcPts val="0"/>
+              </a:spcAft>
+              <a:buClrTx/>
+              <a:buSzTx/>
+              <a:buFontTx/>
+              <a:buNone/>
+              <a:tabLst/>
+              <a:defRPr/>
+            </a:pPr>
+            <a:r>
+              <a:rPr lang="en-US" altLang="ko-KR" dirty="0"/>
+              <a:t>Loss</a:t>
+            </a:r>
+            <a:r>
+              <a:rPr lang="ko-KR" altLang="en-US" dirty="0"/>
+              <a:t>를 최소화 하는 </a:t>
+            </a:r>
+            <a:r>
+              <a:rPr lang="en-US" altLang="ko-KR" dirty="0" err="1"/>
+              <a:t>a,b</a:t>
+            </a:r>
+            <a:r>
+              <a:rPr lang="ko-KR" altLang="en-US" dirty="0"/>
+              <a:t>가 최적의 </a:t>
+            </a:r>
+            <a:r>
+              <a:rPr lang="en-US" altLang="ko-KR" dirty="0" err="1"/>
+              <a:t>a,b</a:t>
+            </a:r>
+            <a:r>
+              <a:rPr lang="ko-KR" altLang="en-US" dirty="0"/>
+              <a:t>가 되는 것</a:t>
+            </a:r>
+          </a:p>
+          <a:p>
+            <a:endParaRPr lang="ko-KR" altLang="en-US" dirty="0"/>
+          </a:p>
+        </p:txBody>
+      </p:sp>
+      <p:sp>
+        <p:nvSpPr>
+          <p:cNvPr id="4" name="슬라이드 번호 개체 틀 3"/>
+          <p:cNvSpPr>
+            <a:spLocks noGrp="1"/>
+          </p:cNvSpPr>
+          <p:nvPr>
+            <p:ph type="sldNum" sz="quarter" idx="10"/>
+          </p:nvPr>
+        </p:nvSpPr>
+        <p:spPr/>
+        <p:txBody>
+          <a:bodyPr/>
+          <a:lstStyle/>
+          <a:p>
+            <a:fld id="{C09E5BFC-1559-42F1-8940-AB342D56BF02}" type="slidenum">
+              <a:rPr lang="ko-KR" altLang="en-US" smtClean="0"/>
+              <a:t>18</a:t>
+            </a:fld>
+            <a:endParaRPr lang="ko-KR" altLang="en-US"/>
+          </a:p>
+        </p:txBody>
+      </p:sp>
+    </p:spTree>
+    <p:extLst>
+      <p:ext uri="{BB962C8B-B14F-4D97-AF65-F5344CB8AC3E}">
+        <p14:creationId xmlns:p14="http://schemas.microsoft.com/office/powerpoint/2010/main" val="3666006663"/>
+      </p:ext>
+    </p:extLst>
+  </p:cSld>
+  <p:clrMapOvr>
+    <a:masterClrMapping/>
+  </p:clrMapOvr>
+</p:notes>
+</file>
+
+<file path=ppt/notesSlides/notesSlide9.xml><?xml version="1.0" encoding="utf-8"?>
+<p:notes xmlns:a="http://schemas.openxmlformats.org/drawingml/2006/main" xmlns:r="http://schemas.openxmlformats.org/officeDocument/2006/relationships" xmlns:p="http://schemas.openxmlformats.org/presentationml/2006/main">
+  <p:cSld>
+    <p:spTree>
+      <p:nvGrpSpPr>
+        <p:cNvPr id="1" name=""/>
+        <p:cNvGrpSpPr/>
+        <p:nvPr/>
+      </p:nvGrpSpPr>
+      <p:grpSpPr>
+        <a:xfrm>
+          <a:off x="0" y="0"/>
+          <a:ext cx="0" cy="0"/>
+          <a:chOff x="0" y="0"/>
+          <a:chExt cx="0" cy="0"/>
+        </a:xfrm>
+      </p:grpSpPr>
+      <p:sp>
+        <p:nvSpPr>
+          <p:cNvPr id="2" name="슬라이드 이미지 개체 틀 1"/>
+          <p:cNvSpPr>
+            <a:spLocks noGrp="1" noRot="1" noChangeAspect="1"/>
+          </p:cNvSpPr>
+          <p:nvPr>
+            <p:ph type="sldImg"/>
+          </p:nvPr>
+        </p:nvSpPr>
+        <p:spPr/>
+      </p:sp>
+      <p:sp>
+        <p:nvSpPr>
+          <p:cNvPr id="3" name="슬라이드 노트 개체 틀 2"/>
+          <p:cNvSpPr>
+            <a:spLocks noGrp="1"/>
+          </p:cNvSpPr>
+          <p:nvPr>
+            <p:ph type="body" idx="1"/>
+          </p:nvPr>
+        </p:nvSpPr>
+        <p:spPr/>
+        <p:txBody>
+          <a:bodyPr/>
+          <a:lstStyle/>
+          <a:p>
+            <a:r>
+              <a:rPr lang="ko-KR" altLang="en-US" dirty="0"/>
+              <a:t>모델이 바뀌어도 학습 구조는 같다</a:t>
+            </a:r>
+          </a:p>
+        </p:txBody>
+      </p:sp>
+      <p:sp>
+        <p:nvSpPr>
+          <p:cNvPr id="4" name="슬라이드 번호 개체 틀 3"/>
+          <p:cNvSpPr>
+            <a:spLocks noGrp="1"/>
+          </p:cNvSpPr>
+          <p:nvPr>
+            <p:ph type="sldNum" sz="quarter" idx="5"/>
+          </p:nvPr>
+        </p:nvSpPr>
+        <p:spPr/>
+        <p:txBody>
+          <a:bodyPr/>
+          <a:lstStyle/>
+          <a:p>
+            <a:fld id="{3E35EA20-6519-4513-9EDC-C89C5369BAEC}" type="slidenum">
+              <a:rPr lang="ko-KR" altLang="en-US" smtClean="0"/>
+              <a:pPr/>
+              <a:t>21</a:t>
+            </a:fld>
+            <a:endParaRPr lang="ko-KR" altLang="en-US" dirty="0"/>
+          </a:p>
+        </p:txBody>
+      </p:sp>
+    </p:spTree>
+    <p:extLst>
+      <p:ext uri="{BB962C8B-B14F-4D97-AF65-F5344CB8AC3E}">
+        <p14:creationId xmlns:p14="http://schemas.microsoft.com/office/powerpoint/2010/main" val="1454035102"/>
       </p:ext>
     </p:extLst>
   </p:cSld>
@@ -1426,7 +2403,7 @@
           <a:p>
             <a:fld id="{442BEE3F-2E9A-4FD8-8B8A-8619F3E161C0}" type="datetime1">
               <a:rPr lang="ko-KR" altLang="en-US" smtClean="0"/>
-              <a:t>2026-02-10</a:t>
+              <a:t>2026-02-12</a:t>
             </a:fld>
             <a:endParaRPr lang="ko-KR" altLang="en-US"/>
           </a:p>
@@ -1713,7 +2690,7 @@
           <a:p>
             <a:fld id="{0F78D9C4-20C1-4B15-A116-16DC77AD9A1E}" type="datetime1">
               <a:rPr lang="ko-KR" altLang="en-US" smtClean="0"/>
-              <a:t>2026-02-10</a:t>
+              <a:t>2026-02-12</a:t>
             </a:fld>
             <a:endParaRPr lang="ko-KR" altLang="en-US"/>
           </a:p>
@@ -1888,7 +2865,7 @@
           <a:p>
             <a:fld id="{7F5E23C3-0E3D-4E4E-8486-D7FB4C073DC1}" type="datetime1">
               <a:rPr lang="ko-KR" altLang="en-US" smtClean="0"/>
-              <a:t>2026-02-10</a:t>
+              <a:t>2026-02-12</a:t>
             </a:fld>
             <a:endParaRPr lang="ko-KR" altLang="en-US"/>
           </a:p>
@@ -2217,7 +3194,7 @@
           <a:p>
             <a:fld id="{7F5E23C3-0E3D-4E4E-8486-D7FB4C073DC1}" type="datetime1">
               <a:rPr lang="ko-KR" altLang="en-US" smtClean="0"/>
-              <a:t>2026-02-10</a:t>
+              <a:t>2026-02-12</a:t>
             </a:fld>
             <a:endParaRPr lang="ko-KR" altLang="en-US"/>
           </a:p>
@@ -3129,6 +4106,465 @@
       </p:grpSpPr>
       <p:sp>
         <p:nvSpPr>
+          <p:cNvPr id="2" name="제목 1">
+            <a:extLst>
+              <a:ext uri="{FF2B5EF4-FFF2-40B4-BE49-F238E27FC236}">
+                <a16:creationId xmlns:a16="http://schemas.microsoft.com/office/drawing/2014/main" id="{A8D8F1F4-4871-4B45-B08E-F92ACDB80FE6}"/>
+              </a:ext>
+            </a:extLst>
+          </p:cNvPr>
+          <p:cNvSpPr>
+            <a:spLocks noGrp="1"/>
+          </p:cNvSpPr>
+          <p:nvPr>
+            <p:ph type="title"/>
+          </p:nvPr>
+        </p:nvSpPr>
+        <p:spPr/>
+        <p:txBody>
+          <a:bodyPr>
+            <a:normAutofit/>
+          </a:bodyPr>
+          <a:lstStyle/>
+          <a:p>
+            <a:r>
+              <a:rPr lang="ko-KR" altLang="en-US" sz="4800" b="1" dirty="0">
+                <a:latin typeface="+mj-ea"/>
+              </a:rPr>
+              <a:t>선형 회귀</a:t>
+            </a:r>
+            <a:r>
+              <a:rPr lang="en-US" altLang="ko-KR" sz="4800" b="1" dirty="0">
+                <a:latin typeface="+mj-ea"/>
+              </a:rPr>
+              <a:t>(Linear Regression)</a:t>
+            </a:r>
+            <a:endParaRPr lang="ko-KR" altLang="en-US" sz="4800" b="1" dirty="0">
+              <a:latin typeface="+mj-ea"/>
+            </a:endParaRPr>
+          </a:p>
+        </p:txBody>
+      </p:sp>
+      <p:sp>
+        <p:nvSpPr>
+          <p:cNvPr id="3" name="내용 개체 틀 2">
+            <a:extLst>
+              <a:ext uri="{FF2B5EF4-FFF2-40B4-BE49-F238E27FC236}">
+                <a16:creationId xmlns:a16="http://schemas.microsoft.com/office/drawing/2014/main" id="{659642C9-AD46-4D01-B61B-33D812751E95}"/>
+              </a:ext>
+            </a:extLst>
+          </p:cNvPr>
+          <p:cNvSpPr>
+            <a:spLocks noGrp="1"/>
+          </p:cNvSpPr>
+          <p:nvPr>
+            <p:ph idx="1"/>
+          </p:nvPr>
+        </p:nvSpPr>
+        <p:spPr>
+          <a:xfrm>
+            <a:off x="238990" y="1145407"/>
+            <a:ext cx="11701221" cy="4385773"/>
+          </a:xfrm>
+        </p:spPr>
+        <p:txBody>
+          <a:bodyPr>
+            <a:noAutofit/>
+          </a:bodyPr>
+          <a:lstStyle/>
+          <a:p>
+            <a:pPr marL="0" indent="0">
+              <a:lnSpc>
+                <a:spcPct val="150000"/>
+              </a:lnSpc>
+              <a:buNone/>
+            </a:pPr>
+            <a:r>
+              <a:rPr lang="ko-KR" altLang="en-US" dirty="0">
+                <a:latin typeface="+mn-ea"/>
+              </a:rPr>
+              <a:t>💡 종속 변수 </a:t>
+            </a:r>
+            <a:r>
+              <a:rPr lang="en-US" altLang="ko-KR" dirty="0">
+                <a:latin typeface="+mn-ea"/>
+              </a:rPr>
+              <a:t>y</a:t>
+            </a:r>
+            <a:r>
+              <a:rPr lang="ko-KR" altLang="en-US" dirty="0">
+                <a:latin typeface="+mn-ea"/>
+              </a:rPr>
+              <a:t>와 하나 이상의 독립 변수 </a:t>
+            </a:r>
+            <a:r>
+              <a:rPr lang="en-US" altLang="ko-KR" dirty="0">
+                <a:latin typeface="+mn-ea"/>
+              </a:rPr>
+              <a:t>x</a:t>
+            </a:r>
+            <a:r>
+              <a:rPr lang="ko-KR" altLang="en-US" dirty="0">
+                <a:latin typeface="+mn-ea"/>
+              </a:rPr>
+              <a:t>와의 선형 상관관계를 모델링하는 기법</a:t>
+            </a:r>
+            <a:endParaRPr lang="en-US" altLang="ko-KR" dirty="0">
+              <a:latin typeface="+mn-ea"/>
+            </a:endParaRPr>
+          </a:p>
+          <a:p>
+            <a:pPr lvl="1">
+              <a:lnSpc>
+                <a:spcPct val="150000"/>
+              </a:lnSpc>
+            </a:pPr>
+            <a:r>
+              <a:rPr lang="ko-KR" altLang="en-US" dirty="0"/>
+              <a:t>데이터 속에서 일정한 패턴</a:t>
+            </a:r>
+            <a:r>
+              <a:rPr lang="en-US" altLang="ko-KR" dirty="0"/>
+              <a:t>(</a:t>
+            </a:r>
+            <a:r>
+              <a:rPr lang="ko-KR" altLang="en-US" dirty="0"/>
+              <a:t>규칙</a:t>
+            </a:r>
+            <a:r>
+              <a:rPr lang="en-US" altLang="ko-KR" dirty="0"/>
+              <a:t>)</a:t>
+            </a:r>
+            <a:r>
+              <a:rPr lang="ko-KR" altLang="en-US" dirty="0"/>
+              <a:t>을 찾아내고</a:t>
+            </a:r>
+            <a:r>
+              <a:rPr lang="en-US" altLang="ko-KR" dirty="0"/>
+              <a:t>, </a:t>
+            </a:r>
+            <a:r>
+              <a:rPr lang="ko-KR" altLang="en-US" dirty="0"/>
+              <a:t>이를 </a:t>
+            </a:r>
+            <a:r>
+              <a:rPr lang="ko-KR" altLang="en-US" b="1" dirty="0">
+                <a:highlight>
+                  <a:srgbClr val="FFFF00"/>
+                </a:highlight>
+              </a:rPr>
+              <a:t>직선 방정식</a:t>
+            </a:r>
+            <a:r>
+              <a:rPr lang="ko-KR" altLang="en-US" dirty="0"/>
+              <a:t>으로 표현하는 것</a:t>
+            </a:r>
+            <a:endParaRPr lang="en-US" altLang="ko-KR" dirty="0"/>
+          </a:p>
+          <a:p>
+            <a:pPr lvl="1">
+              <a:lnSpc>
+                <a:spcPct val="150000"/>
+              </a:lnSpc>
+            </a:pPr>
+            <a:r>
+              <a:rPr lang="en-US" altLang="ko-KR" dirty="0">
+                <a:highlight>
+                  <a:srgbClr val="FFFF00"/>
+                </a:highlight>
+                <a:latin typeface="+mn-ea"/>
+              </a:rPr>
+              <a:t>W </a:t>
+            </a:r>
+            <a:r>
+              <a:rPr lang="ko-KR" altLang="en-US" dirty="0">
+                <a:highlight>
+                  <a:srgbClr val="FFFF00"/>
+                </a:highlight>
+                <a:latin typeface="+mn-ea"/>
+              </a:rPr>
+              <a:t>를 가중치</a:t>
+            </a:r>
+            <a:r>
+              <a:rPr lang="en-US" altLang="ko-KR" dirty="0">
+                <a:highlight>
+                  <a:srgbClr val="FFFF00"/>
+                </a:highlight>
+                <a:latin typeface="+mn-ea"/>
+              </a:rPr>
+              <a:t>(Weight), b</a:t>
+            </a:r>
+            <a:r>
+              <a:rPr lang="ko-KR" altLang="en-US" dirty="0">
+                <a:highlight>
+                  <a:srgbClr val="FFFF00"/>
+                </a:highlight>
+                <a:latin typeface="+mn-ea"/>
+              </a:rPr>
+              <a:t>를 편향</a:t>
+            </a:r>
+            <a:r>
+              <a:rPr lang="en-US" altLang="ko-KR" dirty="0">
+                <a:highlight>
+                  <a:srgbClr val="FFFF00"/>
+                </a:highlight>
+                <a:latin typeface="+mn-ea"/>
+              </a:rPr>
+              <a:t>(bias)</a:t>
+            </a:r>
+            <a:r>
+              <a:rPr lang="ko-KR" altLang="en-US" dirty="0">
+                <a:latin typeface="+mn-ea"/>
+              </a:rPr>
+              <a:t>라고 부름</a:t>
+            </a:r>
+            <a:endParaRPr lang="en-US" altLang="ko-KR" dirty="0">
+              <a:latin typeface="+mn-ea"/>
+            </a:endParaRPr>
+          </a:p>
+          <a:p>
+            <a:pPr lvl="1">
+              <a:lnSpc>
+                <a:spcPct val="150000"/>
+              </a:lnSpc>
+            </a:pPr>
+            <a:endParaRPr lang="en-US" altLang="ko-KR" dirty="0"/>
+          </a:p>
+          <a:p>
+            <a:pPr marL="457200" lvl="1" indent="0">
+              <a:lnSpc>
+                <a:spcPct val="150000"/>
+              </a:lnSpc>
+              <a:buNone/>
+            </a:pPr>
+            <a:endParaRPr lang="en-US" altLang="ko-KR" dirty="0">
+              <a:latin typeface="+mn-ea"/>
+            </a:endParaRPr>
+          </a:p>
+          <a:p>
+            <a:pPr marL="457200" lvl="1" indent="0">
+              <a:lnSpc>
+                <a:spcPct val="150000"/>
+              </a:lnSpc>
+              <a:buNone/>
+            </a:pPr>
+            <a:r>
+              <a:rPr lang="ko-KR" altLang="en-US" dirty="0">
+                <a:latin typeface="+mn-ea"/>
+              </a:rPr>
+              <a:t>✔️ 만약 독립 변수 </a:t>
+            </a:r>
+            <a:r>
+              <a:rPr lang="en-US" altLang="ko-KR" dirty="0">
+                <a:latin typeface="+mn-ea"/>
+              </a:rPr>
+              <a:t>x</a:t>
+            </a:r>
+            <a:r>
+              <a:rPr lang="ko-KR" altLang="en-US" dirty="0">
+                <a:latin typeface="+mn-ea"/>
+              </a:rPr>
+              <a:t>가 </a:t>
+            </a:r>
+            <a:r>
+              <a:rPr lang="en-US" altLang="ko-KR" dirty="0">
+                <a:latin typeface="+mn-ea"/>
+              </a:rPr>
+              <a:t>1</a:t>
+            </a:r>
+            <a:r>
+              <a:rPr lang="ko-KR" altLang="en-US" dirty="0">
+                <a:latin typeface="+mn-ea"/>
+              </a:rPr>
+              <a:t>개라면 </a:t>
+            </a:r>
+            <a:r>
+              <a:rPr lang="ko-KR" altLang="en-US" b="1" dirty="0">
+                <a:latin typeface="+mn-ea"/>
+              </a:rPr>
+              <a:t>단순 선형 회귀</a:t>
+            </a:r>
+            <a:r>
+              <a:rPr lang="en-US" altLang="ko-KR" dirty="0">
+                <a:latin typeface="+mn-ea"/>
+              </a:rPr>
+              <a:t>, 2</a:t>
+            </a:r>
+            <a:r>
+              <a:rPr lang="ko-KR" altLang="en-US" dirty="0">
+                <a:latin typeface="+mn-ea"/>
+              </a:rPr>
+              <a:t>개 이상이면 </a:t>
+            </a:r>
+            <a:r>
+              <a:rPr lang="ko-KR" altLang="en-US" b="1" dirty="0">
+                <a:latin typeface="+mn-ea"/>
+              </a:rPr>
+              <a:t>다중 선형 회귀</a:t>
+            </a:r>
+            <a:r>
+              <a:rPr lang="ko-KR" altLang="en-US" dirty="0">
+                <a:latin typeface="+mn-ea"/>
+              </a:rPr>
+              <a:t>라고 함</a:t>
+            </a:r>
+          </a:p>
+        </p:txBody>
+      </p:sp>
+      <p:sp>
+        <p:nvSpPr>
+          <p:cNvPr id="4" name="날짜 개체 틀 3">
+            <a:extLst>
+              <a:ext uri="{FF2B5EF4-FFF2-40B4-BE49-F238E27FC236}">
+                <a16:creationId xmlns:a16="http://schemas.microsoft.com/office/drawing/2014/main" id="{590F8720-7C11-4CC8-8215-3F57F085A24B}"/>
+              </a:ext>
+            </a:extLst>
+          </p:cNvPr>
+          <p:cNvSpPr>
+            <a:spLocks noGrp="1"/>
+          </p:cNvSpPr>
+          <p:nvPr>
+            <p:ph type="dt" sz="half" idx="10"/>
+          </p:nvPr>
+        </p:nvSpPr>
+        <p:spPr/>
+        <p:txBody>
+          <a:bodyPr/>
+          <a:lstStyle/>
+          <a:p>
+            <a:fld id="{0F78D9C4-20C1-4B15-A116-16DC77AD9A1E}" type="datetime1">
+              <a:rPr lang="ko-KR" altLang="en-US" smtClean="0"/>
+              <a:t>2026-02-12</a:t>
+            </a:fld>
+            <a:endParaRPr lang="ko-KR" altLang="en-US"/>
+          </a:p>
+        </p:txBody>
+      </p:sp>
+      <p:sp>
+        <p:nvSpPr>
+          <p:cNvPr id="5" name="슬라이드 번호 개체 틀 4">
+            <a:extLst>
+              <a:ext uri="{FF2B5EF4-FFF2-40B4-BE49-F238E27FC236}">
+                <a16:creationId xmlns:a16="http://schemas.microsoft.com/office/drawing/2014/main" id="{E86D5960-457B-4CA2-B0B3-F7F0DADA85D8}"/>
+              </a:ext>
+            </a:extLst>
+          </p:cNvPr>
+          <p:cNvSpPr>
+            <a:spLocks noGrp="1"/>
+          </p:cNvSpPr>
+          <p:nvPr>
+            <p:ph type="sldNum" sz="quarter" idx="12"/>
+          </p:nvPr>
+        </p:nvSpPr>
+        <p:spPr/>
+        <p:txBody>
+          <a:bodyPr/>
+          <a:lstStyle/>
+          <a:p>
+            <a:fld id="{083A2CE0-18CD-4102-B738-4ACFF9E68BA4}" type="slidenum">
+              <a:rPr lang="ko-KR" altLang="en-US" smtClean="0"/>
+              <a:t>10</a:t>
+            </a:fld>
+            <a:endParaRPr lang="ko-KR" altLang="en-US"/>
+          </a:p>
+        </p:txBody>
+      </p:sp>
+      <p:pic>
+        <p:nvPicPr>
+          <p:cNvPr id="1026" name="Picture 2"/>
+          <p:cNvPicPr>
+            <a:picLocks noChangeAspect="1" noChangeArrowheads="1"/>
+          </p:cNvPicPr>
+          <p:nvPr/>
+        </p:nvPicPr>
+        <p:blipFill>
+          <a:blip r:embed="rId3">
+            <a:extLst>
+              <a:ext uri="{28A0092B-C50C-407E-A947-70E740481C1C}">
+                <a14:useLocalDpi xmlns:a14="http://schemas.microsoft.com/office/drawing/2010/main" val="0"/>
+              </a:ext>
+            </a:extLst>
+          </a:blip>
+          <a:srcRect/>
+          <a:stretch>
+            <a:fillRect/>
+          </a:stretch>
+        </p:blipFill>
+        <p:spPr bwMode="auto">
+          <a:xfrm>
+            <a:off x="4137775" y="3338293"/>
+            <a:ext cx="3916450" cy="728642"/>
+          </a:xfrm>
+          <a:prstGeom prst="rect">
+            <a:avLst/>
+          </a:prstGeom>
+          <a:noFill/>
+          <a:ln>
+            <a:noFill/>
+          </a:ln>
+          <a:effectLst/>
+          <a:extLst>
+            <a:ext uri="{909E8E84-426E-40DD-AFC4-6F175D3DCCD1}">
+              <a14:hiddenFill xmlns:a14="http://schemas.microsoft.com/office/drawing/2010/main">
+                <a:solidFill>
+                  <a:schemeClr val="accent1"/>
+                </a:solidFill>
+              </a14:hiddenFill>
+            </a:ext>
+            <a:ext uri="{91240B29-F687-4F45-9708-019B960494DF}">
+              <a14:hiddenLine xmlns:a14="http://schemas.microsoft.com/office/drawing/2010/main" w="9525">
+                <a:solidFill>
+                  <a:schemeClr val="tx1"/>
+                </a:solidFill>
+                <a:miter lim="800000"/>
+                <a:headEnd/>
+                <a:tailEnd/>
+              </a14:hiddenLine>
+            </a:ext>
+            <a:ext uri="{AF507438-7753-43E0-B8FC-AC1667EBCBE1}">
+              <a14:hiddenEffects xmlns:a14="http://schemas.microsoft.com/office/drawing/2010/main">
+                <a:effectLst>
+                  <a:outerShdw dist="35921" dir="2700000" algn="ctr" rotWithShape="0">
+                    <a:schemeClr val="bg2"/>
+                  </a:outerShdw>
+                </a:effectLst>
+              </a14:hiddenEffects>
+            </a:ext>
+          </a:extLst>
+        </p:spPr>
+      </p:pic>
+    </p:spTree>
+    <p:extLst>
+      <p:ext uri="{BB962C8B-B14F-4D97-AF65-F5344CB8AC3E}">
+        <p14:creationId xmlns:p14="http://schemas.microsoft.com/office/powerpoint/2010/main" val="1570076540"/>
+      </p:ext>
+    </p:extLst>
+  </p:cSld>
+  <p:clrMapOvr>
+    <a:masterClrMapping/>
+  </p:clrMapOvr>
+</p:sld>
+</file>
+
+<file path=ppt/slides/slide11.xml><?xml version="1.0" encoding="utf-8"?>
+<p:sld xmlns:a="http://schemas.openxmlformats.org/drawingml/2006/main" xmlns:r="http://schemas.openxmlformats.org/officeDocument/2006/relationships" xmlns:p="http://schemas.openxmlformats.org/presentationml/2006/main">
+  <p:cSld>
+    <p:spTree>
+      <p:nvGrpSpPr>
+        <p:cNvPr id="1" name=""/>
+        <p:cNvGrpSpPr/>
+        <p:nvPr/>
+      </p:nvGrpSpPr>
+      <p:grpSpPr>
+        <a:xfrm>
+          <a:off x="0" y="0"/>
+          <a:ext cx="0" cy="0"/>
+          <a:chOff x="0" y="0"/>
+          <a:chExt cx="0" cy="0"/>
+        </a:xfrm>
+      </p:grpSpPr>
+      <p:sp>
+        <p:nvSpPr>
           <p:cNvPr id="3" name="내용 개체 틀 2">
             <a:extLst>
               <a:ext uri="{FF2B5EF4-FFF2-40B4-BE49-F238E27FC236}">
@@ -3265,7 +4701,7 @@
           <a:p>
             <a:fld id="{0F78D9C4-20C1-4B15-A116-16DC77AD9A1E}" type="datetime1">
               <a:rPr lang="ko-KR" altLang="en-US" smtClean="0"/>
-              <a:t>2026-02-10</a:t>
+              <a:t>2026-02-12</a:t>
             </a:fld>
             <a:endParaRPr lang="ko-KR" altLang="en-US" dirty="0"/>
           </a:p>
@@ -3294,7 +4730,7 @@
           <a:p>
             <a:fld id="{083A2CE0-18CD-4102-B738-4ACFF9E68BA4}" type="slidenum">
               <a:rPr lang="ko-KR" altLang="en-US" smtClean="0"/>
-              <a:t>10</a:t>
+              <a:t>11</a:t>
             </a:fld>
             <a:endParaRPr lang="ko-KR" altLang="en-US"/>
           </a:p>
@@ -3642,350 +5078,6 @@
 </p:sld>
 </file>
 
-<file path=ppt/slides/slide11.xml><?xml version="1.0" encoding="utf-8"?>
-<p:sld xmlns:a="http://schemas.openxmlformats.org/drawingml/2006/main" xmlns:r="http://schemas.openxmlformats.org/officeDocument/2006/relationships" xmlns:p="http://schemas.openxmlformats.org/presentationml/2006/main">
-  <p:cSld>
-    <p:spTree>
-      <p:nvGrpSpPr>
-        <p:cNvPr id="1" name=""/>
-        <p:cNvGrpSpPr/>
-        <p:nvPr/>
-      </p:nvGrpSpPr>
-      <p:grpSpPr>
-        <a:xfrm>
-          <a:off x="0" y="0"/>
-          <a:ext cx="0" cy="0"/>
-          <a:chOff x="0" y="0"/>
-          <a:chExt cx="0" cy="0"/>
-        </a:xfrm>
-      </p:grpSpPr>
-      <p:sp>
-        <p:nvSpPr>
-          <p:cNvPr id="2" name="제목 1">
-            <a:extLst>
-              <a:ext uri="{FF2B5EF4-FFF2-40B4-BE49-F238E27FC236}">
-                <a16:creationId xmlns:a16="http://schemas.microsoft.com/office/drawing/2014/main" id="{A8D8F1F4-4871-4B45-B08E-F92ACDB80FE6}"/>
-              </a:ext>
-            </a:extLst>
-          </p:cNvPr>
-          <p:cNvSpPr>
-            <a:spLocks noGrp="1"/>
-          </p:cNvSpPr>
-          <p:nvPr>
-            <p:ph type="title"/>
-          </p:nvPr>
-        </p:nvSpPr>
-        <p:spPr/>
-        <p:txBody>
-          <a:bodyPr>
-            <a:normAutofit/>
-          </a:bodyPr>
-          <a:lstStyle/>
-          <a:p>
-            <a:r>
-              <a:rPr lang="en-US" altLang="ko-KR" sz="4800" b="1" dirty="0" err="1">
-                <a:latin typeface="+mj-ea"/>
-              </a:rPr>
-              <a:t>가중치와</a:t>
-            </a:r>
-            <a:r>
-              <a:rPr lang="en-US" altLang="ko-KR" sz="4800" b="1" dirty="0">
-                <a:latin typeface="+mj-ea"/>
-              </a:rPr>
-              <a:t> </a:t>
-            </a:r>
-            <a:r>
-              <a:rPr lang="en-US" altLang="ko-KR" sz="4800" b="1" dirty="0" err="1">
-                <a:latin typeface="+mj-ea"/>
-              </a:rPr>
-              <a:t>편향</a:t>
-            </a:r>
-          </a:p>
-        </p:txBody>
-      </p:sp>
-      <p:sp>
-        <p:nvSpPr>
-          <p:cNvPr id="3" name="내용 개체 틀 2">
-            <a:extLst>
-              <a:ext uri="{FF2B5EF4-FFF2-40B4-BE49-F238E27FC236}">
-                <a16:creationId xmlns:a16="http://schemas.microsoft.com/office/drawing/2014/main" id="{659642C9-AD46-4D01-B61B-33D812751E95}"/>
-              </a:ext>
-            </a:extLst>
-          </p:cNvPr>
-          <p:cNvSpPr>
-            <a:spLocks noGrp="1"/>
-          </p:cNvSpPr>
-          <p:nvPr>
-            <p:ph idx="1"/>
-          </p:nvPr>
-        </p:nvSpPr>
-        <p:spPr>
-          <a:xfrm>
-            <a:off x="251788" y="1145407"/>
-            <a:ext cx="11641238" cy="3808175"/>
-          </a:xfrm>
-        </p:spPr>
-        <p:txBody>
-          <a:bodyPr vert="horz" lIns="91440" tIns="45720" rIns="91440" bIns="45720" rtlCol="0" anchor="t">
-            <a:noAutofit/>
-          </a:bodyPr>
-          <a:lstStyle/>
-          <a:p>
-            <a:pPr marL="0" indent="0">
-              <a:lnSpc>
-                <a:spcPct val="150000"/>
-              </a:lnSpc>
-              <a:buNone/>
-            </a:pPr>
-            <a:r>
-              <a:rPr lang="ko-KR" altLang="en-US" b="1" dirty="0">
-                <a:latin typeface="+mn-ea"/>
-              </a:rPr>
-              <a:t>✔️ 가중치(</a:t>
-            </a:r>
-            <a:r>
-              <a:rPr lang="ko-KR" altLang="en-US" b="1" dirty="0" err="1">
-                <a:latin typeface="+mn-ea"/>
-              </a:rPr>
-              <a:t>Weight</a:t>
-            </a:r>
-            <a:r>
-              <a:rPr lang="ko-KR" altLang="en-US" b="1" dirty="0">
-                <a:latin typeface="+mn-ea"/>
-              </a:rPr>
-              <a:t>)</a:t>
-            </a:r>
-          </a:p>
-          <a:p>
-            <a:pPr lvl="1">
-              <a:lnSpc>
-                <a:spcPct val="150000"/>
-              </a:lnSpc>
-            </a:pPr>
-            <a:r>
-              <a:rPr lang="ko-KR" altLang="en-US" dirty="0"/>
-              <a:t>입력 변수 </a:t>
-            </a:r>
-            <a:r>
-              <a:rPr lang="en-US" altLang="ko-KR" dirty="0"/>
-              <a:t>x</a:t>
-            </a:r>
-            <a:r>
-              <a:rPr lang="ko-KR" altLang="en-US" dirty="0"/>
-              <a:t>가 결과값 </a:t>
-            </a:r>
-            <a:r>
-              <a:rPr lang="en-US" altLang="ko-KR" dirty="0"/>
-              <a:t>y</a:t>
-            </a:r>
-            <a:r>
-              <a:rPr lang="ko-KR" altLang="en-US" dirty="0"/>
-              <a:t>에 얼마나 영향을 미치는지를 나타냄</a:t>
-            </a:r>
-            <a:endParaRPr lang="en-US" altLang="ko-KR" dirty="0"/>
-          </a:p>
-          <a:p>
-            <a:pPr lvl="1">
-              <a:lnSpc>
-                <a:spcPct val="150000"/>
-              </a:lnSpc>
-            </a:pPr>
-            <a:r>
-              <a:rPr lang="ko-KR" altLang="en-US" dirty="0">
-                <a:latin typeface="+mn-ea"/>
-              </a:rPr>
-              <a:t>그래프상 </a:t>
-            </a:r>
-            <a:r>
-              <a:rPr lang="ko-KR" altLang="en-US" dirty="0"/>
-              <a:t>직선의 </a:t>
-            </a:r>
-            <a:r>
-              <a:rPr lang="ko-KR" altLang="en-US" b="1" dirty="0"/>
-              <a:t>기울기</a:t>
-            </a:r>
-            <a:endParaRPr lang="en-US" altLang="ko-KR" dirty="0">
-              <a:latin typeface="+mn-ea"/>
-            </a:endParaRPr>
-          </a:p>
-          <a:p>
-            <a:pPr marL="0" indent="0">
-              <a:lnSpc>
-                <a:spcPct val="150000"/>
-              </a:lnSpc>
-              <a:buNone/>
-            </a:pPr>
-            <a:r>
-              <a:rPr lang="ko-KR" altLang="en-US" b="1" dirty="0">
-                <a:latin typeface="+mn-ea"/>
-              </a:rPr>
-              <a:t>✔️ 편향(</a:t>
-            </a:r>
-            <a:r>
-              <a:rPr lang="ko-KR" altLang="en-US" b="1" dirty="0" err="1">
-                <a:latin typeface="+mn-ea"/>
-              </a:rPr>
-              <a:t>bias</a:t>
-            </a:r>
-            <a:r>
-              <a:rPr lang="ko-KR" altLang="en-US" b="1" dirty="0">
-                <a:latin typeface="+mn-ea"/>
-              </a:rPr>
-              <a:t>)</a:t>
-            </a:r>
-            <a:endParaRPr lang="en-US" dirty="0"/>
-          </a:p>
-          <a:p>
-            <a:pPr lvl="1">
-              <a:lnSpc>
-                <a:spcPct val="150000"/>
-              </a:lnSpc>
-            </a:pPr>
-            <a:r>
-              <a:rPr lang="ko-KR" altLang="en-US" dirty="0"/>
-              <a:t>모델이 입력 값과 관계없이 일정한 기본 출력 값을 가지도록 조정하는 역할을 함</a:t>
-            </a:r>
-            <a:endParaRPr lang="en-US" altLang="ko-KR" dirty="0"/>
-          </a:p>
-          <a:p>
-            <a:pPr lvl="1">
-              <a:lnSpc>
-                <a:spcPct val="150000"/>
-              </a:lnSpc>
-            </a:pPr>
-            <a:r>
-              <a:rPr lang="ko-KR" altLang="en-US" dirty="0"/>
-              <a:t>직선이 </a:t>
-            </a:r>
-            <a:r>
-              <a:rPr lang="en-US" altLang="ko-KR" dirty="0"/>
-              <a:t>y</a:t>
-            </a:r>
-            <a:r>
-              <a:rPr lang="ko-KR" altLang="en-US" dirty="0"/>
-              <a:t>축과 만나는 지점</a:t>
-            </a:r>
-            <a:r>
-              <a:rPr lang="en-US" altLang="ko-KR" dirty="0"/>
-              <a:t>, </a:t>
-            </a:r>
-            <a:r>
-              <a:rPr lang="ko-KR" altLang="en-US" dirty="0"/>
-              <a:t>즉 </a:t>
-            </a:r>
-            <a:r>
-              <a:rPr lang="en-US" altLang="ko-KR" b="1" dirty="0"/>
-              <a:t>y</a:t>
-            </a:r>
-            <a:r>
-              <a:rPr lang="ko-KR" altLang="en-US" b="1" dirty="0"/>
-              <a:t>절편</a:t>
-            </a:r>
-            <a:endParaRPr lang="en-US" altLang="ko-KR" dirty="0">
-              <a:latin typeface="+mn-ea"/>
-            </a:endParaRPr>
-          </a:p>
-        </p:txBody>
-      </p:sp>
-      <p:sp>
-        <p:nvSpPr>
-          <p:cNvPr id="4" name="날짜 개체 틀 3">
-            <a:extLst>
-              <a:ext uri="{FF2B5EF4-FFF2-40B4-BE49-F238E27FC236}">
-                <a16:creationId xmlns:a16="http://schemas.microsoft.com/office/drawing/2014/main" id="{590F8720-7C11-4CC8-8215-3F57F085A24B}"/>
-              </a:ext>
-            </a:extLst>
-          </p:cNvPr>
-          <p:cNvSpPr>
-            <a:spLocks noGrp="1"/>
-          </p:cNvSpPr>
-          <p:nvPr>
-            <p:ph type="dt" sz="half" idx="10"/>
-          </p:nvPr>
-        </p:nvSpPr>
-        <p:spPr/>
-        <p:txBody>
-          <a:bodyPr/>
-          <a:lstStyle/>
-          <a:p>
-            <a:fld id="{0F78D9C4-20C1-4B15-A116-16DC77AD9A1E}" type="datetime1">
-              <a:rPr lang="ko-KR" altLang="en-US" smtClean="0"/>
-              <a:t>2026-02-10</a:t>
-            </a:fld>
-            <a:endParaRPr lang="ko-KR" altLang="en-US"/>
-          </a:p>
-        </p:txBody>
-      </p:sp>
-      <p:sp>
-        <p:nvSpPr>
-          <p:cNvPr id="5" name="슬라이드 번호 개체 틀 4">
-            <a:extLst>
-              <a:ext uri="{FF2B5EF4-FFF2-40B4-BE49-F238E27FC236}">
-                <a16:creationId xmlns:a16="http://schemas.microsoft.com/office/drawing/2014/main" id="{E86D5960-457B-4CA2-B0B3-F7F0DADA85D8}"/>
-              </a:ext>
-            </a:extLst>
-          </p:cNvPr>
-          <p:cNvSpPr>
-            <a:spLocks noGrp="1"/>
-          </p:cNvSpPr>
-          <p:nvPr>
-            <p:ph type="sldNum" sz="quarter" idx="12"/>
-          </p:nvPr>
-        </p:nvSpPr>
-        <p:spPr/>
-        <p:txBody>
-          <a:bodyPr/>
-          <a:lstStyle/>
-          <a:p>
-            <a:fld id="{083A2CE0-18CD-4102-B738-4ACFF9E68BA4}" type="slidenum">
-              <a:rPr lang="ko-KR" altLang="en-US" smtClean="0"/>
-              <a:t>11</a:t>
-            </a:fld>
-            <a:endParaRPr lang="ko-KR" altLang="en-US"/>
-          </a:p>
-        </p:txBody>
-      </p:sp>
-      <p:sp>
-        <p:nvSpPr>
-          <p:cNvPr id="6" name="직사각형 5"/>
-          <p:cNvSpPr/>
-          <p:nvPr/>
-        </p:nvSpPr>
-        <p:spPr>
-          <a:xfrm>
-            <a:off x="251788" y="5441239"/>
-            <a:ext cx="9635971" cy="523220"/>
-          </a:xfrm>
-          <a:prstGeom prst="rect">
-            <a:avLst/>
-          </a:prstGeom>
-        </p:spPr>
-        <p:txBody>
-          <a:bodyPr wrap="none">
-            <a:spAutoFit/>
-          </a:bodyPr>
-          <a:lstStyle/>
-          <a:p>
-            <a:r>
-              <a:rPr lang="ko-KR" altLang="en-US" sz="2800" dirty="0"/>
-              <a:t>➡️ 가중치와 편향을 조정해서 실제 값과 예측 값 간의 오차를 최소화</a:t>
-            </a:r>
-          </a:p>
-        </p:txBody>
-      </p:sp>
-    </p:spTree>
-    <p:extLst>
-      <p:ext uri="{BB962C8B-B14F-4D97-AF65-F5344CB8AC3E}">
-        <p14:creationId xmlns:p14="http://schemas.microsoft.com/office/powerpoint/2010/main" val="1647509677"/>
-      </p:ext>
-    </p:extLst>
-  </p:cSld>
-  <p:clrMapOvr>
-    <a:masterClrMapping/>
-  </p:clrMapOvr>
-</p:sld>
-</file>
-
 <file path=ppt/slides/slide12.xml><?xml version="1.0" encoding="utf-8"?>
 <p:sld xmlns:a="http://schemas.openxmlformats.org/drawingml/2006/main" xmlns:r="http://schemas.openxmlformats.org/officeDocument/2006/relationships" xmlns:p="http://schemas.openxmlformats.org/presentationml/2006/main">
   <p:cSld>
@@ -4044,24 +5136,190 @@
               </a:rPr>
               <a:t>편향</a:t>
             </a:r>
-            <a:r>
-              <a:rPr lang="en-US" altLang="ko-KR" sz="4800" b="1" dirty="0">
-                <a:latin typeface="+mj-ea"/>
-              </a:rPr>
-              <a:t>(</a:t>
-            </a:r>
-            <a:r>
-              <a:rPr lang="ko-KR" altLang="en-US" sz="4800" b="1" dirty="0">
-                <a:latin typeface="+mj-ea"/>
-              </a:rPr>
-              <a:t>예시</a:t>
-            </a:r>
-            <a:r>
-              <a:rPr lang="en-US" altLang="ko-KR" sz="4800" b="1" dirty="0">
-                <a:latin typeface="+mj-ea"/>
+          </a:p>
+        </p:txBody>
+      </p:sp>
+      <p:sp>
+        <p:nvSpPr>
+          <p:cNvPr id="3" name="내용 개체 틀 2">
+            <a:extLst>
+              <a:ext uri="{FF2B5EF4-FFF2-40B4-BE49-F238E27FC236}">
+                <a16:creationId xmlns:a16="http://schemas.microsoft.com/office/drawing/2014/main" id="{659642C9-AD46-4D01-B61B-33D812751E95}"/>
+              </a:ext>
+            </a:extLst>
+          </p:cNvPr>
+          <p:cNvSpPr>
+            <a:spLocks noGrp="1"/>
+          </p:cNvSpPr>
+          <p:nvPr>
+            <p:ph idx="1"/>
+          </p:nvPr>
+        </p:nvSpPr>
+        <p:spPr>
+          <a:xfrm>
+            <a:off x="251788" y="1145407"/>
+            <a:ext cx="11641238" cy="3808175"/>
+          </a:xfrm>
+        </p:spPr>
+        <p:txBody>
+          <a:bodyPr vert="horz" lIns="91440" tIns="45720" rIns="91440" bIns="45720" rtlCol="0" anchor="t">
+            <a:noAutofit/>
+          </a:bodyPr>
+          <a:lstStyle/>
+          <a:p>
+            <a:pPr marL="0" indent="0">
+              <a:lnSpc>
+                <a:spcPct val="150000"/>
+              </a:lnSpc>
+              <a:buNone/>
+            </a:pPr>
+            <a:r>
+              <a:rPr lang="ko-KR" altLang="en-US" b="1" dirty="0">
+                <a:latin typeface="+mn-ea"/>
+              </a:rPr>
+              <a:t>✔️ 가중치(</a:t>
+            </a:r>
+            <a:r>
+              <a:rPr lang="ko-KR" altLang="en-US" b="1" dirty="0" err="1">
+                <a:latin typeface="+mn-ea"/>
+              </a:rPr>
+              <a:t>Weight</a:t>
+            </a:r>
+            <a:r>
+              <a:rPr lang="ko-KR" altLang="en-US" b="1" dirty="0">
+                <a:latin typeface="+mn-ea"/>
               </a:rPr>
               <a:t>)</a:t>
             </a:r>
+          </a:p>
+          <a:p>
+            <a:pPr lvl="1">
+              <a:lnSpc>
+                <a:spcPct val="150000"/>
+              </a:lnSpc>
+            </a:pPr>
+            <a:r>
+              <a:rPr lang="ko-KR" altLang="en-US" dirty="0"/>
+              <a:t>입력 변수 </a:t>
+            </a:r>
+            <a:r>
+              <a:rPr lang="en-US" altLang="ko-KR" dirty="0"/>
+              <a:t>x</a:t>
+            </a:r>
+            <a:r>
+              <a:rPr lang="ko-KR" altLang="en-US" dirty="0"/>
+              <a:t>가 결과값 </a:t>
+            </a:r>
+            <a:r>
+              <a:rPr lang="en-US" altLang="ko-KR" dirty="0"/>
+              <a:t>y</a:t>
+            </a:r>
+            <a:r>
+              <a:rPr lang="ko-KR" altLang="en-US" dirty="0"/>
+              <a:t>에 얼마나 영향을 미치는지를 나타냄</a:t>
+            </a:r>
+            <a:endParaRPr lang="en-US" altLang="ko-KR" dirty="0"/>
+          </a:p>
+          <a:p>
+            <a:pPr lvl="1">
+              <a:lnSpc>
+                <a:spcPct val="150000"/>
+              </a:lnSpc>
+            </a:pPr>
+            <a:r>
+              <a:rPr lang="ko-KR" altLang="en-US" dirty="0">
+                <a:latin typeface="+mn-ea"/>
+              </a:rPr>
+              <a:t>그래프상 </a:t>
+            </a:r>
+            <a:r>
+              <a:rPr lang="ko-KR" altLang="en-US" dirty="0"/>
+              <a:t>직선의 </a:t>
+            </a:r>
+            <a:r>
+              <a:rPr lang="ko-KR" altLang="en-US" b="1" dirty="0"/>
+              <a:t>기울기</a:t>
+            </a:r>
+            <a:endParaRPr lang="en-US" altLang="ko-KR" dirty="0">
+              <a:latin typeface="+mn-ea"/>
+            </a:endParaRPr>
+          </a:p>
+          <a:p>
+            <a:pPr marL="0" indent="0">
+              <a:lnSpc>
+                <a:spcPct val="150000"/>
+              </a:lnSpc>
+              <a:buNone/>
+            </a:pPr>
+            <a:r>
+              <a:rPr lang="ko-KR" altLang="en-US" b="1" dirty="0">
+                <a:latin typeface="+mn-ea"/>
+              </a:rPr>
+              <a:t>✔️ 편향(</a:t>
+            </a:r>
+            <a:r>
+              <a:rPr lang="ko-KR" altLang="en-US" b="1" dirty="0" err="1">
+                <a:latin typeface="+mn-ea"/>
+              </a:rPr>
+              <a:t>bias</a:t>
+            </a:r>
+            <a:r>
+              <a:rPr lang="ko-KR" altLang="en-US" b="1" dirty="0">
+                <a:latin typeface="+mn-ea"/>
+              </a:rPr>
+              <a:t>)</a:t>
+            </a:r>
+            <a:endParaRPr lang="en-US" dirty="0"/>
+          </a:p>
+          <a:p>
+            <a:pPr lvl="1">
+              <a:lnSpc>
+                <a:spcPct val="150000"/>
+              </a:lnSpc>
+            </a:pPr>
+            <a:r>
+              <a:rPr lang="ko-KR" altLang="en-US" dirty="0"/>
+              <a:t>모델이 입력 값과 관계없이 일정한 기본 출력 값을 가지도록 조정하는 역할을 함</a:t>
+            </a:r>
+            <a:endParaRPr lang="en-US" altLang="ko-KR" dirty="0"/>
+          </a:p>
+          <a:p>
+            <a:pPr lvl="1">
+              <a:lnSpc>
+                <a:spcPct val="150000"/>
+              </a:lnSpc>
+            </a:pPr>
+            <a:r>
+              <a:rPr lang="ko-KR" altLang="en-US" dirty="0"/>
+              <a:t>직선이 </a:t>
+            </a:r>
+            <a:r>
+              <a:rPr lang="en-US" altLang="ko-KR" dirty="0"/>
+              <a:t>y</a:t>
+            </a:r>
+            <a:r>
+              <a:rPr lang="ko-KR" altLang="en-US" dirty="0"/>
+              <a:t>축과 만나는 지점</a:t>
+            </a:r>
+            <a:r>
+              <a:rPr lang="en-US" altLang="ko-KR" dirty="0"/>
+              <a:t>, </a:t>
+            </a:r>
+            <a:r>
+              <a:rPr lang="ko-KR" altLang="en-US" dirty="0"/>
+              <a:t>즉 </a:t>
+            </a:r>
+            <a:r>
+              <a:rPr lang="en-US" altLang="ko-KR" b="1" dirty="0"/>
+              <a:t>y</a:t>
+            </a:r>
+            <a:r>
+              <a:rPr lang="ko-KR" altLang="en-US" b="1" dirty="0"/>
+              <a:t>절편</a:t>
+            </a:r>
+            <a:endParaRPr lang="en-US" altLang="ko-KR" dirty="0">
+              <a:latin typeface="+mn-ea"/>
+            </a:endParaRPr>
           </a:p>
         </p:txBody>
       </p:sp>
@@ -4088,7 +5346,7 @@
           <a:p>
             <a:fld id="{0F78D9C4-20C1-4B15-A116-16DC77AD9A1E}" type="datetime1">
               <a:rPr lang="ko-KR" altLang="en-US" smtClean="0"/>
-              <a:t>2026-02-10</a:t>
+              <a:t>2026-02-12</a:t>
             </a:fld>
             <a:endParaRPr lang="ko-KR" altLang="en-US"/>
           </a:p>
@@ -4118,6 +5376,184 @@
             <a:fld id="{083A2CE0-18CD-4102-B738-4ACFF9E68BA4}" type="slidenum">
               <a:rPr lang="ko-KR" altLang="en-US" smtClean="0"/>
               <a:t>12</a:t>
+            </a:fld>
+            <a:endParaRPr lang="ko-KR" altLang="en-US"/>
+          </a:p>
+        </p:txBody>
+      </p:sp>
+      <p:sp>
+        <p:nvSpPr>
+          <p:cNvPr id="6" name="직사각형 5"/>
+          <p:cNvSpPr/>
+          <p:nvPr/>
+        </p:nvSpPr>
+        <p:spPr>
+          <a:xfrm>
+            <a:off x="251788" y="5441239"/>
+            <a:ext cx="9635971" cy="523220"/>
+          </a:xfrm>
+          <a:prstGeom prst="rect">
+            <a:avLst/>
+          </a:prstGeom>
+        </p:spPr>
+        <p:txBody>
+          <a:bodyPr wrap="none">
+            <a:spAutoFit/>
+          </a:bodyPr>
+          <a:lstStyle/>
+          <a:p>
+            <a:r>
+              <a:rPr lang="ko-KR" altLang="en-US" sz="2800" dirty="0"/>
+              <a:t>➡️ 가중치와 편향을 조정해서 실제 값과 예측 값 간의 오차를 최소화</a:t>
+            </a:r>
+          </a:p>
+        </p:txBody>
+      </p:sp>
+    </p:spTree>
+    <p:extLst>
+      <p:ext uri="{BB962C8B-B14F-4D97-AF65-F5344CB8AC3E}">
+        <p14:creationId xmlns:p14="http://schemas.microsoft.com/office/powerpoint/2010/main" val="1647509677"/>
+      </p:ext>
+    </p:extLst>
+  </p:cSld>
+  <p:clrMapOvr>
+    <a:masterClrMapping/>
+  </p:clrMapOvr>
+</p:sld>
+</file>
+
+<file path=ppt/slides/slide13.xml><?xml version="1.0" encoding="utf-8"?>
+<p:sld xmlns:a="http://schemas.openxmlformats.org/drawingml/2006/main" xmlns:r="http://schemas.openxmlformats.org/officeDocument/2006/relationships" xmlns:p="http://schemas.openxmlformats.org/presentationml/2006/main">
+  <p:cSld>
+    <p:spTree>
+      <p:nvGrpSpPr>
+        <p:cNvPr id="1" name=""/>
+        <p:cNvGrpSpPr/>
+        <p:nvPr/>
+      </p:nvGrpSpPr>
+      <p:grpSpPr>
+        <a:xfrm>
+          <a:off x="0" y="0"/>
+          <a:ext cx="0" cy="0"/>
+          <a:chOff x="0" y="0"/>
+          <a:chExt cx="0" cy="0"/>
+        </a:xfrm>
+      </p:grpSpPr>
+      <p:sp>
+        <p:nvSpPr>
+          <p:cNvPr id="2" name="제목 1">
+            <a:extLst>
+              <a:ext uri="{FF2B5EF4-FFF2-40B4-BE49-F238E27FC236}">
+                <a16:creationId xmlns:a16="http://schemas.microsoft.com/office/drawing/2014/main" id="{A8D8F1F4-4871-4B45-B08E-F92ACDB80FE6}"/>
+              </a:ext>
+            </a:extLst>
+          </p:cNvPr>
+          <p:cNvSpPr>
+            <a:spLocks noGrp="1"/>
+          </p:cNvSpPr>
+          <p:nvPr>
+            <p:ph type="title"/>
+          </p:nvPr>
+        </p:nvSpPr>
+        <p:spPr/>
+        <p:txBody>
+          <a:bodyPr>
+            <a:normAutofit/>
+          </a:bodyPr>
+          <a:lstStyle/>
+          <a:p>
+            <a:r>
+              <a:rPr lang="en-US" altLang="ko-KR" sz="4800" b="1" dirty="0" err="1">
+                <a:latin typeface="+mj-ea"/>
+              </a:rPr>
+              <a:t>가중치와</a:t>
+            </a:r>
+            <a:r>
+              <a:rPr lang="en-US" altLang="ko-KR" sz="4800" b="1" dirty="0">
+                <a:latin typeface="+mj-ea"/>
+              </a:rPr>
+              <a:t> </a:t>
+            </a:r>
+            <a:r>
+              <a:rPr lang="en-US" altLang="ko-KR" sz="4800" b="1" dirty="0" err="1">
+                <a:latin typeface="+mj-ea"/>
+              </a:rPr>
+              <a:t>편향</a:t>
+            </a:r>
+            <a:r>
+              <a:rPr lang="en-US" altLang="ko-KR" sz="4800" b="1" dirty="0">
+                <a:latin typeface="+mj-ea"/>
+              </a:rPr>
+              <a:t>(</a:t>
+            </a:r>
+            <a:r>
+              <a:rPr lang="ko-KR" altLang="en-US" sz="4800" b="1" dirty="0">
+                <a:latin typeface="+mj-ea"/>
+              </a:rPr>
+              <a:t>예시</a:t>
+            </a:r>
+            <a:r>
+              <a:rPr lang="en-US" altLang="ko-KR" sz="4800" b="1" dirty="0">
+                <a:latin typeface="+mj-ea"/>
+              </a:rPr>
+              <a:t>)</a:t>
+            </a:r>
+          </a:p>
+        </p:txBody>
+      </p:sp>
+      <p:sp>
+        <p:nvSpPr>
+          <p:cNvPr id="4" name="날짜 개체 틀 3">
+            <a:extLst>
+              <a:ext uri="{FF2B5EF4-FFF2-40B4-BE49-F238E27FC236}">
+                <a16:creationId xmlns:a16="http://schemas.microsoft.com/office/drawing/2014/main" id="{590F8720-7C11-4CC8-8215-3F57F085A24B}"/>
+              </a:ext>
+            </a:extLst>
+          </p:cNvPr>
+          <p:cNvSpPr>
+            <a:spLocks noGrp="1"/>
+          </p:cNvSpPr>
+          <p:nvPr>
+            <p:ph type="dt" sz="half" idx="10"/>
+          </p:nvPr>
+        </p:nvSpPr>
+        <p:spPr/>
+        <p:txBody>
+          <a:bodyPr/>
+          <a:lstStyle/>
+          <a:p>
+            <a:fld id="{0F78D9C4-20C1-4B15-A116-16DC77AD9A1E}" type="datetime1">
+              <a:rPr lang="ko-KR" altLang="en-US" smtClean="0"/>
+              <a:t>2026-02-12</a:t>
+            </a:fld>
+            <a:endParaRPr lang="ko-KR" altLang="en-US"/>
+          </a:p>
+        </p:txBody>
+      </p:sp>
+      <p:sp>
+        <p:nvSpPr>
+          <p:cNvPr id="5" name="슬라이드 번호 개체 틀 4">
+            <a:extLst>
+              <a:ext uri="{FF2B5EF4-FFF2-40B4-BE49-F238E27FC236}">
+                <a16:creationId xmlns:a16="http://schemas.microsoft.com/office/drawing/2014/main" id="{E86D5960-457B-4CA2-B0B3-F7F0DADA85D8}"/>
+              </a:ext>
+            </a:extLst>
+          </p:cNvPr>
+          <p:cNvSpPr>
+            <a:spLocks noGrp="1"/>
+          </p:cNvSpPr>
+          <p:nvPr>
+            <p:ph type="sldNum" sz="quarter" idx="12"/>
+          </p:nvPr>
+        </p:nvSpPr>
+        <p:spPr/>
+        <p:txBody>
+          <a:bodyPr/>
+          <a:lstStyle/>
+          <a:p>
+            <a:fld id="{083A2CE0-18CD-4102-B738-4ACFF9E68BA4}" type="slidenum">
+              <a:rPr lang="ko-KR" altLang="en-US" smtClean="0"/>
+              <a:t>13</a:t>
             </a:fld>
             <a:endParaRPr lang="ko-KR" altLang="en-US"/>
           </a:p>
@@ -4994,7 +6430,7 @@
 </p:sld>
 </file>
 
-<file path=ppt/slides/slide13.xml><?xml version="1.0" encoding="utf-8"?>
+<file path=ppt/slides/slide14.xml><?xml version="1.0" encoding="utf-8"?>
 <p:sld xmlns:a="http://schemas.openxmlformats.org/drawingml/2006/main" xmlns:r="http://schemas.openxmlformats.org/officeDocument/2006/relationships" xmlns:p="http://schemas.openxmlformats.org/presentationml/2006/main">
   <p:cSld>
     <p:spTree>
@@ -5034,7 +6470,7 @@
           <a:p>
             <a:fld id="{0F78D9C4-20C1-4B15-A116-16DC77AD9A1E}" type="datetime1">
               <a:rPr lang="ko-KR" altLang="en-US" smtClean="0"/>
-              <a:t>2026-02-10</a:t>
+              <a:t>2026-02-12</a:t>
             </a:fld>
             <a:endParaRPr lang="ko-KR" altLang="en-US"/>
           </a:p>
@@ -5063,7 +6499,7 @@
           <a:p>
             <a:fld id="{083A2CE0-18CD-4102-B738-4ACFF9E68BA4}" type="slidenum">
               <a:rPr lang="ko-KR" altLang="en-US" smtClean="0"/>
-              <a:t>13</a:t>
+              <a:t>14</a:t>
             </a:fld>
             <a:endParaRPr lang="ko-KR" altLang="en-US"/>
           </a:p>
@@ -5172,7 +6608,7 @@
 </p:sld>
 </file>
 
-<file path=ppt/slides/slide14.xml><?xml version="1.0" encoding="utf-8"?>
+<file path=ppt/slides/slide15.xml><?xml version="1.0" encoding="utf-8"?>
 <p:sld xmlns:a="http://schemas.openxmlformats.org/drawingml/2006/main" xmlns:r="http://schemas.openxmlformats.org/officeDocument/2006/relationships" xmlns:p="http://schemas.openxmlformats.org/presentationml/2006/main">
   <p:cSld>
     <p:spTree>
@@ -5212,7 +6648,7 @@
           <a:p>
             <a:fld id="{0F78D9C4-20C1-4B15-A116-16DC77AD9A1E}" type="datetime1">
               <a:rPr lang="ko-KR" altLang="en-US" smtClean="0"/>
-              <a:t>2026-02-10</a:t>
+              <a:t>2026-02-12</a:t>
             </a:fld>
             <a:endParaRPr lang="ko-KR" altLang="en-US"/>
           </a:p>
@@ -5241,7 +6677,7 @@
           <a:p>
             <a:fld id="{083A2CE0-18CD-4102-B738-4ACFF9E68BA4}" type="slidenum">
               <a:rPr lang="ko-KR" altLang="en-US" smtClean="0"/>
-              <a:t>14</a:t>
+              <a:t>15</a:t>
             </a:fld>
             <a:endParaRPr lang="ko-KR" altLang="en-US"/>
           </a:p>
@@ -6110,7 +7546,7 @@
 </p:sld>
 </file>
 
-<file path=ppt/slides/slide15.xml><?xml version="1.0" encoding="utf-8"?>
+<file path=ppt/slides/slide16.xml><?xml version="1.0" encoding="utf-8"?>
 <p:sld xmlns:a="http://schemas.openxmlformats.org/drawingml/2006/main" xmlns:r="http://schemas.openxmlformats.org/officeDocument/2006/relationships" xmlns:p="http://schemas.openxmlformats.org/presentationml/2006/main">
   <p:cSld>
     <p:spTree>
@@ -6214,18 +7650,34 @@
               <a:buChar char="§"/>
             </a:pPr>
             <a:r>
-              <a:rPr lang="ko-KR" altLang="en-US" dirty="0"/>
+              <a:rPr lang="ko-KR" altLang="en-US" dirty="0">
+                <a:latin typeface="Pretendard Medium" panose="02000603000000020004" pitchFamily="50" charset="-127"/>
+                <a:ea typeface="Pretendard Medium" panose="02000603000000020004" pitchFamily="50" charset="-127"/>
+                <a:cs typeface="Pretendard Medium" panose="02000603000000020004" pitchFamily="50" charset="-127"/>
+              </a:rPr>
               <a:t>오차가 </a:t>
             </a:r>
             <a:r>
-              <a:rPr lang="en-US" altLang="ko-KR" dirty="0"/>
+              <a:rPr lang="en-US" altLang="ko-KR" dirty="0">
+                <a:latin typeface="Pretendard Medium" panose="02000603000000020004" pitchFamily="50" charset="-127"/>
+                <a:ea typeface="Pretendard Medium" panose="02000603000000020004" pitchFamily="50" charset="-127"/>
+                <a:cs typeface="Pretendard Medium" panose="02000603000000020004" pitchFamily="50" charset="-127"/>
+              </a:rPr>
               <a:t>0</a:t>
             </a:r>
             <a:r>
-              <a:rPr lang="ko-KR" altLang="en-US" dirty="0"/>
+              <a:rPr lang="ko-KR" altLang="en-US" dirty="0">
+                <a:latin typeface="Pretendard Medium" panose="02000603000000020004" pitchFamily="50" charset="-127"/>
+                <a:ea typeface="Pretendard Medium" panose="02000603000000020004" pitchFamily="50" charset="-127"/>
+                <a:cs typeface="Pretendard Medium" panose="02000603000000020004" pitchFamily="50" charset="-127"/>
+              </a:rPr>
               <a:t>에 가까울 수록 정확도가 높다고 볼 수 있음</a:t>
             </a:r>
-            <a:endParaRPr lang="en-US" altLang="ko-KR" dirty="0"/>
+            <a:endParaRPr lang="en-US" altLang="ko-KR" dirty="0">
+              <a:latin typeface="Pretendard Medium" panose="02000603000000020004" pitchFamily="50" charset="-127"/>
+              <a:ea typeface="Pretendard Medium" panose="02000603000000020004" pitchFamily="50" charset="-127"/>
+              <a:cs typeface="Pretendard Medium" panose="02000603000000020004" pitchFamily="50" charset="-127"/>
+            </a:endParaRPr>
           </a:p>
           <a:p>
             <a:pPr lvl="1">
@@ -6285,7 +7737,7 @@
           <a:p>
             <a:fld id="{0F78D9C4-20C1-4B15-A116-16DC77AD9A1E}" type="datetime1">
               <a:rPr lang="ko-KR" altLang="en-US" smtClean="0"/>
-              <a:t>2026-02-10</a:t>
+              <a:t>2026-02-12</a:t>
             </a:fld>
             <a:endParaRPr lang="ko-KR" altLang="en-US"/>
           </a:p>
@@ -6314,7 +7766,7 @@
           <a:p>
             <a:fld id="{083A2CE0-18CD-4102-B738-4ACFF9E68BA4}" type="slidenum">
               <a:rPr lang="ko-KR" altLang="en-US" smtClean="0"/>
-              <a:t>15</a:t>
+              <a:t>16</a:t>
             </a:fld>
             <a:endParaRPr lang="ko-KR" altLang="en-US" dirty="0"/>
           </a:p>
@@ -6436,7 +7888,7 @@
 </p:sld>
 </file>
 
-<file path=ppt/slides/slide16.xml><?xml version="1.0" encoding="utf-8"?>
+<file path=ppt/slides/slide17.xml><?xml version="1.0" encoding="utf-8"?>
 <p:sld xmlns:a="http://schemas.openxmlformats.org/drawingml/2006/main" xmlns:r="http://schemas.openxmlformats.org/officeDocument/2006/relationships" xmlns:p="http://schemas.openxmlformats.org/presentationml/2006/main">
   <p:cSld>
     <p:spTree>
@@ -6657,7 +8109,7 @@
           <a:p>
             <a:fld id="{0F78D9C4-20C1-4B15-A116-16DC77AD9A1E}" type="datetime1">
               <a:rPr lang="ko-KR" altLang="en-US" smtClean="0"/>
-              <a:t>2026-02-10</a:t>
+              <a:t>2026-02-12</a:t>
             </a:fld>
             <a:endParaRPr lang="ko-KR" altLang="en-US"/>
           </a:p>
@@ -6686,7 +8138,7 @@
           <a:p>
             <a:fld id="{083A2CE0-18CD-4102-B738-4ACFF9E68BA4}" type="slidenum">
               <a:rPr lang="ko-KR" altLang="en-US" smtClean="0"/>
-              <a:t>16</a:t>
+              <a:t>17</a:t>
             </a:fld>
             <a:endParaRPr lang="ko-KR" altLang="en-US"/>
           </a:p>
@@ -6789,7 +8241,7 @@
 </p:sld>
 </file>
 
-<file path=ppt/slides/slide17.xml><?xml version="1.0" encoding="utf-8"?>
+<file path=ppt/slides/slide18.xml><?xml version="1.0" encoding="utf-8"?>
 <p:sld xmlns:a="http://schemas.openxmlformats.org/drawingml/2006/main" xmlns:r="http://schemas.openxmlformats.org/officeDocument/2006/relationships" xmlns:p="http://schemas.openxmlformats.org/presentationml/2006/main">
   <p:cSld>
     <p:spTree>
@@ -6870,7 +8322,7 @@
           <a:p>
             <a:fld id="{0F78D9C4-20C1-4B15-A116-16DC77AD9A1E}" type="datetime1">
               <a:rPr lang="ko-KR" altLang="en-US" smtClean="0"/>
-              <a:t>2026-02-10</a:t>
+              <a:t>2026-02-12</a:t>
             </a:fld>
             <a:endParaRPr lang="ko-KR" altLang="en-US"/>
           </a:p>
@@ -6899,7 +8351,7 @@
           <a:p>
             <a:fld id="{083A2CE0-18CD-4102-B738-4ACFF9E68BA4}" type="slidenum">
               <a:rPr lang="ko-KR" altLang="en-US" smtClean="0"/>
-              <a:t>17</a:t>
+              <a:t>18</a:t>
             </a:fld>
             <a:endParaRPr lang="ko-KR" altLang="en-US"/>
           </a:p>
@@ -7307,7 +8759,7 @@
 </p:sld>
 </file>
 
-<file path=ppt/slides/slide18.xml><?xml version="1.0" encoding="utf-8"?>
+<file path=ppt/slides/slide19.xml><?xml version="1.0" encoding="utf-8"?>
 <p:sld xmlns:a="http://schemas.openxmlformats.org/drawingml/2006/main" xmlns:r="http://schemas.openxmlformats.org/officeDocument/2006/relationships" xmlns:p="http://schemas.openxmlformats.org/presentationml/2006/main">
   <p:cSld>
     <p:spTree>
@@ -7390,7 +8842,7 @@
           <a:p>
             <a:fld id="{0F78D9C4-20C1-4B15-A116-16DC77AD9A1E}" type="datetime1">
               <a:rPr lang="ko-KR" altLang="en-US" smtClean="0"/>
-              <a:t>2026-02-10</a:t>
+              <a:t>2026-02-12</a:t>
             </a:fld>
             <a:endParaRPr lang="ko-KR" altLang="en-US"/>
           </a:p>
@@ -7419,7 +8871,7 @@
           <a:p>
             <a:fld id="{083A2CE0-18CD-4102-B738-4ACFF9E68BA4}" type="slidenum">
               <a:rPr lang="ko-KR" altLang="en-US" smtClean="0"/>
-              <a:t>18</a:t>
+              <a:t>19</a:t>
             </a:fld>
             <a:endParaRPr lang="ko-KR" altLang="en-US"/>
           </a:p>
@@ -9229,313 +10681,6 @@
 </p:sld>
 </file>
 
-<file path=ppt/slides/slide19.xml><?xml version="1.0" encoding="utf-8"?>
-<p:sld xmlns:a="http://schemas.openxmlformats.org/drawingml/2006/main" xmlns:r="http://schemas.openxmlformats.org/officeDocument/2006/relationships" xmlns:p="http://schemas.openxmlformats.org/presentationml/2006/main">
-  <p:cSld>
-    <p:spTree>
-      <p:nvGrpSpPr>
-        <p:cNvPr id="1" name=""/>
-        <p:cNvGrpSpPr/>
-        <p:nvPr/>
-      </p:nvGrpSpPr>
-      <p:grpSpPr>
-        <a:xfrm>
-          <a:off x="0" y="0"/>
-          <a:ext cx="0" cy="0"/>
-          <a:chOff x="0" y="0"/>
-          <a:chExt cx="0" cy="0"/>
-        </a:xfrm>
-      </p:grpSpPr>
-      <p:sp>
-        <p:nvSpPr>
-          <p:cNvPr id="2" name="제목 1">
-            <a:extLst>
-              <a:ext uri="{FF2B5EF4-FFF2-40B4-BE49-F238E27FC236}">
-                <a16:creationId xmlns:a16="http://schemas.microsoft.com/office/drawing/2014/main" id="{A8D8F1F4-4871-4B45-B08E-F92ACDB80FE6}"/>
-              </a:ext>
-            </a:extLst>
-          </p:cNvPr>
-          <p:cNvSpPr>
-            <a:spLocks noGrp="1"/>
-          </p:cNvSpPr>
-          <p:nvPr>
-            <p:ph type="title"/>
-          </p:nvPr>
-        </p:nvSpPr>
-        <p:spPr/>
-        <p:txBody>
-          <a:bodyPr>
-            <a:normAutofit/>
-          </a:bodyPr>
-          <a:lstStyle/>
-          <a:p>
-            <a:r>
-              <a:rPr lang="ko-KR" altLang="en-US" sz="4400" b="1" dirty="0">
-                <a:latin typeface="+mj-ea"/>
-              </a:rPr>
-              <a:t>손실 함수</a:t>
-            </a:r>
-            <a:r>
-              <a:rPr lang="en-US" altLang="ko-KR" sz="4400" b="1" dirty="0">
-                <a:latin typeface="+mj-ea"/>
-              </a:rPr>
-              <a:t>(Loss </a:t>
-            </a:r>
-            <a:r>
-              <a:rPr lang="en-US" altLang="ko-KR" sz="4400" b="1" dirty="0" err="1">
-                <a:latin typeface="+mj-ea"/>
-              </a:rPr>
-              <a:t>Fucntion</a:t>
-            </a:r>
-            <a:r>
-              <a:rPr lang="en-US" altLang="ko-KR" sz="4400" b="1" dirty="0">
-                <a:latin typeface="+mj-ea"/>
-              </a:rPr>
-              <a:t>)</a:t>
-            </a:r>
-            <a:endParaRPr lang="ko-KR" altLang="en-US" sz="4400" b="1" dirty="0">
-              <a:latin typeface="+mj-ea"/>
-            </a:endParaRPr>
-          </a:p>
-        </p:txBody>
-      </p:sp>
-      <p:sp>
-        <p:nvSpPr>
-          <p:cNvPr id="3" name="내용 개체 틀 2">
-            <a:extLst>
-              <a:ext uri="{FF2B5EF4-FFF2-40B4-BE49-F238E27FC236}">
-                <a16:creationId xmlns:a16="http://schemas.microsoft.com/office/drawing/2014/main" id="{659642C9-AD46-4D01-B61B-33D812751E95}"/>
-              </a:ext>
-            </a:extLst>
-          </p:cNvPr>
-          <p:cNvSpPr>
-            <a:spLocks noGrp="1"/>
-          </p:cNvSpPr>
-          <p:nvPr>
-            <p:ph idx="1"/>
-          </p:nvPr>
-        </p:nvSpPr>
-        <p:spPr>
-          <a:xfrm>
-            <a:off x="238991" y="1145407"/>
-            <a:ext cx="11384653" cy="4351338"/>
-          </a:xfrm>
-        </p:spPr>
-        <p:txBody>
-          <a:bodyPr>
-            <a:noAutofit/>
-          </a:bodyPr>
-          <a:lstStyle/>
-          <a:p>
-            <a:pPr marL="0" indent="0">
-              <a:lnSpc>
-                <a:spcPct val="150000"/>
-              </a:lnSpc>
-              <a:buNone/>
-            </a:pPr>
-            <a:r>
-              <a:rPr lang="ko-KR" altLang="en-US" dirty="0"/>
-              <a:t>💡 </a:t>
-            </a:r>
-            <a:r>
-              <a:rPr lang="ko-KR" altLang="en-US" dirty="0" err="1"/>
-              <a:t>머신러닝에서</a:t>
-            </a:r>
-            <a:r>
-              <a:rPr lang="ko-KR" altLang="en-US" dirty="0"/>
-              <a:t> 모델의 성능을 측정하고 학습시키는데 사용되는 함수</a:t>
-            </a:r>
-            <a:endParaRPr lang="en-US" altLang="ko-KR" dirty="0"/>
-          </a:p>
-          <a:p>
-            <a:pPr lvl="1">
-              <a:lnSpc>
-                <a:spcPct val="150000"/>
-              </a:lnSpc>
-              <a:buFont typeface="Wingdings" pitchFamily="2" charset="2"/>
-              <a:buChar char="§"/>
-            </a:pPr>
-            <a:r>
-              <a:rPr lang="ko-KR" altLang="en-US" dirty="0" err="1"/>
-              <a:t>예측값과</a:t>
-            </a:r>
-            <a:r>
-              <a:rPr lang="ko-KR" altLang="en-US" dirty="0"/>
-              <a:t> </a:t>
-            </a:r>
-            <a:r>
-              <a:rPr lang="ko-KR" altLang="en-US" dirty="0" err="1"/>
-              <a:t>실제값의</a:t>
-            </a:r>
-            <a:r>
-              <a:rPr lang="ko-KR" altLang="en-US" dirty="0"/>
-              <a:t> 차이를 수치적으로 나타낸 것</a:t>
-            </a:r>
-            <a:endParaRPr lang="en-US" altLang="ko-KR" dirty="0"/>
-          </a:p>
-          <a:p>
-            <a:pPr lvl="1">
-              <a:lnSpc>
-                <a:spcPct val="150000"/>
-              </a:lnSpc>
-              <a:buFont typeface="Wingdings" pitchFamily="2" charset="2"/>
-              <a:buChar char="§"/>
-            </a:pPr>
-            <a:r>
-              <a:rPr lang="ko-KR" altLang="en-US" dirty="0"/>
-              <a:t>모델의 훈련 → 손실함수의 값을 최소화 하는데 목적이 있음</a:t>
-            </a:r>
-            <a:endParaRPr lang="en-US" altLang="ko-KR" dirty="0"/>
-          </a:p>
-          <a:p>
-            <a:pPr lvl="1">
-              <a:lnSpc>
-                <a:spcPct val="150000"/>
-              </a:lnSpc>
-              <a:buFont typeface="Wingdings" pitchFamily="2" charset="2"/>
-              <a:buChar char="§"/>
-            </a:pPr>
-            <a:r>
-              <a:rPr lang="ko-KR" altLang="en-US" dirty="0">
-                <a:latin typeface="+mn-ea"/>
-              </a:rPr>
-              <a:t>손실 함수 </a:t>
-            </a:r>
-            <a:r>
-              <a:rPr lang="en-US" altLang="ko-KR" dirty="0" err="1"/>
-              <a:t>vs</a:t>
-            </a:r>
-            <a:r>
-              <a:rPr lang="en-US" altLang="ko-KR" dirty="0">
-                <a:latin typeface="+mn-ea"/>
-              </a:rPr>
-              <a:t> </a:t>
-            </a:r>
-            <a:r>
-              <a:rPr lang="ko-KR" altLang="en-US" dirty="0">
-                <a:latin typeface="+mn-ea"/>
-              </a:rPr>
-              <a:t>평가 지표</a:t>
-            </a:r>
-            <a:endParaRPr lang="en-US" altLang="ko-KR" dirty="0">
-              <a:latin typeface="+mn-ea"/>
-            </a:endParaRPr>
-          </a:p>
-          <a:p>
-            <a:pPr lvl="2">
-              <a:lnSpc>
-                <a:spcPct val="150000"/>
-              </a:lnSpc>
-            </a:pPr>
-            <a:r>
-              <a:rPr lang="ko-KR" altLang="en-US" b="1" dirty="0"/>
-              <a:t>손실 함수</a:t>
-            </a:r>
-            <a:r>
-              <a:rPr lang="en-US" altLang="ko-KR" dirty="0"/>
-              <a:t>: </a:t>
-            </a:r>
-            <a:r>
-              <a:rPr lang="ko-KR" altLang="en-US" dirty="0"/>
-              <a:t>학습 과정에서 모델을 최적화하기 위해 사용</a:t>
-            </a:r>
-            <a:endParaRPr lang="en-US" altLang="ko-KR" dirty="0"/>
-          </a:p>
-          <a:p>
-            <a:pPr lvl="2">
-              <a:lnSpc>
-                <a:spcPct val="150000"/>
-              </a:lnSpc>
-            </a:pPr>
-            <a:r>
-              <a:rPr lang="ko-KR" altLang="en-US" b="1" dirty="0"/>
-              <a:t>평가 지표</a:t>
-            </a:r>
-            <a:r>
-              <a:rPr lang="en-US" altLang="ko-KR" dirty="0"/>
-              <a:t>: </a:t>
-            </a:r>
-            <a:r>
-              <a:rPr lang="ko-KR" altLang="en-US" dirty="0"/>
-              <a:t>학습된 모델의 성능을 평가하기 위해 사용</a:t>
-            </a:r>
-            <a:endParaRPr lang="en-US" altLang="ko-KR" dirty="0">
-              <a:latin typeface="+mn-ea"/>
-            </a:endParaRPr>
-          </a:p>
-        </p:txBody>
-      </p:sp>
-      <p:sp>
-        <p:nvSpPr>
-          <p:cNvPr id="4" name="날짜 개체 틀 3">
-            <a:extLst>
-              <a:ext uri="{FF2B5EF4-FFF2-40B4-BE49-F238E27FC236}">
-                <a16:creationId xmlns:a16="http://schemas.microsoft.com/office/drawing/2014/main" id="{590F8720-7C11-4CC8-8215-3F57F085A24B}"/>
-              </a:ext>
-            </a:extLst>
-          </p:cNvPr>
-          <p:cNvSpPr>
-            <a:spLocks noGrp="1"/>
-          </p:cNvSpPr>
-          <p:nvPr>
-            <p:ph type="dt" sz="half" idx="10"/>
-          </p:nvPr>
-        </p:nvSpPr>
-        <p:spPr/>
-        <p:txBody>
-          <a:bodyPr/>
-          <a:lstStyle/>
-          <a:p>
-            <a:fld id="{0F78D9C4-20C1-4B15-A116-16DC77AD9A1E}" type="datetime1">
-              <a:rPr lang="ko-KR" altLang="en-US" smtClean="0"/>
-              <a:t>2026-02-10</a:t>
-            </a:fld>
-            <a:endParaRPr lang="ko-KR" altLang="en-US"/>
-          </a:p>
-        </p:txBody>
-      </p:sp>
-      <p:sp>
-        <p:nvSpPr>
-          <p:cNvPr id="5" name="슬라이드 번호 개체 틀 4">
-            <a:extLst>
-              <a:ext uri="{FF2B5EF4-FFF2-40B4-BE49-F238E27FC236}">
-                <a16:creationId xmlns:a16="http://schemas.microsoft.com/office/drawing/2014/main" id="{E86D5960-457B-4CA2-B0B3-F7F0DADA85D8}"/>
-              </a:ext>
-            </a:extLst>
-          </p:cNvPr>
-          <p:cNvSpPr>
-            <a:spLocks noGrp="1"/>
-          </p:cNvSpPr>
-          <p:nvPr>
-            <p:ph type="sldNum" sz="quarter" idx="12"/>
-          </p:nvPr>
-        </p:nvSpPr>
-        <p:spPr/>
-        <p:txBody>
-          <a:bodyPr/>
-          <a:lstStyle/>
-          <a:p>
-            <a:fld id="{083A2CE0-18CD-4102-B738-4ACFF9E68BA4}" type="slidenum">
-              <a:rPr lang="ko-KR" altLang="en-US" smtClean="0"/>
-              <a:t>19</a:t>
-            </a:fld>
-            <a:endParaRPr lang="ko-KR" altLang="en-US"/>
-          </a:p>
-        </p:txBody>
-      </p:sp>
-    </p:spTree>
-    <p:extLst>
-      <p:ext uri="{BB962C8B-B14F-4D97-AF65-F5344CB8AC3E}">
-        <p14:creationId xmlns:p14="http://schemas.microsoft.com/office/powerpoint/2010/main" val="3693762965"/>
-      </p:ext>
-    </p:extLst>
-  </p:cSld>
-  <p:clrMapOvr>
-    <a:masterClrMapping/>
-  </p:clrMapOvr>
-</p:sld>
-</file>
-
 <file path=ppt/slides/slide2.xml><?xml version="1.0" encoding="utf-8"?>
 <p:sld xmlns:a="http://schemas.openxmlformats.org/drawingml/2006/main" xmlns:r="http://schemas.openxmlformats.org/officeDocument/2006/relationships" xmlns:p="http://schemas.openxmlformats.org/presentationml/2006/main">
   <p:cSld>
@@ -9576,7 +10721,7 @@
           <a:p>
             <a:fld id="{0F78D9C4-20C1-4B15-A116-16DC77AD9A1E}" type="datetime1">
               <a:rPr lang="ko-KR" altLang="en-US" smtClean="0"/>
-              <a:t>2026-02-10</a:t>
+              <a:t>2026-02-12</a:t>
             </a:fld>
             <a:endParaRPr lang="ko-KR" altLang="en-US"/>
           </a:p>
@@ -9721,6 +10866,532 @@
               <a:rPr lang="ko-KR" altLang="en-US" sz="4400" b="1" dirty="0">
                 <a:latin typeface="+mj-ea"/>
               </a:rPr>
+              <a:t>손실 함수</a:t>
+            </a:r>
+            <a:r>
+              <a:rPr lang="en-US" altLang="ko-KR" sz="4400" b="1" dirty="0">
+                <a:latin typeface="+mj-ea"/>
+              </a:rPr>
+              <a:t>(Loss </a:t>
+            </a:r>
+            <a:r>
+              <a:rPr lang="en-US" altLang="ko-KR" sz="4400" b="1" dirty="0" err="1">
+                <a:latin typeface="+mj-ea"/>
+              </a:rPr>
+              <a:t>Fucntion</a:t>
+            </a:r>
+            <a:r>
+              <a:rPr lang="en-US" altLang="ko-KR" sz="4400" b="1" dirty="0">
+                <a:latin typeface="+mj-ea"/>
+              </a:rPr>
+              <a:t>)</a:t>
+            </a:r>
+            <a:endParaRPr lang="ko-KR" altLang="en-US" sz="4400" b="1" dirty="0">
+              <a:latin typeface="+mj-ea"/>
+            </a:endParaRPr>
+          </a:p>
+        </p:txBody>
+      </p:sp>
+      <p:sp>
+        <p:nvSpPr>
+          <p:cNvPr id="3" name="내용 개체 틀 2">
+            <a:extLst>
+              <a:ext uri="{FF2B5EF4-FFF2-40B4-BE49-F238E27FC236}">
+                <a16:creationId xmlns:a16="http://schemas.microsoft.com/office/drawing/2014/main" id="{659642C9-AD46-4D01-B61B-33D812751E95}"/>
+              </a:ext>
+            </a:extLst>
+          </p:cNvPr>
+          <p:cNvSpPr>
+            <a:spLocks noGrp="1"/>
+          </p:cNvSpPr>
+          <p:nvPr>
+            <p:ph idx="1"/>
+          </p:nvPr>
+        </p:nvSpPr>
+        <p:spPr>
+          <a:xfrm>
+            <a:off x="238991" y="1145407"/>
+            <a:ext cx="11384653" cy="4351338"/>
+          </a:xfrm>
+        </p:spPr>
+        <p:txBody>
+          <a:bodyPr>
+            <a:noAutofit/>
+          </a:bodyPr>
+          <a:lstStyle/>
+          <a:p>
+            <a:pPr marL="0" indent="0">
+              <a:lnSpc>
+                <a:spcPct val="150000"/>
+              </a:lnSpc>
+              <a:buNone/>
+            </a:pPr>
+            <a:r>
+              <a:rPr lang="ko-KR" altLang="en-US" dirty="0"/>
+              <a:t>💡 </a:t>
+            </a:r>
+            <a:r>
+              <a:rPr lang="ko-KR" altLang="en-US" dirty="0" err="1"/>
+              <a:t>머신러닝에서</a:t>
+            </a:r>
+            <a:r>
+              <a:rPr lang="ko-KR" altLang="en-US" dirty="0"/>
+              <a:t> 모델의 성능을 측정하고 학습시키는데 사용되는 함수</a:t>
+            </a:r>
+            <a:endParaRPr lang="en-US" altLang="ko-KR" dirty="0"/>
+          </a:p>
+          <a:p>
+            <a:pPr lvl="1">
+              <a:lnSpc>
+                <a:spcPct val="150000"/>
+              </a:lnSpc>
+              <a:buFont typeface="Wingdings" pitchFamily="2" charset="2"/>
+              <a:buChar char="§"/>
+            </a:pPr>
+            <a:r>
+              <a:rPr lang="ko-KR" altLang="en-US" dirty="0" err="1"/>
+              <a:t>예측값과</a:t>
+            </a:r>
+            <a:r>
+              <a:rPr lang="ko-KR" altLang="en-US" dirty="0"/>
+              <a:t> </a:t>
+            </a:r>
+            <a:r>
+              <a:rPr lang="ko-KR" altLang="en-US" dirty="0" err="1"/>
+              <a:t>실제값의</a:t>
+            </a:r>
+            <a:r>
+              <a:rPr lang="ko-KR" altLang="en-US" dirty="0"/>
+              <a:t> 차이를 수치적으로 나타낸 것</a:t>
+            </a:r>
+            <a:endParaRPr lang="en-US" altLang="ko-KR" dirty="0"/>
+          </a:p>
+          <a:p>
+            <a:pPr lvl="1">
+              <a:lnSpc>
+                <a:spcPct val="150000"/>
+              </a:lnSpc>
+              <a:buFont typeface="Wingdings" pitchFamily="2" charset="2"/>
+              <a:buChar char="§"/>
+            </a:pPr>
+            <a:r>
+              <a:rPr lang="ko-KR" altLang="en-US" dirty="0"/>
+              <a:t>모델의 훈련 → </a:t>
+            </a:r>
+            <a:r>
+              <a:rPr lang="ko-KR" altLang="en-US" dirty="0">
+                <a:highlight>
+                  <a:srgbClr val="FFFF00"/>
+                </a:highlight>
+              </a:rPr>
+              <a:t>손실함수의 값을 최소화 하는데 목적이 있음</a:t>
+            </a:r>
+            <a:endParaRPr lang="en-US" altLang="ko-KR" dirty="0">
+              <a:highlight>
+                <a:srgbClr val="FFFF00"/>
+              </a:highlight>
+            </a:endParaRPr>
+          </a:p>
+          <a:p>
+            <a:pPr lvl="1">
+              <a:lnSpc>
+                <a:spcPct val="150000"/>
+              </a:lnSpc>
+              <a:buFont typeface="Wingdings" pitchFamily="2" charset="2"/>
+              <a:buChar char="§"/>
+            </a:pPr>
+            <a:r>
+              <a:rPr lang="ko-KR" altLang="en-US" dirty="0">
+                <a:latin typeface="+mn-ea"/>
+              </a:rPr>
+              <a:t>손실 함수 </a:t>
+            </a:r>
+            <a:r>
+              <a:rPr lang="en-US" altLang="ko-KR" dirty="0" err="1"/>
+              <a:t>vs</a:t>
+            </a:r>
+            <a:r>
+              <a:rPr lang="en-US" altLang="ko-KR" dirty="0">
+                <a:latin typeface="+mn-ea"/>
+              </a:rPr>
+              <a:t> </a:t>
+            </a:r>
+            <a:r>
+              <a:rPr lang="ko-KR" altLang="en-US" dirty="0">
+                <a:latin typeface="+mn-ea"/>
+              </a:rPr>
+              <a:t>평가 지표</a:t>
+            </a:r>
+            <a:endParaRPr lang="en-US" altLang="ko-KR" dirty="0">
+              <a:latin typeface="+mn-ea"/>
+            </a:endParaRPr>
+          </a:p>
+          <a:p>
+            <a:pPr lvl="2">
+              <a:lnSpc>
+                <a:spcPct val="150000"/>
+              </a:lnSpc>
+            </a:pPr>
+            <a:r>
+              <a:rPr lang="ko-KR" altLang="en-US" b="1" dirty="0"/>
+              <a:t>손실 함수</a:t>
+            </a:r>
+            <a:r>
+              <a:rPr lang="en-US" altLang="ko-KR" dirty="0"/>
+              <a:t>: </a:t>
+            </a:r>
+            <a:r>
+              <a:rPr lang="ko-KR" altLang="en-US" dirty="0"/>
+              <a:t>학습 과정에서 모델을 최적화하기 위해 사용</a:t>
+            </a:r>
+            <a:endParaRPr lang="en-US" altLang="ko-KR" dirty="0"/>
+          </a:p>
+          <a:p>
+            <a:pPr lvl="2">
+              <a:lnSpc>
+                <a:spcPct val="150000"/>
+              </a:lnSpc>
+            </a:pPr>
+            <a:r>
+              <a:rPr lang="ko-KR" altLang="en-US" b="1" dirty="0"/>
+              <a:t>평가 지표</a:t>
+            </a:r>
+            <a:r>
+              <a:rPr lang="en-US" altLang="ko-KR" dirty="0"/>
+              <a:t>: </a:t>
+            </a:r>
+            <a:r>
+              <a:rPr lang="ko-KR" altLang="en-US" dirty="0"/>
+              <a:t>학습된 모델의 성능을 평가하기 위해 사용 </a:t>
+            </a:r>
+            <a:r>
+              <a:rPr lang="en-US" altLang="ko-KR" dirty="0"/>
+              <a:t>(</a:t>
+            </a:r>
+            <a:r>
+              <a:rPr lang="ko-KR" altLang="en-US" dirty="0"/>
+              <a:t>모델 평가 기준</a:t>
+            </a:r>
+            <a:r>
+              <a:rPr lang="en-US" altLang="ko-KR" dirty="0"/>
+              <a:t>)</a:t>
+            </a:r>
+            <a:endParaRPr lang="en-US" altLang="ko-KR" dirty="0">
+              <a:latin typeface="+mn-ea"/>
+            </a:endParaRPr>
+          </a:p>
+        </p:txBody>
+      </p:sp>
+      <p:sp>
+        <p:nvSpPr>
+          <p:cNvPr id="4" name="날짜 개체 틀 3">
+            <a:extLst>
+              <a:ext uri="{FF2B5EF4-FFF2-40B4-BE49-F238E27FC236}">
+                <a16:creationId xmlns:a16="http://schemas.microsoft.com/office/drawing/2014/main" id="{590F8720-7C11-4CC8-8215-3F57F085A24B}"/>
+              </a:ext>
+            </a:extLst>
+          </p:cNvPr>
+          <p:cNvSpPr>
+            <a:spLocks noGrp="1"/>
+          </p:cNvSpPr>
+          <p:nvPr>
+            <p:ph type="dt" sz="half" idx="10"/>
+          </p:nvPr>
+        </p:nvSpPr>
+        <p:spPr/>
+        <p:txBody>
+          <a:bodyPr/>
+          <a:lstStyle/>
+          <a:p>
+            <a:fld id="{0F78D9C4-20C1-4B15-A116-16DC77AD9A1E}" type="datetime1">
+              <a:rPr lang="ko-KR" altLang="en-US" smtClean="0"/>
+              <a:t>2026-02-12</a:t>
+            </a:fld>
+            <a:endParaRPr lang="ko-KR" altLang="en-US"/>
+          </a:p>
+        </p:txBody>
+      </p:sp>
+      <p:sp>
+        <p:nvSpPr>
+          <p:cNvPr id="5" name="슬라이드 번호 개체 틀 4">
+            <a:extLst>
+              <a:ext uri="{FF2B5EF4-FFF2-40B4-BE49-F238E27FC236}">
+                <a16:creationId xmlns:a16="http://schemas.microsoft.com/office/drawing/2014/main" id="{E86D5960-457B-4CA2-B0B3-F7F0DADA85D8}"/>
+              </a:ext>
+            </a:extLst>
+          </p:cNvPr>
+          <p:cNvSpPr>
+            <a:spLocks noGrp="1"/>
+          </p:cNvSpPr>
+          <p:nvPr>
+            <p:ph type="sldNum" sz="quarter" idx="12"/>
+          </p:nvPr>
+        </p:nvSpPr>
+        <p:spPr/>
+        <p:txBody>
+          <a:bodyPr/>
+          <a:lstStyle/>
+          <a:p>
+            <a:fld id="{083A2CE0-18CD-4102-B738-4ACFF9E68BA4}" type="slidenum">
+              <a:rPr lang="ko-KR" altLang="en-US" smtClean="0"/>
+              <a:t>20</a:t>
+            </a:fld>
+            <a:endParaRPr lang="ko-KR" altLang="en-US"/>
+          </a:p>
+        </p:txBody>
+      </p:sp>
+    </p:spTree>
+    <p:extLst>
+      <p:ext uri="{BB962C8B-B14F-4D97-AF65-F5344CB8AC3E}">
+        <p14:creationId xmlns:p14="http://schemas.microsoft.com/office/powerpoint/2010/main" val="3693762965"/>
+      </p:ext>
+    </p:extLst>
+  </p:cSld>
+  <p:clrMapOvr>
+    <a:masterClrMapping/>
+  </p:clrMapOvr>
+</p:sld>
+</file>
+
+<file path=ppt/slides/slide21.xml><?xml version="1.0" encoding="utf-8"?>
+<p:sld xmlns:a="http://schemas.openxmlformats.org/drawingml/2006/main" xmlns:r="http://schemas.openxmlformats.org/officeDocument/2006/relationships" xmlns:p="http://schemas.openxmlformats.org/presentationml/2006/main">
+  <p:cSld>
+    <p:spTree>
+      <p:nvGrpSpPr>
+        <p:cNvPr id="1" name=""/>
+        <p:cNvGrpSpPr/>
+        <p:nvPr/>
+      </p:nvGrpSpPr>
+      <p:grpSpPr>
+        <a:xfrm>
+          <a:off x="0" y="0"/>
+          <a:ext cx="0" cy="0"/>
+          <a:chOff x="0" y="0"/>
+          <a:chExt cx="0" cy="0"/>
+        </a:xfrm>
+      </p:grpSpPr>
+      <p:sp>
+        <p:nvSpPr>
+          <p:cNvPr id="2" name="제목 1">
+            <a:extLst>
+              <a:ext uri="{FF2B5EF4-FFF2-40B4-BE49-F238E27FC236}">
+                <a16:creationId xmlns:a16="http://schemas.microsoft.com/office/drawing/2014/main" id="{4BA30954-D12F-4C11-8428-4FC14557470B}"/>
+              </a:ext>
+            </a:extLst>
+          </p:cNvPr>
+          <p:cNvSpPr>
+            <a:spLocks noGrp="1"/>
+          </p:cNvSpPr>
+          <p:nvPr>
+            <p:ph type="title"/>
+          </p:nvPr>
+        </p:nvSpPr>
+        <p:spPr/>
+        <p:txBody>
+          <a:bodyPr/>
+          <a:lstStyle/>
+          <a:p>
+            <a:r>
+              <a:rPr lang="ko-KR" altLang="en-US" dirty="0"/>
+              <a:t>손실 함수의 개념과 연결되어</a:t>
+            </a:r>
+          </a:p>
+        </p:txBody>
+      </p:sp>
+      <p:sp>
+        <p:nvSpPr>
+          <p:cNvPr id="3" name="내용 개체 틀 2">
+            <a:extLst>
+              <a:ext uri="{FF2B5EF4-FFF2-40B4-BE49-F238E27FC236}">
+                <a16:creationId xmlns:a16="http://schemas.microsoft.com/office/drawing/2014/main" id="{F6BE9A03-3A96-BF2C-56A9-75A5832C9A4A}"/>
+              </a:ext>
+            </a:extLst>
+          </p:cNvPr>
+          <p:cNvSpPr>
+            <a:spLocks noGrp="1"/>
+          </p:cNvSpPr>
+          <p:nvPr>
+            <p:ph idx="1"/>
+          </p:nvPr>
+        </p:nvSpPr>
+        <p:spPr/>
+        <p:txBody>
+          <a:bodyPr/>
+          <a:lstStyle/>
+          <a:p>
+            <a:r>
+              <a:rPr lang="ko-KR" altLang="en-US" dirty="0"/>
+              <a:t>분류 문제에서도 동일한 학습 구조</a:t>
+            </a:r>
+            <a:endParaRPr lang="en-US" altLang="ko-KR" dirty="0"/>
+          </a:p>
+          <a:p>
+            <a:pPr lvl="1"/>
+            <a:r>
+              <a:rPr lang="ko-KR" altLang="en-US" dirty="0"/>
+              <a:t>예측 → 오차 계산 → 기울기 계산 → 업데이트</a:t>
+            </a:r>
+            <a:endParaRPr lang="en-US" altLang="ko-KR" dirty="0"/>
+          </a:p>
+          <a:p>
+            <a:r>
+              <a:rPr lang="ko-KR" altLang="en-US" dirty="0"/>
+              <a:t>인공신경망도 동일한 손실 최소화 구조</a:t>
+            </a:r>
+            <a:endParaRPr lang="en-US" altLang="ko-KR" dirty="0"/>
+          </a:p>
+          <a:p>
+            <a:r>
+              <a:rPr lang="en-US" altLang="ko-KR" dirty="0" err="1"/>
+              <a:t>PyTorch</a:t>
+            </a:r>
+            <a:r>
+              <a:rPr lang="en-US" altLang="ko-KR" dirty="0"/>
+              <a:t> </a:t>
+            </a:r>
+            <a:r>
+              <a:rPr lang="en-US" altLang="ko-KR" dirty="0" err="1"/>
+              <a:t>autograd</a:t>
+            </a:r>
+            <a:r>
+              <a:rPr lang="ko-KR" altLang="en-US" dirty="0"/>
+              <a:t>와 </a:t>
+            </a:r>
+            <a:r>
+              <a:rPr lang="en-US" altLang="ko-KR" dirty="0"/>
+              <a:t>optimizer</a:t>
+            </a:r>
+            <a:r>
+              <a:rPr lang="ko-KR" altLang="en-US" dirty="0"/>
+              <a:t>의 원리</a:t>
+            </a:r>
+            <a:endParaRPr lang="en-US" altLang="ko-KR" dirty="0"/>
+          </a:p>
+          <a:p>
+            <a:pPr lvl="1"/>
+            <a:r>
+              <a:rPr lang="ko-KR" altLang="en-US" dirty="0"/>
+              <a:t>기울기 계산</a:t>
+            </a:r>
+            <a:r>
+              <a:rPr lang="en-US" altLang="ko-KR" dirty="0"/>
+              <a:t>, </a:t>
+            </a:r>
+            <a:r>
+              <a:rPr lang="ko-KR" altLang="en-US" dirty="0"/>
+              <a:t>가중치 업데이트 등</a:t>
+            </a:r>
+            <a:endParaRPr lang="en-US" altLang="ko-KR" dirty="0"/>
+          </a:p>
+          <a:p>
+            <a:r>
+              <a:rPr lang="ko-KR" altLang="en-US" dirty="0"/>
+              <a:t>프로젝트에서 </a:t>
+            </a:r>
+            <a:r>
+              <a:rPr lang="ko-KR" altLang="en-US" dirty="0" err="1"/>
+              <a:t>하이퍼파라미터</a:t>
+            </a:r>
+            <a:r>
+              <a:rPr lang="ko-KR" altLang="en-US" dirty="0"/>
+              <a:t> 조정의 근거</a:t>
+            </a:r>
+            <a:endParaRPr lang="en-US" altLang="ko-KR" dirty="0"/>
+          </a:p>
+          <a:p>
+            <a:pPr lvl="1"/>
+            <a:r>
+              <a:rPr lang="ko-KR" altLang="en-US" dirty="0" err="1"/>
+              <a:t>학습률</a:t>
+            </a:r>
+            <a:r>
+              <a:rPr lang="ko-KR" altLang="en-US" dirty="0"/>
+              <a:t> 조정</a:t>
+            </a:r>
+            <a:r>
+              <a:rPr lang="en-US" altLang="ko-KR" dirty="0"/>
+              <a:t>, optimizer </a:t>
+            </a:r>
+            <a:r>
+              <a:rPr lang="ko-KR" altLang="en-US" dirty="0"/>
+              <a:t>조정</a:t>
+            </a:r>
+            <a:r>
+              <a:rPr lang="en-US" altLang="ko-KR" dirty="0"/>
+              <a:t>, </a:t>
+            </a:r>
+            <a:r>
+              <a:rPr lang="ko-KR" altLang="en-US" dirty="0"/>
+              <a:t>정규화 강도</a:t>
+            </a:r>
+            <a:r>
+              <a:rPr lang="en-US" altLang="ko-KR" dirty="0"/>
+              <a:t>, </a:t>
+            </a:r>
+            <a:r>
+              <a:rPr lang="ko-KR" altLang="en-US" dirty="0"/>
+              <a:t>모델 크기 등</a:t>
+            </a:r>
+          </a:p>
+        </p:txBody>
+      </p:sp>
+    </p:spTree>
+    <p:extLst>
+      <p:ext uri="{BB962C8B-B14F-4D97-AF65-F5344CB8AC3E}">
+        <p14:creationId xmlns:p14="http://schemas.microsoft.com/office/powerpoint/2010/main" val="2412100310"/>
+      </p:ext>
+    </p:extLst>
+  </p:cSld>
+  <p:clrMapOvr>
+    <a:masterClrMapping/>
+  </p:clrMapOvr>
+</p:sld>
+</file>
+
+<file path=ppt/slides/slide22.xml><?xml version="1.0" encoding="utf-8"?>
+<p:sld xmlns:a="http://schemas.openxmlformats.org/drawingml/2006/main" xmlns:r="http://schemas.openxmlformats.org/officeDocument/2006/relationships" xmlns:p="http://schemas.openxmlformats.org/presentationml/2006/main">
+  <p:cSld>
+    <p:spTree>
+      <p:nvGrpSpPr>
+        <p:cNvPr id="1" name=""/>
+        <p:cNvGrpSpPr/>
+        <p:nvPr/>
+      </p:nvGrpSpPr>
+      <p:grpSpPr>
+        <a:xfrm>
+          <a:off x="0" y="0"/>
+          <a:ext cx="0" cy="0"/>
+          <a:chOff x="0" y="0"/>
+          <a:chExt cx="0" cy="0"/>
+        </a:xfrm>
+      </p:grpSpPr>
+      <p:sp>
+        <p:nvSpPr>
+          <p:cNvPr id="2" name="제목 1">
+            <a:extLst>
+              <a:ext uri="{FF2B5EF4-FFF2-40B4-BE49-F238E27FC236}">
+                <a16:creationId xmlns:a16="http://schemas.microsoft.com/office/drawing/2014/main" id="{A8D8F1F4-4871-4B45-B08E-F92ACDB80FE6}"/>
+              </a:ext>
+            </a:extLst>
+          </p:cNvPr>
+          <p:cNvSpPr>
+            <a:spLocks noGrp="1"/>
+          </p:cNvSpPr>
+          <p:nvPr>
+            <p:ph type="title"/>
+          </p:nvPr>
+        </p:nvSpPr>
+        <p:spPr/>
+        <p:txBody>
+          <a:bodyPr>
+            <a:normAutofit/>
+          </a:bodyPr>
+          <a:lstStyle/>
+          <a:p>
+            <a:r>
+              <a:rPr lang="ko-KR" altLang="en-US" sz="4400" b="1" dirty="0">
+                <a:latin typeface="+mj-ea"/>
+              </a:rPr>
               <a:t>경사 </a:t>
             </a:r>
             <a:r>
@@ -9789,9 +11460,21 @@
             </a:pPr>
             <a:r>
               <a:rPr lang="ko-KR" altLang="en-US" sz="2400" dirty="0"/>
-              <a:t>💡 오차를 줄이면서 모델이 더 나은 예측을 할 수 있도록 최적화하는 과정</a:t>
-            </a:r>
-            <a:endParaRPr lang="en-US" altLang="ko-KR" sz="2400" dirty="0"/>
+              <a:t>💡 </a:t>
+            </a:r>
+            <a:r>
+              <a:rPr lang="ko-KR" altLang="en-US" sz="2400" dirty="0">
+                <a:solidFill>
+                  <a:srgbClr val="FF0000"/>
+                </a:solidFill>
+              </a:rPr>
+              <a:t>오차를 줄이면서 모델이 더 나은 예측을 할 수 있도록 최적화하는 과정</a:t>
+            </a:r>
+            <a:endParaRPr lang="en-US" altLang="ko-KR" sz="2400" dirty="0">
+              <a:solidFill>
+                <a:srgbClr val="FF0000"/>
+              </a:solidFill>
+            </a:endParaRPr>
           </a:p>
         </p:txBody>
       </p:sp>
@@ -9818,7 +11501,7 @@
           <a:p>
             <a:fld id="{0F78D9C4-20C1-4B15-A116-16DC77AD9A1E}" type="datetime1">
               <a:rPr lang="ko-KR" altLang="en-US" smtClean="0"/>
-              <a:t>2026-02-10</a:t>
+              <a:t>2026-02-12</a:t>
             </a:fld>
             <a:endParaRPr lang="ko-KR" altLang="en-US"/>
           </a:p>
@@ -9847,7 +11530,7 @@
           <a:p>
             <a:fld id="{083A2CE0-18CD-4102-B738-4ACFF9E68BA4}" type="slidenum">
               <a:rPr lang="ko-KR" altLang="en-US" smtClean="0"/>
-              <a:t>20</a:t>
+              <a:t>22</a:t>
             </a:fld>
             <a:endParaRPr lang="ko-KR" altLang="en-US"/>
           </a:p>
@@ -9868,7 +11551,7 @@
           <p:nvPr/>
         </p:nvPicPr>
         <p:blipFill>
-          <a:blip r:embed="rId2"/>
+          <a:blip r:embed="rId3"/>
           <a:stretch>
             <a:fillRect/>
           </a:stretch>
@@ -9898,7 +11581,7 @@
           <p:nvPr/>
         </p:nvPicPr>
         <p:blipFill>
-          <a:blip r:embed="rId3"/>
+          <a:blip r:embed="rId4"/>
           <a:stretch>
             <a:fillRect/>
           </a:stretch>
@@ -9928,7 +11611,7 @@
           <p:nvPr/>
         </p:nvPicPr>
         <p:blipFill>
-          <a:blip r:embed="rId4"/>
+          <a:blip r:embed="rId5"/>
           <a:stretch>
             <a:fillRect/>
           </a:stretch>
@@ -9956,7 +11639,7 @@
 </p:sld>
 </file>
 
-<file path=ppt/slides/slide21.xml><?xml version="1.0" encoding="utf-8"?>
+<file path=ppt/slides/slide23.xml><?xml version="1.0" encoding="utf-8"?>
 <p:sld xmlns:a="http://schemas.openxmlformats.org/drawingml/2006/main" xmlns:r="http://schemas.openxmlformats.org/officeDocument/2006/relationships" xmlns:p="http://schemas.openxmlformats.org/presentationml/2006/main">
   <p:cSld>
     <p:spTree>
@@ -10332,7 +12015,7 @@
           <a:p>
             <a:fld id="{0F78D9C4-20C1-4B15-A116-16DC77AD9A1E}" type="datetime1">
               <a:rPr lang="ko-KR" altLang="en-US" smtClean="0"/>
-              <a:t>2026-02-10</a:t>
+              <a:t>2026-02-12</a:t>
             </a:fld>
             <a:endParaRPr lang="ko-KR" altLang="en-US"/>
           </a:p>
@@ -10361,7 +12044,7 @@
           <a:p>
             <a:fld id="{083A2CE0-18CD-4102-B738-4ACFF9E68BA4}" type="slidenum">
               <a:rPr lang="ko-KR" altLang="en-US" smtClean="0"/>
-              <a:t>21</a:t>
+              <a:t>23</a:t>
             </a:fld>
             <a:endParaRPr lang="ko-KR" altLang="en-US"/>
           </a:p>
@@ -10432,7 +12115,7 @@
 </p:sld>
 </file>
 
-<file path=ppt/slides/slide22.xml><?xml version="1.0" encoding="utf-8"?>
+<file path=ppt/slides/slide24.xml><?xml version="1.0" encoding="utf-8"?>
 <p:sld xmlns:a="http://schemas.openxmlformats.org/drawingml/2006/main" xmlns:r="http://schemas.openxmlformats.org/officeDocument/2006/relationships" xmlns:p="http://schemas.openxmlformats.org/presentationml/2006/main">
   <p:cSld>
     <p:spTree>
@@ -10531,7 +12214,7 @@
           <a:p>
             <a:fld id="{0F78D9C4-20C1-4B15-A116-16DC77AD9A1E}" type="datetime1">
               <a:rPr lang="ko-KR" altLang="en-US" smtClean="0"/>
-              <a:t>2026-02-10</a:t>
+              <a:t>2026-02-12</a:t>
             </a:fld>
             <a:endParaRPr lang="ko-KR" altLang="en-US"/>
           </a:p>
@@ -10560,7 +12243,7 @@
           <a:p>
             <a:fld id="{083A2CE0-18CD-4102-B738-4ACFF9E68BA4}" type="slidenum">
               <a:rPr lang="ko-KR" altLang="en-US" smtClean="0"/>
-              <a:t>22</a:t>
+              <a:t>24</a:t>
             </a:fld>
             <a:endParaRPr lang="ko-KR" altLang="en-US"/>
           </a:p>
@@ -10620,8 +12303,8 @@
 </p:sld>
 </file>
 
-<file path=ppt/slides/slide23.xml><?xml version="1.0" encoding="utf-8"?>
-<p:sld xmlns:a="http://schemas.openxmlformats.org/drawingml/2006/main" xmlns:r="http://schemas.openxmlformats.org/officeDocument/2006/relationships" xmlns:p="http://schemas.openxmlformats.org/presentationml/2006/main">
+<file path=ppt/slides/slide25.xml><?xml version="1.0" encoding="utf-8"?>
+<p:sld xmlns:a="http://schemas.openxmlformats.org/drawingml/2006/main" xmlns:r="http://schemas.openxmlformats.org/officeDocument/2006/relationships" xmlns:p="http://schemas.openxmlformats.org/presentationml/2006/main" show="0">
   <p:cSld>
     <p:spTree>
       <p:nvGrpSpPr>
@@ -10817,7 +12500,7 @@
           <a:p>
             <a:fld id="{0F78D9C4-20C1-4B15-A116-16DC77AD9A1E}" type="datetime1">
               <a:rPr lang="ko-KR" altLang="en-US" smtClean="0"/>
-              <a:t>2026-02-10</a:t>
+              <a:t>2026-02-12</a:t>
             </a:fld>
             <a:endParaRPr lang="ko-KR" altLang="en-US"/>
           </a:p>
@@ -10846,7 +12529,7 @@
           <a:p>
             <a:fld id="{083A2CE0-18CD-4102-B738-4ACFF9E68BA4}" type="slidenum">
               <a:rPr lang="ko-KR" altLang="en-US" smtClean="0"/>
-              <a:t>23</a:t>
+              <a:t>25</a:t>
             </a:fld>
             <a:endParaRPr lang="ko-KR" altLang="en-US"/>
           </a:p>
@@ -10906,8 +12589,8 @@
 </p:sld>
 </file>
 
-<file path=ppt/slides/slide24.xml><?xml version="1.0" encoding="utf-8"?>
-<p:sld xmlns:a="http://schemas.openxmlformats.org/drawingml/2006/main" xmlns:r="http://schemas.openxmlformats.org/officeDocument/2006/relationships" xmlns:p="http://schemas.openxmlformats.org/presentationml/2006/main">
+<file path=ppt/slides/slide26.xml><?xml version="1.0" encoding="utf-8"?>
+<p:sld xmlns:a="http://schemas.openxmlformats.org/drawingml/2006/main" xmlns:r="http://schemas.openxmlformats.org/officeDocument/2006/relationships" xmlns:p="http://schemas.openxmlformats.org/presentationml/2006/main" show="0">
   <p:cSld>
     <p:spTree>
       <p:nvGrpSpPr>
@@ -11224,7 +12907,7 @@
           <a:p>
             <a:fld id="{0F78D9C4-20C1-4B15-A116-16DC77AD9A1E}" type="datetime1">
               <a:rPr lang="ko-KR" altLang="en-US" smtClean="0"/>
-              <a:t>2026-02-10</a:t>
+              <a:t>2026-02-12</a:t>
             </a:fld>
             <a:endParaRPr lang="ko-KR" altLang="en-US" dirty="0"/>
           </a:p>
@@ -11253,7 +12936,7 @@
           <a:p>
             <a:fld id="{083A2CE0-18CD-4102-B738-4ACFF9E68BA4}" type="slidenum">
               <a:rPr lang="ko-KR" altLang="en-US" smtClean="0"/>
-              <a:t>24</a:t>
+              <a:t>26</a:t>
             </a:fld>
             <a:endParaRPr lang="ko-KR" altLang="en-US"/>
           </a:p>
@@ -11303,8 +12986,8 @@
 </p:sld>
 </file>
 
-<file path=ppt/slides/slide25.xml><?xml version="1.0" encoding="utf-8"?>
-<p:sld xmlns:a="http://schemas.openxmlformats.org/drawingml/2006/main" xmlns:r="http://schemas.openxmlformats.org/officeDocument/2006/relationships" xmlns:p="http://schemas.openxmlformats.org/presentationml/2006/main">
+<file path=ppt/slides/slide27.xml><?xml version="1.0" encoding="utf-8"?>
+<p:sld xmlns:a="http://schemas.openxmlformats.org/drawingml/2006/main" xmlns:r="http://schemas.openxmlformats.org/officeDocument/2006/relationships" xmlns:p="http://schemas.openxmlformats.org/presentationml/2006/main" show="0">
   <p:cSld>
     <p:spTree>
       <p:nvGrpSpPr>
@@ -11622,7 +13305,7 @@
           <a:p>
             <a:fld id="{0F78D9C4-20C1-4B15-A116-16DC77AD9A1E}" type="datetime1">
               <a:rPr lang="ko-KR" altLang="en-US" smtClean="0"/>
-              <a:t>2026-02-10</a:t>
+              <a:t>2026-02-12</a:t>
             </a:fld>
             <a:endParaRPr lang="ko-KR" altLang="en-US"/>
           </a:p>
@@ -11651,7 +13334,7 @@
           <a:p>
             <a:fld id="{083A2CE0-18CD-4102-B738-4ACFF9E68BA4}" type="slidenum">
               <a:rPr lang="ko-KR" altLang="en-US" smtClean="0"/>
-              <a:t>25</a:t>
+              <a:t>27</a:t>
             </a:fld>
             <a:endParaRPr lang="ko-KR" altLang="en-US"/>
           </a:p>
@@ -11701,8 +13384,8 @@
 </p:sld>
 </file>
 
-<file path=ppt/slides/slide26.xml><?xml version="1.0" encoding="utf-8"?>
-<p:sld xmlns:a="http://schemas.openxmlformats.org/drawingml/2006/main" xmlns:r="http://schemas.openxmlformats.org/officeDocument/2006/relationships" xmlns:p="http://schemas.openxmlformats.org/presentationml/2006/main">
+<file path=ppt/slides/slide28.xml><?xml version="1.0" encoding="utf-8"?>
+<p:sld xmlns:a="http://schemas.openxmlformats.org/drawingml/2006/main" xmlns:r="http://schemas.openxmlformats.org/officeDocument/2006/relationships" xmlns:p="http://schemas.openxmlformats.org/presentationml/2006/main" show="0">
   <p:cSld>
     <p:spTree>
       <p:nvGrpSpPr>
@@ -12025,7 +13708,7 @@
           <a:p>
             <a:fld id="{0F78D9C4-20C1-4B15-A116-16DC77AD9A1E}" type="datetime1">
               <a:rPr lang="ko-KR" altLang="en-US" smtClean="0"/>
-              <a:t>2026-02-10</a:t>
+              <a:t>2026-02-12</a:t>
             </a:fld>
             <a:endParaRPr lang="ko-KR" altLang="en-US"/>
           </a:p>
@@ -12054,7 +13737,7 @@
           <a:p>
             <a:fld id="{083A2CE0-18CD-4102-B738-4ACFF9E68BA4}" type="slidenum">
               <a:rPr lang="ko-KR" altLang="en-US" smtClean="0"/>
-              <a:t>26</a:t>
+              <a:t>28</a:t>
             </a:fld>
             <a:endParaRPr lang="ko-KR" altLang="en-US"/>
           </a:p>
@@ -12104,7 +13787,7 @@
 </p:sld>
 </file>
 
-<file path=ppt/slides/slide27.xml><?xml version="1.0" encoding="utf-8"?>
+<file path=ppt/slides/slide29.xml><?xml version="1.0" encoding="utf-8"?>
 <p:sld xmlns:a="http://schemas.openxmlformats.org/drawingml/2006/main" xmlns:r="http://schemas.openxmlformats.org/officeDocument/2006/relationships" xmlns:p="http://schemas.openxmlformats.org/presentationml/2006/main">
   <p:cSld>
     <p:spTree>
@@ -12144,7 +13827,7 @@
           <a:p>
             <a:fld id="{0F78D9C4-20C1-4B15-A116-16DC77AD9A1E}" type="datetime1">
               <a:rPr lang="ko-KR" altLang="en-US" smtClean="0"/>
-              <a:t>2026-02-10</a:t>
+              <a:t>2026-02-12</a:t>
             </a:fld>
             <a:endParaRPr lang="ko-KR" altLang="en-US"/>
           </a:p>
@@ -12173,7 +13856,7 @@
           <a:p>
             <a:fld id="{083A2CE0-18CD-4102-B738-4ACFF9E68BA4}" type="slidenum">
               <a:rPr lang="ko-KR" altLang="en-US" smtClean="0"/>
-              <a:t>27</a:t>
+              <a:t>29</a:t>
             </a:fld>
             <a:endParaRPr lang="ko-KR" altLang="en-US"/>
           </a:p>
@@ -12306,7 +13989,135 @@
 </p:sld>
 </file>
 
-<file path=ppt/slides/slide28.xml><?xml version="1.0" encoding="utf-8"?>
+<file path=ppt/slides/slide3.xml><?xml version="1.0" encoding="utf-8"?>
+<p:sld xmlns:a="http://schemas.openxmlformats.org/drawingml/2006/main" xmlns:r="http://schemas.openxmlformats.org/officeDocument/2006/relationships" xmlns:p="http://schemas.openxmlformats.org/presentationml/2006/main">
+  <p:cSld>
+    <p:spTree>
+      <p:nvGrpSpPr>
+        <p:cNvPr id="1" name=""/>
+        <p:cNvGrpSpPr/>
+        <p:nvPr/>
+      </p:nvGrpSpPr>
+      <p:grpSpPr>
+        <a:xfrm>
+          <a:off x="0" y="0"/>
+          <a:ext cx="0" cy="0"/>
+          <a:chOff x="0" y="0"/>
+          <a:chExt cx="0" cy="0"/>
+        </a:xfrm>
+      </p:grpSpPr>
+      <p:sp>
+        <p:nvSpPr>
+          <p:cNvPr id="2" name="제목 1">
+            <a:extLst>
+              <a:ext uri="{FF2B5EF4-FFF2-40B4-BE49-F238E27FC236}">
+                <a16:creationId xmlns:a16="http://schemas.microsoft.com/office/drawing/2014/main" id="{F73998D1-36E6-E560-0EB9-B215896A40B8}"/>
+              </a:ext>
+            </a:extLst>
+          </p:cNvPr>
+          <p:cNvSpPr>
+            <a:spLocks noGrp="1"/>
+          </p:cNvSpPr>
+          <p:nvPr>
+            <p:ph type="title"/>
+          </p:nvPr>
+        </p:nvSpPr>
+        <p:spPr/>
+        <p:txBody>
+          <a:bodyPr/>
+          <a:lstStyle/>
+          <a:p>
+            <a:r>
+              <a:rPr lang="ko-KR" altLang="en-US" dirty="0"/>
+              <a:t>왜 회귀와 </a:t>
+            </a:r>
+            <a:r>
+              <a:rPr lang="ko-KR" altLang="en-US" dirty="0" err="1"/>
+              <a:t>경사하강법을</a:t>
+            </a:r>
+            <a:r>
+              <a:rPr lang="ko-KR" altLang="en-US" dirty="0"/>
+              <a:t> 배우는가</a:t>
+            </a:r>
+            <a:r>
+              <a:rPr lang="en-US" altLang="ko-KR" dirty="0"/>
+              <a:t>?</a:t>
+            </a:r>
+            <a:endParaRPr lang="ko-KR" altLang="en-US" dirty="0"/>
+          </a:p>
+        </p:txBody>
+      </p:sp>
+      <p:sp>
+        <p:nvSpPr>
+          <p:cNvPr id="3" name="내용 개체 틀 2">
+            <a:extLst>
+              <a:ext uri="{FF2B5EF4-FFF2-40B4-BE49-F238E27FC236}">
+                <a16:creationId xmlns:a16="http://schemas.microsoft.com/office/drawing/2014/main" id="{AA798C0F-143A-B950-7589-5FA0DFAE013F}"/>
+              </a:ext>
+            </a:extLst>
+          </p:cNvPr>
+          <p:cNvSpPr>
+            <a:spLocks noGrp="1"/>
+          </p:cNvSpPr>
+          <p:nvPr>
+            <p:ph idx="1"/>
+          </p:nvPr>
+        </p:nvSpPr>
+        <p:spPr/>
+        <p:txBody>
+          <a:bodyPr/>
+          <a:lstStyle/>
+          <a:p>
+            <a:r>
+              <a:rPr lang="ko-KR" altLang="en-US" dirty="0"/>
+              <a:t>모든 학습 모델의 기본 구조 이해</a:t>
+            </a:r>
+            <a:endParaRPr lang="en-US" altLang="ko-KR" dirty="0"/>
+          </a:p>
+          <a:p>
+            <a:r>
+              <a:rPr lang="ko-KR" altLang="en-US" dirty="0"/>
+              <a:t>딥러닝 학습 원리의 출발점</a:t>
+            </a:r>
+            <a:endParaRPr lang="en-US" altLang="ko-KR" dirty="0"/>
+          </a:p>
+          <a:p>
+            <a:r>
+              <a:rPr lang="en-US" altLang="ko-KR" dirty="0" err="1"/>
+              <a:t>PyTorch</a:t>
+            </a:r>
+            <a:r>
+              <a:rPr lang="en-US" altLang="ko-KR" dirty="0"/>
+              <a:t> optimizer</a:t>
+            </a:r>
+            <a:r>
+              <a:rPr lang="ko-KR" altLang="en-US" dirty="0"/>
+              <a:t> 이해의 기초</a:t>
+            </a:r>
+            <a:endParaRPr lang="en-US" altLang="ko-KR" dirty="0"/>
+          </a:p>
+          <a:p>
+            <a:r>
+              <a:rPr lang="ko-KR" altLang="en-US" dirty="0"/>
+              <a:t>프로젝트에서 모델 디버깅에 필수</a:t>
+            </a:r>
+          </a:p>
+        </p:txBody>
+      </p:sp>
+    </p:spTree>
+    <p:extLst>
+      <p:ext uri="{BB962C8B-B14F-4D97-AF65-F5344CB8AC3E}">
+        <p14:creationId xmlns:p14="http://schemas.microsoft.com/office/powerpoint/2010/main" val="566461880"/>
+      </p:ext>
+    </p:extLst>
+  </p:cSld>
+  <p:clrMapOvr>
+    <a:masterClrMapping/>
+  </p:clrMapOvr>
+</p:sld>
+</file>
+
+<file path=ppt/slides/slide30.xml><?xml version="1.0" encoding="utf-8"?>
 <p:sld xmlns:a="http://schemas.openxmlformats.org/drawingml/2006/main" xmlns:r="http://schemas.openxmlformats.org/officeDocument/2006/relationships" xmlns:p="http://schemas.openxmlformats.org/presentationml/2006/main">
   <p:cSld>
     <p:spTree>
@@ -12346,7 +14157,7 @@
           <a:p>
             <a:fld id="{0F78D9C4-20C1-4B15-A116-16DC77AD9A1E}" type="datetime1">
               <a:rPr lang="ko-KR" altLang="en-US" smtClean="0"/>
-              <a:t>2026-02-10</a:t>
+              <a:t>2026-02-12</a:t>
             </a:fld>
             <a:endParaRPr lang="ko-KR" altLang="en-US"/>
           </a:p>
@@ -12375,7 +14186,7 @@
           <a:p>
             <a:fld id="{083A2CE0-18CD-4102-B738-4ACFF9E68BA4}" type="slidenum">
               <a:rPr lang="ko-KR" altLang="en-US" smtClean="0"/>
-              <a:t>28</a:t>
+              <a:t>30</a:t>
             </a:fld>
             <a:endParaRPr lang="ko-KR" altLang="en-US"/>
           </a:p>
@@ -13885,7 +15696,7 @@
 </p:sld>
 </file>
 
-<file path=ppt/slides/slide29.xml><?xml version="1.0" encoding="utf-8"?>
+<file path=ppt/slides/slide31.xml><?xml version="1.0" encoding="utf-8"?>
 <p:sld xmlns:a="http://schemas.openxmlformats.org/drawingml/2006/main" xmlns:r="http://schemas.openxmlformats.org/officeDocument/2006/relationships" xmlns:p="http://schemas.openxmlformats.org/presentationml/2006/main">
   <p:cSld>
     <p:spTree>
@@ -14118,7 +15929,7 @@
           <a:p>
             <a:fld id="{0F78D9C4-20C1-4B15-A116-16DC77AD9A1E}" type="datetime1">
               <a:rPr lang="ko-KR" altLang="en-US" smtClean="0"/>
-              <a:t>2026-02-10</a:t>
+              <a:t>2026-02-12</a:t>
             </a:fld>
             <a:endParaRPr lang="ko-KR" altLang="en-US"/>
           </a:p>
@@ -14147,7 +15958,7 @@
           <a:p>
             <a:fld id="{083A2CE0-18CD-4102-B738-4ACFF9E68BA4}" type="slidenum">
               <a:rPr lang="ko-KR" altLang="en-US" smtClean="0"/>
-              <a:t>29</a:t>
+              <a:t>31</a:t>
             </a:fld>
             <a:endParaRPr lang="ko-KR" altLang="en-US"/>
           </a:p>
@@ -14260,7 +16071,2460 @@
 </p:sld>
 </file>
 
-<file path=ppt/slides/slide3.xml><?xml version="1.0" encoding="utf-8"?>
+<file path=ppt/slides/slide32.xml><?xml version="1.0" encoding="utf-8"?>
+<p:sld xmlns:a="http://schemas.openxmlformats.org/drawingml/2006/main" xmlns:r="http://schemas.openxmlformats.org/officeDocument/2006/relationships" xmlns:p="http://schemas.openxmlformats.org/presentationml/2006/main">
+  <p:cSld>
+    <p:spTree>
+      <p:nvGrpSpPr>
+        <p:cNvPr id="1" name=""/>
+        <p:cNvGrpSpPr/>
+        <p:nvPr/>
+      </p:nvGrpSpPr>
+      <p:grpSpPr>
+        <a:xfrm>
+          <a:off x="0" y="0"/>
+          <a:ext cx="0" cy="0"/>
+          <a:chOff x="0" y="0"/>
+          <a:chExt cx="0" cy="0"/>
+        </a:xfrm>
+      </p:grpSpPr>
+      <p:sp>
+        <p:nvSpPr>
+          <p:cNvPr id="3" name="내용 개체 틀 2">
+            <a:extLst>
+              <a:ext uri="{FF2B5EF4-FFF2-40B4-BE49-F238E27FC236}">
+                <a16:creationId xmlns:a16="http://schemas.microsoft.com/office/drawing/2014/main" id="{659642C9-AD46-4D01-B61B-33D812751E95}"/>
+              </a:ext>
+            </a:extLst>
+          </p:cNvPr>
+          <p:cNvSpPr>
+            <a:spLocks noGrp="1"/>
+          </p:cNvSpPr>
+          <p:nvPr>
+            <p:ph idx="1"/>
+          </p:nvPr>
+        </p:nvSpPr>
+        <p:spPr>
+          <a:xfrm>
+            <a:off x="251788" y="1623229"/>
+            <a:ext cx="7491964" cy="4008437"/>
+          </a:xfrm>
+        </p:spPr>
+        <p:txBody>
+          <a:bodyPr>
+            <a:noAutofit/>
+          </a:bodyPr>
+          <a:lstStyle/>
+          <a:p>
+            <a:pPr marL="0" indent="0">
+              <a:lnSpc>
+                <a:spcPct val="150000"/>
+              </a:lnSpc>
+              <a:buNone/>
+            </a:pPr>
+            <a:r>
+              <a:rPr lang="ko-KR" altLang="en-US" sz="2400" b="1" dirty="0">
+                <a:latin typeface="+mn-ea"/>
+              </a:rPr>
+              <a:t>✔️ </a:t>
+            </a:r>
+            <a:r>
+              <a:rPr lang="en-US" altLang="ko-KR" sz="2400" b="1" dirty="0">
+                <a:latin typeface="+mn-ea"/>
+              </a:rPr>
+              <a:t>Saddle point(</a:t>
+            </a:r>
+            <a:r>
+              <a:rPr lang="ko-KR" altLang="en-US" sz="2400" b="1" dirty="0" err="1">
+                <a:latin typeface="+mn-ea"/>
+              </a:rPr>
+              <a:t>안장점</a:t>
+            </a:r>
+            <a:r>
+              <a:rPr lang="en-US" altLang="ko-KR" sz="2400" b="1" dirty="0">
+                <a:latin typeface="+mn-ea"/>
+              </a:rPr>
+              <a:t>)</a:t>
+            </a:r>
+          </a:p>
+          <a:p>
+            <a:pPr lvl="1">
+              <a:lnSpc>
+                <a:spcPct val="150000"/>
+              </a:lnSpc>
+            </a:pPr>
+            <a:r>
+              <a:rPr lang="ko-KR" altLang="en-US" sz="2000" dirty="0">
+                <a:latin typeface="+mn-ea"/>
+              </a:rPr>
+              <a:t>최댓값인지 최솟값인지 구분할 수 없음</a:t>
+            </a:r>
+            <a:endParaRPr lang="en-US" altLang="ko-KR" sz="2000" dirty="0">
+              <a:latin typeface="+mn-ea"/>
+            </a:endParaRPr>
+          </a:p>
+          <a:p>
+            <a:pPr marL="457200" lvl="1" indent="0">
+              <a:lnSpc>
+                <a:spcPct val="150000"/>
+              </a:lnSpc>
+              <a:buNone/>
+            </a:pPr>
+            <a:endParaRPr lang="en-US" altLang="ko-KR" sz="2000" dirty="0">
+              <a:latin typeface="+mn-ea"/>
+            </a:endParaRPr>
+          </a:p>
+          <a:p>
+            <a:pPr marL="0" indent="0">
+              <a:lnSpc>
+                <a:spcPct val="150000"/>
+              </a:lnSpc>
+              <a:buNone/>
+            </a:pPr>
+            <a:r>
+              <a:rPr lang="ko-KR" altLang="en-US" sz="2400" b="1" dirty="0">
+                <a:latin typeface="+mn-ea"/>
+              </a:rPr>
+              <a:t>✔️ </a:t>
+            </a:r>
+            <a:r>
+              <a:rPr lang="en-US" altLang="ko-KR" sz="2400" b="1" dirty="0">
+                <a:latin typeface="+mn-ea"/>
+              </a:rPr>
+              <a:t>Overshooting</a:t>
+            </a:r>
+          </a:p>
+          <a:p>
+            <a:pPr lvl="1">
+              <a:lnSpc>
+                <a:spcPct val="150000"/>
+              </a:lnSpc>
+            </a:pPr>
+            <a:r>
+              <a:rPr lang="ko-KR" altLang="en-US" sz="2000" dirty="0" err="1"/>
+              <a:t>학습률이</a:t>
+            </a:r>
+            <a:r>
+              <a:rPr lang="ko-KR" altLang="en-US" sz="2000" dirty="0"/>
+              <a:t> 너무 커서 매개변수가 최솟값을 지나쳐버리는 현상</a:t>
+            </a:r>
+            <a:r>
+              <a:rPr lang="en-US" altLang="ko-KR" sz="2000" dirty="0"/>
+              <a:t>.</a:t>
+            </a:r>
+            <a:endParaRPr lang="en-US" altLang="ko-KR" sz="2000" dirty="0">
+              <a:latin typeface="+mn-ea"/>
+            </a:endParaRPr>
+          </a:p>
+          <a:p>
+            <a:pPr lvl="1">
+              <a:lnSpc>
+                <a:spcPct val="150000"/>
+              </a:lnSpc>
+            </a:pPr>
+            <a:r>
+              <a:rPr lang="ko-KR" altLang="en-US" sz="2000" dirty="0"/>
+              <a:t>매개변수 값이 진동</a:t>
+            </a:r>
+            <a:r>
+              <a:rPr lang="en-US" altLang="ko-KR" sz="2000" dirty="0"/>
+              <a:t>/</a:t>
+            </a:r>
+            <a:r>
+              <a:rPr lang="ko-KR" altLang="en-US" sz="2000" dirty="0"/>
+              <a:t>발산해서</a:t>
+            </a:r>
+            <a:r>
+              <a:rPr lang="en-US" altLang="ko-KR" sz="2000" dirty="0"/>
+              <a:t>, </a:t>
+            </a:r>
+            <a:r>
+              <a:rPr lang="ko-KR" altLang="en-US" sz="2000" dirty="0"/>
+              <a:t>학습에 실패하게 됨</a:t>
+            </a:r>
+            <a:r>
+              <a:rPr lang="en-US" altLang="ko-KR" sz="2000" dirty="0"/>
+              <a:t>.</a:t>
+            </a:r>
+            <a:endParaRPr lang="en-US" altLang="ko-KR" sz="2000" dirty="0">
+              <a:latin typeface="+mn-ea"/>
+            </a:endParaRPr>
+          </a:p>
+        </p:txBody>
+      </p:sp>
+      <p:sp>
+        <p:nvSpPr>
+          <p:cNvPr id="4" name="날짜 개체 틀 3">
+            <a:extLst>
+              <a:ext uri="{FF2B5EF4-FFF2-40B4-BE49-F238E27FC236}">
+                <a16:creationId xmlns:a16="http://schemas.microsoft.com/office/drawing/2014/main" id="{590F8720-7C11-4CC8-8215-3F57F085A24B}"/>
+              </a:ext>
+            </a:extLst>
+          </p:cNvPr>
+          <p:cNvSpPr>
+            <a:spLocks noGrp="1"/>
+          </p:cNvSpPr>
+          <p:nvPr>
+            <p:ph type="dt" sz="half" idx="10"/>
+          </p:nvPr>
+        </p:nvSpPr>
+        <p:spPr/>
+        <p:txBody>
+          <a:bodyPr/>
+          <a:lstStyle/>
+          <a:p>
+            <a:fld id="{0F78D9C4-20C1-4B15-A116-16DC77AD9A1E}" type="datetime1">
+              <a:rPr lang="ko-KR" altLang="en-US" smtClean="0"/>
+              <a:t>2026-02-12</a:t>
+            </a:fld>
+            <a:endParaRPr lang="ko-KR" altLang="en-US"/>
+          </a:p>
+        </p:txBody>
+      </p:sp>
+      <p:sp>
+        <p:nvSpPr>
+          <p:cNvPr id="5" name="슬라이드 번호 개체 틀 4">
+            <a:extLst>
+              <a:ext uri="{FF2B5EF4-FFF2-40B4-BE49-F238E27FC236}">
+                <a16:creationId xmlns:a16="http://schemas.microsoft.com/office/drawing/2014/main" id="{E86D5960-457B-4CA2-B0B3-F7F0DADA85D8}"/>
+              </a:ext>
+            </a:extLst>
+          </p:cNvPr>
+          <p:cNvSpPr>
+            <a:spLocks noGrp="1"/>
+          </p:cNvSpPr>
+          <p:nvPr>
+            <p:ph type="sldNum" sz="quarter" idx="12"/>
+          </p:nvPr>
+        </p:nvSpPr>
+        <p:spPr/>
+        <p:txBody>
+          <a:bodyPr/>
+          <a:lstStyle/>
+          <a:p>
+            <a:fld id="{083A2CE0-18CD-4102-B738-4ACFF9E68BA4}" type="slidenum">
+              <a:rPr lang="ko-KR" altLang="en-US" smtClean="0"/>
+              <a:t>32</a:t>
+            </a:fld>
+            <a:endParaRPr lang="ko-KR" altLang="en-US"/>
+          </a:p>
+        </p:txBody>
+      </p:sp>
+      <p:pic>
+        <p:nvPicPr>
+          <p:cNvPr id="6150" name="Picture 6">
+            <a:extLst>
+              <a:ext uri="{FF2B5EF4-FFF2-40B4-BE49-F238E27FC236}">
+                <a16:creationId xmlns:a16="http://schemas.microsoft.com/office/drawing/2014/main" id="{396D47C3-F265-C8AF-4AED-08B68167DFC0}"/>
+              </a:ext>
+            </a:extLst>
+          </p:cNvPr>
+          <p:cNvPicPr>
+            <a:picLocks noChangeAspect="1" noChangeArrowheads="1"/>
+          </p:cNvPicPr>
+          <p:nvPr/>
+        </p:nvPicPr>
+        <p:blipFill>
+          <a:blip r:embed="rId2" cstate="print">
+            <a:extLst>
+              <a:ext uri="{28A0092B-C50C-407E-A947-70E740481C1C}">
+                <a14:useLocalDpi xmlns:a14="http://schemas.microsoft.com/office/drawing/2010/main" val="0"/>
+              </a:ext>
+            </a:extLst>
+          </a:blip>
+          <a:srcRect/>
+          <a:stretch>
+            <a:fillRect/>
+          </a:stretch>
+        </p:blipFill>
+        <p:spPr bwMode="auto">
+          <a:xfrm>
+            <a:off x="8144768" y="1104336"/>
+            <a:ext cx="2864316" cy="2074694"/>
+          </a:xfrm>
+          <a:prstGeom prst="rect">
+            <a:avLst/>
+          </a:prstGeom>
+          <a:noFill/>
+          <a:extLst>
+            <a:ext uri="{909E8E84-426E-40DD-AFC4-6F175D3DCCD1}">
+              <a14:hiddenFill xmlns:a14="http://schemas.microsoft.com/office/drawing/2010/main">
+                <a:solidFill>
+                  <a:srgbClr val="FFFFFF"/>
+                </a:solidFill>
+              </a14:hiddenFill>
+            </a:ext>
+          </a:extLst>
+        </p:spPr>
+      </p:pic>
+      <p:pic>
+        <p:nvPicPr>
+          <p:cNvPr id="8" name="그림 7">
+            <a:extLst>
+              <a:ext uri="{FF2B5EF4-FFF2-40B4-BE49-F238E27FC236}">
+                <a16:creationId xmlns:a16="http://schemas.microsoft.com/office/drawing/2014/main" id="{7A0C89AB-71DB-6B49-DD18-EDEA17B48333}"/>
+              </a:ext>
+            </a:extLst>
+          </p:cNvPr>
+          <p:cNvPicPr>
+            <a:picLocks noChangeAspect="1"/>
+          </p:cNvPicPr>
+          <p:nvPr/>
+        </p:nvPicPr>
+        <p:blipFill>
+          <a:blip r:embed="rId3"/>
+          <a:stretch>
+            <a:fillRect/>
+          </a:stretch>
+        </p:blipFill>
+        <p:spPr>
+          <a:xfrm>
+            <a:off x="8231379" y="3451267"/>
+            <a:ext cx="2724530" cy="2572109"/>
+          </a:xfrm>
+          <a:prstGeom prst="rect">
+            <a:avLst/>
+          </a:prstGeom>
+        </p:spPr>
+      </p:pic>
+      <mc:AlternateContent xmlns:mc="http://schemas.openxmlformats.org/markup-compatibility/2006" xmlns:p14="http://schemas.microsoft.com/office/powerpoint/2010/main">
+        <mc:Choice Requires="p14">
+          <p:contentPart p14:bwMode="auto" r:id="rId4">
+            <p14:nvContentPartPr>
+              <p14:cNvPr id="6" name="잉크 5">
+                <a:extLst>
+                  <a:ext uri="{FF2B5EF4-FFF2-40B4-BE49-F238E27FC236}">
+                    <a16:creationId xmlns:a16="http://schemas.microsoft.com/office/drawing/2014/main" id="{A84636BC-18A8-DDA3-F9FF-DF65865F9521}"/>
+                  </a:ext>
+                </a:extLst>
+              </p14:cNvPr>
+              <p14:cNvContentPartPr/>
+              <p14:nvPr/>
+            </p14:nvContentPartPr>
+            <p14:xfrm>
+              <a:off x="9709147" y="1325563"/>
+              <a:ext cx="787680" cy="1632240"/>
+            </p14:xfrm>
+          </p:contentPart>
+        </mc:Choice>
+        <mc:Fallback xmlns="">
+          <p:pic>
+            <p:nvPicPr>
+              <p:cNvPr id="6" name="잉크 5">
+                <a:extLst>
+                  <a:ext uri="{FF2B5EF4-FFF2-40B4-BE49-F238E27FC236}">
+                    <a16:creationId xmlns:a16="http://schemas.microsoft.com/office/drawing/2014/main" id="{A84636BC-18A8-DDA3-F9FF-DF65865F9521}"/>
+                  </a:ext>
+                </a:extLst>
+              </p:cNvPr>
+              <p:cNvPicPr/>
+              <p:nvPr/>
+            </p:nvPicPr>
+            <p:blipFill>
+              <a:blip r:embed="rId5"/>
+              <a:stretch>
+                <a:fillRect/>
+              </a:stretch>
+            </p:blipFill>
+            <p:spPr>
+              <a:xfrm>
+                <a:off x="9699787" y="1316203"/>
+                <a:ext cx="806400" cy="1650960"/>
+              </a:xfrm>
+              <a:prstGeom prst="rect">
+                <a:avLst/>
+              </a:prstGeom>
+            </p:spPr>
+          </p:pic>
+        </mc:Fallback>
+      </mc:AlternateContent>
+      <p:sp>
+        <p:nvSpPr>
+          <p:cNvPr id="7" name="제목 6">
+            <a:extLst>
+              <a:ext uri="{FF2B5EF4-FFF2-40B4-BE49-F238E27FC236}">
+                <a16:creationId xmlns:a16="http://schemas.microsoft.com/office/drawing/2014/main" id="{1EE30D88-C106-216E-66C3-DB3EC4505884}"/>
+              </a:ext>
+            </a:extLst>
+          </p:cNvPr>
+          <p:cNvSpPr>
+            <a:spLocks noGrp="1"/>
+          </p:cNvSpPr>
+          <p:nvPr>
+            <p:ph type="title"/>
+          </p:nvPr>
+        </p:nvSpPr>
+        <p:spPr/>
+        <p:txBody>
+          <a:bodyPr/>
+          <a:lstStyle/>
+          <a:p>
+            <a:r>
+              <a:rPr lang="ko-KR" altLang="en-US" b="1" dirty="0"/>
+              <a:t>경사 하강법의 문제</a:t>
+            </a:r>
+            <a:endParaRPr lang="ko-KR" altLang="en-US" dirty="0"/>
+          </a:p>
+        </p:txBody>
+      </p:sp>
+    </p:spTree>
+    <p:extLst>
+      <p:ext uri="{BB962C8B-B14F-4D97-AF65-F5344CB8AC3E}">
+        <p14:creationId xmlns:p14="http://schemas.microsoft.com/office/powerpoint/2010/main" val="2964515769"/>
+      </p:ext>
+    </p:extLst>
+  </p:cSld>
+  <p:clrMapOvr>
+    <a:masterClrMapping/>
+  </p:clrMapOvr>
+</p:sld>
+</file>
+
+<file path=ppt/slides/slide33.xml><?xml version="1.0" encoding="utf-8"?>
+<p:sld xmlns:a="http://schemas.openxmlformats.org/drawingml/2006/main" xmlns:r="http://schemas.openxmlformats.org/officeDocument/2006/relationships" xmlns:p="http://schemas.openxmlformats.org/presentationml/2006/main">
+  <p:cSld>
+    <p:spTree>
+      <p:nvGrpSpPr>
+        <p:cNvPr id="1" name=""/>
+        <p:cNvGrpSpPr/>
+        <p:nvPr/>
+      </p:nvGrpSpPr>
+      <p:grpSpPr>
+        <a:xfrm>
+          <a:off x="0" y="0"/>
+          <a:ext cx="0" cy="0"/>
+          <a:chOff x="0" y="0"/>
+          <a:chExt cx="0" cy="0"/>
+        </a:xfrm>
+      </p:grpSpPr>
+      <p:sp>
+        <p:nvSpPr>
+          <p:cNvPr id="2" name="제목 1">
+            <a:extLst>
+              <a:ext uri="{FF2B5EF4-FFF2-40B4-BE49-F238E27FC236}">
+                <a16:creationId xmlns:a16="http://schemas.microsoft.com/office/drawing/2014/main" id="{A8D8F1F4-4871-4B45-B08E-F92ACDB80FE6}"/>
+              </a:ext>
+            </a:extLst>
+          </p:cNvPr>
+          <p:cNvSpPr>
+            <a:spLocks noGrp="1"/>
+          </p:cNvSpPr>
+          <p:nvPr>
+            <p:ph type="title"/>
+          </p:nvPr>
+        </p:nvSpPr>
+        <p:spPr/>
+        <p:txBody>
+          <a:bodyPr>
+            <a:normAutofit/>
+          </a:bodyPr>
+          <a:lstStyle/>
+          <a:p>
+            <a:r>
+              <a:rPr lang="ko-KR" altLang="en-US" dirty="0" err="1"/>
+              <a:t>경사하강법의</a:t>
+            </a:r>
+            <a:r>
+              <a:rPr lang="ko-KR" altLang="en-US" dirty="0"/>
+              <a:t> 한계</a:t>
+            </a:r>
+            <a:endParaRPr lang="ko-KR" altLang="en-US" b="1" dirty="0">
+              <a:latin typeface="+mj-ea"/>
+            </a:endParaRPr>
+          </a:p>
+        </p:txBody>
+      </p:sp>
+      <p:sp>
+        <p:nvSpPr>
+          <p:cNvPr id="3" name="내용 개체 틀 2">
+            <a:extLst>
+              <a:ext uri="{FF2B5EF4-FFF2-40B4-BE49-F238E27FC236}">
+                <a16:creationId xmlns:a16="http://schemas.microsoft.com/office/drawing/2014/main" id="{659642C9-AD46-4D01-B61B-33D812751E95}"/>
+              </a:ext>
+            </a:extLst>
+          </p:cNvPr>
+          <p:cNvSpPr>
+            <a:spLocks noGrp="1"/>
+          </p:cNvSpPr>
+          <p:nvPr>
+            <p:ph idx="1"/>
+          </p:nvPr>
+        </p:nvSpPr>
+        <p:spPr>
+          <a:xfrm>
+            <a:off x="238991" y="1173214"/>
+            <a:ext cx="11521440" cy="4680954"/>
+          </a:xfrm>
+        </p:spPr>
+        <p:txBody>
+          <a:bodyPr>
+            <a:normAutofit/>
+          </a:bodyPr>
+          <a:lstStyle/>
+          <a:p>
+            <a:pPr marL="0" indent="0">
+              <a:lnSpc>
+                <a:spcPct val="150000"/>
+              </a:lnSpc>
+              <a:buNone/>
+            </a:pPr>
+            <a:r>
+              <a:rPr lang="ko-KR" altLang="en-US" b="1" dirty="0">
+                <a:latin typeface="+mn-ea"/>
+              </a:rPr>
+              <a:t>💡 </a:t>
+            </a:r>
+            <a:r>
+              <a:rPr lang="ko-KR" altLang="en-US" b="1" dirty="0" err="1">
+                <a:latin typeface="+mn-ea"/>
+              </a:rPr>
+              <a:t>학습률</a:t>
+            </a:r>
+            <a:r>
+              <a:rPr lang="en-US" altLang="ko-KR" b="1" dirty="0">
+                <a:latin typeface="+mn-ea"/>
+              </a:rPr>
+              <a:t>(Learning</a:t>
+            </a:r>
+            <a:r>
+              <a:rPr lang="ko-KR" altLang="en-US" b="1" dirty="0">
+                <a:latin typeface="+mn-ea"/>
+              </a:rPr>
+              <a:t> </a:t>
+            </a:r>
+            <a:r>
+              <a:rPr lang="en-US" altLang="ko-KR" b="1" dirty="0">
+                <a:latin typeface="+mn-ea"/>
+              </a:rPr>
+              <a:t>rate)</a:t>
+            </a:r>
+          </a:p>
+          <a:p>
+            <a:pPr lvl="1">
+              <a:lnSpc>
+                <a:spcPct val="150000"/>
+              </a:lnSpc>
+            </a:pPr>
+            <a:r>
+              <a:rPr lang="ko-KR" altLang="en-US" dirty="0"/>
+              <a:t>매개변수를 업데이트할 </a:t>
+            </a:r>
+            <a:r>
+              <a:rPr lang="ko-KR" altLang="en-US" dirty="0">
+                <a:latin typeface="+mn-ea"/>
+              </a:rPr>
+              <a:t>때 </a:t>
+            </a:r>
+            <a:r>
+              <a:rPr lang="ko-KR" altLang="en-US" dirty="0"/>
+              <a:t>한 번의 업데이트가 이루어지는 크기를 결정하는 </a:t>
+            </a:r>
+            <a:r>
+              <a:rPr lang="ko-KR" altLang="en-US" dirty="0" err="1"/>
+              <a:t>파라미터</a:t>
+            </a:r>
+            <a:endParaRPr lang="en-US" altLang="ko-KR" dirty="0"/>
+          </a:p>
+          <a:p>
+            <a:pPr lvl="1">
+              <a:lnSpc>
+                <a:spcPct val="150000"/>
+              </a:lnSpc>
+            </a:pPr>
+            <a:r>
+              <a:rPr lang="ko-KR" altLang="en-US" dirty="0"/>
+              <a:t>손실 함수의 기울기를 따라 이동하는 속도를 제어함</a:t>
+            </a:r>
+            <a:endParaRPr lang="en-US" altLang="ko-KR" dirty="0"/>
+          </a:p>
+          <a:p>
+            <a:pPr lvl="1">
+              <a:lnSpc>
+                <a:spcPct val="150000"/>
+              </a:lnSpc>
+            </a:pPr>
+            <a:r>
+              <a:rPr lang="en-US" altLang="ko-KR" dirty="0">
+                <a:latin typeface="+mn-ea"/>
+              </a:rPr>
+              <a:t>Step size</a:t>
+            </a:r>
+            <a:r>
+              <a:rPr lang="ko-KR" altLang="en-US" dirty="0">
+                <a:latin typeface="+mn-ea"/>
+              </a:rPr>
+              <a:t>라고도 함</a:t>
+            </a:r>
+            <a:endParaRPr lang="en-US" altLang="ko-KR" dirty="0">
+              <a:latin typeface="+mn-ea"/>
+            </a:endParaRPr>
+          </a:p>
+          <a:p>
+            <a:pPr lvl="1">
+              <a:lnSpc>
+                <a:spcPct val="150000"/>
+              </a:lnSpc>
+            </a:pPr>
+            <a:r>
+              <a:rPr lang="ko-KR" altLang="en-US" dirty="0">
+                <a:latin typeface="+mn-ea"/>
+              </a:rPr>
+              <a:t>너무 작으면 시간이 오래 걸리고 너무 크면 학습이 제대로 이루어지지 않음</a:t>
+            </a:r>
+            <a:endParaRPr lang="en-US" altLang="ko-KR" dirty="0">
+              <a:latin typeface="+mn-ea"/>
+            </a:endParaRPr>
+          </a:p>
+        </p:txBody>
+      </p:sp>
+      <p:sp>
+        <p:nvSpPr>
+          <p:cNvPr id="4" name="날짜 개체 틀 3">
+            <a:extLst>
+              <a:ext uri="{FF2B5EF4-FFF2-40B4-BE49-F238E27FC236}">
+                <a16:creationId xmlns:a16="http://schemas.microsoft.com/office/drawing/2014/main" id="{590F8720-7C11-4CC8-8215-3F57F085A24B}"/>
+              </a:ext>
+            </a:extLst>
+          </p:cNvPr>
+          <p:cNvSpPr>
+            <a:spLocks noGrp="1"/>
+          </p:cNvSpPr>
+          <p:nvPr>
+            <p:ph type="dt" sz="half" idx="10"/>
+          </p:nvPr>
+        </p:nvSpPr>
+        <p:spPr/>
+        <p:txBody>
+          <a:bodyPr/>
+          <a:lstStyle/>
+          <a:p>
+            <a:fld id="{0F78D9C4-20C1-4B15-A116-16DC77AD9A1E}" type="datetime1">
+              <a:rPr lang="ko-KR" altLang="en-US" smtClean="0"/>
+              <a:t>2026-02-12</a:t>
+            </a:fld>
+            <a:endParaRPr lang="ko-KR" altLang="en-US"/>
+          </a:p>
+        </p:txBody>
+      </p:sp>
+      <p:sp>
+        <p:nvSpPr>
+          <p:cNvPr id="5" name="슬라이드 번호 개체 틀 4">
+            <a:extLst>
+              <a:ext uri="{FF2B5EF4-FFF2-40B4-BE49-F238E27FC236}">
+                <a16:creationId xmlns:a16="http://schemas.microsoft.com/office/drawing/2014/main" id="{E86D5960-457B-4CA2-B0B3-F7F0DADA85D8}"/>
+              </a:ext>
+            </a:extLst>
+          </p:cNvPr>
+          <p:cNvSpPr>
+            <a:spLocks noGrp="1"/>
+          </p:cNvSpPr>
+          <p:nvPr>
+            <p:ph type="sldNum" sz="quarter" idx="12"/>
+          </p:nvPr>
+        </p:nvSpPr>
+        <p:spPr/>
+        <p:txBody>
+          <a:bodyPr/>
+          <a:lstStyle/>
+          <a:p>
+            <a:fld id="{083A2CE0-18CD-4102-B738-4ACFF9E68BA4}" type="slidenum">
+              <a:rPr lang="ko-KR" altLang="en-US" smtClean="0"/>
+              <a:t>33</a:t>
+            </a:fld>
+            <a:endParaRPr lang="ko-KR" altLang="en-US"/>
+          </a:p>
+        </p:txBody>
+      </p:sp>
+    </p:spTree>
+    <p:extLst>
+      <p:ext uri="{BB962C8B-B14F-4D97-AF65-F5344CB8AC3E}">
+        <p14:creationId xmlns:p14="http://schemas.microsoft.com/office/powerpoint/2010/main" val="3404284640"/>
+      </p:ext>
+    </p:extLst>
+  </p:cSld>
+  <p:clrMapOvr>
+    <a:masterClrMapping/>
+  </p:clrMapOvr>
+</p:sld>
+</file>
+
+<file path=ppt/slides/slide34.xml><?xml version="1.0" encoding="utf-8"?>
+<p:sld xmlns:a="http://schemas.openxmlformats.org/drawingml/2006/main" xmlns:r="http://schemas.openxmlformats.org/officeDocument/2006/relationships" xmlns:p="http://schemas.openxmlformats.org/presentationml/2006/main">
+  <p:cSld>
+    <p:spTree>
+      <p:nvGrpSpPr>
+        <p:cNvPr id="1" name=""/>
+        <p:cNvGrpSpPr/>
+        <p:nvPr/>
+      </p:nvGrpSpPr>
+      <p:grpSpPr>
+        <a:xfrm>
+          <a:off x="0" y="0"/>
+          <a:ext cx="0" cy="0"/>
+          <a:chOff x="0" y="0"/>
+          <a:chExt cx="0" cy="0"/>
+        </a:xfrm>
+      </p:grpSpPr>
+      <p:sp>
+        <p:nvSpPr>
+          <p:cNvPr id="2" name="제목 1">
+            <a:extLst>
+              <a:ext uri="{FF2B5EF4-FFF2-40B4-BE49-F238E27FC236}">
+                <a16:creationId xmlns:a16="http://schemas.microsoft.com/office/drawing/2014/main" id="{A8D8F1F4-4871-4B45-B08E-F92ACDB80FE6}"/>
+              </a:ext>
+            </a:extLst>
+          </p:cNvPr>
+          <p:cNvSpPr>
+            <a:spLocks noGrp="1"/>
+          </p:cNvSpPr>
+          <p:nvPr>
+            <p:ph type="title"/>
+          </p:nvPr>
+        </p:nvSpPr>
+        <p:spPr/>
+        <p:txBody>
+          <a:bodyPr>
+            <a:normAutofit/>
+          </a:bodyPr>
+          <a:lstStyle/>
+          <a:p>
+            <a:r>
+              <a:rPr lang="ko-KR" altLang="en-US" dirty="0"/>
+              <a:t>왜 </a:t>
+            </a:r>
+            <a:r>
+              <a:rPr lang="en-US" altLang="ko-KR" dirty="0"/>
+              <a:t>Optimizer</a:t>
+            </a:r>
+            <a:r>
+              <a:rPr lang="ko-KR" altLang="en-US" dirty="0"/>
+              <a:t>가 필요한가</a:t>
+            </a:r>
+            <a:r>
+              <a:rPr lang="en-US" altLang="ko-KR" dirty="0"/>
+              <a:t>?</a:t>
+            </a:r>
+            <a:endParaRPr lang="ko-KR" altLang="en-US" b="1" dirty="0"/>
+          </a:p>
+        </p:txBody>
+      </p:sp>
+      <p:sp>
+        <p:nvSpPr>
+          <p:cNvPr id="4" name="날짜 개체 틀 3">
+            <a:extLst>
+              <a:ext uri="{FF2B5EF4-FFF2-40B4-BE49-F238E27FC236}">
+                <a16:creationId xmlns:a16="http://schemas.microsoft.com/office/drawing/2014/main" id="{590F8720-7C11-4CC8-8215-3F57F085A24B}"/>
+              </a:ext>
+            </a:extLst>
+          </p:cNvPr>
+          <p:cNvSpPr>
+            <a:spLocks noGrp="1"/>
+          </p:cNvSpPr>
+          <p:nvPr>
+            <p:ph type="dt" sz="half" idx="10"/>
+          </p:nvPr>
+        </p:nvSpPr>
+        <p:spPr/>
+        <p:txBody>
+          <a:bodyPr/>
+          <a:lstStyle/>
+          <a:p>
+            <a:fld id="{0F78D9C4-20C1-4B15-A116-16DC77AD9A1E}" type="datetime1">
+              <a:rPr lang="ko-KR" altLang="en-US" smtClean="0"/>
+              <a:t>2026-02-12</a:t>
+            </a:fld>
+            <a:endParaRPr lang="ko-KR" altLang="en-US"/>
+          </a:p>
+        </p:txBody>
+      </p:sp>
+      <p:sp>
+        <p:nvSpPr>
+          <p:cNvPr id="5" name="슬라이드 번호 개체 틀 4">
+            <a:extLst>
+              <a:ext uri="{FF2B5EF4-FFF2-40B4-BE49-F238E27FC236}">
+                <a16:creationId xmlns:a16="http://schemas.microsoft.com/office/drawing/2014/main" id="{E86D5960-457B-4CA2-B0B3-F7F0DADA85D8}"/>
+              </a:ext>
+            </a:extLst>
+          </p:cNvPr>
+          <p:cNvSpPr>
+            <a:spLocks noGrp="1"/>
+          </p:cNvSpPr>
+          <p:nvPr>
+            <p:ph type="sldNum" sz="quarter" idx="12"/>
+          </p:nvPr>
+        </p:nvSpPr>
+        <p:spPr/>
+        <p:txBody>
+          <a:bodyPr/>
+          <a:lstStyle/>
+          <a:p>
+            <a:fld id="{083A2CE0-18CD-4102-B738-4ACFF9E68BA4}" type="slidenum">
+              <a:rPr lang="ko-KR" altLang="en-US" smtClean="0"/>
+              <a:t>34</a:t>
+            </a:fld>
+            <a:endParaRPr lang="ko-KR" altLang="en-US"/>
+          </a:p>
+        </p:txBody>
+      </p:sp>
+      <p:pic>
+        <p:nvPicPr>
+          <p:cNvPr id="12290" name="Picture 2">
+            <a:extLst>
+              <a:ext uri="{FF2B5EF4-FFF2-40B4-BE49-F238E27FC236}">
+                <a16:creationId xmlns:a16="http://schemas.microsoft.com/office/drawing/2014/main" id="{F9A25452-6416-18AD-6D5F-C0213AC9CB1A}"/>
+              </a:ext>
+            </a:extLst>
+          </p:cNvPr>
+          <p:cNvPicPr>
+            <a:picLocks noChangeAspect="1" noChangeArrowheads="1"/>
+          </p:cNvPicPr>
+          <p:nvPr/>
+        </p:nvPicPr>
+        <p:blipFill>
+          <a:blip r:embed="rId2">
+            <a:extLst>
+              <a:ext uri="{28A0092B-C50C-407E-A947-70E740481C1C}">
+                <a14:useLocalDpi xmlns:a14="http://schemas.microsoft.com/office/drawing/2010/main" val="0"/>
+              </a:ext>
+            </a:extLst>
+          </a:blip>
+          <a:srcRect/>
+          <a:stretch>
+            <a:fillRect/>
+          </a:stretch>
+        </p:blipFill>
+        <p:spPr bwMode="auto">
+          <a:xfrm>
+            <a:off x="2982191" y="2911568"/>
+            <a:ext cx="6196332" cy="3001348"/>
+          </a:xfrm>
+          <a:prstGeom prst="rect">
+            <a:avLst/>
+          </a:prstGeom>
+          <a:noFill/>
+          <a:extLst>
+            <a:ext uri="{909E8E84-426E-40DD-AFC4-6F175D3DCCD1}">
+              <a14:hiddenFill xmlns:a14="http://schemas.microsoft.com/office/drawing/2010/main">
+                <a:solidFill>
+                  <a:srgbClr val="FFFFFF"/>
+                </a:solidFill>
+              </a14:hiddenFill>
+            </a:ext>
+          </a:extLst>
+        </p:spPr>
+      </p:pic>
+      <p:sp>
+        <p:nvSpPr>
+          <p:cNvPr id="6" name="TextBox 5">
+            <a:extLst>
+              <a:ext uri="{FF2B5EF4-FFF2-40B4-BE49-F238E27FC236}">
+                <a16:creationId xmlns:a16="http://schemas.microsoft.com/office/drawing/2014/main" id="{D59AB5B1-78E1-09EB-AE05-AD476080E919}"/>
+              </a:ext>
+            </a:extLst>
+          </p:cNvPr>
+          <p:cNvSpPr txBox="1"/>
+          <p:nvPr/>
+        </p:nvSpPr>
+        <p:spPr>
+          <a:xfrm>
+            <a:off x="4427113" y="6101192"/>
+            <a:ext cx="3337773" cy="246221"/>
+          </a:xfrm>
+          <a:prstGeom prst="rect">
+            <a:avLst/>
+          </a:prstGeom>
+          <a:noFill/>
+        </p:spPr>
+        <p:txBody>
+          <a:bodyPr wrap="none" rtlCol="0">
+            <a:spAutoFit/>
+          </a:bodyPr>
+          <a:lstStyle/>
+          <a:p>
+            <a:r>
+              <a:rPr lang="ko-KR" altLang="en-US" sz="1000" dirty="0">
+                <a:latin typeface="+mn-ea"/>
+              </a:rPr>
+              <a:t>출처</a:t>
+            </a:r>
+            <a:r>
+              <a:rPr lang="en-US" altLang="ko-KR" sz="1000" dirty="0">
+                <a:latin typeface="+mn-ea"/>
+              </a:rPr>
+              <a:t>:</a:t>
+            </a:r>
+            <a:r>
+              <a:rPr lang="en-US" altLang="ko-KR" sz="1000" b="0" i="0" u="none" strike="noStrike" dirty="0">
+                <a:solidFill>
+                  <a:srgbClr val="404040"/>
+                </a:solidFill>
+                <a:effectLst/>
+                <a:latin typeface="+mn-ea"/>
+                <a:hlinkClick r:id="rId3"/>
+              </a:rPr>
+              <a:t>https://www.slideshare.net/yongho/ss-79607172</a:t>
+            </a:r>
+            <a:endParaRPr lang="ko-KR" altLang="en-US" sz="1000" dirty="0">
+              <a:latin typeface="+mn-ea"/>
+            </a:endParaRPr>
+          </a:p>
+        </p:txBody>
+      </p:sp>
+      <p:sp>
+        <p:nvSpPr>
+          <p:cNvPr id="7" name="직사각형 6"/>
+          <p:cNvSpPr/>
+          <p:nvPr/>
+        </p:nvSpPr>
+        <p:spPr>
+          <a:xfrm>
+            <a:off x="251788" y="940433"/>
+            <a:ext cx="11688424" cy="1782860"/>
+          </a:xfrm>
+          <a:prstGeom prst="rect">
+            <a:avLst/>
+          </a:prstGeom>
+        </p:spPr>
+        <p:txBody>
+          <a:bodyPr wrap="square">
+            <a:spAutoFit/>
+          </a:bodyPr>
+          <a:lstStyle/>
+          <a:p>
+            <a:pPr>
+              <a:lnSpc>
+                <a:spcPct val="150000"/>
+              </a:lnSpc>
+            </a:pPr>
+            <a:r>
+              <a:rPr lang="ko-KR" altLang="en-US" sz="2800" dirty="0"/>
+              <a:t>💡 </a:t>
+            </a:r>
+            <a:r>
+              <a:rPr lang="en-US" altLang="ko-KR" sz="2800" dirty="0"/>
+              <a:t>Optimizer</a:t>
+            </a:r>
+          </a:p>
+          <a:p>
+            <a:pPr marL="800100" lvl="1" indent="-342900">
+              <a:lnSpc>
+                <a:spcPct val="150000"/>
+              </a:lnSpc>
+              <a:buFont typeface="Arial" panose="020B0604020202020204" pitchFamily="34" charset="0"/>
+              <a:buChar char="•"/>
+            </a:pPr>
+            <a:r>
+              <a:rPr lang="ko-KR" altLang="en-US" sz="2400" dirty="0">
+                <a:latin typeface="Pretendard Light" panose="02000403000000020004" pitchFamily="2" charset="-127"/>
+                <a:ea typeface="Pretendard Light" panose="02000403000000020004" pitchFamily="2" charset="-127"/>
+                <a:cs typeface="Pretendard Light" panose="02000403000000020004" pitchFamily="2" charset="-127"/>
+              </a:rPr>
+              <a:t>모델의 학습 과정을 제어하여</a:t>
+            </a:r>
+            <a:r>
+              <a:rPr lang="en-US" altLang="ko-KR" sz="2400" dirty="0">
+                <a:latin typeface="Pretendard Light" panose="02000403000000020004" pitchFamily="2" charset="-127"/>
+                <a:ea typeface="Pretendard Light" panose="02000403000000020004" pitchFamily="2" charset="-127"/>
+                <a:cs typeface="Pretendard Light" panose="02000403000000020004" pitchFamily="2" charset="-127"/>
+              </a:rPr>
+              <a:t>, </a:t>
+            </a:r>
+            <a:r>
+              <a:rPr lang="ko-KR" altLang="en-US" sz="2400" dirty="0">
+                <a:latin typeface="Pretendard Light" panose="02000403000000020004" pitchFamily="2" charset="-127"/>
+                <a:ea typeface="Pretendard Light" panose="02000403000000020004" pitchFamily="2" charset="-127"/>
+                <a:cs typeface="Pretendard Light" panose="02000403000000020004" pitchFamily="2" charset="-127"/>
+              </a:rPr>
+              <a:t>손실 함수</a:t>
+            </a:r>
+            <a:r>
+              <a:rPr lang="en-US" altLang="ko-KR" sz="2400" dirty="0">
+                <a:latin typeface="Pretendard Light" panose="02000403000000020004" pitchFamily="2" charset="-127"/>
+                <a:ea typeface="Pretendard Light" panose="02000403000000020004" pitchFamily="2" charset="-127"/>
+                <a:cs typeface="Pretendard Light" panose="02000403000000020004" pitchFamily="2" charset="-127"/>
+              </a:rPr>
+              <a:t>(Loss Function)</a:t>
+            </a:r>
+            <a:r>
+              <a:rPr lang="ko-KR" altLang="en-US" sz="2400" dirty="0">
+                <a:latin typeface="Pretendard Light" panose="02000403000000020004" pitchFamily="2" charset="-127"/>
+                <a:ea typeface="Pretendard Light" panose="02000403000000020004" pitchFamily="2" charset="-127"/>
+                <a:cs typeface="Pretendard Light" panose="02000403000000020004" pitchFamily="2" charset="-127"/>
+              </a:rPr>
+              <a:t>를 최소화하기 위해 사용되는</a:t>
+            </a:r>
+            <a:r>
+              <a:rPr lang="en-US" altLang="ko-KR" sz="2400" dirty="0">
+                <a:latin typeface="Pretendard Light" panose="02000403000000020004" pitchFamily="2" charset="-127"/>
+                <a:ea typeface="Pretendard Light" panose="02000403000000020004" pitchFamily="2" charset="-127"/>
+                <a:cs typeface="Pretendard Light" panose="02000403000000020004" pitchFamily="2" charset="-127"/>
+              </a:rPr>
+              <a:t> </a:t>
+            </a:r>
+            <a:br>
+              <a:rPr lang="en-US" altLang="ko-KR" sz="2400" dirty="0">
+                <a:latin typeface="Pretendard Light" panose="02000403000000020004" pitchFamily="2" charset="-127"/>
+                <a:ea typeface="Pretendard Light" panose="02000403000000020004" pitchFamily="2" charset="-127"/>
+                <a:cs typeface="Pretendard Light" panose="02000403000000020004" pitchFamily="2" charset="-127"/>
+              </a:rPr>
+            </a:br>
+            <a:r>
+              <a:rPr lang="ko-KR" altLang="en-US" sz="2400" b="1" dirty="0">
+                <a:latin typeface="Pretendard Light" panose="02000403000000020004" pitchFamily="2" charset="-127"/>
+                <a:ea typeface="Pretendard Light" panose="02000403000000020004" pitchFamily="2" charset="-127"/>
+                <a:cs typeface="Pretendard Light" panose="02000403000000020004" pitchFamily="2" charset="-127"/>
+              </a:rPr>
+              <a:t>알고리즘</a:t>
+            </a:r>
+            <a:r>
+              <a:rPr lang="ko-KR" altLang="en-US" sz="2400" dirty="0">
+                <a:latin typeface="Pretendard Light" panose="02000403000000020004" pitchFamily="2" charset="-127"/>
+                <a:ea typeface="Pretendard Light" panose="02000403000000020004" pitchFamily="2" charset="-127"/>
+                <a:cs typeface="Pretendard Light" panose="02000403000000020004" pitchFamily="2" charset="-127"/>
+              </a:rPr>
+              <a:t> 또는 방법론</a:t>
+            </a:r>
+            <a:endParaRPr lang="en-US" altLang="ko-KR" sz="2400" dirty="0">
+              <a:latin typeface="Pretendard Light" panose="02000403000000020004" pitchFamily="2" charset="-127"/>
+              <a:ea typeface="Pretendard Light" panose="02000403000000020004" pitchFamily="2" charset="-127"/>
+              <a:cs typeface="Pretendard Light" panose="02000403000000020004" pitchFamily="2" charset="-127"/>
+            </a:endParaRPr>
+          </a:p>
+        </p:txBody>
+      </p:sp>
+    </p:spTree>
+    <p:extLst>
+      <p:ext uri="{BB962C8B-B14F-4D97-AF65-F5344CB8AC3E}">
+        <p14:creationId xmlns:p14="http://schemas.microsoft.com/office/powerpoint/2010/main" val="2603008017"/>
+      </p:ext>
+    </p:extLst>
+  </p:cSld>
+  <p:clrMapOvr>
+    <a:masterClrMapping/>
+  </p:clrMapOvr>
+</p:sld>
+</file>
+
+<file path=ppt/slides/slide35.xml><?xml version="1.0" encoding="utf-8"?>
+<p:sld xmlns:a="http://schemas.openxmlformats.org/drawingml/2006/main" xmlns:r="http://schemas.openxmlformats.org/officeDocument/2006/relationships" xmlns:p="http://schemas.openxmlformats.org/presentationml/2006/main">
+  <p:cSld>
+    <p:spTree>
+      <p:nvGrpSpPr>
+        <p:cNvPr id="1" name=""/>
+        <p:cNvGrpSpPr/>
+        <p:nvPr/>
+      </p:nvGrpSpPr>
+      <p:grpSpPr>
+        <a:xfrm>
+          <a:off x="0" y="0"/>
+          <a:ext cx="0" cy="0"/>
+          <a:chOff x="0" y="0"/>
+          <a:chExt cx="0" cy="0"/>
+        </a:xfrm>
+      </p:grpSpPr>
+      <p:sp>
+        <p:nvSpPr>
+          <p:cNvPr id="2" name="제목 1">
+            <a:extLst>
+              <a:ext uri="{FF2B5EF4-FFF2-40B4-BE49-F238E27FC236}">
+                <a16:creationId xmlns:a16="http://schemas.microsoft.com/office/drawing/2014/main" id="{A8D8F1F4-4871-4B45-B08E-F92ACDB80FE6}"/>
+              </a:ext>
+            </a:extLst>
+          </p:cNvPr>
+          <p:cNvSpPr>
+            <a:spLocks noGrp="1"/>
+          </p:cNvSpPr>
+          <p:nvPr>
+            <p:ph type="title"/>
+          </p:nvPr>
+        </p:nvSpPr>
+        <p:spPr/>
+        <p:txBody>
+          <a:bodyPr>
+            <a:normAutofit/>
+          </a:bodyPr>
+          <a:lstStyle/>
+          <a:p>
+            <a:r>
+              <a:rPr lang="ko-KR" altLang="en-US" dirty="0"/>
+              <a:t>왜 </a:t>
+            </a:r>
+            <a:r>
+              <a:rPr lang="en-US" altLang="ko-KR" dirty="0"/>
+              <a:t>Optimizer</a:t>
+            </a:r>
+            <a:r>
+              <a:rPr lang="ko-KR" altLang="en-US" dirty="0"/>
+              <a:t>가 필요한가</a:t>
+            </a:r>
+            <a:r>
+              <a:rPr lang="en-US" altLang="ko-KR" dirty="0"/>
+              <a:t>?</a:t>
+            </a:r>
+            <a:endParaRPr lang="ko-KR" altLang="en-US" b="1" dirty="0">
+              <a:latin typeface="+mj-ea"/>
+            </a:endParaRPr>
+          </a:p>
+        </p:txBody>
+      </p:sp>
+      <p:sp>
+        <p:nvSpPr>
+          <p:cNvPr id="3" name="내용 개체 틀 2">
+            <a:extLst>
+              <a:ext uri="{FF2B5EF4-FFF2-40B4-BE49-F238E27FC236}">
+                <a16:creationId xmlns:a16="http://schemas.microsoft.com/office/drawing/2014/main" id="{659642C9-AD46-4D01-B61B-33D812751E95}"/>
+              </a:ext>
+            </a:extLst>
+          </p:cNvPr>
+          <p:cNvSpPr>
+            <a:spLocks noGrp="1"/>
+          </p:cNvSpPr>
+          <p:nvPr>
+            <p:ph idx="1"/>
+          </p:nvPr>
+        </p:nvSpPr>
+        <p:spPr>
+          <a:xfrm>
+            <a:off x="251788" y="1145407"/>
+            <a:ext cx="11688424" cy="4680954"/>
+          </a:xfrm>
+        </p:spPr>
+        <p:txBody>
+          <a:bodyPr>
+            <a:noAutofit/>
+          </a:bodyPr>
+          <a:lstStyle/>
+          <a:p>
+            <a:pPr marL="0" indent="0">
+              <a:lnSpc>
+                <a:spcPct val="150000"/>
+              </a:lnSpc>
+              <a:buNone/>
+            </a:pPr>
+            <a:r>
+              <a:rPr lang="ko-KR" altLang="en-US" dirty="0">
+                <a:latin typeface="+mn-ea"/>
+              </a:rPr>
+              <a:t>✅ </a:t>
+            </a:r>
+            <a:r>
+              <a:rPr lang="ko-KR" altLang="en-US" dirty="0" err="1">
+                <a:latin typeface="+mn-ea"/>
+              </a:rPr>
+              <a:t>학습률</a:t>
+            </a:r>
+            <a:r>
+              <a:rPr lang="en-US" altLang="ko-KR" dirty="0">
+                <a:latin typeface="+mn-ea"/>
+              </a:rPr>
+              <a:t>(Learning</a:t>
+            </a:r>
+            <a:r>
+              <a:rPr lang="ko-KR" altLang="en-US" dirty="0">
+                <a:latin typeface="+mn-ea"/>
+              </a:rPr>
+              <a:t> </a:t>
+            </a:r>
+            <a:r>
+              <a:rPr lang="en-US" altLang="ko-KR" dirty="0">
+                <a:latin typeface="+mn-ea"/>
+              </a:rPr>
+              <a:t>rate) </a:t>
+            </a:r>
+            <a:r>
+              <a:rPr lang="ko-KR" altLang="en-US" dirty="0">
+                <a:latin typeface="+mn-ea"/>
+              </a:rPr>
+              <a:t>최적화 기법</a:t>
+            </a:r>
+            <a:endParaRPr lang="en-US" altLang="ko-KR" dirty="0">
+              <a:latin typeface="+mn-ea"/>
+            </a:endParaRPr>
+          </a:p>
+          <a:p>
+            <a:pPr lvl="1">
+              <a:lnSpc>
+                <a:spcPct val="150000"/>
+              </a:lnSpc>
+              <a:buFont typeface="Wingdings" panose="05000000000000000000" pitchFamily="2" charset="2"/>
+              <a:buChar char="§"/>
+            </a:pPr>
+            <a:r>
+              <a:rPr lang="en-US" altLang="ko-KR" i="0" dirty="0">
+                <a:solidFill>
+                  <a:srgbClr val="212529"/>
+                </a:solidFill>
+                <a:effectLst/>
+                <a:latin typeface="+mn-ea"/>
+              </a:rPr>
+              <a:t>learning rate decay</a:t>
+            </a:r>
+          </a:p>
+          <a:p>
+            <a:pPr lvl="2">
+              <a:lnSpc>
+                <a:spcPct val="150000"/>
+              </a:lnSpc>
+            </a:pPr>
+            <a:r>
+              <a:rPr lang="ko-KR" altLang="en-US" dirty="0">
+                <a:solidFill>
+                  <a:srgbClr val="212529"/>
+                </a:solidFill>
+                <a:latin typeface="+mn-ea"/>
+              </a:rPr>
+              <a:t>초반에는 큰 폭으로 이동하여 빠르게 내려가고</a:t>
+            </a:r>
+            <a:r>
+              <a:rPr lang="en-US" altLang="ko-KR" dirty="0">
+                <a:solidFill>
+                  <a:srgbClr val="212529"/>
+                </a:solidFill>
+                <a:latin typeface="+mn-ea"/>
+              </a:rPr>
+              <a:t>, </a:t>
+            </a:r>
+            <a:r>
+              <a:rPr lang="ko-KR" altLang="en-US" dirty="0">
+                <a:solidFill>
+                  <a:srgbClr val="212529"/>
+                </a:solidFill>
+                <a:latin typeface="+mn-ea"/>
+              </a:rPr>
+              <a:t>점차 </a:t>
+            </a:r>
+            <a:r>
+              <a:rPr lang="ko-KR" altLang="en-US" dirty="0" err="1">
+                <a:solidFill>
+                  <a:srgbClr val="212529"/>
+                </a:solidFill>
+                <a:latin typeface="+mn-ea"/>
+              </a:rPr>
+              <a:t>학습률을</a:t>
+            </a:r>
+            <a:r>
+              <a:rPr lang="ko-KR" altLang="en-US" dirty="0">
+                <a:solidFill>
+                  <a:srgbClr val="212529"/>
+                </a:solidFill>
+                <a:latin typeface="+mn-ea"/>
+              </a:rPr>
+              <a:t> 줄여서 조심스럽게 내려가는 방법</a:t>
+            </a:r>
+            <a:endParaRPr lang="en-US" altLang="ko-KR" dirty="0">
+              <a:solidFill>
+                <a:srgbClr val="212529"/>
+              </a:solidFill>
+              <a:latin typeface="+mn-ea"/>
+            </a:endParaRPr>
+          </a:p>
+          <a:p>
+            <a:pPr lvl="1">
+              <a:lnSpc>
+                <a:spcPct val="150000"/>
+              </a:lnSpc>
+              <a:buFont typeface="Wingdings" panose="05000000000000000000" pitchFamily="2" charset="2"/>
+              <a:buChar char="§"/>
+            </a:pPr>
+            <a:r>
+              <a:rPr lang="en-US" altLang="ko-KR" i="0" dirty="0">
+                <a:solidFill>
+                  <a:srgbClr val="212529"/>
+                </a:solidFill>
+                <a:effectLst/>
+                <a:latin typeface="+mn-ea"/>
+              </a:rPr>
+              <a:t>Adaptive learning rate</a:t>
+            </a:r>
+          </a:p>
+          <a:p>
+            <a:pPr lvl="2">
+              <a:lnSpc>
+                <a:spcPct val="150000"/>
+              </a:lnSpc>
+            </a:pPr>
+            <a:r>
+              <a:rPr lang="ko-KR" altLang="en-US" dirty="0">
+                <a:solidFill>
+                  <a:srgbClr val="212529"/>
+                </a:solidFill>
+                <a:latin typeface="+mn-ea"/>
+              </a:rPr>
+              <a:t>경사가 가파르면 조금 이동하고 완만하면 크게 이동</a:t>
+            </a:r>
+            <a:endParaRPr lang="en-US" altLang="ko-KR" dirty="0">
+              <a:solidFill>
+                <a:srgbClr val="212529"/>
+              </a:solidFill>
+              <a:latin typeface="+mn-ea"/>
+            </a:endParaRPr>
+          </a:p>
+          <a:p>
+            <a:pPr lvl="1">
+              <a:lnSpc>
+                <a:spcPct val="150000"/>
+              </a:lnSpc>
+              <a:buFont typeface="Wingdings" panose="05000000000000000000" pitchFamily="2" charset="2"/>
+              <a:buChar char="§"/>
+            </a:pPr>
+            <a:r>
+              <a:rPr lang="en-US" altLang="ko-KR" dirty="0">
+                <a:solidFill>
+                  <a:srgbClr val="212529"/>
+                </a:solidFill>
+                <a:latin typeface="+mn-ea"/>
+              </a:rPr>
+              <a:t>Momentum</a:t>
+            </a:r>
+          </a:p>
+          <a:p>
+            <a:pPr lvl="2">
+              <a:lnSpc>
+                <a:spcPct val="150000"/>
+              </a:lnSpc>
+            </a:pPr>
+            <a:r>
+              <a:rPr lang="ko-KR" altLang="en-US" dirty="0"/>
+              <a:t>기울기</a:t>
+            </a:r>
+            <a:r>
+              <a:rPr lang="en-US" altLang="ko-KR" dirty="0"/>
+              <a:t>(gradient) </a:t>
+            </a:r>
+            <a:r>
+              <a:rPr lang="ko-KR" altLang="en-US" dirty="0"/>
+              <a:t>업데이트에 </a:t>
+            </a:r>
+            <a:r>
+              <a:rPr lang="ko-KR" altLang="en-US" b="1" dirty="0"/>
+              <a:t>이전 업데이트 방향의 관성을 추가</a:t>
+            </a:r>
+            <a:r>
+              <a:rPr lang="ko-KR" altLang="en-US" dirty="0"/>
+              <a:t>하여 더 빠르고 안정적으로 </a:t>
+            </a:r>
+            <a:r>
+              <a:rPr lang="ko-KR" altLang="en-US" dirty="0" err="1"/>
+              <a:t>최적값에</a:t>
+            </a:r>
+            <a:r>
+              <a:rPr lang="ko-KR" altLang="en-US" dirty="0"/>
+              <a:t> 도달하도록 돕는 방법</a:t>
+            </a:r>
+            <a:endParaRPr lang="en-US" altLang="ko-KR" dirty="0">
+              <a:latin typeface="+mn-ea"/>
+            </a:endParaRPr>
+          </a:p>
+        </p:txBody>
+      </p:sp>
+      <p:sp>
+        <p:nvSpPr>
+          <p:cNvPr id="4" name="날짜 개체 틀 3">
+            <a:extLst>
+              <a:ext uri="{FF2B5EF4-FFF2-40B4-BE49-F238E27FC236}">
+                <a16:creationId xmlns:a16="http://schemas.microsoft.com/office/drawing/2014/main" id="{590F8720-7C11-4CC8-8215-3F57F085A24B}"/>
+              </a:ext>
+            </a:extLst>
+          </p:cNvPr>
+          <p:cNvSpPr>
+            <a:spLocks noGrp="1"/>
+          </p:cNvSpPr>
+          <p:nvPr>
+            <p:ph type="dt" sz="half" idx="10"/>
+          </p:nvPr>
+        </p:nvSpPr>
+        <p:spPr/>
+        <p:txBody>
+          <a:bodyPr/>
+          <a:lstStyle/>
+          <a:p>
+            <a:fld id="{0F78D9C4-20C1-4B15-A116-16DC77AD9A1E}" type="datetime1">
+              <a:rPr lang="ko-KR" altLang="en-US" smtClean="0"/>
+              <a:t>2026-02-12</a:t>
+            </a:fld>
+            <a:endParaRPr lang="ko-KR" altLang="en-US"/>
+          </a:p>
+        </p:txBody>
+      </p:sp>
+      <p:sp>
+        <p:nvSpPr>
+          <p:cNvPr id="5" name="슬라이드 번호 개체 틀 4">
+            <a:extLst>
+              <a:ext uri="{FF2B5EF4-FFF2-40B4-BE49-F238E27FC236}">
+                <a16:creationId xmlns:a16="http://schemas.microsoft.com/office/drawing/2014/main" id="{E86D5960-457B-4CA2-B0B3-F7F0DADA85D8}"/>
+              </a:ext>
+            </a:extLst>
+          </p:cNvPr>
+          <p:cNvSpPr>
+            <a:spLocks noGrp="1"/>
+          </p:cNvSpPr>
+          <p:nvPr>
+            <p:ph type="sldNum" sz="quarter" idx="12"/>
+          </p:nvPr>
+        </p:nvSpPr>
+        <p:spPr/>
+        <p:txBody>
+          <a:bodyPr/>
+          <a:lstStyle/>
+          <a:p>
+            <a:fld id="{083A2CE0-18CD-4102-B738-4ACFF9E68BA4}" type="slidenum">
+              <a:rPr lang="ko-KR" altLang="en-US" smtClean="0"/>
+              <a:t>35</a:t>
+            </a:fld>
+            <a:endParaRPr lang="ko-KR" altLang="en-US"/>
+          </a:p>
+        </p:txBody>
+      </p:sp>
+    </p:spTree>
+    <p:extLst>
+      <p:ext uri="{BB962C8B-B14F-4D97-AF65-F5344CB8AC3E}">
+        <p14:creationId xmlns:p14="http://schemas.microsoft.com/office/powerpoint/2010/main" val="3567262447"/>
+      </p:ext>
+    </p:extLst>
+  </p:cSld>
+  <p:clrMapOvr>
+    <a:masterClrMapping/>
+  </p:clrMapOvr>
+</p:sld>
+</file>
+
+<file path=ppt/slides/slide36.xml><?xml version="1.0" encoding="utf-8"?>
+<p:sld xmlns:a="http://schemas.openxmlformats.org/drawingml/2006/main" xmlns:r="http://schemas.openxmlformats.org/officeDocument/2006/relationships" xmlns:p="http://schemas.openxmlformats.org/presentationml/2006/main">
+  <p:cSld>
+    <p:spTree>
+      <p:nvGrpSpPr>
+        <p:cNvPr id="1" name=""/>
+        <p:cNvGrpSpPr/>
+        <p:nvPr/>
+      </p:nvGrpSpPr>
+      <p:grpSpPr>
+        <a:xfrm>
+          <a:off x="0" y="0"/>
+          <a:ext cx="0" cy="0"/>
+          <a:chOff x="0" y="0"/>
+          <a:chExt cx="0" cy="0"/>
+        </a:xfrm>
+      </p:grpSpPr>
+      <p:sp>
+        <p:nvSpPr>
+          <p:cNvPr id="2" name="제목 1">
+            <a:extLst>
+              <a:ext uri="{FF2B5EF4-FFF2-40B4-BE49-F238E27FC236}">
+                <a16:creationId xmlns:a16="http://schemas.microsoft.com/office/drawing/2014/main" id="{A8D8F1F4-4871-4B45-B08E-F92ACDB80FE6}"/>
+              </a:ext>
+            </a:extLst>
+          </p:cNvPr>
+          <p:cNvSpPr>
+            <a:spLocks noGrp="1"/>
+          </p:cNvSpPr>
+          <p:nvPr>
+            <p:ph type="title"/>
+          </p:nvPr>
+        </p:nvSpPr>
+        <p:spPr/>
+        <p:txBody>
+          <a:bodyPr>
+            <a:normAutofit/>
+          </a:bodyPr>
+          <a:lstStyle/>
+          <a:p>
+            <a:r>
+              <a:rPr lang="ko-KR" altLang="en-US" dirty="0"/>
+              <a:t>왜 </a:t>
+            </a:r>
+            <a:r>
+              <a:rPr lang="en-US" altLang="ko-KR" dirty="0"/>
+              <a:t>Optimizer</a:t>
+            </a:r>
+            <a:r>
+              <a:rPr lang="ko-KR" altLang="en-US" dirty="0"/>
+              <a:t>가 필요한가</a:t>
+            </a:r>
+            <a:r>
+              <a:rPr lang="en-US" altLang="ko-KR" dirty="0"/>
+              <a:t>?</a:t>
+            </a:r>
+            <a:endParaRPr lang="ko-KR" altLang="en-US" b="1" dirty="0">
+              <a:latin typeface="+mj-ea"/>
+            </a:endParaRPr>
+          </a:p>
+        </p:txBody>
+      </p:sp>
+      <p:sp>
+        <p:nvSpPr>
+          <p:cNvPr id="4" name="날짜 개체 틀 3">
+            <a:extLst>
+              <a:ext uri="{FF2B5EF4-FFF2-40B4-BE49-F238E27FC236}">
+                <a16:creationId xmlns:a16="http://schemas.microsoft.com/office/drawing/2014/main" id="{590F8720-7C11-4CC8-8215-3F57F085A24B}"/>
+              </a:ext>
+            </a:extLst>
+          </p:cNvPr>
+          <p:cNvSpPr>
+            <a:spLocks noGrp="1"/>
+          </p:cNvSpPr>
+          <p:nvPr>
+            <p:ph type="dt" sz="half" idx="10"/>
+          </p:nvPr>
+        </p:nvSpPr>
+        <p:spPr/>
+        <p:txBody>
+          <a:bodyPr/>
+          <a:lstStyle/>
+          <a:p>
+            <a:fld id="{0F78D9C4-20C1-4B15-A116-16DC77AD9A1E}" type="datetime1">
+              <a:rPr lang="ko-KR" altLang="en-US" smtClean="0"/>
+              <a:t>2026-02-12</a:t>
+            </a:fld>
+            <a:endParaRPr lang="ko-KR" altLang="en-US"/>
+          </a:p>
+        </p:txBody>
+      </p:sp>
+      <p:sp>
+        <p:nvSpPr>
+          <p:cNvPr id="5" name="슬라이드 번호 개체 틀 4">
+            <a:extLst>
+              <a:ext uri="{FF2B5EF4-FFF2-40B4-BE49-F238E27FC236}">
+                <a16:creationId xmlns:a16="http://schemas.microsoft.com/office/drawing/2014/main" id="{E86D5960-457B-4CA2-B0B3-F7F0DADA85D8}"/>
+              </a:ext>
+            </a:extLst>
+          </p:cNvPr>
+          <p:cNvSpPr>
+            <a:spLocks noGrp="1"/>
+          </p:cNvSpPr>
+          <p:nvPr>
+            <p:ph type="sldNum" sz="quarter" idx="12"/>
+          </p:nvPr>
+        </p:nvSpPr>
+        <p:spPr/>
+        <p:txBody>
+          <a:bodyPr/>
+          <a:lstStyle/>
+          <a:p>
+            <a:fld id="{083A2CE0-18CD-4102-B738-4ACFF9E68BA4}" type="slidenum">
+              <a:rPr lang="ko-KR" altLang="en-US" smtClean="0"/>
+              <a:t>36</a:t>
+            </a:fld>
+            <a:endParaRPr lang="ko-KR" altLang="en-US"/>
+          </a:p>
+        </p:txBody>
+      </p:sp>
+      <p:pic>
+        <p:nvPicPr>
+          <p:cNvPr id="4098" name="Picture 2" descr="Accelerating privacy-preserving momentum federated learning for industrial  cyber-physical systems | Complex &amp; Intelligent Systems"/>
+          <p:cNvPicPr>
+            <a:picLocks noChangeAspect="1" noChangeArrowheads="1"/>
+          </p:cNvPicPr>
+          <p:nvPr/>
+        </p:nvPicPr>
+        <p:blipFill>
+          <a:blip r:embed="rId3">
+            <a:extLst>
+              <a:ext uri="{28A0092B-C50C-407E-A947-70E740481C1C}">
+                <a14:useLocalDpi xmlns:a14="http://schemas.microsoft.com/office/drawing/2010/main" val="0"/>
+              </a:ext>
+            </a:extLst>
+          </a:blip>
+          <a:srcRect/>
+          <a:stretch>
+            <a:fillRect/>
+          </a:stretch>
+        </p:blipFill>
+        <p:spPr bwMode="auto">
+          <a:xfrm>
+            <a:off x="928647" y="1946514"/>
+            <a:ext cx="10315656" cy="3418474"/>
+          </a:xfrm>
+          <a:prstGeom prst="rect">
+            <a:avLst/>
+          </a:prstGeom>
+          <a:noFill/>
+          <a:extLst>
+            <a:ext uri="{909E8E84-426E-40DD-AFC4-6F175D3DCCD1}">
+              <a14:hiddenFill xmlns:a14="http://schemas.microsoft.com/office/drawing/2010/main">
+                <a:solidFill>
+                  <a:srgbClr val="FFFFFF"/>
+                </a:solidFill>
+              </a14:hiddenFill>
+            </a:ext>
+          </a:extLst>
+        </p:spPr>
+      </p:pic>
+      <p:sp>
+        <p:nvSpPr>
+          <p:cNvPr id="6" name="TextBox 5">
+            <a:extLst>
+              <a:ext uri="{FF2B5EF4-FFF2-40B4-BE49-F238E27FC236}">
+                <a16:creationId xmlns:a16="http://schemas.microsoft.com/office/drawing/2014/main" id="{CB1CE735-6D46-BC65-837D-FA30EC48237D}"/>
+              </a:ext>
+            </a:extLst>
+          </p:cNvPr>
+          <p:cNvSpPr txBox="1"/>
+          <p:nvPr/>
+        </p:nvSpPr>
+        <p:spPr>
+          <a:xfrm>
+            <a:off x="633845" y="1361294"/>
+            <a:ext cx="6109854" cy="369332"/>
+          </a:xfrm>
+          <a:prstGeom prst="rect">
+            <a:avLst/>
+          </a:prstGeom>
+          <a:noFill/>
+        </p:spPr>
+        <p:txBody>
+          <a:bodyPr wrap="square">
+            <a:spAutoFit/>
+          </a:bodyPr>
+          <a:lstStyle/>
+          <a:p>
+            <a:r>
+              <a:rPr lang="ko-KR" altLang="en-US" dirty="0">
+                <a:latin typeface="+mj-ea"/>
+                <a:ea typeface="+mj-ea"/>
+              </a:rPr>
+              <a:t>손실 함수</a:t>
+            </a:r>
+            <a:r>
+              <a:rPr lang="en-US" altLang="ko-KR" dirty="0">
+                <a:latin typeface="+mj-ea"/>
+                <a:ea typeface="+mj-ea"/>
+              </a:rPr>
+              <a:t>(loss function)</a:t>
+            </a:r>
+            <a:r>
+              <a:rPr lang="ko-KR" altLang="en-US" dirty="0">
+                <a:latin typeface="+mj-ea"/>
+                <a:ea typeface="+mj-ea"/>
+              </a:rPr>
+              <a:t>의 등고선</a:t>
+            </a:r>
+          </a:p>
+        </p:txBody>
+      </p:sp>
+      <p:sp>
+        <p:nvSpPr>
+          <p:cNvPr id="7" name="Rectangle 1">
+            <a:extLst>
+              <a:ext uri="{FF2B5EF4-FFF2-40B4-BE49-F238E27FC236}">
+                <a16:creationId xmlns:a16="http://schemas.microsoft.com/office/drawing/2014/main" id="{9CC0A890-1D30-D26C-2DFF-748B84BAD7AF}"/>
+              </a:ext>
+            </a:extLst>
+          </p:cNvPr>
+          <p:cNvSpPr>
+            <a:spLocks noChangeArrowheads="1"/>
+          </p:cNvSpPr>
+          <p:nvPr/>
+        </p:nvSpPr>
+        <p:spPr bwMode="auto">
+          <a:xfrm>
+            <a:off x="7557654" y="1158205"/>
+            <a:ext cx="4395355" cy="923330"/>
+          </a:xfrm>
+          <a:prstGeom prst="rect">
+            <a:avLst/>
+          </a:prstGeom>
+          <a:noFill/>
+          <a:ln>
+            <a:noFill/>
+          </a:ln>
+          <a:effectLst/>
+          <a:extLst>
+            <a:ext uri="{909E8E84-426E-40DD-AFC4-6F175D3DCCD1}">
+              <a14:hiddenFill xmlns:a14="http://schemas.microsoft.com/office/drawing/2010/main">
+                <a:solidFill>
+                  <a:schemeClr val="accent1"/>
+                </a:solidFill>
+              </a14:hiddenFill>
+            </a:ext>
+            <a:ext uri="{91240B29-F687-4F45-9708-019B960494DF}">
+              <a14:hiddenLine xmlns:a14="http://schemas.microsoft.com/office/drawing/2010/main" w="9525">
+                <a:solidFill>
+                  <a:schemeClr val="tx1"/>
+                </a:solidFill>
+                <a:miter lim="800000"/>
+                <a:headEnd/>
+                <a:tailEnd/>
+              </a14:hiddenLine>
+            </a:ext>
+            <a:ext uri="{AF507438-7753-43E0-B8FC-AC1667EBCBE1}">
+              <a14:hiddenEffects xmlns:a14="http://schemas.microsoft.com/office/drawing/2010/main">
+                <a:effectLst>
+                  <a:outerShdw dist="35921" dir="2700000" algn="ctr" rotWithShape="0">
+                    <a:schemeClr val="bg2"/>
+                  </a:outerShdw>
+                </a:effectLst>
+              </a14:hiddenEffects>
+            </a:ext>
+          </a:extLst>
+        </p:spPr>
+        <p:txBody>
+          <a:bodyPr vert="horz" wrap="square" lIns="91440" tIns="45720" rIns="91440" bIns="45720" numCol="1" anchor="ctr" anchorCtr="0" compatLnSpc="1">
+            <a:prstTxWarp prst="textNoShape">
+              <a:avLst/>
+            </a:prstTxWarp>
+            <a:spAutoFit/>
+          </a:bodyPr>
+          <a:lstStyle/>
+          <a:p>
+            <a:pPr marL="0" marR="0" lvl="0" indent="0" algn="l" defTabSz="914400" rtl="0" eaLnBrk="0" fontAlgn="base" latinLnBrk="0" hangingPunct="0">
+              <a:lnSpc>
+                <a:spcPct val="100000"/>
+              </a:lnSpc>
+              <a:spcBef>
+                <a:spcPct val="0"/>
+              </a:spcBef>
+              <a:spcAft>
+                <a:spcPct val="0"/>
+              </a:spcAft>
+              <a:buClrTx/>
+              <a:buSzTx/>
+              <a:buFontTx/>
+              <a:buChar char="•"/>
+              <a:tabLst/>
+            </a:pPr>
+            <a:r>
+              <a:rPr kumimoji="0" lang="ko-KR" altLang="ko-KR" sz="1800" b="0" i="0" u="none" strike="noStrike" cap="none" normalizeH="0" baseline="0" dirty="0">
+                <a:ln>
+                  <a:noFill/>
+                </a:ln>
+                <a:solidFill>
+                  <a:schemeClr val="tx1"/>
+                </a:solidFill>
+                <a:effectLst/>
+                <a:latin typeface="Arial" panose="020B0604020202020204" pitchFamily="34" charset="0"/>
+              </a:rPr>
+              <a:t>동그란 타원들 = 같은 손실 값을 가지는 지점들</a:t>
+            </a:r>
+          </a:p>
+          <a:p>
+            <a:pPr marL="0" marR="0" lvl="0" indent="0" algn="l" defTabSz="914400" rtl="0" eaLnBrk="0" fontAlgn="base" latinLnBrk="0" hangingPunct="0">
+              <a:lnSpc>
+                <a:spcPct val="100000"/>
+              </a:lnSpc>
+              <a:spcBef>
+                <a:spcPct val="0"/>
+              </a:spcBef>
+              <a:spcAft>
+                <a:spcPct val="0"/>
+              </a:spcAft>
+              <a:buClrTx/>
+              <a:buSzTx/>
+              <a:buFontTx/>
+              <a:buChar char="•"/>
+              <a:tabLst/>
+            </a:pPr>
+            <a:r>
+              <a:rPr kumimoji="0" lang="ko-KR" altLang="ko-KR" sz="1800" b="0" i="0" u="none" strike="noStrike" cap="none" normalizeH="0" baseline="0" dirty="0">
+                <a:ln>
+                  <a:noFill/>
+                </a:ln>
+                <a:solidFill>
+                  <a:schemeClr val="tx1"/>
+                </a:solidFill>
+                <a:effectLst/>
+                <a:latin typeface="Arial" panose="020B0604020202020204" pitchFamily="34" charset="0"/>
+              </a:rPr>
+              <a:t>중심(</a:t>
+            </a:r>
+            <a:r>
+              <a:rPr kumimoji="0" lang="ko-KR" altLang="ko-KR" sz="1800" b="0" i="0" u="none" strike="noStrike" cap="none" normalizeH="0" baseline="0" dirty="0" err="1">
+                <a:ln>
+                  <a:noFill/>
+                </a:ln>
+                <a:solidFill>
+                  <a:schemeClr val="tx1"/>
+                </a:solidFill>
+                <a:effectLst/>
+                <a:latin typeface="Arial" panose="020B0604020202020204" pitchFamily="34" charset="0"/>
+              </a:rPr>
+              <a:t>O</a:t>
+            </a:r>
+            <a:r>
+              <a:rPr kumimoji="0" lang="ko-KR" altLang="ko-KR" sz="1800" b="0" i="0" u="none" strike="noStrike" cap="none" normalizeH="0" baseline="0" dirty="0">
+                <a:ln>
+                  <a:noFill/>
+                </a:ln>
+                <a:solidFill>
+                  <a:schemeClr val="tx1"/>
+                </a:solidFill>
+                <a:effectLst/>
+                <a:latin typeface="Arial" panose="020B0604020202020204" pitchFamily="34" charset="0"/>
+              </a:rPr>
+              <a:t>) = </a:t>
+            </a:r>
+            <a:r>
+              <a:rPr kumimoji="0" lang="ko-KR" altLang="ko-KR" sz="1800" b="0" i="0" u="none" strike="noStrike" cap="none" normalizeH="0" baseline="0" dirty="0" err="1">
+                <a:ln>
+                  <a:noFill/>
+                </a:ln>
+                <a:solidFill>
+                  <a:schemeClr val="tx1"/>
+                </a:solidFill>
+                <a:effectLst/>
+                <a:latin typeface="Arial" panose="020B0604020202020204" pitchFamily="34" charset="0"/>
+              </a:rPr>
+              <a:t>최적점</a:t>
+            </a:r>
+            <a:r>
+              <a:rPr kumimoji="0" lang="ko-KR" altLang="ko-KR" sz="1800" b="0" i="0" u="none" strike="noStrike" cap="none" normalizeH="0" baseline="0" dirty="0">
+                <a:ln>
+                  <a:noFill/>
+                </a:ln>
+                <a:solidFill>
+                  <a:schemeClr val="tx1"/>
+                </a:solidFill>
+                <a:effectLst/>
+                <a:latin typeface="Arial" panose="020B0604020202020204" pitchFamily="34" charset="0"/>
+              </a:rPr>
+              <a:t> (손실 최소)</a:t>
+            </a:r>
+          </a:p>
+          <a:p>
+            <a:pPr marL="0" marR="0" lvl="0" indent="0" algn="l" defTabSz="914400" rtl="0" eaLnBrk="0" fontAlgn="base" latinLnBrk="0" hangingPunct="0">
+              <a:lnSpc>
+                <a:spcPct val="100000"/>
+              </a:lnSpc>
+              <a:spcBef>
+                <a:spcPct val="0"/>
+              </a:spcBef>
+              <a:spcAft>
+                <a:spcPct val="0"/>
+              </a:spcAft>
+              <a:buClrTx/>
+              <a:buSzTx/>
+              <a:buFontTx/>
+              <a:buChar char="•"/>
+              <a:tabLst/>
+            </a:pPr>
+            <a:r>
+              <a:rPr kumimoji="0" lang="ko-KR" altLang="ko-KR" sz="1800" b="0" i="0" u="none" strike="noStrike" cap="none" normalizeH="0" baseline="0" dirty="0" err="1">
+                <a:ln>
+                  <a:noFill/>
+                </a:ln>
+                <a:solidFill>
+                  <a:schemeClr val="tx1"/>
+                </a:solidFill>
+                <a:effectLst/>
+                <a:latin typeface="Arial" panose="020B0604020202020204" pitchFamily="34" charset="0"/>
+              </a:rPr>
+              <a:t>P</a:t>
+            </a:r>
+            <a:r>
+              <a:rPr kumimoji="0" lang="ko-KR" altLang="ko-KR" sz="1800" b="0" i="0" u="none" strike="noStrike" cap="none" normalizeH="0" baseline="0" dirty="0">
+                <a:ln>
+                  <a:noFill/>
+                </a:ln>
+                <a:solidFill>
+                  <a:schemeClr val="tx1"/>
+                </a:solidFill>
+                <a:effectLst/>
+                <a:latin typeface="Arial" panose="020B0604020202020204" pitchFamily="34" charset="0"/>
+              </a:rPr>
+              <a:t> = 시작점</a:t>
+            </a:r>
+          </a:p>
+        </p:txBody>
+      </p:sp>
+    </p:spTree>
+    <p:extLst>
+      <p:ext uri="{BB962C8B-B14F-4D97-AF65-F5344CB8AC3E}">
+        <p14:creationId xmlns:p14="http://schemas.microsoft.com/office/powerpoint/2010/main" val="1432145884"/>
+      </p:ext>
+    </p:extLst>
+  </p:cSld>
+  <p:clrMapOvr>
+    <a:masterClrMapping/>
+  </p:clrMapOvr>
+</p:sld>
+</file>
+
+<file path=ppt/slides/slide37.xml><?xml version="1.0" encoding="utf-8"?>
+<p:sld xmlns:a="http://schemas.openxmlformats.org/drawingml/2006/main" xmlns:r="http://schemas.openxmlformats.org/officeDocument/2006/relationships" xmlns:p="http://schemas.openxmlformats.org/presentationml/2006/main">
+  <p:cSld>
+    <p:spTree>
+      <p:nvGrpSpPr>
+        <p:cNvPr id="1" name=""/>
+        <p:cNvGrpSpPr/>
+        <p:nvPr/>
+      </p:nvGrpSpPr>
+      <p:grpSpPr>
+        <a:xfrm>
+          <a:off x="0" y="0"/>
+          <a:ext cx="0" cy="0"/>
+          <a:chOff x="0" y="0"/>
+          <a:chExt cx="0" cy="0"/>
+        </a:xfrm>
+      </p:grpSpPr>
+      <p:sp>
+        <p:nvSpPr>
+          <p:cNvPr id="4" name="날짜 개체 틀 3">
+            <a:extLst>
+              <a:ext uri="{FF2B5EF4-FFF2-40B4-BE49-F238E27FC236}">
+                <a16:creationId xmlns:a16="http://schemas.microsoft.com/office/drawing/2014/main" id="{42F7F97D-DAA6-05B8-8DBE-13E9DCB52604}"/>
+              </a:ext>
+            </a:extLst>
+          </p:cNvPr>
+          <p:cNvSpPr>
+            <a:spLocks noGrp="1"/>
+          </p:cNvSpPr>
+          <p:nvPr>
+            <p:ph type="dt" sz="half" idx="10"/>
+          </p:nvPr>
+        </p:nvSpPr>
+        <p:spPr/>
+        <p:txBody>
+          <a:bodyPr/>
+          <a:lstStyle/>
+          <a:p>
+            <a:fld id="{0F78D9C4-20C1-4B15-A116-16DC77AD9A1E}" type="datetime1">
+              <a:rPr lang="ko-KR" altLang="en-US" smtClean="0"/>
+              <a:t>2026-02-12</a:t>
+            </a:fld>
+            <a:endParaRPr lang="ko-KR" altLang="en-US"/>
+          </a:p>
+        </p:txBody>
+      </p:sp>
+      <p:sp>
+        <p:nvSpPr>
+          <p:cNvPr id="5" name="슬라이드 번호 개체 틀 4">
+            <a:extLst>
+              <a:ext uri="{FF2B5EF4-FFF2-40B4-BE49-F238E27FC236}">
+                <a16:creationId xmlns:a16="http://schemas.microsoft.com/office/drawing/2014/main" id="{AC87F9AC-63A1-F987-9209-BA6204B71F30}"/>
+              </a:ext>
+            </a:extLst>
+          </p:cNvPr>
+          <p:cNvSpPr>
+            <a:spLocks noGrp="1"/>
+          </p:cNvSpPr>
+          <p:nvPr>
+            <p:ph type="sldNum" sz="quarter" idx="12"/>
+          </p:nvPr>
+        </p:nvSpPr>
+        <p:spPr/>
+        <p:txBody>
+          <a:bodyPr/>
+          <a:lstStyle/>
+          <a:p>
+            <a:fld id="{083A2CE0-18CD-4102-B738-4ACFF9E68BA4}" type="slidenum">
+              <a:rPr lang="ko-KR" altLang="en-US" smtClean="0"/>
+              <a:t>37</a:t>
+            </a:fld>
+            <a:endParaRPr lang="ko-KR" altLang="en-US"/>
+          </a:p>
+        </p:txBody>
+      </p:sp>
+      <p:pic>
+        <p:nvPicPr>
+          <p:cNvPr id="7" name="그림 6" descr="텍스트, 스크린샷, 도표, 디자인이(가) 표시된 사진&#10;&#10;자동 생성된 설명">
+            <a:extLst>
+              <a:ext uri="{FF2B5EF4-FFF2-40B4-BE49-F238E27FC236}">
+                <a16:creationId xmlns:a16="http://schemas.microsoft.com/office/drawing/2014/main" id="{766D135C-0D25-33A0-2315-2E253AC7A898}"/>
+              </a:ext>
+            </a:extLst>
+          </p:cNvPr>
+          <p:cNvPicPr>
+            <a:picLocks noChangeAspect="1"/>
+          </p:cNvPicPr>
+          <p:nvPr/>
+        </p:nvPicPr>
+        <p:blipFill>
+          <a:blip r:embed="rId2">
+            <a:extLst>
+              <a:ext uri="{28A0092B-C50C-407E-A947-70E740481C1C}">
+                <a14:useLocalDpi xmlns:a14="http://schemas.microsoft.com/office/drawing/2010/main" val="0"/>
+              </a:ext>
+            </a:extLst>
+          </a:blip>
+          <a:stretch>
+            <a:fillRect/>
+          </a:stretch>
+        </p:blipFill>
+        <p:spPr>
+          <a:xfrm>
+            <a:off x="2654300" y="589024"/>
+            <a:ext cx="6883400" cy="5329084"/>
+          </a:xfrm>
+          <a:prstGeom prst="rect">
+            <a:avLst/>
+          </a:prstGeom>
+        </p:spPr>
+      </p:pic>
+      <p:sp>
+        <p:nvSpPr>
+          <p:cNvPr id="3" name="제목 1">
+            <a:extLst>
+              <a:ext uri="{FF2B5EF4-FFF2-40B4-BE49-F238E27FC236}">
+                <a16:creationId xmlns:a16="http://schemas.microsoft.com/office/drawing/2014/main" id="{AA7AE0F9-3DF1-7D7A-FB66-E93A71B33C82}"/>
+              </a:ext>
+            </a:extLst>
+          </p:cNvPr>
+          <p:cNvSpPr txBox="1">
+            <a:spLocks/>
+          </p:cNvSpPr>
+          <p:nvPr/>
+        </p:nvSpPr>
+        <p:spPr>
+          <a:xfrm>
+            <a:off x="124690" y="139308"/>
+            <a:ext cx="4142509" cy="812647"/>
+          </a:xfrm>
+          <a:prstGeom prst="rect">
+            <a:avLst/>
+          </a:prstGeom>
+        </p:spPr>
+        <p:txBody>
+          <a:bodyPr vert="horz" lIns="91440" tIns="45720" rIns="91440" bIns="45720" rtlCol="0" anchor="ctr">
+            <a:normAutofit/>
+          </a:bodyPr>
+          <a:lstStyle>
+            <a:lvl1pPr algn="l" defTabSz="914400" rtl="0" eaLnBrk="1" latinLnBrk="1" hangingPunct="1">
+              <a:lnSpc>
+                <a:spcPct val="90000"/>
+              </a:lnSpc>
+              <a:spcBef>
+                <a:spcPct val="0"/>
+              </a:spcBef>
+              <a:buNone/>
+              <a:defRPr sz="5400" kern="1200">
+                <a:solidFill>
+                  <a:schemeClr val="tx1"/>
+                </a:solidFill>
+                <a:latin typeface="+mj-lt"/>
+                <a:ea typeface="+mj-ea"/>
+                <a:cs typeface="+mj-cs"/>
+              </a:defRPr>
+            </a:lvl1pPr>
+          </a:lstStyle>
+          <a:p>
+            <a:r>
+              <a:rPr lang="ko-KR" altLang="en-US" sz="2800" dirty="0">
+                <a:latin typeface="+mn-ea"/>
+                <a:ea typeface="+mn-ea"/>
+              </a:rPr>
+              <a:t>✅ </a:t>
+            </a:r>
+            <a:r>
+              <a:rPr lang="ko-KR" altLang="en-US" sz="2800" dirty="0" err="1">
+                <a:latin typeface="+mn-ea"/>
+                <a:ea typeface="+mn-ea"/>
+              </a:rPr>
+              <a:t>안장점</a:t>
+            </a:r>
+            <a:r>
+              <a:rPr lang="ko-KR" altLang="en-US" sz="2800" dirty="0">
+                <a:latin typeface="+mn-ea"/>
+                <a:ea typeface="+mn-ea"/>
+              </a:rPr>
+              <a:t> 탈출 시뮬레이션</a:t>
+            </a:r>
+          </a:p>
+        </p:txBody>
+      </p:sp>
+      <p:sp>
+        <p:nvSpPr>
+          <p:cNvPr id="8" name="TextBox 7">
+            <a:extLst>
+              <a:ext uri="{FF2B5EF4-FFF2-40B4-BE49-F238E27FC236}">
+                <a16:creationId xmlns:a16="http://schemas.microsoft.com/office/drawing/2014/main" id="{38B8D091-BAFA-0CA6-B64B-006F1F5E77FA}"/>
+              </a:ext>
+            </a:extLst>
+          </p:cNvPr>
+          <p:cNvSpPr txBox="1"/>
+          <p:nvPr/>
+        </p:nvSpPr>
+        <p:spPr>
+          <a:xfrm>
+            <a:off x="4056062" y="5961500"/>
+            <a:ext cx="4079875" cy="246221"/>
+          </a:xfrm>
+          <a:prstGeom prst="rect">
+            <a:avLst/>
+          </a:prstGeom>
+          <a:noFill/>
+        </p:spPr>
+        <p:txBody>
+          <a:bodyPr wrap="square">
+            <a:spAutoFit/>
+          </a:bodyPr>
+          <a:lstStyle/>
+          <a:p>
+            <a:pPr algn="ctr"/>
+            <a:r>
+              <a:rPr lang="en-US" altLang="ko-KR" sz="1000" dirty="0">
+                <a:solidFill>
+                  <a:schemeClr val="bg2">
+                    <a:lumMod val="75000"/>
+                  </a:schemeClr>
+                </a:solidFill>
+              </a:rPr>
+              <a:t>[</a:t>
+            </a:r>
+            <a:r>
+              <a:rPr lang="ko-KR" altLang="en-US" sz="1000" dirty="0">
+                <a:solidFill>
+                  <a:schemeClr val="bg2">
+                    <a:lumMod val="75000"/>
+                  </a:schemeClr>
+                </a:solidFill>
+              </a:rPr>
+              <a:t>출처</a:t>
+            </a:r>
+            <a:r>
+              <a:rPr lang="en-US" altLang="ko-KR" sz="1000" dirty="0">
+                <a:solidFill>
+                  <a:schemeClr val="bg2">
+                    <a:lumMod val="75000"/>
+                  </a:schemeClr>
+                </a:solidFill>
+              </a:rPr>
+              <a:t>] </a:t>
+            </a:r>
+            <a:r>
+              <a:rPr lang="ko-KR" altLang="en-US" sz="1000" dirty="0">
+                <a:solidFill>
+                  <a:schemeClr val="bg2">
+                    <a:lumMod val="75000"/>
+                  </a:schemeClr>
+                </a:solidFill>
+              </a:rPr>
+              <a:t>https://imgur.com/a/visualizing-optimization-algos-Hqolp</a:t>
+            </a:r>
+          </a:p>
+        </p:txBody>
+      </p:sp>
+    </p:spTree>
+    <p:extLst>
+      <p:ext uri="{BB962C8B-B14F-4D97-AF65-F5344CB8AC3E}">
+        <p14:creationId xmlns:p14="http://schemas.microsoft.com/office/powerpoint/2010/main" val="2199310784"/>
+      </p:ext>
+    </p:extLst>
+  </p:cSld>
+  <p:clrMapOvr>
+    <a:masterClrMapping/>
+  </p:clrMapOvr>
+</p:sld>
+</file>
+
+<file path=ppt/slides/slide38.xml><?xml version="1.0" encoding="utf-8"?>
+<p:sld xmlns:a="http://schemas.openxmlformats.org/drawingml/2006/main" xmlns:r="http://schemas.openxmlformats.org/officeDocument/2006/relationships" xmlns:p="http://schemas.openxmlformats.org/presentationml/2006/main">
+  <p:cSld>
+    <p:spTree>
+      <p:nvGrpSpPr>
+        <p:cNvPr id="1" name="">
+          <a:extLst>
+            <a:ext uri="{FF2B5EF4-FFF2-40B4-BE49-F238E27FC236}">
+              <a16:creationId xmlns:a16="http://schemas.microsoft.com/office/drawing/2014/main" id="{ACBA4ED0-C41D-C278-E1B0-39C11A426E71}"/>
+            </a:ext>
+          </a:extLst>
+        </p:cNvPr>
+        <p:cNvGrpSpPr/>
+        <p:nvPr/>
+      </p:nvGrpSpPr>
+      <p:grpSpPr>
+        <a:xfrm>
+          <a:off x="0" y="0"/>
+          <a:ext cx="0" cy="0"/>
+          <a:chOff x="0" y="0"/>
+          <a:chExt cx="0" cy="0"/>
+        </a:xfrm>
+      </p:grpSpPr>
+      <p:sp>
+        <p:nvSpPr>
+          <p:cNvPr id="2" name="제목 1">
+            <a:extLst>
+              <a:ext uri="{FF2B5EF4-FFF2-40B4-BE49-F238E27FC236}">
+                <a16:creationId xmlns:a16="http://schemas.microsoft.com/office/drawing/2014/main" id="{783D1DC8-9245-4828-7C0D-89F35C0FD1D5}"/>
+              </a:ext>
+            </a:extLst>
+          </p:cNvPr>
+          <p:cNvSpPr>
+            <a:spLocks noGrp="1"/>
+          </p:cNvSpPr>
+          <p:nvPr>
+            <p:ph type="title"/>
+          </p:nvPr>
+        </p:nvSpPr>
+        <p:spPr/>
+        <p:txBody>
+          <a:bodyPr>
+            <a:normAutofit/>
+          </a:bodyPr>
+          <a:lstStyle/>
+          <a:p>
+            <a:r>
+              <a:rPr lang="en-US" altLang="ko-KR" b="1">
+                <a:latin typeface="+mj-ea"/>
+              </a:rPr>
+              <a:t>Optimizer</a:t>
+            </a:r>
+            <a:endParaRPr lang="ko-KR" altLang="en-US" b="1" dirty="0">
+              <a:latin typeface="+mj-ea"/>
+            </a:endParaRPr>
+          </a:p>
+        </p:txBody>
+      </p:sp>
+      <p:sp>
+        <p:nvSpPr>
+          <p:cNvPr id="4" name="날짜 개체 틀 3">
+            <a:extLst>
+              <a:ext uri="{FF2B5EF4-FFF2-40B4-BE49-F238E27FC236}">
+                <a16:creationId xmlns:a16="http://schemas.microsoft.com/office/drawing/2014/main" id="{165BA029-FDF4-BE01-B012-3E27F3E4255E}"/>
+              </a:ext>
+            </a:extLst>
+          </p:cNvPr>
+          <p:cNvSpPr>
+            <a:spLocks noGrp="1"/>
+          </p:cNvSpPr>
+          <p:nvPr>
+            <p:ph type="dt" sz="half" idx="10"/>
+          </p:nvPr>
+        </p:nvSpPr>
+        <p:spPr/>
+        <p:txBody>
+          <a:bodyPr/>
+          <a:lstStyle/>
+          <a:p>
+            <a:fld id="{0F78D9C4-20C1-4B15-A116-16DC77AD9A1E}" type="datetime1">
+              <a:rPr lang="ko-KR" altLang="en-US" smtClean="0"/>
+              <a:t>2026-02-12</a:t>
+            </a:fld>
+            <a:endParaRPr lang="ko-KR" altLang="en-US"/>
+          </a:p>
+        </p:txBody>
+      </p:sp>
+      <p:sp>
+        <p:nvSpPr>
+          <p:cNvPr id="5" name="슬라이드 번호 개체 틀 4">
+            <a:extLst>
+              <a:ext uri="{FF2B5EF4-FFF2-40B4-BE49-F238E27FC236}">
+                <a16:creationId xmlns:a16="http://schemas.microsoft.com/office/drawing/2014/main" id="{B8FB8E11-7ADE-CB64-8077-C1EE630CF7BE}"/>
+              </a:ext>
+            </a:extLst>
+          </p:cNvPr>
+          <p:cNvSpPr>
+            <a:spLocks noGrp="1"/>
+          </p:cNvSpPr>
+          <p:nvPr>
+            <p:ph type="sldNum" sz="quarter" idx="12"/>
+          </p:nvPr>
+        </p:nvSpPr>
+        <p:spPr/>
+        <p:txBody>
+          <a:bodyPr/>
+          <a:lstStyle/>
+          <a:p>
+            <a:fld id="{083A2CE0-18CD-4102-B738-4ACFF9E68BA4}" type="slidenum">
+              <a:rPr lang="ko-KR" altLang="en-US" smtClean="0"/>
+              <a:t>38</a:t>
+            </a:fld>
+            <a:endParaRPr lang="ko-KR" altLang="en-US"/>
+          </a:p>
+        </p:txBody>
+      </p:sp>
+      <p:sp>
+        <p:nvSpPr>
+          <p:cNvPr id="10" name="TextBox 9">
+            <a:extLst>
+              <a:ext uri="{FF2B5EF4-FFF2-40B4-BE49-F238E27FC236}">
+                <a16:creationId xmlns:a16="http://schemas.microsoft.com/office/drawing/2014/main" id="{7E0B772F-CA46-1F40-75E5-509D790159A5}"/>
+              </a:ext>
+            </a:extLst>
+          </p:cNvPr>
+          <p:cNvSpPr txBox="1"/>
+          <p:nvPr/>
+        </p:nvSpPr>
+        <p:spPr>
+          <a:xfrm>
+            <a:off x="251788" y="1145407"/>
+            <a:ext cx="6898312" cy="1782860"/>
+          </a:xfrm>
+          <a:prstGeom prst="rect">
+            <a:avLst/>
+          </a:prstGeom>
+          <a:noFill/>
+        </p:spPr>
+        <p:txBody>
+          <a:bodyPr wrap="square">
+            <a:spAutoFit/>
+          </a:bodyPr>
+          <a:lstStyle/>
+          <a:p>
+            <a:pPr marL="0" indent="0">
+              <a:lnSpc>
+                <a:spcPct val="150000"/>
+              </a:lnSpc>
+              <a:buNone/>
+            </a:pPr>
+            <a:r>
+              <a:rPr lang="ko-KR" altLang="en-US" sz="2800" dirty="0">
+                <a:latin typeface="+mn-ea"/>
+              </a:rPr>
+              <a:t>🔗 참고 링크</a:t>
+            </a:r>
+            <a:endParaRPr lang="en-US" altLang="ko-KR" dirty="0">
+              <a:latin typeface="Pretendard Light" panose="02000403000000020004" pitchFamily="2" charset="-127"/>
+              <a:ea typeface="Pretendard Light" panose="02000403000000020004" pitchFamily="2" charset="-127"/>
+              <a:cs typeface="Pretendard Light" panose="02000403000000020004" pitchFamily="2" charset="-127"/>
+              <a:hlinkClick r:id="rId2"/>
+            </a:endParaRPr>
+          </a:p>
+          <a:p>
+            <a:pPr marL="742950" lvl="1" indent="-285750">
+              <a:lnSpc>
+                <a:spcPct val="150000"/>
+              </a:lnSpc>
+              <a:buFont typeface="Arial" pitchFamily="34" charset="0"/>
+              <a:buChar char="•"/>
+            </a:pPr>
+            <a:r>
+              <a:rPr lang="en-US" altLang="ko-KR" sz="2400" dirty="0">
+                <a:latin typeface="Pretendard Light" panose="02000403000000020004" pitchFamily="2" charset="-127"/>
+                <a:ea typeface="Pretendard Light" panose="02000403000000020004" pitchFamily="2" charset="-127"/>
+                <a:cs typeface="Pretendard Light" panose="02000403000000020004" pitchFamily="2" charset="-127"/>
+                <a:hlinkClick r:id="rId2"/>
+              </a:rPr>
+              <a:t>https://keras.io/api/optimizers/</a:t>
+            </a:r>
+            <a:endParaRPr lang="en-US" altLang="ko-KR" sz="2400" dirty="0">
+              <a:latin typeface="Pretendard Light" panose="02000403000000020004" pitchFamily="2" charset="-127"/>
+              <a:ea typeface="Pretendard Light" panose="02000403000000020004" pitchFamily="2" charset="-127"/>
+              <a:cs typeface="Pretendard Light" panose="02000403000000020004" pitchFamily="2" charset="-127"/>
+            </a:endParaRPr>
+          </a:p>
+          <a:p>
+            <a:pPr marL="742950" lvl="1" indent="-285750">
+              <a:lnSpc>
+                <a:spcPct val="150000"/>
+              </a:lnSpc>
+              <a:buFont typeface="Arial" pitchFamily="34" charset="0"/>
+              <a:buChar char="•"/>
+            </a:pPr>
+            <a:r>
+              <a:rPr lang="en-US" altLang="ko-KR" sz="2400" dirty="0">
+                <a:latin typeface="Pretendard Light" panose="02000403000000020004" pitchFamily="2" charset="-127"/>
+                <a:ea typeface="Pretendard Light" panose="02000403000000020004" pitchFamily="2" charset="-127"/>
+                <a:cs typeface="Pretendard Light" panose="02000403000000020004" pitchFamily="2" charset="-127"/>
+                <a:hlinkClick r:id="rId3"/>
+              </a:rPr>
+              <a:t>https://pytorch.org/docs/stable/optim.html</a:t>
+            </a:r>
+            <a:endParaRPr lang="en-US" altLang="ko-KR" sz="2400" dirty="0">
+              <a:latin typeface="Pretendard Light" panose="02000403000000020004" pitchFamily="2" charset="-127"/>
+              <a:ea typeface="Pretendard Light" panose="02000403000000020004" pitchFamily="2" charset="-127"/>
+              <a:cs typeface="Pretendard Light" panose="02000403000000020004" pitchFamily="2" charset="-127"/>
+            </a:endParaRPr>
+          </a:p>
+        </p:txBody>
+      </p:sp>
+    </p:spTree>
+    <p:extLst>
+      <p:ext uri="{BB962C8B-B14F-4D97-AF65-F5344CB8AC3E}">
+        <p14:creationId xmlns:p14="http://schemas.microsoft.com/office/powerpoint/2010/main" val="3062334820"/>
+      </p:ext>
+    </p:extLst>
+  </p:cSld>
+  <p:clrMapOvr>
+    <a:masterClrMapping/>
+  </p:clrMapOvr>
+</p:sld>
+</file>
+
+<file path=ppt/slides/slide39.xml><?xml version="1.0" encoding="utf-8"?>
+<p:sld xmlns:a="http://schemas.openxmlformats.org/drawingml/2006/main" xmlns:r="http://schemas.openxmlformats.org/officeDocument/2006/relationships" xmlns:p="http://schemas.openxmlformats.org/presentationml/2006/main">
+  <p:cSld>
+    <p:spTree>
+      <p:nvGrpSpPr>
+        <p:cNvPr id="1" name=""/>
+        <p:cNvGrpSpPr/>
+        <p:nvPr/>
+      </p:nvGrpSpPr>
+      <p:grpSpPr>
+        <a:xfrm>
+          <a:off x="0" y="0"/>
+          <a:ext cx="0" cy="0"/>
+          <a:chOff x="0" y="0"/>
+          <a:chExt cx="0" cy="0"/>
+        </a:xfrm>
+      </p:grpSpPr>
+      <p:sp>
+        <p:nvSpPr>
+          <p:cNvPr id="2" name="제목 1">
+            <a:extLst>
+              <a:ext uri="{FF2B5EF4-FFF2-40B4-BE49-F238E27FC236}">
+                <a16:creationId xmlns:a16="http://schemas.microsoft.com/office/drawing/2014/main" id="{FC0A2AB7-4D5E-6614-0E8C-D87C787D466A}"/>
+              </a:ext>
+            </a:extLst>
+          </p:cNvPr>
+          <p:cNvSpPr>
+            <a:spLocks noGrp="1"/>
+          </p:cNvSpPr>
+          <p:nvPr>
+            <p:ph type="title"/>
+          </p:nvPr>
+        </p:nvSpPr>
+        <p:spPr/>
+        <p:txBody>
+          <a:bodyPr/>
+          <a:lstStyle/>
+          <a:p>
+            <a:r>
+              <a:rPr lang="ko-KR" altLang="en-US" dirty="0"/>
+              <a:t>실습</a:t>
+            </a:r>
+            <a:r>
+              <a:rPr lang="en-US" altLang="ko-KR" dirty="0"/>
+              <a:t>1. </a:t>
+            </a:r>
+            <a:r>
+              <a:rPr lang="ko-KR" altLang="en-US" dirty="0" err="1"/>
+              <a:t>경사하강법</a:t>
+            </a:r>
+            <a:r>
+              <a:rPr lang="ko-KR" altLang="en-US"/>
+              <a:t> 구현</a:t>
+            </a:r>
+          </a:p>
+        </p:txBody>
+      </p:sp>
+      <p:sp>
+        <p:nvSpPr>
+          <p:cNvPr id="3" name="내용 개체 틀 2">
+            <a:extLst>
+              <a:ext uri="{FF2B5EF4-FFF2-40B4-BE49-F238E27FC236}">
+                <a16:creationId xmlns:a16="http://schemas.microsoft.com/office/drawing/2014/main" id="{CFE2628F-1AD1-7A7C-57EC-83570A962913}"/>
+              </a:ext>
+            </a:extLst>
+          </p:cNvPr>
+          <p:cNvSpPr>
+            <a:spLocks noGrp="1"/>
+          </p:cNvSpPr>
+          <p:nvPr>
+            <p:ph idx="1"/>
+          </p:nvPr>
+        </p:nvSpPr>
+        <p:spPr/>
+        <p:txBody>
+          <a:bodyPr/>
+          <a:lstStyle/>
+          <a:p>
+            <a:endParaRPr lang="ko-KR" altLang="en-US"/>
+          </a:p>
+        </p:txBody>
+      </p:sp>
+    </p:spTree>
+    <p:extLst>
+      <p:ext uri="{BB962C8B-B14F-4D97-AF65-F5344CB8AC3E}">
+        <p14:creationId xmlns:p14="http://schemas.microsoft.com/office/powerpoint/2010/main" val="3539734480"/>
+      </p:ext>
+    </p:extLst>
+  </p:cSld>
+  <p:clrMapOvr>
+    <a:masterClrMapping/>
+  </p:clrMapOvr>
+</p:sld>
+</file>
+
+<file path=ppt/slides/slide4.xml><?xml version="1.0" encoding="utf-8"?>
 <p:sld xmlns:a="http://schemas.openxmlformats.org/drawingml/2006/main" xmlns:r="http://schemas.openxmlformats.org/officeDocument/2006/relationships" xmlns:p="http://schemas.openxmlformats.org/presentationml/2006/main">
   <p:cSld>
     <p:spTree>
@@ -14559,7 +18823,7 @@
           <a:p>
             <a:fld id="{0F78D9C4-20C1-4B15-A116-16DC77AD9A1E}" type="datetime1">
               <a:rPr lang="ko-KR" altLang="en-US" smtClean="0"/>
-              <a:t>2026-02-10</a:t>
+              <a:t>2026-02-12</a:t>
             </a:fld>
             <a:endParaRPr lang="ko-KR" altLang="en-US"/>
           </a:p>
@@ -14588,7 +18852,7 @@
           <a:p>
             <a:fld id="{083A2CE0-18CD-4102-B738-4ACFF9E68BA4}" type="slidenum">
               <a:rPr lang="ko-KR" altLang="en-US" smtClean="0"/>
-              <a:t>3</a:t>
+              <a:t>4</a:t>
             </a:fld>
             <a:endParaRPr lang="ko-KR" altLang="en-US"/>
           </a:p>
@@ -14644,2090 +18908,7 @@
 </p:sld>
 </file>
 
-<file path=ppt/slides/slide30.xml><?xml version="1.0" encoding="utf-8"?>
-<p:sld xmlns:a="http://schemas.openxmlformats.org/drawingml/2006/main" xmlns:r="http://schemas.openxmlformats.org/officeDocument/2006/relationships" xmlns:p="http://schemas.openxmlformats.org/presentationml/2006/main">
-  <p:cSld>
-    <p:spTree>
-      <p:nvGrpSpPr>
-        <p:cNvPr id="1" name=""/>
-        <p:cNvGrpSpPr/>
-        <p:nvPr/>
-      </p:nvGrpSpPr>
-      <p:grpSpPr>
-        <a:xfrm>
-          <a:off x="0" y="0"/>
-          <a:ext cx="0" cy="0"/>
-          <a:chOff x="0" y="0"/>
-          <a:chExt cx="0" cy="0"/>
-        </a:xfrm>
-      </p:grpSpPr>
-      <p:sp>
-        <p:nvSpPr>
-          <p:cNvPr id="3" name="내용 개체 틀 2">
-            <a:extLst>
-              <a:ext uri="{FF2B5EF4-FFF2-40B4-BE49-F238E27FC236}">
-                <a16:creationId xmlns:a16="http://schemas.microsoft.com/office/drawing/2014/main" id="{659642C9-AD46-4D01-B61B-33D812751E95}"/>
-              </a:ext>
-            </a:extLst>
-          </p:cNvPr>
-          <p:cNvSpPr>
-            <a:spLocks noGrp="1"/>
-          </p:cNvSpPr>
-          <p:nvPr>
-            <p:ph idx="1"/>
-          </p:nvPr>
-        </p:nvSpPr>
-        <p:spPr>
-          <a:xfrm>
-            <a:off x="251788" y="1623229"/>
-            <a:ext cx="7491964" cy="4008437"/>
-          </a:xfrm>
-        </p:spPr>
-        <p:txBody>
-          <a:bodyPr>
-            <a:noAutofit/>
-          </a:bodyPr>
-          <a:lstStyle/>
-          <a:p>
-            <a:pPr marL="0" indent="0">
-              <a:lnSpc>
-                <a:spcPct val="150000"/>
-              </a:lnSpc>
-              <a:buNone/>
-            </a:pPr>
-            <a:r>
-              <a:rPr lang="ko-KR" altLang="en-US" sz="2400" b="1" dirty="0">
-                <a:latin typeface="+mn-ea"/>
-              </a:rPr>
-              <a:t>✔️ </a:t>
-            </a:r>
-            <a:r>
-              <a:rPr lang="en-US" altLang="ko-KR" sz="2400" b="1" dirty="0">
-                <a:latin typeface="+mn-ea"/>
-              </a:rPr>
-              <a:t>Saddle point(</a:t>
-            </a:r>
-            <a:r>
-              <a:rPr lang="ko-KR" altLang="en-US" sz="2400" b="1" dirty="0" err="1">
-                <a:latin typeface="+mn-ea"/>
-              </a:rPr>
-              <a:t>안장점</a:t>
-            </a:r>
-            <a:r>
-              <a:rPr lang="en-US" altLang="ko-KR" sz="2400" b="1" dirty="0">
-                <a:latin typeface="+mn-ea"/>
-              </a:rPr>
-              <a:t>)</a:t>
-            </a:r>
-          </a:p>
-          <a:p>
-            <a:pPr lvl="1">
-              <a:lnSpc>
-                <a:spcPct val="150000"/>
-              </a:lnSpc>
-            </a:pPr>
-            <a:r>
-              <a:rPr lang="ko-KR" altLang="en-US" sz="2000" dirty="0">
-                <a:latin typeface="+mn-ea"/>
-              </a:rPr>
-              <a:t>최댓값인지 최솟값인지 구분할 수 없음</a:t>
-            </a:r>
-            <a:endParaRPr lang="en-US" altLang="ko-KR" sz="2000" dirty="0">
-              <a:latin typeface="+mn-ea"/>
-            </a:endParaRPr>
-          </a:p>
-          <a:p>
-            <a:pPr marL="457200" lvl="1" indent="0">
-              <a:lnSpc>
-                <a:spcPct val="150000"/>
-              </a:lnSpc>
-              <a:buNone/>
-            </a:pPr>
-            <a:endParaRPr lang="en-US" altLang="ko-KR" sz="2000" dirty="0">
-              <a:latin typeface="+mn-ea"/>
-            </a:endParaRPr>
-          </a:p>
-          <a:p>
-            <a:pPr marL="0" indent="0">
-              <a:lnSpc>
-                <a:spcPct val="150000"/>
-              </a:lnSpc>
-              <a:buNone/>
-            </a:pPr>
-            <a:r>
-              <a:rPr lang="ko-KR" altLang="en-US" sz="2400" b="1" dirty="0">
-                <a:latin typeface="+mn-ea"/>
-              </a:rPr>
-              <a:t>✔️ </a:t>
-            </a:r>
-            <a:r>
-              <a:rPr lang="en-US" altLang="ko-KR" sz="2400" b="1" dirty="0">
-                <a:latin typeface="+mn-ea"/>
-              </a:rPr>
-              <a:t>Overshooting</a:t>
-            </a:r>
-          </a:p>
-          <a:p>
-            <a:pPr lvl="1">
-              <a:lnSpc>
-                <a:spcPct val="150000"/>
-              </a:lnSpc>
-            </a:pPr>
-            <a:r>
-              <a:rPr lang="ko-KR" altLang="en-US" sz="2000" dirty="0" err="1"/>
-              <a:t>학습률이</a:t>
-            </a:r>
-            <a:r>
-              <a:rPr lang="ko-KR" altLang="en-US" sz="2000" dirty="0"/>
-              <a:t> 너무 커서 매개변수가 최솟값을 지나쳐버리는 현상</a:t>
-            </a:r>
-            <a:r>
-              <a:rPr lang="en-US" altLang="ko-KR" sz="2000" dirty="0"/>
-              <a:t>.</a:t>
-            </a:r>
-            <a:endParaRPr lang="en-US" altLang="ko-KR" sz="2000" dirty="0">
-              <a:latin typeface="+mn-ea"/>
-            </a:endParaRPr>
-          </a:p>
-          <a:p>
-            <a:pPr lvl="1">
-              <a:lnSpc>
-                <a:spcPct val="150000"/>
-              </a:lnSpc>
-            </a:pPr>
-            <a:r>
-              <a:rPr lang="ko-KR" altLang="en-US" sz="2000" dirty="0"/>
-              <a:t>매개변수 값이 진동</a:t>
-            </a:r>
-            <a:r>
-              <a:rPr lang="en-US" altLang="ko-KR" sz="2000" dirty="0"/>
-              <a:t>/</a:t>
-            </a:r>
-            <a:r>
-              <a:rPr lang="ko-KR" altLang="en-US" sz="2000" dirty="0"/>
-              <a:t>발산해서</a:t>
-            </a:r>
-            <a:r>
-              <a:rPr lang="en-US" altLang="ko-KR" sz="2000" dirty="0"/>
-              <a:t>, </a:t>
-            </a:r>
-            <a:r>
-              <a:rPr lang="ko-KR" altLang="en-US" sz="2000" dirty="0"/>
-              <a:t>학습에 실패하게 됨</a:t>
-            </a:r>
-            <a:r>
-              <a:rPr lang="en-US" altLang="ko-KR" sz="2000" dirty="0"/>
-              <a:t>.</a:t>
-            </a:r>
-            <a:endParaRPr lang="en-US" altLang="ko-KR" sz="2000" dirty="0">
-              <a:latin typeface="+mn-ea"/>
-            </a:endParaRPr>
-          </a:p>
-        </p:txBody>
-      </p:sp>
-      <p:sp>
-        <p:nvSpPr>
-          <p:cNvPr id="4" name="날짜 개체 틀 3">
-            <a:extLst>
-              <a:ext uri="{FF2B5EF4-FFF2-40B4-BE49-F238E27FC236}">
-                <a16:creationId xmlns:a16="http://schemas.microsoft.com/office/drawing/2014/main" id="{590F8720-7C11-4CC8-8215-3F57F085A24B}"/>
-              </a:ext>
-            </a:extLst>
-          </p:cNvPr>
-          <p:cNvSpPr>
-            <a:spLocks noGrp="1"/>
-          </p:cNvSpPr>
-          <p:nvPr>
-            <p:ph type="dt" sz="half" idx="10"/>
-          </p:nvPr>
-        </p:nvSpPr>
-        <p:spPr/>
-        <p:txBody>
-          <a:bodyPr/>
-          <a:lstStyle/>
-          <a:p>
-            <a:fld id="{0F78D9C4-20C1-4B15-A116-16DC77AD9A1E}" type="datetime1">
-              <a:rPr lang="ko-KR" altLang="en-US" smtClean="0"/>
-              <a:t>2026-02-10</a:t>
-            </a:fld>
-            <a:endParaRPr lang="ko-KR" altLang="en-US"/>
-          </a:p>
-        </p:txBody>
-      </p:sp>
-      <p:sp>
-        <p:nvSpPr>
-          <p:cNvPr id="5" name="슬라이드 번호 개체 틀 4">
-            <a:extLst>
-              <a:ext uri="{FF2B5EF4-FFF2-40B4-BE49-F238E27FC236}">
-                <a16:creationId xmlns:a16="http://schemas.microsoft.com/office/drawing/2014/main" id="{E86D5960-457B-4CA2-B0B3-F7F0DADA85D8}"/>
-              </a:ext>
-            </a:extLst>
-          </p:cNvPr>
-          <p:cNvSpPr>
-            <a:spLocks noGrp="1"/>
-          </p:cNvSpPr>
-          <p:nvPr>
-            <p:ph type="sldNum" sz="quarter" idx="12"/>
-          </p:nvPr>
-        </p:nvSpPr>
-        <p:spPr/>
-        <p:txBody>
-          <a:bodyPr/>
-          <a:lstStyle/>
-          <a:p>
-            <a:fld id="{083A2CE0-18CD-4102-B738-4ACFF9E68BA4}" type="slidenum">
-              <a:rPr lang="ko-KR" altLang="en-US" smtClean="0"/>
-              <a:t>30</a:t>
-            </a:fld>
-            <a:endParaRPr lang="ko-KR" altLang="en-US"/>
-          </a:p>
-        </p:txBody>
-      </p:sp>
-      <p:pic>
-        <p:nvPicPr>
-          <p:cNvPr id="6150" name="Picture 6">
-            <a:extLst>
-              <a:ext uri="{FF2B5EF4-FFF2-40B4-BE49-F238E27FC236}">
-                <a16:creationId xmlns:a16="http://schemas.microsoft.com/office/drawing/2014/main" id="{396D47C3-F265-C8AF-4AED-08B68167DFC0}"/>
-              </a:ext>
-            </a:extLst>
-          </p:cNvPr>
-          <p:cNvPicPr>
-            <a:picLocks noChangeAspect="1" noChangeArrowheads="1"/>
-          </p:cNvPicPr>
-          <p:nvPr/>
-        </p:nvPicPr>
-        <p:blipFill>
-          <a:blip r:embed="rId2" cstate="print">
-            <a:extLst>
-              <a:ext uri="{28A0092B-C50C-407E-A947-70E740481C1C}">
-                <a14:useLocalDpi xmlns:a14="http://schemas.microsoft.com/office/drawing/2010/main" val="0"/>
-              </a:ext>
-            </a:extLst>
-          </a:blip>
-          <a:srcRect/>
-          <a:stretch>
-            <a:fillRect/>
-          </a:stretch>
-        </p:blipFill>
-        <p:spPr bwMode="auto">
-          <a:xfrm>
-            <a:off x="8144768" y="1104336"/>
-            <a:ext cx="2864316" cy="2074694"/>
-          </a:xfrm>
-          <a:prstGeom prst="rect">
-            <a:avLst/>
-          </a:prstGeom>
-          <a:noFill/>
-          <a:extLst>
-            <a:ext uri="{909E8E84-426E-40DD-AFC4-6F175D3DCCD1}">
-              <a14:hiddenFill xmlns:a14="http://schemas.microsoft.com/office/drawing/2010/main">
-                <a:solidFill>
-                  <a:srgbClr val="FFFFFF"/>
-                </a:solidFill>
-              </a14:hiddenFill>
-            </a:ext>
-          </a:extLst>
-        </p:spPr>
-      </p:pic>
-      <p:pic>
-        <p:nvPicPr>
-          <p:cNvPr id="8" name="그림 7">
-            <a:extLst>
-              <a:ext uri="{FF2B5EF4-FFF2-40B4-BE49-F238E27FC236}">
-                <a16:creationId xmlns:a16="http://schemas.microsoft.com/office/drawing/2014/main" id="{7A0C89AB-71DB-6B49-DD18-EDEA17B48333}"/>
-              </a:ext>
-            </a:extLst>
-          </p:cNvPr>
-          <p:cNvPicPr>
-            <a:picLocks noChangeAspect="1"/>
-          </p:cNvPicPr>
-          <p:nvPr/>
-        </p:nvPicPr>
-        <p:blipFill>
-          <a:blip r:embed="rId3"/>
-          <a:stretch>
-            <a:fillRect/>
-          </a:stretch>
-        </p:blipFill>
-        <p:spPr>
-          <a:xfrm>
-            <a:off x="8231379" y="3451267"/>
-            <a:ext cx="2724530" cy="2572109"/>
-          </a:xfrm>
-          <a:prstGeom prst="rect">
-            <a:avLst/>
-          </a:prstGeom>
-        </p:spPr>
-      </p:pic>
-      <mc:AlternateContent xmlns:mc="http://schemas.openxmlformats.org/markup-compatibility/2006" xmlns:p14="http://schemas.microsoft.com/office/powerpoint/2010/main">
-        <mc:Choice Requires="p14">
-          <p:contentPart p14:bwMode="auto" r:id="rId4">
-            <p14:nvContentPartPr>
-              <p14:cNvPr id="6" name="잉크 5">
-                <a:extLst>
-                  <a:ext uri="{FF2B5EF4-FFF2-40B4-BE49-F238E27FC236}">
-                    <a16:creationId xmlns:a16="http://schemas.microsoft.com/office/drawing/2014/main" id="{A84636BC-18A8-DDA3-F9FF-DF65865F9521}"/>
-                  </a:ext>
-                </a:extLst>
-              </p14:cNvPr>
-              <p14:cNvContentPartPr/>
-              <p14:nvPr/>
-            </p14:nvContentPartPr>
-            <p14:xfrm>
-              <a:off x="9709147" y="1325563"/>
-              <a:ext cx="787680" cy="1632240"/>
-            </p14:xfrm>
-          </p:contentPart>
-        </mc:Choice>
-        <mc:Fallback xmlns="">
-          <p:pic>
-            <p:nvPicPr>
-              <p:cNvPr id="6" name="잉크 5">
-                <a:extLst>
-                  <a:ext uri="{FF2B5EF4-FFF2-40B4-BE49-F238E27FC236}">
-                    <a16:creationId xmlns:a16="http://schemas.microsoft.com/office/drawing/2014/main" id="{A84636BC-18A8-DDA3-F9FF-DF65865F9521}"/>
-                  </a:ext>
-                </a:extLst>
-              </p:cNvPr>
-              <p:cNvPicPr/>
-              <p:nvPr/>
-            </p:nvPicPr>
-            <p:blipFill>
-              <a:blip r:embed="rId5"/>
-              <a:stretch>
-                <a:fillRect/>
-              </a:stretch>
-            </p:blipFill>
-            <p:spPr>
-              <a:xfrm>
-                <a:off x="9699787" y="1316203"/>
-                <a:ext cx="806400" cy="1650960"/>
-              </a:xfrm>
-              <a:prstGeom prst="rect">
-                <a:avLst/>
-              </a:prstGeom>
-            </p:spPr>
-          </p:pic>
-        </mc:Fallback>
-      </mc:AlternateContent>
-      <p:sp>
-        <p:nvSpPr>
-          <p:cNvPr id="7" name="제목 6">
-            <a:extLst>
-              <a:ext uri="{FF2B5EF4-FFF2-40B4-BE49-F238E27FC236}">
-                <a16:creationId xmlns:a16="http://schemas.microsoft.com/office/drawing/2014/main" id="{1EE30D88-C106-216E-66C3-DB3EC4505884}"/>
-              </a:ext>
-            </a:extLst>
-          </p:cNvPr>
-          <p:cNvSpPr>
-            <a:spLocks noGrp="1"/>
-          </p:cNvSpPr>
-          <p:nvPr>
-            <p:ph type="title"/>
-          </p:nvPr>
-        </p:nvSpPr>
-        <p:spPr/>
-        <p:txBody>
-          <a:bodyPr/>
-          <a:lstStyle/>
-          <a:p>
-            <a:r>
-              <a:rPr lang="ko-KR" altLang="en-US" b="1" dirty="0"/>
-              <a:t>경사 하강법의 문제</a:t>
-            </a:r>
-            <a:endParaRPr lang="ko-KR" altLang="en-US" dirty="0"/>
-          </a:p>
-        </p:txBody>
-      </p:sp>
-    </p:spTree>
-    <p:extLst>
-      <p:ext uri="{BB962C8B-B14F-4D97-AF65-F5344CB8AC3E}">
-        <p14:creationId xmlns:p14="http://schemas.microsoft.com/office/powerpoint/2010/main" val="2964515769"/>
-      </p:ext>
-    </p:extLst>
-  </p:cSld>
-  <p:clrMapOvr>
-    <a:masterClrMapping/>
-  </p:clrMapOvr>
-</p:sld>
-</file>
-
-<file path=ppt/slides/slide31.xml><?xml version="1.0" encoding="utf-8"?>
-<p:sld xmlns:a="http://schemas.openxmlformats.org/drawingml/2006/main" xmlns:r="http://schemas.openxmlformats.org/officeDocument/2006/relationships" xmlns:p="http://schemas.openxmlformats.org/presentationml/2006/main">
-  <p:cSld>
-    <p:spTree>
-      <p:nvGrpSpPr>
-        <p:cNvPr id="1" name=""/>
-        <p:cNvGrpSpPr/>
-        <p:nvPr/>
-      </p:nvGrpSpPr>
-      <p:grpSpPr>
-        <a:xfrm>
-          <a:off x="0" y="0"/>
-          <a:ext cx="0" cy="0"/>
-          <a:chOff x="0" y="0"/>
-          <a:chExt cx="0" cy="0"/>
-        </a:xfrm>
-      </p:grpSpPr>
-      <p:sp>
-        <p:nvSpPr>
-          <p:cNvPr id="2" name="제목 1">
-            <a:extLst>
-              <a:ext uri="{FF2B5EF4-FFF2-40B4-BE49-F238E27FC236}">
-                <a16:creationId xmlns:a16="http://schemas.microsoft.com/office/drawing/2014/main" id="{A8D8F1F4-4871-4B45-B08E-F92ACDB80FE6}"/>
-              </a:ext>
-            </a:extLst>
-          </p:cNvPr>
-          <p:cNvSpPr>
-            <a:spLocks noGrp="1"/>
-          </p:cNvSpPr>
-          <p:nvPr>
-            <p:ph type="title"/>
-          </p:nvPr>
-        </p:nvSpPr>
-        <p:spPr/>
-        <p:txBody>
-          <a:bodyPr>
-            <a:normAutofit/>
-          </a:bodyPr>
-          <a:lstStyle/>
-          <a:p>
-            <a:r>
-              <a:rPr lang="en-US" altLang="ko-KR" b="1" dirty="0">
-                <a:latin typeface="+mj-ea"/>
-              </a:rPr>
-              <a:t>SGD</a:t>
-            </a:r>
-            <a:r>
-              <a:rPr lang="ko-KR" altLang="en-US" b="1" dirty="0">
-                <a:latin typeface="+mj-ea"/>
-              </a:rPr>
-              <a:t>의 단점을 개선</a:t>
-            </a:r>
-            <a:r>
-              <a:rPr lang="en-US" altLang="ko-KR" b="1" dirty="0">
-                <a:latin typeface="+mj-ea"/>
-              </a:rPr>
-              <a:t>(optimizer)</a:t>
-            </a:r>
-            <a:endParaRPr lang="ko-KR" altLang="en-US" b="1" dirty="0">
-              <a:latin typeface="+mj-ea"/>
-            </a:endParaRPr>
-          </a:p>
-        </p:txBody>
-      </p:sp>
-      <p:sp>
-        <p:nvSpPr>
-          <p:cNvPr id="3" name="내용 개체 틀 2">
-            <a:extLst>
-              <a:ext uri="{FF2B5EF4-FFF2-40B4-BE49-F238E27FC236}">
-                <a16:creationId xmlns:a16="http://schemas.microsoft.com/office/drawing/2014/main" id="{659642C9-AD46-4D01-B61B-33D812751E95}"/>
-              </a:ext>
-            </a:extLst>
-          </p:cNvPr>
-          <p:cNvSpPr>
-            <a:spLocks noGrp="1"/>
-          </p:cNvSpPr>
-          <p:nvPr>
-            <p:ph idx="1"/>
-          </p:nvPr>
-        </p:nvSpPr>
-        <p:spPr>
-          <a:xfrm>
-            <a:off x="238991" y="1173214"/>
-            <a:ext cx="11521440" cy="4680954"/>
-          </a:xfrm>
-        </p:spPr>
-        <p:txBody>
-          <a:bodyPr>
-            <a:normAutofit/>
-          </a:bodyPr>
-          <a:lstStyle/>
-          <a:p>
-            <a:pPr marL="0" indent="0">
-              <a:lnSpc>
-                <a:spcPct val="150000"/>
-              </a:lnSpc>
-              <a:buNone/>
-            </a:pPr>
-            <a:r>
-              <a:rPr lang="ko-KR" altLang="en-US" b="1" dirty="0">
-                <a:latin typeface="+mn-ea"/>
-              </a:rPr>
-              <a:t>💡 </a:t>
-            </a:r>
-            <a:r>
-              <a:rPr lang="ko-KR" altLang="en-US" b="1" dirty="0" err="1">
-                <a:latin typeface="+mn-ea"/>
-              </a:rPr>
-              <a:t>학습률</a:t>
-            </a:r>
-            <a:r>
-              <a:rPr lang="en-US" altLang="ko-KR" b="1" dirty="0">
-                <a:latin typeface="+mn-ea"/>
-              </a:rPr>
-              <a:t>(Learning</a:t>
-            </a:r>
-            <a:r>
-              <a:rPr lang="ko-KR" altLang="en-US" b="1" dirty="0">
-                <a:latin typeface="+mn-ea"/>
-              </a:rPr>
-              <a:t> </a:t>
-            </a:r>
-            <a:r>
-              <a:rPr lang="en-US" altLang="ko-KR" b="1" dirty="0">
-                <a:latin typeface="+mn-ea"/>
-              </a:rPr>
-              <a:t>rate)</a:t>
-            </a:r>
-          </a:p>
-          <a:p>
-            <a:pPr lvl="1">
-              <a:lnSpc>
-                <a:spcPct val="150000"/>
-              </a:lnSpc>
-            </a:pPr>
-            <a:r>
-              <a:rPr lang="ko-KR" altLang="en-US" dirty="0"/>
-              <a:t>매개변수를 업데이트할 </a:t>
-            </a:r>
-            <a:r>
-              <a:rPr lang="ko-KR" altLang="en-US" dirty="0">
-                <a:latin typeface="+mn-ea"/>
-              </a:rPr>
-              <a:t>때 </a:t>
-            </a:r>
-            <a:r>
-              <a:rPr lang="ko-KR" altLang="en-US" dirty="0"/>
-              <a:t>한 번의 업데이트가 이루어지는 크기를 결정하는 </a:t>
-            </a:r>
-            <a:r>
-              <a:rPr lang="ko-KR" altLang="en-US" dirty="0" err="1"/>
-              <a:t>파라미터</a:t>
-            </a:r>
-            <a:endParaRPr lang="en-US" altLang="ko-KR" dirty="0"/>
-          </a:p>
-          <a:p>
-            <a:pPr lvl="1">
-              <a:lnSpc>
-                <a:spcPct val="150000"/>
-              </a:lnSpc>
-            </a:pPr>
-            <a:r>
-              <a:rPr lang="ko-KR" altLang="en-US" dirty="0"/>
-              <a:t>손실 함수의 기울기를 따라 이동하는 속도를 제어함</a:t>
-            </a:r>
-            <a:endParaRPr lang="en-US" altLang="ko-KR" dirty="0"/>
-          </a:p>
-          <a:p>
-            <a:pPr lvl="1">
-              <a:lnSpc>
-                <a:spcPct val="150000"/>
-              </a:lnSpc>
-            </a:pPr>
-            <a:r>
-              <a:rPr lang="en-US" altLang="ko-KR" dirty="0">
-                <a:latin typeface="+mn-ea"/>
-              </a:rPr>
-              <a:t>Step size</a:t>
-            </a:r>
-            <a:r>
-              <a:rPr lang="ko-KR" altLang="en-US" dirty="0">
-                <a:latin typeface="+mn-ea"/>
-              </a:rPr>
-              <a:t>라고도 함</a:t>
-            </a:r>
-            <a:endParaRPr lang="en-US" altLang="ko-KR" dirty="0">
-              <a:latin typeface="+mn-ea"/>
-            </a:endParaRPr>
-          </a:p>
-          <a:p>
-            <a:pPr lvl="1">
-              <a:lnSpc>
-                <a:spcPct val="150000"/>
-              </a:lnSpc>
-            </a:pPr>
-            <a:r>
-              <a:rPr lang="ko-KR" altLang="en-US" dirty="0">
-                <a:latin typeface="+mn-ea"/>
-              </a:rPr>
-              <a:t>너무 작으면 시간이 오래 걸리고 너무 크면 학습이 제대로 이루어지지 않음</a:t>
-            </a:r>
-            <a:endParaRPr lang="en-US" altLang="ko-KR" dirty="0">
-              <a:latin typeface="+mn-ea"/>
-            </a:endParaRPr>
-          </a:p>
-        </p:txBody>
-      </p:sp>
-      <p:sp>
-        <p:nvSpPr>
-          <p:cNvPr id="4" name="날짜 개체 틀 3">
-            <a:extLst>
-              <a:ext uri="{FF2B5EF4-FFF2-40B4-BE49-F238E27FC236}">
-                <a16:creationId xmlns:a16="http://schemas.microsoft.com/office/drawing/2014/main" id="{590F8720-7C11-4CC8-8215-3F57F085A24B}"/>
-              </a:ext>
-            </a:extLst>
-          </p:cNvPr>
-          <p:cNvSpPr>
-            <a:spLocks noGrp="1"/>
-          </p:cNvSpPr>
-          <p:nvPr>
-            <p:ph type="dt" sz="half" idx="10"/>
-          </p:nvPr>
-        </p:nvSpPr>
-        <p:spPr/>
-        <p:txBody>
-          <a:bodyPr/>
-          <a:lstStyle/>
-          <a:p>
-            <a:fld id="{0F78D9C4-20C1-4B15-A116-16DC77AD9A1E}" type="datetime1">
-              <a:rPr lang="ko-KR" altLang="en-US" smtClean="0"/>
-              <a:t>2026-02-10</a:t>
-            </a:fld>
-            <a:endParaRPr lang="ko-KR" altLang="en-US"/>
-          </a:p>
-        </p:txBody>
-      </p:sp>
-      <p:sp>
-        <p:nvSpPr>
-          <p:cNvPr id="5" name="슬라이드 번호 개체 틀 4">
-            <a:extLst>
-              <a:ext uri="{FF2B5EF4-FFF2-40B4-BE49-F238E27FC236}">
-                <a16:creationId xmlns:a16="http://schemas.microsoft.com/office/drawing/2014/main" id="{E86D5960-457B-4CA2-B0B3-F7F0DADA85D8}"/>
-              </a:ext>
-            </a:extLst>
-          </p:cNvPr>
-          <p:cNvSpPr>
-            <a:spLocks noGrp="1"/>
-          </p:cNvSpPr>
-          <p:nvPr>
-            <p:ph type="sldNum" sz="quarter" idx="12"/>
-          </p:nvPr>
-        </p:nvSpPr>
-        <p:spPr/>
-        <p:txBody>
-          <a:bodyPr/>
-          <a:lstStyle/>
-          <a:p>
-            <a:fld id="{083A2CE0-18CD-4102-B738-4ACFF9E68BA4}" type="slidenum">
-              <a:rPr lang="ko-KR" altLang="en-US" smtClean="0"/>
-              <a:t>31</a:t>
-            </a:fld>
-            <a:endParaRPr lang="ko-KR" altLang="en-US"/>
-          </a:p>
-        </p:txBody>
-      </p:sp>
-    </p:spTree>
-    <p:extLst>
-      <p:ext uri="{BB962C8B-B14F-4D97-AF65-F5344CB8AC3E}">
-        <p14:creationId xmlns:p14="http://schemas.microsoft.com/office/powerpoint/2010/main" val="3404284640"/>
-      </p:ext>
-    </p:extLst>
-  </p:cSld>
-  <p:clrMapOvr>
-    <a:masterClrMapping/>
-  </p:clrMapOvr>
-</p:sld>
-</file>
-
-<file path=ppt/slides/slide32.xml><?xml version="1.0" encoding="utf-8"?>
-<p:sld xmlns:a="http://schemas.openxmlformats.org/drawingml/2006/main" xmlns:r="http://schemas.openxmlformats.org/officeDocument/2006/relationships" xmlns:p="http://schemas.openxmlformats.org/presentationml/2006/main">
-  <p:cSld>
-    <p:spTree>
-      <p:nvGrpSpPr>
-        <p:cNvPr id="1" name=""/>
-        <p:cNvGrpSpPr/>
-        <p:nvPr/>
-      </p:nvGrpSpPr>
-      <p:grpSpPr>
-        <a:xfrm>
-          <a:off x="0" y="0"/>
-          <a:ext cx="0" cy="0"/>
-          <a:chOff x="0" y="0"/>
-          <a:chExt cx="0" cy="0"/>
-        </a:xfrm>
-      </p:grpSpPr>
-      <p:sp>
-        <p:nvSpPr>
-          <p:cNvPr id="2" name="제목 1">
-            <a:extLst>
-              <a:ext uri="{FF2B5EF4-FFF2-40B4-BE49-F238E27FC236}">
-                <a16:creationId xmlns:a16="http://schemas.microsoft.com/office/drawing/2014/main" id="{A8D8F1F4-4871-4B45-B08E-F92ACDB80FE6}"/>
-              </a:ext>
-            </a:extLst>
-          </p:cNvPr>
-          <p:cNvSpPr>
-            <a:spLocks noGrp="1"/>
-          </p:cNvSpPr>
-          <p:nvPr>
-            <p:ph type="title"/>
-          </p:nvPr>
-        </p:nvSpPr>
-        <p:spPr/>
-        <p:txBody>
-          <a:bodyPr>
-            <a:normAutofit/>
-          </a:bodyPr>
-          <a:lstStyle/>
-          <a:p>
-            <a:r>
-              <a:rPr lang="en-US" altLang="ko-KR" b="1" dirty="0">
-                <a:latin typeface="+mj-ea"/>
-              </a:rPr>
-              <a:t>SGD</a:t>
-            </a:r>
-            <a:r>
-              <a:rPr lang="ko-KR" altLang="en-US" b="1" dirty="0">
-                <a:latin typeface="+mj-ea"/>
-              </a:rPr>
-              <a:t>의 단점을 개선</a:t>
-            </a:r>
-            <a:r>
-              <a:rPr lang="en-US" altLang="ko-KR" b="1" dirty="0">
-                <a:latin typeface="+mj-ea"/>
-              </a:rPr>
-              <a:t>(optimizer)</a:t>
-            </a:r>
-            <a:endParaRPr lang="ko-KR" altLang="en-US" b="1" dirty="0"/>
-          </a:p>
-        </p:txBody>
-      </p:sp>
-      <p:sp>
-        <p:nvSpPr>
-          <p:cNvPr id="4" name="날짜 개체 틀 3">
-            <a:extLst>
-              <a:ext uri="{FF2B5EF4-FFF2-40B4-BE49-F238E27FC236}">
-                <a16:creationId xmlns:a16="http://schemas.microsoft.com/office/drawing/2014/main" id="{590F8720-7C11-4CC8-8215-3F57F085A24B}"/>
-              </a:ext>
-            </a:extLst>
-          </p:cNvPr>
-          <p:cNvSpPr>
-            <a:spLocks noGrp="1"/>
-          </p:cNvSpPr>
-          <p:nvPr>
-            <p:ph type="dt" sz="half" idx="10"/>
-          </p:nvPr>
-        </p:nvSpPr>
-        <p:spPr/>
-        <p:txBody>
-          <a:bodyPr/>
-          <a:lstStyle/>
-          <a:p>
-            <a:fld id="{0F78D9C4-20C1-4B15-A116-16DC77AD9A1E}" type="datetime1">
-              <a:rPr lang="ko-KR" altLang="en-US" smtClean="0"/>
-              <a:t>2026-02-10</a:t>
-            </a:fld>
-            <a:endParaRPr lang="ko-KR" altLang="en-US"/>
-          </a:p>
-        </p:txBody>
-      </p:sp>
-      <p:sp>
-        <p:nvSpPr>
-          <p:cNvPr id="5" name="슬라이드 번호 개체 틀 4">
-            <a:extLst>
-              <a:ext uri="{FF2B5EF4-FFF2-40B4-BE49-F238E27FC236}">
-                <a16:creationId xmlns:a16="http://schemas.microsoft.com/office/drawing/2014/main" id="{E86D5960-457B-4CA2-B0B3-F7F0DADA85D8}"/>
-              </a:ext>
-            </a:extLst>
-          </p:cNvPr>
-          <p:cNvSpPr>
-            <a:spLocks noGrp="1"/>
-          </p:cNvSpPr>
-          <p:nvPr>
-            <p:ph type="sldNum" sz="quarter" idx="12"/>
-          </p:nvPr>
-        </p:nvSpPr>
-        <p:spPr/>
-        <p:txBody>
-          <a:bodyPr/>
-          <a:lstStyle/>
-          <a:p>
-            <a:fld id="{083A2CE0-18CD-4102-B738-4ACFF9E68BA4}" type="slidenum">
-              <a:rPr lang="ko-KR" altLang="en-US" smtClean="0"/>
-              <a:t>32</a:t>
-            </a:fld>
-            <a:endParaRPr lang="ko-KR" altLang="en-US"/>
-          </a:p>
-        </p:txBody>
-      </p:sp>
-      <p:pic>
-        <p:nvPicPr>
-          <p:cNvPr id="12290" name="Picture 2">
-            <a:extLst>
-              <a:ext uri="{FF2B5EF4-FFF2-40B4-BE49-F238E27FC236}">
-                <a16:creationId xmlns:a16="http://schemas.microsoft.com/office/drawing/2014/main" id="{F9A25452-6416-18AD-6D5F-C0213AC9CB1A}"/>
-              </a:ext>
-            </a:extLst>
-          </p:cNvPr>
-          <p:cNvPicPr>
-            <a:picLocks noChangeAspect="1" noChangeArrowheads="1"/>
-          </p:cNvPicPr>
-          <p:nvPr/>
-        </p:nvPicPr>
-        <p:blipFill>
-          <a:blip r:embed="rId2">
-            <a:extLst>
-              <a:ext uri="{28A0092B-C50C-407E-A947-70E740481C1C}">
-                <a14:useLocalDpi xmlns:a14="http://schemas.microsoft.com/office/drawing/2010/main" val="0"/>
-              </a:ext>
-            </a:extLst>
-          </a:blip>
-          <a:srcRect/>
-          <a:stretch>
-            <a:fillRect/>
-          </a:stretch>
-        </p:blipFill>
-        <p:spPr bwMode="auto">
-          <a:xfrm>
-            <a:off x="2982191" y="2911568"/>
-            <a:ext cx="6196332" cy="3001348"/>
-          </a:xfrm>
-          <a:prstGeom prst="rect">
-            <a:avLst/>
-          </a:prstGeom>
-          <a:noFill/>
-          <a:extLst>
-            <a:ext uri="{909E8E84-426E-40DD-AFC4-6F175D3DCCD1}">
-              <a14:hiddenFill xmlns:a14="http://schemas.microsoft.com/office/drawing/2010/main">
-                <a:solidFill>
-                  <a:srgbClr val="FFFFFF"/>
-                </a:solidFill>
-              </a14:hiddenFill>
-            </a:ext>
-          </a:extLst>
-        </p:spPr>
-      </p:pic>
-      <p:sp>
-        <p:nvSpPr>
-          <p:cNvPr id="6" name="TextBox 5">
-            <a:extLst>
-              <a:ext uri="{FF2B5EF4-FFF2-40B4-BE49-F238E27FC236}">
-                <a16:creationId xmlns:a16="http://schemas.microsoft.com/office/drawing/2014/main" id="{D59AB5B1-78E1-09EB-AE05-AD476080E919}"/>
-              </a:ext>
-            </a:extLst>
-          </p:cNvPr>
-          <p:cNvSpPr txBox="1"/>
-          <p:nvPr/>
-        </p:nvSpPr>
-        <p:spPr>
-          <a:xfrm>
-            <a:off x="4427113" y="6101192"/>
-            <a:ext cx="3337773" cy="246221"/>
-          </a:xfrm>
-          <a:prstGeom prst="rect">
-            <a:avLst/>
-          </a:prstGeom>
-          <a:noFill/>
-        </p:spPr>
-        <p:txBody>
-          <a:bodyPr wrap="none" rtlCol="0">
-            <a:spAutoFit/>
-          </a:bodyPr>
-          <a:lstStyle/>
-          <a:p>
-            <a:r>
-              <a:rPr lang="ko-KR" altLang="en-US" sz="1000" dirty="0">
-                <a:latin typeface="+mn-ea"/>
-              </a:rPr>
-              <a:t>출처</a:t>
-            </a:r>
-            <a:r>
-              <a:rPr lang="en-US" altLang="ko-KR" sz="1000" dirty="0">
-                <a:latin typeface="+mn-ea"/>
-              </a:rPr>
-              <a:t>:</a:t>
-            </a:r>
-            <a:r>
-              <a:rPr lang="en-US" altLang="ko-KR" sz="1000" b="0" i="0" u="none" strike="noStrike" dirty="0">
-                <a:solidFill>
-                  <a:srgbClr val="404040"/>
-                </a:solidFill>
-                <a:effectLst/>
-                <a:latin typeface="+mn-ea"/>
-                <a:hlinkClick r:id="rId3"/>
-              </a:rPr>
-              <a:t>https://www.slideshare.net/yongho/ss-79607172</a:t>
-            </a:r>
-            <a:endParaRPr lang="ko-KR" altLang="en-US" sz="1000" dirty="0">
-              <a:latin typeface="+mn-ea"/>
-            </a:endParaRPr>
-          </a:p>
-        </p:txBody>
-      </p:sp>
-      <p:sp>
-        <p:nvSpPr>
-          <p:cNvPr id="7" name="직사각형 6"/>
-          <p:cNvSpPr/>
-          <p:nvPr/>
-        </p:nvSpPr>
-        <p:spPr>
-          <a:xfrm>
-            <a:off x="251788" y="940433"/>
-            <a:ext cx="11688424" cy="1782860"/>
-          </a:xfrm>
-          <a:prstGeom prst="rect">
-            <a:avLst/>
-          </a:prstGeom>
-        </p:spPr>
-        <p:txBody>
-          <a:bodyPr wrap="square">
-            <a:spAutoFit/>
-          </a:bodyPr>
-          <a:lstStyle/>
-          <a:p>
-            <a:pPr>
-              <a:lnSpc>
-                <a:spcPct val="150000"/>
-              </a:lnSpc>
-            </a:pPr>
-            <a:r>
-              <a:rPr lang="ko-KR" altLang="en-US" sz="2800" dirty="0"/>
-              <a:t>💡 </a:t>
-            </a:r>
-            <a:r>
-              <a:rPr lang="en-US" altLang="ko-KR" sz="2800" dirty="0"/>
-              <a:t>Optimizer</a:t>
-            </a:r>
-          </a:p>
-          <a:p>
-            <a:pPr marL="800100" lvl="1" indent="-342900">
-              <a:lnSpc>
-                <a:spcPct val="150000"/>
-              </a:lnSpc>
-              <a:buFont typeface="Arial" panose="020B0604020202020204" pitchFamily="34" charset="0"/>
-              <a:buChar char="•"/>
-            </a:pPr>
-            <a:r>
-              <a:rPr lang="ko-KR" altLang="en-US" sz="2400" dirty="0">
-                <a:latin typeface="Pretendard Light" panose="02000403000000020004" pitchFamily="2" charset="-127"/>
-                <a:ea typeface="Pretendard Light" panose="02000403000000020004" pitchFamily="2" charset="-127"/>
-                <a:cs typeface="Pretendard Light" panose="02000403000000020004" pitchFamily="2" charset="-127"/>
-              </a:rPr>
-              <a:t>모델의 학습 과정을 제어하여</a:t>
-            </a:r>
-            <a:r>
-              <a:rPr lang="en-US" altLang="ko-KR" sz="2400" dirty="0">
-                <a:latin typeface="Pretendard Light" panose="02000403000000020004" pitchFamily="2" charset="-127"/>
-                <a:ea typeface="Pretendard Light" panose="02000403000000020004" pitchFamily="2" charset="-127"/>
-                <a:cs typeface="Pretendard Light" panose="02000403000000020004" pitchFamily="2" charset="-127"/>
-              </a:rPr>
-              <a:t>, </a:t>
-            </a:r>
-            <a:r>
-              <a:rPr lang="ko-KR" altLang="en-US" sz="2400" dirty="0">
-                <a:latin typeface="Pretendard Light" panose="02000403000000020004" pitchFamily="2" charset="-127"/>
-                <a:ea typeface="Pretendard Light" panose="02000403000000020004" pitchFamily="2" charset="-127"/>
-                <a:cs typeface="Pretendard Light" panose="02000403000000020004" pitchFamily="2" charset="-127"/>
-              </a:rPr>
-              <a:t>손실 함수</a:t>
-            </a:r>
-            <a:r>
-              <a:rPr lang="en-US" altLang="ko-KR" sz="2400" dirty="0">
-                <a:latin typeface="Pretendard Light" panose="02000403000000020004" pitchFamily="2" charset="-127"/>
-                <a:ea typeface="Pretendard Light" panose="02000403000000020004" pitchFamily="2" charset="-127"/>
-                <a:cs typeface="Pretendard Light" panose="02000403000000020004" pitchFamily="2" charset="-127"/>
-              </a:rPr>
-              <a:t>(Loss Function)</a:t>
-            </a:r>
-            <a:r>
-              <a:rPr lang="ko-KR" altLang="en-US" sz="2400" dirty="0">
-                <a:latin typeface="Pretendard Light" panose="02000403000000020004" pitchFamily="2" charset="-127"/>
-                <a:ea typeface="Pretendard Light" panose="02000403000000020004" pitchFamily="2" charset="-127"/>
-                <a:cs typeface="Pretendard Light" panose="02000403000000020004" pitchFamily="2" charset="-127"/>
-              </a:rPr>
-              <a:t>를 최소화하기 위해 사용되는</a:t>
-            </a:r>
-            <a:r>
-              <a:rPr lang="en-US" altLang="ko-KR" sz="2400" dirty="0">
-                <a:latin typeface="Pretendard Light" panose="02000403000000020004" pitchFamily="2" charset="-127"/>
-                <a:ea typeface="Pretendard Light" panose="02000403000000020004" pitchFamily="2" charset="-127"/>
-                <a:cs typeface="Pretendard Light" panose="02000403000000020004" pitchFamily="2" charset="-127"/>
-              </a:rPr>
-              <a:t> </a:t>
-            </a:r>
-            <a:r>
-              <a:rPr lang="ko-KR" altLang="en-US" sz="2400" dirty="0">
-                <a:latin typeface="Pretendard Light" panose="02000403000000020004" pitchFamily="2" charset="-127"/>
-                <a:ea typeface="Pretendard Light" panose="02000403000000020004" pitchFamily="2" charset="-127"/>
-                <a:cs typeface="Pretendard Light" panose="02000403000000020004" pitchFamily="2" charset="-127"/>
-              </a:rPr>
-              <a:t>알고리즘 또는 방법론</a:t>
-            </a:r>
-            <a:endParaRPr lang="en-US" altLang="ko-KR" sz="2400" dirty="0">
-              <a:latin typeface="Pretendard Light" panose="02000403000000020004" pitchFamily="2" charset="-127"/>
-              <a:ea typeface="Pretendard Light" panose="02000403000000020004" pitchFamily="2" charset="-127"/>
-              <a:cs typeface="Pretendard Light" panose="02000403000000020004" pitchFamily="2" charset="-127"/>
-            </a:endParaRPr>
-          </a:p>
-        </p:txBody>
-      </p:sp>
-    </p:spTree>
-    <p:extLst>
-      <p:ext uri="{BB962C8B-B14F-4D97-AF65-F5344CB8AC3E}">
-        <p14:creationId xmlns:p14="http://schemas.microsoft.com/office/powerpoint/2010/main" val="2603008017"/>
-      </p:ext>
-    </p:extLst>
-  </p:cSld>
-  <p:clrMapOvr>
-    <a:masterClrMapping/>
-  </p:clrMapOvr>
-</p:sld>
-</file>
-
-<file path=ppt/slides/slide33.xml><?xml version="1.0" encoding="utf-8"?>
-<p:sld xmlns:a="http://schemas.openxmlformats.org/drawingml/2006/main" xmlns:r="http://schemas.openxmlformats.org/officeDocument/2006/relationships" xmlns:p="http://schemas.openxmlformats.org/presentationml/2006/main">
-  <p:cSld>
-    <p:spTree>
-      <p:nvGrpSpPr>
-        <p:cNvPr id="1" name=""/>
-        <p:cNvGrpSpPr/>
-        <p:nvPr/>
-      </p:nvGrpSpPr>
-      <p:grpSpPr>
-        <a:xfrm>
-          <a:off x="0" y="0"/>
-          <a:ext cx="0" cy="0"/>
-          <a:chOff x="0" y="0"/>
-          <a:chExt cx="0" cy="0"/>
-        </a:xfrm>
-      </p:grpSpPr>
-      <p:sp>
-        <p:nvSpPr>
-          <p:cNvPr id="2" name="제목 1">
-            <a:extLst>
-              <a:ext uri="{FF2B5EF4-FFF2-40B4-BE49-F238E27FC236}">
-                <a16:creationId xmlns:a16="http://schemas.microsoft.com/office/drawing/2014/main" id="{A8D8F1F4-4871-4B45-B08E-F92ACDB80FE6}"/>
-              </a:ext>
-            </a:extLst>
-          </p:cNvPr>
-          <p:cNvSpPr>
-            <a:spLocks noGrp="1"/>
-          </p:cNvSpPr>
-          <p:nvPr>
-            <p:ph type="title"/>
-          </p:nvPr>
-        </p:nvSpPr>
-        <p:spPr/>
-        <p:txBody>
-          <a:bodyPr>
-            <a:normAutofit/>
-          </a:bodyPr>
-          <a:lstStyle/>
-          <a:p>
-            <a:r>
-              <a:rPr lang="en-US" altLang="ko-KR" b="1" dirty="0">
-                <a:latin typeface="+mj-ea"/>
-              </a:rPr>
-              <a:t>SGD</a:t>
-            </a:r>
-            <a:r>
-              <a:rPr lang="ko-KR" altLang="en-US" b="1" dirty="0">
-                <a:latin typeface="+mj-ea"/>
-              </a:rPr>
-              <a:t>의 단점을 개선</a:t>
-            </a:r>
-            <a:r>
-              <a:rPr lang="en-US" altLang="ko-KR" b="1" dirty="0">
-                <a:latin typeface="+mj-ea"/>
-              </a:rPr>
-              <a:t>(optimizer)</a:t>
-            </a:r>
-            <a:endParaRPr lang="ko-KR" altLang="en-US" b="1" dirty="0">
-              <a:latin typeface="+mj-ea"/>
-            </a:endParaRPr>
-          </a:p>
-        </p:txBody>
-      </p:sp>
-      <p:sp>
-        <p:nvSpPr>
-          <p:cNvPr id="3" name="내용 개체 틀 2">
-            <a:extLst>
-              <a:ext uri="{FF2B5EF4-FFF2-40B4-BE49-F238E27FC236}">
-                <a16:creationId xmlns:a16="http://schemas.microsoft.com/office/drawing/2014/main" id="{659642C9-AD46-4D01-B61B-33D812751E95}"/>
-              </a:ext>
-            </a:extLst>
-          </p:cNvPr>
-          <p:cNvSpPr>
-            <a:spLocks noGrp="1"/>
-          </p:cNvSpPr>
-          <p:nvPr>
-            <p:ph idx="1"/>
-          </p:nvPr>
-        </p:nvSpPr>
-        <p:spPr>
-          <a:xfrm>
-            <a:off x="251788" y="1145407"/>
-            <a:ext cx="11688424" cy="4680954"/>
-          </a:xfrm>
-        </p:spPr>
-        <p:txBody>
-          <a:bodyPr>
-            <a:noAutofit/>
-          </a:bodyPr>
-          <a:lstStyle/>
-          <a:p>
-            <a:pPr marL="0" indent="0">
-              <a:lnSpc>
-                <a:spcPct val="150000"/>
-              </a:lnSpc>
-              <a:buNone/>
-            </a:pPr>
-            <a:r>
-              <a:rPr lang="ko-KR" altLang="en-US" dirty="0">
-                <a:latin typeface="+mn-ea"/>
-              </a:rPr>
-              <a:t>✅ </a:t>
-            </a:r>
-            <a:r>
-              <a:rPr lang="ko-KR" altLang="en-US" dirty="0" err="1">
-                <a:latin typeface="+mn-ea"/>
-              </a:rPr>
-              <a:t>학습률</a:t>
-            </a:r>
-            <a:r>
-              <a:rPr lang="en-US" altLang="ko-KR" dirty="0">
-                <a:latin typeface="+mn-ea"/>
-              </a:rPr>
-              <a:t>(Learning</a:t>
-            </a:r>
-            <a:r>
-              <a:rPr lang="ko-KR" altLang="en-US" dirty="0">
-                <a:latin typeface="+mn-ea"/>
-              </a:rPr>
-              <a:t> </a:t>
-            </a:r>
-            <a:r>
-              <a:rPr lang="en-US" altLang="ko-KR" dirty="0">
-                <a:latin typeface="+mn-ea"/>
-              </a:rPr>
-              <a:t>rate) </a:t>
-            </a:r>
-            <a:r>
-              <a:rPr lang="ko-KR" altLang="en-US" dirty="0">
-                <a:latin typeface="+mn-ea"/>
-              </a:rPr>
-              <a:t>최적화 기법</a:t>
-            </a:r>
-            <a:endParaRPr lang="en-US" altLang="ko-KR" dirty="0">
-              <a:latin typeface="+mn-ea"/>
-            </a:endParaRPr>
-          </a:p>
-          <a:p>
-            <a:pPr lvl="1">
-              <a:lnSpc>
-                <a:spcPct val="150000"/>
-              </a:lnSpc>
-              <a:buFont typeface="Wingdings" panose="05000000000000000000" pitchFamily="2" charset="2"/>
-              <a:buChar char="§"/>
-            </a:pPr>
-            <a:r>
-              <a:rPr lang="en-US" altLang="ko-KR" i="0" dirty="0">
-                <a:solidFill>
-                  <a:srgbClr val="212529"/>
-                </a:solidFill>
-                <a:effectLst/>
-                <a:latin typeface="+mn-ea"/>
-              </a:rPr>
-              <a:t>learning rate decay</a:t>
-            </a:r>
-          </a:p>
-          <a:p>
-            <a:pPr lvl="2">
-              <a:lnSpc>
-                <a:spcPct val="150000"/>
-              </a:lnSpc>
-            </a:pPr>
-            <a:r>
-              <a:rPr lang="ko-KR" altLang="en-US" dirty="0">
-                <a:solidFill>
-                  <a:srgbClr val="212529"/>
-                </a:solidFill>
-                <a:latin typeface="+mn-ea"/>
-              </a:rPr>
-              <a:t>초반에는 큰 폭으로 이동하여 빠르게 내려가고</a:t>
-            </a:r>
-            <a:r>
-              <a:rPr lang="en-US" altLang="ko-KR" dirty="0">
-                <a:solidFill>
-                  <a:srgbClr val="212529"/>
-                </a:solidFill>
-                <a:latin typeface="+mn-ea"/>
-              </a:rPr>
-              <a:t>, </a:t>
-            </a:r>
-            <a:r>
-              <a:rPr lang="ko-KR" altLang="en-US" dirty="0">
-                <a:solidFill>
-                  <a:srgbClr val="212529"/>
-                </a:solidFill>
-                <a:latin typeface="+mn-ea"/>
-              </a:rPr>
-              <a:t>점차 </a:t>
-            </a:r>
-            <a:r>
-              <a:rPr lang="ko-KR" altLang="en-US" dirty="0" err="1">
-                <a:solidFill>
-                  <a:srgbClr val="212529"/>
-                </a:solidFill>
-                <a:latin typeface="+mn-ea"/>
-              </a:rPr>
-              <a:t>학습률을</a:t>
-            </a:r>
-            <a:r>
-              <a:rPr lang="ko-KR" altLang="en-US" dirty="0">
-                <a:solidFill>
-                  <a:srgbClr val="212529"/>
-                </a:solidFill>
-                <a:latin typeface="+mn-ea"/>
-              </a:rPr>
-              <a:t> 줄여서 조심스럽게 내려가는 방법</a:t>
-            </a:r>
-            <a:endParaRPr lang="en-US" altLang="ko-KR" dirty="0">
-              <a:solidFill>
-                <a:srgbClr val="212529"/>
-              </a:solidFill>
-              <a:latin typeface="+mn-ea"/>
-            </a:endParaRPr>
-          </a:p>
-          <a:p>
-            <a:pPr lvl="1">
-              <a:lnSpc>
-                <a:spcPct val="150000"/>
-              </a:lnSpc>
-              <a:buFont typeface="Wingdings" panose="05000000000000000000" pitchFamily="2" charset="2"/>
-              <a:buChar char="§"/>
-            </a:pPr>
-            <a:r>
-              <a:rPr lang="en-US" altLang="ko-KR" i="0" dirty="0">
-                <a:solidFill>
-                  <a:srgbClr val="212529"/>
-                </a:solidFill>
-                <a:effectLst/>
-                <a:latin typeface="+mn-ea"/>
-              </a:rPr>
-              <a:t>Adaptive learning rate</a:t>
-            </a:r>
-          </a:p>
-          <a:p>
-            <a:pPr lvl="2">
-              <a:lnSpc>
-                <a:spcPct val="150000"/>
-              </a:lnSpc>
-            </a:pPr>
-            <a:r>
-              <a:rPr lang="ko-KR" altLang="en-US" dirty="0">
-                <a:solidFill>
-                  <a:srgbClr val="212529"/>
-                </a:solidFill>
-                <a:latin typeface="+mn-ea"/>
-              </a:rPr>
-              <a:t>경사가 가파르면 조금 이동하고 완만하면 크게 이동</a:t>
-            </a:r>
-            <a:endParaRPr lang="en-US" altLang="ko-KR" dirty="0">
-              <a:solidFill>
-                <a:srgbClr val="212529"/>
-              </a:solidFill>
-              <a:latin typeface="+mn-ea"/>
-            </a:endParaRPr>
-          </a:p>
-          <a:p>
-            <a:pPr lvl="1">
-              <a:lnSpc>
-                <a:spcPct val="150000"/>
-              </a:lnSpc>
-              <a:buFont typeface="Wingdings" panose="05000000000000000000" pitchFamily="2" charset="2"/>
-              <a:buChar char="§"/>
-            </a:pPr>
-            <a:r>
-              <a:rPr lang="en-US" altLang="ko-KR" dirty="0">
-                <a:solidFill>
-                  <a:srgbClr val="212529"/>
-                </a:solidFill>
-                <a:latin typeface="+mn-ea"/>
-              </a:rPr>
-              <a:t>Momentum</a:t>
-            </a:r>
-          </a:p>
-          <a:p>
-            <a:pPr lvl="2">
-              <a:lnSpc>
-                <a:spcPct val="150000"/>
-              </a:lnSpc>
-            </a:pPr>
-            <a:r>
-              <a:rPr lang="ko-KR" altLang="en-US" dirty="0"/>
-              <a:t>기울기</a:t>
-            </a:r>
-            <a:r>
-              <a:rPr lang="en-US" altLang="ko-KR" dirty="0"/>
-              <a:t>(gradient) </a:t>
-            </a:r>
-            <a:r>
-              <a:rPr lang="ko-KR" altLang="en-US" dirty="0"/>
-              <a:t>업데이트에 </a:t>
-            </a:r>
-            <a:r>
-              <a:rPr lang="ko-KR" altLang="en-US" b="1" dirty="0"/>
-              <a:t>이전 업데이트 방향의 관성을 추가</a:t>
-            </a:r>
-            <a:r>
-              <a:rPr lang="ko-KR" altLang="en-US" dirty="0"/>
-              <a:t>하여 더 빠르고 안정적으로 </a:t>
-            </a:r>
-            <a:r>
-              <a:rPr lang="ko-KR" altLang="en-US" dirty="0" err="1"/>
-              <a:t>최적값에</a:t>
-            </a:r>
-            <a:r>
-              <a:rPr lang="ko-KR" altLang="en-US" dirty="0"/>
-              <a:t> 도달하도록 돕는 방법</a:t>
-            </a:r>
-            <a:endParaRPr lang="en-US" altLang="ko-KR" dirty="0">
-              <a:latin typeface="+mn-ea"/>
-            </a:endParaRPr>
-          </a:p>
-        </p:txBody>
-      </p:sp>
-      <p:sp>
-        <p:nvSpPr>
-          <p:cNvPr id="4" name="날짜 개체 틀 3">
-            <a:extLst>
-              <a:ext uri="{FF2B5EF4-FFF2-40B4-BE49-F238E27FC236}">
-                <a16:creationId xmlns:a16="http://schemas.microsoft.com/office/drawing/2014/main" id="{590F8720-7C11-4CC8-8215-3F57F085A24B}"/>
-              </a:ext>
-            </a:extLst>
-          </p:cNvPr>
-          <p:cNvSpPr>
-            <a:spLocks noGrp="1"/>
-          </p:cNvSpPr>
-          <p:nvPr>
-            <p:ph type="dt" sz="half" idx="10"/>
-          </p:nvPr>
-        </p:nvSpPr>
-        <p:spPr/>
-        <p:txBody>
-          <a:bodyPr/>
-          <a:lstStyle/>
-          <a:p>
-            <a:fld id="{0F78D9C4-20C1-4B15-A116-16DC77AD9A1E}" type="datetime1">
-              <a:rPr lang="ko-KR" altLang="en-US" smtClean="0"/>
-              <a:t>2026-02-10</a:t>
-            </a:fld>
-            <a:endParaRPr lang="ko-KR" altLang="en-US"/>
-          </a:p>
-        </p:txBody>
-      </p:sp>
-      <p:sp>
-        <p:nvSpPr>
-          <p:cNvPr id="5" name="슬라이드 번호 개체 틀 4">
-            <a:extLst>
-              <a:ext uri="{FF2B5EF4-FFF2-40B4-BE49-F238E27FC236}">
-                <a16:creationId xmlns:a16="http://schemas.microsoft.com/office/drawing/2014/main" id="{E86D5960-457B-4CA2-B0B3-F7F0DADA85D8}"/>
-              </a:ext>
-            </a:extLst>
-          </p:cNvPr>
-          <p:cNvSpPr>
-            <a:spLocks noGrp="1"/>
-          </p:cNvSpPr>
-          <p:nvPr>
-            <p:ph type="sldNum" sz="quarter" idx="12"/>
-          </p:nvPr>
-        </p:nvSpPr>
-        <p:spPr/>
-        <p:txBody>
-          <a:bodyPr/>
-          <a:lstStyle/>
-          <a:p>
-            <a:fld id="{083A2CE0-18CD-4102-B738-4ACFF9E68BA4}" type="slidenum">
-              <a:rPr lang="ko-KR" altLang="en-US" smtClean="0"/>
-              <a:t>33</a:t>
-            </a:fld>
-            <a:endParaRPr lang="ko-KR" altLang="en-US"/>
-          </a:p>
-        </p:txBody>
-      </p:sp>
-    </p:spTree>
-    <p:extLst>
-      <p:ext uri="{BB962C8B-B14F-4D97-AF65-F5344CB8AC3E}">
-        <p14:creationId xmlns:p14="http://schemas.microsoft.com/office/powerpoint/2010/main" val="3567262447"/>
-      </p:ext>
-    </p:extLst>
-  </p:cSld>
-  <p:clrMapOvr>
-    <a:masterClrMapping/>
-  </p:clrMapOvr>
-</p:sld>
-</file>
-
-<file path=ppt/slides/slide34.xml><?xml version="1.0" encoding="utf-8"?>
-<p:sld xmlns:a="http://schemas.openxmlformats.org/drawingml/2006/main" xmlns:r="http://schemas.openxmlformats.org/officeDocument/2006/relationships" xmlns:p="http://schemas.openxmlformats.org/presentationml/2006/main">
-  <p:cSld>
-    <p:spTree>
-      <p:nvGrpSpPr>
-        <p:cNvPr id="1" name=""/>
-        <p:cNvGrpSpPr/>
-        <p:nvPr/>
-      </p:nvGrpSpPr>
-      <p:grpSpPr>
-        <a:xfrm>
-          <a:off x="0" y="0"/>
-          <a:ext cx="0" cy="0"/>
-          <a:chOff x="0" y="0"/>
-          <a:chExt cx="0" cy="0"/>
-        </a:xfrm>
-      </p:grpSpPr>
-      <p:sp>
-        <p:nvSpPr>
-          <p:cNvPr id="2" name="제목 1">
-            <a:extLst>
-              <a:ext uri="{FF2B5EF4-FFF2-40B4-BE49-F238E27FC236}">
-                <a16:creationId xmlns:a16="http://schemas.microsoft.com/office/drawing/2014/main" id="{A8D8F1F4-4871-4B45-B08E-F92ACDB80FE6}"/>
-              </a:ext>
-            </a:extLst>
-          </p:cNvPr>
-          <p:cNvSpPr>
-            <a:spLocks noGrp="1"/>
-          </p:cNvSpPr>
-          <p:nvPr>
-            <p:ph type="title"/>
-          </p:nvPr>
-        </p:nvSpPr>
-        <p:spPr/>
-        <p:txBody>
-          <a:bodyPr>
-            <a:normAutofit/>
-          </a:bodyPr>
-          <a:lstStyle/>
-          <a:p>
-            <a:r>
-              <a:rPr lang="en-US" altLang="ko-KR" b="1" dirty="0">
-                <a:latin typeface="+mj-ea"/>
-              </a:rPr>
-              <a:t>SGD</a:t>
-            </a:r>
-            <a:r>
-              <a:rPr lang="ko-KR" altLang="en-US" b="1" dirty="0">
-                <a:latin typeface="+mj-ea"/>
-              </a:rPr>
-              <a:t>의 단점을 개선</a:t>
-            </a:r>
-            <a:r>
-              <a:rPr lang="en-US" altLang="ko-KR" b="1" dirty="0">
-                <a:latin typeface="+mj-ea"/>
-              </a:rPr>
-              <a:t>(optimizer)</a:t>
-            </a:r>
-            <a:endParaRPr lang="ko-KR" altLang="en-US" b="1" dirty="0">
-              <a:latin typeface="+mj-ea"/>
-            </a:endParaRPr>
-          </a:p>
-        </p:txBody>
-      </p:sp>
-      <p:sp>
-        <p:nvSpPr>
-          <p:cNvPr id="4" name="날짜 개체 틀 3">
-            <a:extLst>
-              <a:ext uri="{FF2B5EF4-FFF2-40B4-BE49-F238E27FC236}">
-                <a16:creationId xmlns:a16="http://schemas.microsoft.com/office/drawing/2014/main" id="{590F8720-7C11-4CC8-8215-3F57F085A24B}"/>
-              </a:ext>
-            </a:extLst>
-          </p:cNvPr>
-          <p:cNvSpPr>
-            <a:spLocks noGrp="1"/>
-          </p:cNvSpPr>
-          <p:nvPr>
-            <p:ph type="dt" sz="half" idx="10"/>
-          </p:nvPr>
-        </p:nvSpPr>
-        <p:spPr/>
-        <p:txBody>
-          <a:bodyPr/>
-          <a:lstStyle/>
-          <a:p>
-            <a:fld id="{0F78D9C4-20C1-4B15-A116-16DC77AD9A1E}" type="datetime1">
-              <a:rPr lang="ko-KR" altLang="en-US" smtClean="0"/>
-              <a:t>2026-02-10</a:t>
-            </a:fld>
-            <a:endParaRPr lang="ko-KR" altLang="en-US"/>
-          </a:p>
-        </p:txBody>
-      </p:sp>
-      <p:sp>
-        <p:nvSpPr>
-          <p:cNvPr id="5" name="슬라이드 번호 개체 틀 4">
-            <a:extLst>
-              <a:ext uri="{FF2B5EF4-FFF2-40B4-BE49-F238E27FC236}">
-                <a16:creationId xmlns:a16="http://schemas.microsoft.com/office/drawing/2014/main" id="{E86D5960-457B-4CA2-B0B3-F7F0DADA85D8}"/>
-              </a:ext>
-            </a:extLst>
-          </p:cNvPr>
-          <p:cNvSpPr>
-            <a:spLocks noGrp="1"/>
-          </p:cNvSpPr>
-          <p:nvPr>
-            <p:ph type="sldNum" sz="quarter" idx="12"/>
-          </p:nvPr>
-        </p:nvSpPr>
-        <p:spPr/>
-        <p:txBody>
-          <a:bodyPr/>
-          <a:lstStyle/>
-          <a:p>
-            <a:fld id="{083A2CE0-18CD-4102-B738-4ACFF9E68BA4}" type="slidenum">
-              <a:rPr lang="ko-KR" altLang="en-US" smtClean="0"/>
-              <a:t>34</a:t>
-            </a:fld>
-            <a:endParaRPr lang="ko-KR" altLang="en-US"/>
-          </a:p>
-        </p:txBody>
-      </p:sp>
-      <p:pic>
-        <p:nvPicPr>
-          <p:cNvPr id="4098" name="Picture 2" descr="Accelerating privacy-preserving momentum federated learning for industrial  cyber-physical systems | Complex &amp; Intelligent Systems"/>
-          <p:cNvPicPr>
-            <a:picLocks noChangeAspect="1" noChangeArrowheads="1"/>
-          </p:cNvPicPr>
-          <p:nvPr/>
-        </p:nvPicPr>
-        <p:blipFill>
-          <a:blip r:embed="rId2">
-            <a:extLst>
-              <a:ext uri="{28A0092B-C50C-407E-A947-70E740481C1C}">
-                <a14:useLocalDpi xmlns:a14="http://schemas.microsoft.com/office/drawing/2010/main" val="0"/>
-              </a:ext>
-            </a:extLst>
-          </a:blip>
-          <a:srcRect/>
-          <a:stretch>
-            <a:fillRect/>
-          </a:stretch>
-        </p:blipFill>
-        <p:spPr bwMode="auto">
-          <a:xfrm>
-            <a:off x="928647" y="1946514"/>
-            <a:ext cx="10315656" cy="3418474"/>
-          </a:xfrm>
-          <a:prstGeom prst="rect">
-            <a:avLst/>
-          </a:prstGeom>
-          <a:noFill/>
-          <a:extLst>
-            <a:ext uri="{909E8E84-426E-40DD-AFC4-6F175D3DCCD1}">
-              <a14:hiddenFill xmlns:a14="http://schemas.microsoft.com/office/drawing/2010/main">
-                <a:solidFill>
-                  <a:srgbClr val="FFFFFF"/>
-                </a:solidFill>
-              </a14:hiddenFill>
-            </a:ext>
-          </a:extLst>
-        </p:spPr>
-      </p:pic>
-    </p:spTree>
-    <p:extLst>
-      <p:ext uri="{BB962C8B-B14F-4D97-AF65-F5344CB8AC3E}">
-        <p14:creationId xmlns:p14="http://schemas.microsoft.com/office/powerpoint/2010/main" val="1432145884"/>
-      </p:ext>
-    </p:extLst>
-  </p:cSld>
-  <p:clrMapOvr>
-    <a:masterClrMapping/>
-  </p:clrMapOvr>
-</p:sld>
-</file>
-
-<file path=ppt/slides/slide35.xml><?xml version="1.0" encoding="utf-8"?>
-<p:sld xmlns:a="http://schemas.openxmlformats.org/drawingml/2006/main" xmlns:r="http://schemas.openxmlformats.org/officeDocument/2006/relationships" xmlns:p="http://schemas.openxmlformats.org/presentationml/2006/main">
-  <p:cSld>
-    <p:spTree>
-      <p:nvGrpSpPr>
-        <p:cNvPr id="1" name=""/>
-        <p:cNvGrpSpPr/>
-        <p:nvPr/>
-      </p:nvGrpSpPr>
-      <p:grpSpPr>
-        <a:xfrm>
-          <a:off x="0" y="0"/>
-          <a:ext cx="0" cy="0"/>
-          <a:chOff x="0" y="0"/>
-          <a:chExt cx="0" cy="0"/>
-        </a:xfrm>
-      </p:grpSpPr>
-      <p:sp>
-        <p:nvSpPr>
-          <p:cNvPr id="4" name="날짜 개체 틀 3">
-            <a:extLst>
-              <a:ext uri="{FF2B5EF4-FFF2-40B4-BE49-F238E27FC236}">
-                <a16:creationId xmlns:a16="http://schemas.microsoft.com/office/drawing/2014/main" id="{42F7F97D-DAA6-05B8-8DBE-13E9DCB52604}"/>
-              </a:ext>
-            </a:extLst>
-          </p:cNvPr>
-          <p:cNvSpPr>
-            <a:spLocks noGrp="1"/>
-          </p:cNvSpPr>
-          <p:nvPr>
-            <p:ph type="dt" sz="half" idx="10"/>
-          </p:nvPr>
-        </p:nvSpPr>
-        <p:spPr/>
-        <p:txBody>
-          <a:bodyPr/>
-          <a:lstStyle/>
-          <a:p>
-            <a:fld id="{0F78D9C4-20C1-4B15-A116-16DC77AD9A1E}" type="datetime1">
-              <a:rPr lang="ko-KR" altLang="en-US" smtClean="0"/>
-              <a:t>2026-02-10</a:t>
-            </a:fld>
-            <a:endParaRPr lang="ko-KR" altLang="en-US"/>
-          </a:p>
-        </p:txBody>
-      </p:sp>
-      <p:sp>
-        <p:nvSpPr>
-          <p:cNvPr id="5" name="슬라이드 번호 개체 틀 4">
-            <a:extLst>
-              <a:ext uri="{FF2B5EF4-FFF2-40B4-BE49-F238E27FC236}">
-                <a16:creationId xmlns:a16="http://schemas.microsoft.com/office/drawing/2014/main" id="{AC87F9AC-63A1-F987-9209-BA6204B71F30}"/>
-              </a:ext>
-            </a:extLst>
-          </p:cNvPr>
-          <p:cNvSpPr>
-            <a:spLocks noGrp="1"/>
-          </p:cNvSpPr>
-          <p:nvPr>
-            <p:ph type="sldNum" sz="quarter" idx="12"/>
-          </p:nvPr>
-        </p:nvSpPr>
-        <p:spPr/>
-        <p:txBody>
-          <a:bodyPr/>
-          <a:lstStyle/>
-          <a:p>
-            <a:fld id="{083A2CE0-18CD-4102-B738-4ACFF9E68BA4}" type="slidenum">
-              <a:rPr lang="ko-KR" altLang="en-US" smtClean="0"/>
-              <a:t>35</a:t>
-            </a:fld>
-            <a:endParaRPr lang="ko-KR" altLang="en-US"/>
-          </a:p>
-        </p:txBody>
-      </p:sp>
-      <p:pic>
-        <p:nvPicPr>
-          <p:cNvPr id="7" name="그림 6" descr="텍스트, 스크린샷, 도표, 디자인이(가) 표시된 사진&#10;&#10;자동 생성된 설명">
-            <a:extLst>
-              <a:ext uri="{FF2B5EF4-FFF2-40B4-BE49-F238E27FC236}">
-                <a16:creationId xmlns:a16="http://schemas.microsoft.com/office/drawing/2014/main" id="{766D135C-0D25-33A0-2315-2E253AC7A898}"/>
-              </a:ext>
-            </a:extLst>
-          </p:cNvPr>
-          <p:cNvPicPr>
-            <a:picLocks noChangeAspect="1"/>
-          </p:cNvPicPr>
-          <p:nvPr/>
-        </p:nvPicPr>
-        <p:blipFill>
-          <a:blip r:embed="rId2">
-            <a:extLst>
-              <a:ext uri="{28A0092B-C50C-407E-A947-70E740481C1C}">
-                <a14:useLocalDpi xmlns:a14="http://schemas.microsoft.com/office/drawing/2010/main" val="0"/>
-              </a:ext>
-            </a:extLst>
-          </a:blip>
-          <a:stretch>
-            <a:fillRect/>
-          </a:stretch>
-        </p:blipFill>
-        <p:spPr>
-          <a:xfrm>
-            <a:off x="2654300" y="589024"/>
-            <a:ext cx="6883400" cy="5329084"/>
-          </a:xfrm>
-          <a:prstGeom prst="rect">
-            <a:avLst/>
-          </a:prstGeom>
-        </p:spPr>
-      </p:pic>
-      <p:sp>
-        <p:nvSpPr>
-          <p:cNvPr id="3" name="제목 1">
-            <a:extLst>
-              <a:ext uri="{FF2B5EF4-FFF2-40B4-BE49-F238E27FC236}">
-                <a16:creationId xmlns:a16="http://schemas.microsoft.com/office/drawing/2014/main" id="{AA7AE0F9-3DF1-7D7A-FB66-E93A71B33C82}"/>
-              </a:ext>
-            </a:extLst>
-          </p:cNvPr>
-          <p:cNvSpPr txBox="1">
-            <a:spLocks/>
-          </p:cNvSpPr>
-          <p:nvPr/>
-        </p:nvSpPr>
-        <p:spPr>
-          <a:xfrm>
-            <a:off x="124690" y="139308"/>
-            <a:ext cx="4142509" cy="812647"/>
-          </a:xfrm>
-          <a:prstGeom prst="rect">
-            <a:avLst/>
-          </a:prstGeom>
-        </p:spPr>
-        <p:txBody>
-          <a:bodyPr vert="horz" lIns="91440" tIns="45720" rIns="91440" bIns="45720" rtlCol="0" anchor="ctr">
-            <a:normAutofit/>
-          </a:bodyPr>
-          <a:lstStyle>
-            <a:lvl1pPr algn="l" defTabSz="914400" rtl="0" eaLnBrk="1" latinLnBrk="1" hangingPunct="1">
-              <a:lnSpc>
-                <a:spcPct val="90000"/>
-              </a:lnSpc>
-              <a:spcBef>
-                <a:spcPct val="0"/>
-              </a:spcBef>
-              <a:buNone/>
-              <a:defRPr sz="5400" kern="1200">
-                <a:solidFill>
-                  <a:schemeClr val="tx1"/>
-                </a:solidFill>
-                <a:latin typeface="+mj-lt"/>
-                <a:ea typeface="+mj-ea"/>
-                <a:cs typeface="+mj-cs"/>
-              </a:defRPr>
-            </a:lvl1pPr>
-          </a:lstStyle>
-          <a:p>
-            <a:r>
-              <a:rPr lang="ko-KR" altLang="en-US" sz="2800" dirty="0">
-                <a:latin typeface="+mn-ea"/>
-                <a:ea typeface="+mn-ea"/>
-              </a:rPr>
-              <a:t>✅ </a:t>
-            </a:r>
-            <a:r>
-              <a:rPr lang="ko-KR" altLang="en-US" sz="2800" dirty="0" err="1">
-                <a:latin typeface="+mn-ea"/>
-                <a:ea typeface="+mn-ea"/>
-              </a:rPr>
-              <a:t>안장점</a:t>
-            </a:r>
-            <a:r>
-              <a:rPr lang="ko-KR" altLang="en-US" sz="2800" dirty="0">
-                <a:latin typeface="+mn-ea"/>
-                <a:ea typeface="+mn-ea"/>
-              </a:rPr>
-              <a:t> 탈출 시뮬레이션</a:t>
-            </a:r>
-          </a:p>
-        </p:txBody>
-      </p:sp>
-      <p:sp>
-        <p:nvSpPr>
-          <p:cNvPr id="8" name="TextBox 7">
-            <a:extLst>
-              <a:ext uri="{FF2B5EF4-FFF2-40B4-BE49-F238E27FC236}">
-                <a16:creationId xmlns:a16="http://schemas.microsoft.com/office/drawing/2014/main" id="{38B8D091-BAFA-0CA6-B64B-006F1F5E77FA}"/>
-              </a:ext>
-            </a:extLst>
-          </p:cNvPr>
-          <p:cNvSpPr txBox="1"/>
-          <p:nvPr/>
-        </p:nvSpPr>
-        <p:spPr>
-          <a:xfrm>
-            <a:off x="4056062" y="5961500"/>
-            <a:ext cx="4079875" cy="246221"/>
-          </a:xfrm>
-          <a:prstGeom prst="rect">
-            <a:avLst/>
-          </a:prstGeom>
-          <a:noFill/>
-        </p:spPr>
-        <p:txBody>
-          <a:bodyPr wrap="square">
-            <a:spAutoFit/>
-          </a:bodyPr>
-          <a:lstStyle/>
-          <a:p>
-            <a:pPr algn="ctr"/>
-            <a:r>
-              <a:rPr lang="en-US" altLang="ko-KR" sz="1000" dirty="0">
-                <a:solidFill>
-                  <a:schemeClr val="bg2">
-                    <a:lumMod val="75000"/>
-                  </a:schemeClr>
-                </a:solidFill>
-              </a:rPr>
-              <a:t>[</a:t>
-            </a:r>
-            <a:r>
-              <a:rPr lang="ko-KR" altLang="en-US" sz="1000" dirty="0">
-                <a:solidFill>
-                  <a:schemeClr val="bg2">
-                    <a:lumMod val="75000"/>
-                  </a:schemeClr>
-                </a:solidFill>
-              </a:rPr>
-              <a:t>출처</a:t>
-            </a:r>
-            <a:r>
-              <a:rPr lang="en-US" altLang="ko-KR" sz="1000" dirty="0">
-                <a:solidFill>
-                  <a:schemeClr val="bg2">
-                    <a:lumMod val="75000"/>
-                  </a:schemeClr>
-                </a:solidFill>
-              </a:rPr>
-              <a:t>] </a:t>
-            </a:r>
-            <a:r>
-              <a:rPr lang="ko-KR" altLang="en-US" sz="1000" dirty="0">
-                <a:solidFill>
-                  <a:schemeClr val="bg2">
-                    <a:lumMod val="75000"/>
-                  </a:schemeClr>
-                </a:solidFill>
-              </a:rPr>
-              <a:t>https://imgur.com/a/visualizing-optimization-algos-Hqolp</a:t>
-            </a:r>
-          </a:p>
-        </p:txBody>
-      </p:sp>
-    </p:spTree>
-    <p:extLst>
-      <p:ext uri="{BB962C8B-B14F-4D97-AF65-F5344CB8AC3E}">
-        <p14:creationId xmlns:p14="http://schemas.microsoft.com/office/powerpoint/2010/main" val="2199310784"/>
-      </p:ext>
-    </p:extLst>
-  </p:cSld>
-  <p:clrMapOvr>
-    <a:masterClrMapping/>
-  </p:clrMapOvr>
-</p:sld>
-</file>
-
-<file path=ppt/slides/slide36.xml><?xml version="1.0" encoding="utf-8"?>
-<p:sld xmlns:a="http://schemas.openxmlformats.org/drawingml/2006/main" xmlns:r="http://schemas.openxmlformats.org/officeDocument/2006/relationships" xmlns:p="http://schemas.openxmlformats.org/presentationml/2006/main">
-  <p:cSld>
-    <p:spTree>
-      <p:nvGrpSpPr>
-        <p:cNvPr id="1" name="">
-          <a:extLst>
-            <a:ext uri="{FF2B5EF4-FFF2-40B4-BE49-F238E27FC236}">
-              <a16:creationId xmlns:a16="http://schemas.microsoft.com/office/drawing/2014/main" id="{ACBA4ED0-C41D-C278-E1B0-39C11A426E71}"/>
-            </a:ext>
-          </a:extLst>
-        </p:cNvPr>
-        <p:cNvGrpSpPr/>
-        <p:nvPr/>
-      </p:nvGrpSpPr>
-      <p:grpSpPr>
-        <a:xfrm>
-          <a:off x="0" y="0"/>
-          <a:ext cx="0" cy="0"/>
-          <a:chOff x="0" y="0"/>
-          <a:chExt cx="0" cy="0"/>
-        </a:xfrm>
-      </p:grpSpPr>
-      <p:sp>
-        <p:nvSpPr>
-          <p:cNvPr id="2" name="제목 1">
-            <a:extLst>
-              <a:ext uri="{FF2B5EF4-FFF2-40B4-BE49-F238E27FC236}">
-                <a16:creationId xmlns:a16="http://schemas.microsoft.com/office/drawing/2014/main" id="{783D1DC8-9245-4828-7C0D-89F35C0FD1D5}"/>
-              </a:ext>
-            </a:extLst>
-          </p:cNvPr>
-          <p:cNvSpPr>
-            <a:spLocks noGrp="1"/>
-          </p:cNvSpPr>
-          <p:nvPr>
-            <p:ph type="title"/>
-          </p:nvPr>
-        </p:nvSpPr>
-        <p:spPr/>
-        <p:txBody>
-          <a:bodyPr>
-            <a:normAutofit/>
-          </a:bodyPr>
-          <a:lstStyle/>
-          <a:p>
-            <a:r>
-              <a:rPr lang="en-US" altLang="ko-KR" b="1">
-                <a:latin typeface="+mj-ea"/>
-              </a:rPr>
-              <a:t>Optimizer</a:t>
-            </a:r>
-            <a:endParaRPr lang="ko-KR" altLang="en-US" b="1" dirty="0">
-              <a:latin typeface="+mj-ea"/>
-            </a:endParaRPr>
-          </a:p>
-        </p:txBody>
-      </p:sp>
-      <p:sp>
-        <p:nvSpPr>
-          <p:cNvPr id="4" name="날짜 개체 틀 3">
-            <a:extLst>
-              <a:ext uri="{FF2B5EF4-FFF2-40B4-BE49-F238E27FC236}">
-                <a16:creationId xmlns:a16="http://schemas.microsoft.com/office/drawing/2014/main" id="{165BA029-FDF4-BE01-B012-3E27F3E4255E}"/>
-              </a:ext>
-            </a:extLst>
-          </p:cNvPr>
-          <p:cNvSpPr>
-            <a:spLocks noGrp="1"/>
-          </p:cNvSpPr>
-          <p:nvPr>
-            <p:ph type="dt" sz="half" idx="10"/>
-          </p:nvPr>
-        </p:nvSpPr>
-        <p:spPr/>
-        <p:txBody>
-          <a:bodyPr/>
-          <a:lstStyle/>
-          <a:p>
-            <a:fld id="{0F78D9C4-20C1-4B15-A116-16DC77AD9A1E}" type="datetime1">
-              <a:rPr lang="ko-KR" altLang="en-US" smtClean="0"/>
-              <a:t>2026-02-10</a:t>
-            </a:fld>
-            <a:endParaRPr lang="ko-KR" altLang="en-US"/>
-          </a:p>
-        </p:txBody>
-      </p:sp>
-      <p:sp>
-        <p:nvSpPr>
-          <p:cNvPr id="5" name="슬라이드 번호 개체 틀 4">
-            <a:extLst>
-              <a:ext uri="{FF2B5EF4-FFF2-40B4-BE49-F238E27FC236}">
-                <a16:creationId xmlns:a16="http://schemas.microsoft.com/office/drawing/2014/main" id="{B8FB8E11-7ADE-CB64-8077-C1EE630CF7BE}"/>
-              </a:ext>
-            </a:extLst>
-          </p:cNvPr>
-          <p:cNvSpPr>
-            <a:spLocks noGrp="1"/>
-          </p:cNvSpPr>
-          <p:nvPr>
-            <p:ph type="sldNum" sz="quarter" idx="12"/>
-          </p:nvPr>
-        </p:nvSpPr>
-        <p:spPr/>
-        <p:txBody>
-          <a:bodyPr/>
-          <a:lstStyle/>
-          <a:p>
-            <a:fld id="{083A2CE0-18CD-4102-B738-4ACFF9E68BA4}" type="slidenum">
-              <a:rPr lang="ko-KR" altLang="en-US" smtClean="0"/>
-              <a:t>36</a:t>
-            </a:fld>
-            <a:endParaRPr lang="ko-KR" altLang="en-US"/>
-          </a:p>
-        </p:txBody>
-      </p:sp>
-      <p:sp>
-        <p:nvSpPr>
-          <p:cNvPr id="10" name="TextBox 9">
-            <a:extLst>
-              <a:ext uri="{FF2B5EF4-FFF2-40B4-BE49-F238E27FC236}">
-                <a16:creationId xmlns:a16="http://schemas.microsoft.com/office/drawing/2014/main" id="{7E0B772F-CA46-1F40-75E5-509D790159A5}"/>
-              </a:ext>
-            </a:extLst>
-          </p:cNvPr>
-          <p:cNvSpPr txBox="1"/>
-          <p:nvPr/>
-        </p:nvSpPr>
-        <p:spPr>
-          <a:xfrm>
-            <a:off x="251788" y="1145407"/>
-            <a:ext cx="6898312" cy="1782860"/>
-          </a:xfrm>
-          <a:prstGeom prst="rect">
-            <a:avLst/>
-          </a:prstGeom>
-          <a:noFill/>
-        </p:spPr>
-        <p:txBody>
-          <a:bodyPr wrap="square">
-            <a:spAutoFit/>
-          </a:bodyPr>
-          <a:lstStyle/>
-          <a:p>
-            <a:pPr marL="0" indent="0">
-              <a:lnSpc>
-                <a:spcPct val="150000"/>
-              </a:lnSpc>
-              <a:buNone/>
-            </a:pPr>
-            <a:r>
-              <a:rPr lang="ko-KR" altLang="en-US" sz="2800" dirty="0">
-                <a:latin typeface="+mn-ea"/>
-              </a:rPr>
-              <a:t>🔗 참고 링크</a:t>
-            </a:r>
-            <a:endParaRPr lang="en-US" altLang="ko-KR" dirty="0">
-              <a:latin typeface="Pretendard Light" panose="02000403000000020004" pitchFamily="2" charset="-127"/>
-              <a:ea typeface="Pretendard Light" panose="02000403000000020004" pitchFamily="2" charset="-127"/>
-              <a:cs typeface="Pretendard Light" panose="02000403000000020004" pitchFamily="2" charset="-127"/>
-              <a:hlinkClick r:id="rId2"/>
-            </a:endParaRPr>
-          </a:p>
-          <a:p>
-            <a:pPr marL="742950" lvl="1" indent="-285750">
-              <a:lnSpc>
-                <a:spcPct val="150000"/>
-              </a:lnSpc>
-              <a:buFont typeface="Arial" pitchFamily="34" charset="0"/>
-              <a:buChar char="•"/>
-            </a:pPr>
-            <a:r>
-              <a:rPr lang="en-US" altLang="ko-KR" sz="2400" dirty="0">
-                <a:latin typeface="Pretendard Light" panose="02000403000000020004" pitchFamily="2" charset="-127"/>
-                <a:ea typeface="Pretendard Light" panose="02000403000000020004" pitchFamily="2" charset="-127"/>
-                <a:cs typeface="Pretendard Light" panose="02000403000000020004" pitchFamily="2" charset="-127"/>
-                <a:hlinkClick r:id="rId2"/>
-              </a:rPr>
-              <a:t>https://keras.io/api/optimizers/</a:t>
-            </a:r>
-            <a:endParaRPr lang="en-US" altLang="ko-KR" sz="2400" dirty="0">
-              <a:latin typeface="Pretendard Light" panose="02000403000000020004" pitchFamily="2" charset="-127"/>
-              <a:ea typeface="Pretendard Light" panose="02000403000000020004" pitchFamily="2" charset="-127"/>
-              <a:cs typeface="Pretendard Light" panose="02000403000000020004" pitchFamily="2" charset="-127"/>
-            </a:endParaRPr>
-          </a:p>
-          <a:p>
-            <a:pPr marL="742950" lvl="1" indent="-285750">
-              <a:lnSpc>
-                <a:spcPct val="150000"/>
-              </a:lnSpc>
-              <a:buFont typeface="Arial" pitchFamily="34" charset="0"/>
-              <a:buChar char="•"/>
-            </a:pPr>
-            <a:r>
-              <a:rPr lang="en-US" altLang="ko-KR" sz="2400" dirty="0">
-                <a:latin typeface="Pretendard Light" panose="02000403000000020004" pitchFamily="2" charset="-127"/>
-                <a:ea typeface="Pretendard Light" panose="02000403000000020004" pitchFamily="2" charset="-127"/>
-                <a:cs typeface="Pretendard Light" panose="02000403000000020004" pitchFamily="2" charset="-127"/>
-                <a:hlinkClick r:id="rId3"/>
-              </a:rPr>
-              <a:t>https://pytorch.org/docs/stable/optim.html</a:t>
-            </a:r>
-            <a:endParaRPr lang="en-US" altLang="ko-KR" sz="2400" dirty="0">
-              <a:latin typeface="Pretendard Light" panose="02000403000000020004" pitchFamily="2" charset="-127"/>
-              <a:ea typeface="Pretendard Light" panose="02000403000000020004" pitchFamily="2" charset="-127"/>
-              <a:cs typeface="Pretendard Light" panose="02000403000000020004" pitchFamily="2" charset="-127"/>
-            </a:endParaRPr>
-          </a:p>
-        </p:txBody>
-      </p:sp>
-    </p:spTree>
-    <p:extLst>
-      <p:ext uri="{BB962C8B-B14F-4D97-AF65-F5344CB8AC3E}">
-        <p14:creationId xmlns:p14="http://schemas.microsoft.com/office/powerpoint/2010/main" val="3062334820"/>
-      </p:ext>
-    </p:extLst>
-  </p:cSld>
-  <p:clrMapOvr>
-    <a:masterClrMapping/>
-  </p:clrMapOvr>
-</p:sld>
-</file>
-
-<file path=ppt/slides/slide37.xml><?xml version="1.0" encoding="utf-8"?>
+<file path=ppt/slides/slide40.xml><?xml version="1.0" encoding="utf-8"?>
 <p:sld xmlns:a="http://schemas.openxmlformats.org/drawingml/2006/main" xmlns:r="http://schemas.openxmlformats.org/officeDocument/2006/relationships" xmlns:p="http://schemas.openxmlformats.org/presentationml/2006/main">
   <p:cSld>
     <p:spTree>
@@ -16823,7 +19004,7 @@
 </p:sld>
 </file>
 
-<file path=ppt/slides/slide4.xml><?xml version="1.0" encoding="utf-8"?>
+<file path=ppt/slides/slide5.xml><?xml version="1.0" encoding="utf-8"?>
 <p:sld xmlns:a="http://schemas.openxmlformats.org/drawingml/2006/main" xmlns:r="http://schemas.openxmlformats.org/officeDocument/2006/relationships" xmlns:p="http://schemas.openxmlformats.org/presentationml/2006/main">
   <p:cSld>
     <p:spTree>
@@ -16869,7 +19050,7 @@
           <a:p>
             <a:fld id="{0F78D9C4-20C1-4B15-A116-16DC77AD9A1E}" type="datetime1">
               <a:rPr lang="ko-KR" altLang="en-US" smtClean="0"/>
-              <a:t>2026-02-10</a:t>
+              <a:t>2026-02-12</a:t>
             </a:fld>
             <a:endParaRPr lang="ko-KR" altLang="en-US"/>
           </a:p>
@@ -16898,7 +19079,7 @@
           <a:p>
             <a:fld id="{083A2CE0-18CD-4102-B738-4ACFF9E68BA4}" type="slidenum">
               <a:rPr lang="ko-KR" altLang="en-US" smtClean="0"/>
-              <a:t>4</a:t>
+              <a:t>5</a:t>
             </a:fld>
             <a:endParaRPr lang="ko-KR" altLang="en-US"/>
           </a:p>
@@ -17242,7 +19423,7 @@
 </p:sld>
 </file>
 
-<file path=ppt/slides/slide5.xml><?xml version="1.0" encoding="utf-8"?>
+<file path=ppt/slides/slide6.xml><?xml version="1.0" encoding="utf-8"?>
 <p:sld xmlns:a="http://schemas.openxmlformats.org/drawingml/2006/main" xmlns:r="http://schemas.openxmlformats.org/officeDocument/2006/relationships" xmlns:p="http://schemas.openxmlformats.org/presentationml/2006/main">
   <p:cSld>
     <p:spTree>
@@ -17356,7 +19537,7 @@
           <a:p>
             <a:fld id="{0F78D9C4-20C1-4B15-A116-16DC77AD9A1E}" type="datetime1">
               <a:rPr lang="ko-KR" altLang="en-US" smtClean="0"/>
-              <a:t>2026-02-10</a:t>
+              <a:t>2026-02-12</a:t>
             </a:fld>
             <a:endParaRPr lang="ko-KR" altLang="en-US"/>
           </a:p>
@@ -17385,7 +19566,7 @@
           <a:p>
             <a:fld id="{083A2CE0-18CD-4102-B738-4ACFF9E68BA4}" type="slidenum">
               <a:rPr lang="ko-KR" altLang="en-US" smtClean="0"/>
-              <a:t>5</a:t>
+              <a:t>6</a:t>
             </a:fld>
             <a:endParaRPr lang="ko-KR" altLang="en-US"/>
           </a:p>
@@ -17480,16 +19661,13 @@
             <a:pPr algn="ctr"/>
             <a:r>
               <a:rPr lang="ko-KR" altLang="en-US" sz="2800" dirty="0"/>
-              <a:t>변수 간의 관계를</a:t>
-            </a:r>
-            <a:endParaRPr lang="en-US" altLang="ko-KR" sz="2800" dirty="0"/>
-          </a:p>
-          <a:p>
-            <a:pPr algn="ctr"/>
-            <a:r>
-              <a:rPr lang="ko-KR" altLang="en-US" sz="2800" dirty="0"/>
-              <a:t>모델링하여 예측하는 방법</a:t>
-            </a:r>
+              <a:t>숫자 예측 모델</a:t>
+            </a:r>
+            <a:endParaRPr lang="ko-KR" altLang="en-US" sz="2800" dirty="0">
+              <a:highlight>
+                <a:srgbClr val="FFFF00"/>
+              </a:highlight>
+            </a:endParaRPr>
           </a:p>
         </p:txBody>
       </p:sp>
@@ -17752,7 +19930,7 @@
 </p:sld>
 </file>
 
-<file path=ppt/slides/slide6.xml><?xml version="1.0" encoding="utf-8"?>
+<file path=ppt/slides/slide7.xml><?xml version="1.0" encoding="utf-8"?>
 <p:sld xmlns:a="http://schemas.openxmlformats.org/drawingml/2006/main" xmlns:r="http://schemas.openxmlformats.org/officeDocument/2006/relationships" xmlns:p="http://schemas.openxmlformats.org/presentationml/2006/main">
   <p:cSld>
     <p:spTree>
@@ -18003,7 +20181,7 @@
           <a:p>
             <a:fld id="{0F78D9C4-20C1-4B15-A116-16DC77AD9A1E}" type="datetime1">
               <a:rPr lang="ko-KR" altLang="en-US" smtClean="0"/>
-              <a:t>2026-02-10</a:t>
+              <a:t>2026-02-12</a:t>
             </a:fld>
             <a:endParaRPr lang="ko-KR" altLang="en-US"/>
           </a:p>
@@ -18032,7 +20210,7 @@
           <a:p>
             <a:fld id="{083A2CE0-18CD-4102-B738-4ACFF9E68BA4}" type="slidenum">
               <a:rPr lang="ko-KR" altLang="en-US" smtClean="0"/>
-              <a:t>6</a:t>
+              <a:t>7</a:t>
             </a:fld>
             <a:endParaRPr lang="ko-KR" altLang="en-US"/>
           </a:p>
@@ -18218,7 +20396,7 @@
 </p:sld>
 </file>
 
-<file path=ppt/slides/slide7.xml><?xml version="1.0" encoding="utf-8"?>
+<file path=ppt/slides/slide8.xml><?xml version="1.0" encoding="utf-8"?>
 <p:sld xmlns:a="http://schemas.openxmlformats.org/drawingml/2006/main" xmlns:r="http://schemas.openxmlformats.org/officeDocument/2006/relationships" xmlns:p="http://schemas.openxmlformats.org/presentationml/2006/main">
   <p:cSld>
     <p:spTree>
@@ -18298,7 +20476,7 @@
           <a:p>
             <a:fld id="{0F78D9C4-20C1-4B15-A116-16DC77AD9A1E}" type="datetime1">
               <a:rPr lang="ko-KR" altLang="en-US" smtClean="0"/>
-              <a:t>2026-02-10</a:t>
+              <a:t>2026-02-12</a:t>
             </a:fld>
             <a:endParaRPr lang="ko-KR" altLang="en-US"/>
           </a:p>
@@ -18327,7 +20505,7 @@
           <a:p>
             <a:fld id="{083A2CE0-18CD-4102-B738-4ACFF9E68BA4}" type="slidenum">
               <a:rPr lang="ko-KR" altLang="en-US" smtClean="0"/>
-              <a:t>7</a:t>
+              <a:t>8</a:t>
             </a:fld>
             <a:endParaRPr lang="ko-KR" altLang="en-US"/>
           </a:p>
@@ -21346,7 +23524,7 @@
 </p:sld>
 </file>
 
-<file path=ppt/slides/slide8.xml><?xml version="1.0" encoding="utf-8"?>
+<file path=ppt/slides/slide9.xml><?xml version="1.0" encoding="utf-8"?>
 <p:sld xmlns:a="http://schemas.openxmlformats.org/drawingml/2006/main" xmlns:r="http://schemas.openxmlformats.org/officeDocument/2006/relationships" xmlns:p="http://schemas.openxmlformats.org/presentationml/2006/main">
   <p:cSld>
     <p:spTree>
@@ -21514,13 +23692,7 @@
               <a:rPr lang="ko-KR" altLang="en-US" dirty="0">
                 <a:latin typeface="+mn-ea"/>
               </a:rPr>
-              <a:t>하는 데 </a:t>
-            </a:r>
-            <a:r>
-              <a:rPr lang="ko-KR" altLang="en-US" dirty="0" err="1">
-                <a:latin typeface="+mn-ea"/>
-              </a:rPr>
-              <a:t>사용돔</a:t>
+              <a:t>하는 데 사용됨</a:t>
             </a:r>
             <a:endParaRPr lang="en-US" altLang="ko-KR" dirty="0">
               <a:latin typeface="+mn-ea"/>
@@ -21579,7 +23751,7 @@
           <a:p>
             <a:fld id="{0F78D9C4-20C1-4B15-A116-16DC77AD9A1E}" type="datetime1">
               <a:rPr lang="ko-KR" altLang="en-US" smtClean="0"/>
-              <a:t>2026-02-10</a:t>
+              <a:t>2026-02-12</a:t>
             </a:fld>
             <a:endParaRPr lang="ko-KR" altLang="en-US"/>
           </a:p>
@@ -21608,7 +23780,7 @@
           <a:p>
             <a:fld id="{083A2CE0-18CD-4102-B738-4ACFF9E68BA4}" type="slidenum">
               <a:rPr lang="ko-KR" altLang="en-US" smtClean="0"/>
-              <a:t>8</a:t>
+              <a:t>9</a:t>
             </a:fld>
             <a:endParaRPr lang="ko-KR" altLang="en-US"/>
           </a:p>
@@ -21660,446 +23832,6 @@
     <p:extLst>
       <p:ext uri="{BB962C8B-B14F-4D97-AF65-F5344CB8AC3E}">
         <p14:creationId xmlns:p14="http://schemas.microsoft.com/office/powerpoint/2010/main" val="818204136"/>
-      </p:ext>
-    </p:extLst>
-  </p:cSld>
-  <p:clrMapOvr>
-    <a:masterClrMapping/>
-  </p:clrMapOvr>
-</p:sld>
-</file>
-
-<file path=ppt/slides/slide9.xml><?xml version="1.0" encoding="utf-8"?>
-<p:sld xmlns:a="http://schemas.openxmlformats.org/drawingml/2006/main" xmlns:r="http://schemas.openxmlformats.org/officeDocument/2006/relationships" xmlns:p="http://schemas.openxmlformats.org/presentationml/2006/main">
-  <p:cSld>
-    <p:spTree>
-      <p:nvGrpSpPr>
-        <p:cNvPr id="1" name=""/>
-        <p:cNvGrpSpPr/>
-        <p:nvPr/>
-      </p:nvGrpSpPr>
-      <p:grpSpPr>
-        <a:xfrm>
-          <a:off x="0" y="0"/>
-          <a:ext cx="0" cy="0"/>
-          <a:chOff x="0" y="0"/>
-          <a:chExt cx="0" cy="0"/>
-        </a:xfrm>
-      </p:grpSpPr>
-      <p:sp>
-        <p:nvSpPr>
-          <p:cNvPr id="2" name="제목 1">
-            <a:extLst>
-              <a:ext uri="{FF2B5EF4-FFF2-40B4-BE49-F238E27FC236}">
-                <a16:creationId xmlns:a16="http://schemas.microsoft.com/office/drawing/2014/main" id="{A8D8F1F4-4871-4B45-B08E-F92ACDB80FE6}"/>
-              </a:ext>
-            </a:extLst>
-          </p:cNvPr>
-          <p:cNvSpPr>
-            <a:spLocks noGrp="1"/>
-          </p:cNvSpPr>
-          <p:nvPr>
-            <p:ph type="title"/>
-          </p:nvPr>
-        </p:nvSpPr>
-        <p:spPr/>
-        <p:txBody>
-          <a:bodyPr>
-            <a:normAutofit/>
-          </a:bodyPr>
-          <a:lstStyle/>
-          <a:p>
-            <a:r>
-              <a:rPr lang="ko-KR" altLang="en-US" sz="4800" b="1" dirty="0">
-                <a:latin typeface="+mj-ea"/>
-              </a:rPr>
-              <a:t>선형 회귀</a:t>
-            </a:r>
-            <a:r>
-              <a:rPr lang="en-US" altLang="ko-KR" sz="4800" b="1" dirty="0">
-                <a:latin typeface="+mj-ea"/>
-              </a:rPr>
-              <a:t>(Linear Regression)</a:t>
-            </a:r>
-            <a:endParaRPr lang="ko-KR" altLang="en-US" sz="4800" b="1" dirty="0">
-              <a:latin typeface="+mj-ea"/>
-            </a:endParaRPr>
-          </a:p>
-        </p:txBody>
-      </p:sp>
-      <p:sp>
-        <p:nvSpPr>
-          <p:cNvPr id="3" name="내용 개체 틀 2">
-            <a:extLst>
-              <a:ext uri="{FF2B5EF4-FFF2-40B4-BE49-F238E27FC236}">
-                <a16:creationId xmlns:a16="http://schemas.microsoft.com/office/drawing/2014/main" id="{659642C9-AD46-4D01-B61B-33D812751E95}"/>
-              </a:ext>
-            </a:extLst>
-          </p:cNvPr>
-          <p:cNvSpPr>
-            <a:spLocks noGrp="1"/>
-          </p:cNvSpPr>
-          <p:nvPr>
-            <p:ph idx="1"/>
-          </p:nvPr>
-        </p:nvSpPr>
-        <p:spPr>
-          <a:xfrm>
-            <a:off x="238990" y="1145407"/>
-            <a:ext cx="11701221" cy="4385773"/>
-          </a:xfrm>
-        </p:spPr>
-        <p:txBody>
-          <a:bodyPr>
-            <a:noAutofit/>
-          </a:bodyPr>
-          <a:lstStyle/>
-          <a:p>
-            <a:pPr marL="0" indent="0">
-              <a:lnSpc>
-                <a:spcPct val="150000"/>
-              </a:lnSpc>
-              <a:buNone/>
-            </a:pPr>
-            <a:r>
-              <a:rPr lang="ko-KR" altLang="en-US" dirty="0">
-                <a:latin typeface="+mn-ea"/>
-              </a:rPr>
-              <a:t>💡 종속 변수 </a:t>
-            </a:r>
-            <a:r>
-              <a:rPr lang="en-US" altLang="ko-KR" dirty="0">
-                <a:latin typeface="+mn-ea"/>
-              </a:rPr>
-              <a:t>y</a:t>
-            </a:r>
-            <a:r>
-              <a:rPr lang="ko-KR" altLang="en-US" dirty="0">
-                <a:latin typeface="+mn-ea"/>
-              </a:rPr>
-              <a:t>와 하나 이상의 독립 변수 </a:t>
-            </a:r>
-            <a:r>
-              <a:rPr lang="en-US" altLang="ko-KR" dirty="0">
-                <a:latin typeface="+mn-ea"/>
-              </a:rPr>
-              <a:t>x</a:t>
-            </a:r>
-            <a:r>
-              <a:rPr lang="ko-KR" altLang="en-US" dirty="0">
-                <a:latin typeface="+mn-ea"/>
-              </a:rPr>
-              <a:t>와의 선형 상관관계를 모델링하는 기법</a:t>
-            </a:r>
-            <a:endParaRPr lang="en-US" altLang="ko-KR" dirty="0">
-              <a:latin typeface="+mn-ea"/>
-            </a:endParaRPr>
-          </a:p>
-          <a:p>
-            <a:pPr lvl="1">
-              <a:lnSpc>
-                <a:spcPct val="150000"/>
-              </a:lnSpc>
-            </a:pPr>
-            <a:r>
-              <a:rPr lang="ko-KR" altLang="en-US" dirty="0"/>
-              <a:t>데이터 속에서 일정한 패턴</a:t>
-            </a:r>
-            <a:r>
-              <a:rPr lang="en-US" altLang="ko-KR" dirty="0"/>
-              <a:t>(</a:t>
-            </a:r>
-            <a:r>
-              <a:rPr lang="ko-KR" altLang="en-US" dirty="0"/>
-              <a:t>규칙</a:t>
-            </a:r>
-            <a:r>
-              <a:rPr lang="en-US" altLang="ko-KR" dirty="0"/>
-              <a:t>)</a:t>
-            </a:r>
-            <a:r>
-              <a:rPr lang="ko-KR" altLang="en-US" dirty="0"/>
-              <a:t>을 찾아내고</a:t>
-            </a:r>
-            <a:r>
-              <a:rPr lang="en-US" altLang="ko-KR" dirty="0"/>
-              <a:t>, </a:t>
-            </a:r>
-            <a:r>
-              <a:rPr lang="ko-KR" altLang="en-US" dirty="0"/>
-              <a:t>이를 </a:t>
-            </a:r>
-            <a:r>
-              <a:rPr lang="ko-KR" altLang="en-US" b="1" dirty="0"/>
-              <a:t>직선 방정식</a:t>
-            </a:r>
-            <a:r>
-              <a:rPr lang="ko-KR" altLang="en-US" dirty="0"/>
-              <a:t>으로 표현하는 것</a:t>
-            </a:r>
-            <a:endParaRPr lang="en-US" altLang="ko-KR" dirty="0"/>
-          </a:p>
-          <a:p>
-            <a:pPr lvl="1">
-              <a:lnSpc>
-                <a:spcPct val="150000"/>
-              </a:lnSpc>
-            </a:pPr>
-            <a:r>
-              <a:rPr lang="en-US" altLang="ko-KR" dirty="0">
-                <a:latin typeface="+mn-ea"/>
-              </a:rPr>
-              <a:t>W </a:t>
-            </a:r>
-            <a:r>
-              <a:rPr lang="ko-KR" altLang="en-US" dirty="0">
-                <a:latin typeface="+mn-ea"/>
-              </a:rPr>
-              <a:t>를 가중치</a:t>
-            </a:r>
-            <a:r>
-              <a:rPr lang="en-US" altLang="ko-KR" dirty="0">
-                <a:latin typeface="+mn-ea"/>
-              </a:rPr>
-              <a:t>(Weight), b</a:t>
-            </a:r>
-            <a:r>
-              <a:rPr lang="ko-KR" altLang="en-US" dirty="0">
-                <a:latin typeface="+mn-ea"/>
-              </a:rPr>
-              <a:t>를 편향</a:t>
-            </a:r>
-            <a:r>
-              <a:rPr lang="en-US" altLang="ko-KR" dirty="0">
-                <a:latin typeface="+mn-ea"/>
-              </a:rPr>
-              <a:t>(bias)</a:t>
-            </a:r>
-            <a:r>
-              <a:rPr lang="ko-KR" altLang="en-US" dirty="0">
-                <a:latin typeface="+mn-ea"/>
-              </a:rPr>
-              <a:t>라고 부름</a:t>
-            </a:r>
-            <a:endParaRPr lang="en-US" altLang="ko-KR" dirty="0">
-              <a:latin typeface="+mn-ea"/>
-            </a:endParaRPr>
-          </a:p>
-          <a:p>
-            <a:pPr lvl="1">
-              <a:lnSpc>
-                <a:spcPct val="150000"/>
-              </a:lnSpc>
-            </a:pPr>
-            <a:endParaRPr lang="en-US" altLang="ko-KR" dirty="0"/>
-          </a:p>
-          <a:p>
-            <a:pPr marL="457200" lvl="1" indent="0">
-              <a:lnSpc>
-                <a:spcPct val="150000"/>
-              </a:lnSpc>
-              <a:buNone/>
-            </a:pPr>
-            <a:endParaRPr lang="en-US" altLang="ko-KR" dirty="0">
-              <a:latin typeface="+mn-ea"/>
-            </a:endParaRPr>
-          </a:p>
-          <a:p>
-            <a:pPr marL="457200" lvl="1" indent="0">
-              <a:lnSpc>
-                <a:spcPct val="150000"/>
-              </a:lnSpc>
-              <a:buNone/>
-            </a:pPr>
-            <a:r>
-              <a:rPr lang="ko-KR" altLang="en-US" dirty="0">
-                <a:latin typeface="+mn-ea"/>
-              </a:rPr>
-              <a:t>✔️ 만약 독립 변수 </a:t>
-            </a:r>
-            <a:r>
-              <a:rPr lang="en-US" altLang="ko-KR" dirty="0">
-                <a:latin typeface="+mn-ea"/>
-              </a:rPr>
-              <a:t>x</a:t>
-            </a:r>
-            <a:r>
-              <a:rPr lang="ko-KR" altLang="en-US" dirty="0">
-                <a:latin typeface="+mn-ea"/>
-              </a:rPr>
-              <a:t>가 </a:t>
-            </a:r>
-            <a:r>
-              <a:rPr lang="en-US" altLang="ko-KR" dirty="0">
-                <a:latin typeface="+mn-ea"/>
-              </a:rPr>
-              <a:t>1</a:t>
-            </a:r>
-            <a:r>
-              <a:rPr lang="ko-KR" altLang="en-US" dirty="0">
-                <a:latin typeface="+mn-ea"/>
-              </a:rPr>
-              <a:t>개라면 </a:t>
-            </a:r>
-            <a:r>
-              <a:rPr lang="ko-KR" altLang="en-US" b="1" dirty="0">
-                <a:latin typeface="+mn-ea"/>
-              </a:rPr>
-              <a:t>단순 선형 회귀</a:t>
-            </a:r>
-            <a:r>
-              <a:rPr lang="en-US" altLang="ko-KR" dirty="0">
-                <a:latin typeface="+mn-ea"/>
-              </a:rPr>
-              <a:t>, 2</a:t>
-            </a:r>
-            <a:r>
-              <a:rPr lang="ko-KR" altLang="en-US" dirty="0">
-                <a:latin typeface="+mn-ea"/>
-              </a:rPr>
-              <a:t>개 이상이면 </a:t>
-            </a:r>
-            <a:r>
-              <a:rPr lang="ko-KR" altLang="en-US" b="1" dirty="0">
-                <a:latin typeface="+mn-ea"/>
-              </a:rPr>
-              <a:t>다중 선형 회귀</a:t>
-            </a:r>
-            <a:r>
-              <a:rPr lang="ko-KR" altLang="en-US" dirty="0">
-                <a:latin typeface="+mn-ea"/>
-              </a:rPr>
-              <a:t>라고 함</a:t>
-            </a:r>
-          </a:p>
-        </p:txBody>
-      </p:sp>
-      <p:sp>
-        <p:nvSpPr>
-          <p:cNvPr id="4" name="날짜 개체 틀 3">
-            <a:extLst>
-              <a:ext uri="{FF2B5EF4-FFF2-40B4-BE49-F238E27FC236}">
-                <a16:creationId xmlns:a16="http://schemas.microsoft.com/office/drawing/2014/main" id="{590F8720-7C11-4CC8-8215-3F57F085A24B}"/>
-              </a:ext>
-            </a:extLst>
-          </p:cNvPr>
-          <p:cNvSpPr>
-            <a:spLocks noGrp="1"/>
-          </p:cNvSpPr>
-          <p:nvPr>
-            <p:ph type="dt" sz="half" idx="10"/>
-          </p:nvPr>
-        </p:nvSpPr>
-        <p:spPr/>
-        <p:txBody>
-          <a:bodyPr/>
-          <a:lstStyle/>
-          <a:p>
-            <a:fld id="{0F78D9C4-20C1-4B15-A116-16DC77AD9A1E}" type="datetime1">
-              <a:rPr lang="ko-KR" altLang="en-US" smtClean="0"/>
-              <a:t>2026-02-10</a:t>
-            </a:fld>
-            <a:endParaRPr lang="ko-KR" altLang="en-US"/>
-          </a:p>
-        </p:txBody>
-      </p:sp>
-      <p:sp>
-        <p:nvSpPr>
-          <p:cNvPr id="5" name="슬라이드 번호 개체 틀 4">
-            <a:extLst>
-              <a:ext uri="{FF2B5EF4-FFF2-40B4-BE49-F238E27FC236}">
-                <a16:creationId xmlns:a16="http://schemas.microsoft.com/office/drawing/2014/main" id="{E86D5960-457B-4CA2-B0B3-F7F0DADA85D8}"/>
-              </a:ext>
-            </a:extLst>
-          </p:cNvPr>
-          <p:cNvSpPr>
-            <a:spLocks noGrp="1"/>
-          </p:cNvSpPr>
-          <p:nvPr>
-            <p:ph type="sldNum" sz="quarter" idx="12"/>
-          </p:nvPr>
-        </p:nvSpPr>
-        <p:spPr/>
-        <p:txBody>
-          <a:bodyPr/>
-          <a:lstStyle/>
-          <a:p>
-            <a:fld id="{083A2CE0-18CD-4102-B738-4ACFF9E68BA4}" type="slidenum">
-              <a:rPr lang="ko-KR" altLang="en-US" smtClean="0"/>
-              <a:t>9</a:t>
-            </a:fld>
-            <a:endParaRPr lang="ko-KR" altLang="en-US"/>
-          </a:p>
-        </p:txBody>
-      </p:sp>
-      <p:pic>
-        <p:nvPicPr>
-          <p:cNvPr id="1026" name="Picture 2"/>
-          <p:cNvPicPr>
-            <a:picLocks noChangeAspect="1" noChangeArrowheads="1"/>
-          </p:cNvPicPr>
-          <p:nvPr/>
-        </p:nvPicPr>
-        <p:blipFill>
-          <a:blip r:embed="rId3">
-            <a:extLst>
-              <a:ext uri="{28A0092B-C50C-407E-A947-70E740481C1C}">
-                <a14:useLocalDpi xmlns:a14="http://schemas.microsoft.com/office/drawing/2010/main" val="0"/>
-              </a:ext>
-            </a:extLst>
-          </a:blip>
-          <a:srcRect/>
-          <a:stretch>
-            <a:fillRect/>
-          </a:stretch>
-        </p:blipFill>
-        <p:spPr bwMode="auto">
-          <a:xfrm>
-            <a:off x="4137775" y="3338293"/>
-            <a:ext cx="3916450" cy="728642"/>
-          </a:xfrm>
-          <a:prstGeom prst="rect">
-            <a:avLst/>
-          </a:prstGeom>
-          <a:noFill/>
-          <a:ln>
-            <a:noFill/>
-          </a:ln>
-          <a:effectLst/>
-          <a:extLst>
-            <a:ext uri="{909E8E84-426E-40DD-AFC4-6F175D3DCCD1}">
-              <a14:hiddenFill xmlns:a14="http://schemas.microsoft.com/office/drawing/2010/main">
-                <a:solidFill>
-                  <a:schemeClr val="accent1"/>
-                </a:solidFill>
-              </a14:hiddenFill>
-            </a:ext>
-            <a:ext uri="{91240B29-F687-4F45-9708-019B960494DF}">
-              <a14:hiddenLine xmlns:a14="http://schemas.microsoft.com/office/drawing/2010/main" w="9525">
-                <a:solidFill>
-                  <a:schemeClr val="tx1"/>
-                </a:solidFill>
-                <a:miter lim="800000"/>
-                <a:headEnd/>
-                <a:tailEnd/>
-              </a14:hiddenLine>
-            </a:ext>
-            <a:ext uri="{AF507438-7753-43E0-B8FC-AC1667EBCBE1}">
-              <a14:hiddenEffects xmlns:a14="http://schemas.microsoft.com/office/drawing/2010/main">
-                <a:effectLst>
-                  <a:outerShdw dist="35921" dir="2700000" algn="ctr" rotWithShape="0">
-                    <a:schemeClr val="bg2"/>
-                  </a:outerShdw>
-                </a:effectLst>
-              </a14:hiddenEffects>
-            </a:ext>
-          </a:extLst>
-        </p:spPr>
-      </p:pic>
-    </p:spTree>
-    <p:extLst>
-      <p:ext uri="{BB962C8B-B14F-4D97-AF65-F5344CB8AC3E}">
-        <p14:creationId xmlns:p14="http://schemas.microsoft.com/office/powerpoint/2010/main" val="1570076540"/>
       </p:ext>
     </p:extLst>
   </p:cSld>

--- a/material/5_AI/09_회귀와경사하강법.pptx
+++ b/material/5_AI/09_회귀와경사하강법.pptx
@@ -5,7 +5,7 @@
     <p:sldMasterId id="2147483660" r:id="rId1"/>
   </p:sldMasterIdLst>
   <p:notesMasterIdLst>
-    <p:notesMasterId r:id="rId42"/>
+    <p:notesMasterId r:id="rId41"/>
   </p:notesMasterIdLst>
   <p:sldIdLst>
     <p:sldId id="1013" r:id="rId2"/>
@@ -46,8 +46,7 @@
     <p:sldId id="680" r:id="rId37"/>
     <p:sldId id="695" r:id="rId38"/>
     <p:sldId id="1007" r:id="rId39"/>
-    <p:sldId id="1016" r:id="rId40"/>
-    <p:sldId id="836" r:id="rId41"/>
+    <p:sldId id="836" r:id="rId40"/>
   </p:sldIdLst>
   <p:sldSz cx="12192000" cy="6858000"/>
   <p:notesSz cx="6858000" cy="9144000"/>
@@ -286,7 +285,7 @@
             <a:fld id="{A13A867C-D490-40C2-AB8D-A60FA70A9BF5}" type="datetimeFigureOut">
               <a:rPr lang="ko-KR" altLang="en-US" smtClean="0"/>
               <a:pPr/>
-              <a:t>2026-02-12</a:t>
+              <a:t>2026-02-13</a:t>
             </a:fld>
             <a:endParaRPr lang="ko-KR" altLang="en-US" dirty="0"/>
           </a:p>
@@ -1392,7 +1391,7 @@
           <a:p>
             <a:fld id="{A0085365-8376-4996-BDD6-F39608FADAF3}" type="slidenum">
               <a:rPr lang="ko-KR" altLang="en-US" smtClean="0"/>
-              <a:t>40</a:t>
+              <a:t>39</a:t>
             </a:fld>
             <a:endParaRPr lang="ko-KR" altLang="en-US"/>
           </a:p>
@@ -2403,7 +2402,7 @@
           <a:p>
             <a:fld id="{442BEE3F-2E9A-4FD8-8B8A-8619F3E161C0}" type="datetime1">
               <a:rPr lang="ko-KR" altLang="en-US" smtClean="0"/>
-              <a:t>2026-02-12</a:t>
+              <a:t>2026-02-13</a:t>
             </a:fld>
             <a:endParaRPr lang="ko-KR" altLang="en-US"/>
           </a:p>
@@ -2690,7 +2689,7 @@
           <a:p>
             <a:fld id="{0F78D9C4-20C1-4B15-A116-16DC77AD9A1E}" type="datetime1">
               <a:rPr lang="ko-KR" altLang="en-US" smtClean="0"/>
-              <a:t>2026-02-12</a:t>
+              <a:t>2026-02-13</a:t>
             </a:fld>
             <a:endParaRPr lang="ko-KR" altLang="en-US"/>
           </a:p>
@@ -2865,7 +2864,7 @@
           <a:p>
             <a:fld id="{7F5E23C3-0E3D-4E4E-8486-D7FB4C073DC1}" type="datetime1">
               <a:rPr lang="ko-KR" altLang="en-US" smtClean="0"/>
-              <a:t>2026-02-12</a:t>
+              <a:t>2026-02-13</a:t>
             </a:fld>
             <a:endParaRPr lang="ko-KR" altLang="en-US"/>
           </a:p>
@@ -3194,7 +3193,7 @@
           <a:p>
             <a:fld id="{7F5E23C3-0E3D-4E4E-8486-D7FB4C073DC1}" type="datetime1">
               <a:rPr lang="ko-KR" altLang="en-US" smtClean="0"/>
-              <a:t>2026-02-12</a:t>
+              <a:t>2026-02-13</a:t>
             </a:fld>
             <a:endParaRPr lang="ko-KR" altLang="en-US"/>
           </a:p>
@@ -4434,7 +4433,7 @@
           <a:p>
             <a:fld id="{0F78D9C4-20C1-4B15-A116-16DC77AD9A1E}" type="datetime1">
               <a:rPr lang="ko-KR" altLang="en-US" smtClean="0"/>
-              <a:t>2026-02-12</a:t>
+              <a:t>2026-02-13</a:t>
             </a:fld>
             <a:endParaRPr lang="ko-KR" altLang="en-US"/>
           </a:p>
@@ -4701,7 +4700,7 @@
           <a:p>
             <a:fld id="{0F78D9C4-20C1-4B15-A116-16DC77AD9A1E}" type="datetime1">
               <a:rPr lang="ko-KR" altLang="en-US" smtClean="0"/>
-              <a:t>2026-02-12</a:t>
+              <a:t>2026-02-13</a:t>
             </a:fld>
             <a:endParaRPr lang="ko-KR" altLang="en-US" dirty="0"/>
           </a:p>
@@ -5346,7 +5345,7 @@
           <a:p>
             <a:fld id="{0F78D9C4-20C1-4B15-A116-16DC77AD9A1E}" type="datetime1">
               <a:rPr lang="ko-KR" altLang="en-US" smtClean="0"/>
-              <a:t>2026-02-12</a:t>
+              <a:t>2026-02-13</a:t>
             </a:fld>
             <a:endParaRPr lang="ko-KR" altLang="en-US"/>
           </a:p>
@@ -5524,7 +5523,7 @@
           <a:p>
             <a:fld id="{0F78D9C4-20C1-4B15-A116-16DC77AD9A1E}" type="datetime1">
               <a:rPr lang="ko-KR" altLang="en-US" smtClean="0"/>
-              <a:t>2026-02-12</a:t>
+              <a:t>2026-02-13</a:t>
             </a:fld>
             <a:endParaRPr lang="ko-KR" altLang="en-US"/>
           </a:p>
@@ -6470,7 +6469,7 @@
           <a:p>
             <a:fld id="{0F78D9C4-20C1-4B15-A116-16DC77AD9A1E}" type="datetime1">
               <a:rPr lang="ko-KR" altLang="en-US" smtClean="0"/>
-              <a:t>2026-02-12</a:t>
+              <a:t>2026-02-13</a:t>
             </a:fld>
             <a:endParaRPr lang="ko-KR" altLang="en-US"/>
           </a:p>
@@ -6648,7 +6647,7 @@
           <a:p>
             <a:fld id="{0F78D9C4-20C1-4B15-A116-16DC77AD9A1E}" type="datetime1">
               <a:rPr lang="ko-KR" altLang="en-US" smtClean="0"/>
-              <a:t>2026-02-12</a:t>
+              <a:t>2026-02-13</a:t>
             </a:fld>
             <a:endParaRPr lang="ko-KR" altLang="en-US"/>
           </a:p>
@@ -7737,7 +7736,7 @@
           <a:p>
             <a:fld id="{0F78D9C4-20C1-4B15-A116-16DC77AD9A1E}" type="datetime1">
               <a:rPr lang="ko-KR" altLang="en-US" smtClean="0"/>
-              <a:t>2026-02-12</a:t>
+              <a:t>2026-02-13</a:t>
             </a:fld>
             <a:endParaRPr lang="ko-KR" altLang="en-US"/>
           </a:p>
@@ -8109,7 +8108,7 @@
           <a:p>
             <a:fld id="{0F78D9C4-20C1-4B15-A116-16DC77AD9A1E}" type="datetime1">
               <a:rPr lang="ko-KR" altLang="en-US" smtClean="0"/>
-              <a:t>2026-02-12</a:t>
+              <a:t>2026-02-13</a:t>
             </a:fld>
             <a:endParaRPr lang="ko-KR" altLang="en-US"/>
           </a:p>
@@ -8322,7 +8321,7 @@
           <a:p>
             <a:fld id="{0F78D9C4-20C1-4B15-A116-16DC77AD9A1E}" type="datetime1">
               <a:rPr lang="ko-KR" altLang="en-US" smtClean="0"/>
-              <a:t>2026-02-12</a:t>
+              <a:t>2026-02-13</a:t>
             </a:fld>
             <a:endParaRPr lang="ko-KR" altLang="en-US"/>
           </a:p>
@@ -8842,7 +8841,7 @@
           <a:p>
             <a:fld id="{0F78D9C4-20C1-4B15-A116-16DC77AD9A1E}" type="datetime1">
               <a:rPr lang="ko-KR" altLang="en-US" smtClean="0"/>
-              <a:t>2026-02-12</a:t>
+              <a:t>2026-02-13</a:t>
             </a:fld>
             <a:endParaRPr lang="ko-KR" altLang="en-US"/>
           </a:p>
@@ -10721,7 +10720,7 @@
           <a:p>
             <a:fld id="{0F78D9C4-20C1-4B15-A116-16DC77AD9A1E}" type="datetime1">
               <a:rPr lang="ko-KR" altLang="en-US" smtClean="0"/>
-              <a:t>2026-02-12</a:t>
+              <a:t>2026-02-13</a:t>
             </a:fld>
             <a:endParaRPr lang="ko-KR" altLang="en-US"/>
           </a:p>
@@ -11105,7 +11104,7 @@
           <a:p>
             <a:fld id="{0F78D9C4-20C1-4B15-A116-16DC77AD9A1E}" type="datetime1">
               <a:rPr lang="ko-KR" altLang="en-US" smtClean="0"/>
-              <a:t>2026-02-12</a:t>
+              <a:t>2026-02-13</a:t>
             </a:fld>
             <a:endParaRPr lang="ko-KR" altLang="en-US"/>
           </a:p>
@@ -11501,7 +11500,7 @@
           <a:p>
             <a:fld id="{0F78D9C4-20C1-4B15-A116-16DC77AD9A1E}" type="datetime1">
               <a:rPr lang="ko-KR" altLang="en-US" smtClean="0"/>
-              <a:t>2026-02-12</a:t>
+              <a:t>2026-02-13</a:t>
             </a:fld>
             <a:endParaRPr lang="ko-KR" altLang="en-US"/>
           </a:p>
@@ -12015,7 +12014,7 @@
           <a:p>
             <a:fld id="{0F78D9C4-20C1-4B15-A116-16DC77AD9A1E}" type="datetime1">
               <a:rPr lang="ko-KR" altLang="en-US" smtClean="0"/>
-              <a:t>2026-02-12</a:t>
+              <a:t>2026-02-13</a:t>
             </a:fld>
             <a:endParaRPr lang="ko-KR" altLang="en-US"/>
           </a:p>
@@ -12214,7 +12213,7 @@
           <a:p>
             <a:fld id="{0F78D9C4-20C1-4B15-A116-16DC77AD9A1E}" type="datetime1">
               <a:rPr lang="ko-KR" altLang="en-US" smtClean="0"/>
-              <a:t>2026-02-12</a:t>
+              <a:t>2026-02-13</a:t>
             </a:fld>
             <a:endParaRPr lang="ko-KR" altLang="en-US"/>
           </a:p>
@@ -12500,7 +12499,7 @@
           <a:p>
             <a:fld id="{0F78D9C4-20C1-4B15-A116-16DC77AD9A1E}" type="datetime1">
               <a:rPr lang="ko-KR" altLang="en-US" smtClean="0"/>
-              <a:t>2026-02-12</a:t>
+              <a:t>2026-02-13</a:t>
             </a:fld>
             <a:endParaRPr lang="ko-KR" altLang="en-US"/>
           </a:p>
@@ -12907,7 +12906,7 @@
           <a:p>
             <a:fld id="{0F78D9C4-20C1-4B15-A116-16DC77AD9A1E}" type="datetime1">
               <a:rPr lang="ko-KR" altLang="en-US" smtClean="0"/>
-              <a:t>2026-02-12</a:t>
+              <a:t>2026-02-13</a:t>
             </a:fld>
             <a:endParaRPr lang="ko-KR" altLang="en-US" dirty="0"/>
           </a:p>
@@ -13305,7 +13304,7 @@
           <a:p>
             <a:fld id="{0F78D9C4-20C1-4B15-A116-16DC77AD9A1E}" type="datetime1">
               <a:rPr lang="ko-KR" altLang="en-US" smtClean="0"/>
-              <a:t>2026-02-12</a:t>
+              <a:t>2026-02-13</a:t>
             </a:fld>
             <a:endParaRPr lang="ko-KR" altLang="en-US"/>
           </a:p>
@@ -13708,7 +13707,7 @@
           <a:p>
             <a:fld id="{0F78D9C4-20C1-4B15-A116-16DC77AD9A1E}" type="datetime1">
               <a:rPr lang="ko-KR" altLang="en-US" smtClean="0"/>
-              <a:t>2026-02-12</a:t>
+              <a:t>2026-02-13</a:t>
             </a:fld>
             <a:endParaRPr lang="ko-KR" altLang="en-US"/>
           </a:p>
@@ -13827,7 +13826,7 @@
           <a:p>
             <a:fld id="{0F78D9C4-20C1-4B15-A116-16DC77AD9A1E}" type="datetime1">
               <a:rPr lang="ko-KR" altLang="en-US" smtClean="0"/>
-              <a:t>2026-02-12</a:t>
+              <a:t>2026-02-13</a:t>
             </a:fld>
             <a:endParaRPr lang="ko-KR" altLang="en-US"/>
           </a:p>
@@ -14157,7 +14156,7 @@
           <a:p>
             <a:fld id="{0F78D9C4-20C1-4B15-A116-16DC77AD9A1E}" type="datetime1">
               <a:rPr lang="ko-KR" altLang="en-US" smtClean="0"/>
-              <a:t>2026-02-12</a:t>
+              <a:t>2026-02-13</a:t>
             </a:fld>
             <a:endParaRPr lang="ko-KR" altLang="en-US"/>
           </a:p>
@@ -15929,7 +15928,7 @@
           <a:p>
             <a:fld id="{0F78D9C4-20C1-4B15-A116-16DC77AD9A1E}" type="datetime1">
               <a:rPr lang="ko-KR" altLang="en-US" smtClean="0"/>
-              <a:t>2026-02-12</a:t>
+              <a:t>2026-02-13</a:t>
             </a:fld>
             <a:endParaRPr lang="ko-KR" altLang="en-US"/>
           </a:p>
@@ -16275,7 +16274,7 @@
           <a:p>
             <a:fld id="{0F78D9C4-20C1-4B15-A116-16DC77AD9A1E}" type="datetime1">
               <a:rPr lang="ko-KR" altLang="en-US" smtClean="0"/>
-              <a:t>2026-02-12</a:t>
+              <a:t>2026-02-13</a:t>
             </a:fld>
             <a:endParaRPr lang="ko-KR" altLang="en-US"/>
           </a:p>
@@ -16700,7 +16699,7 @@
           <a:p>
             <a:fld id="{0F78D9C4-20C1-4B15-A116-16DC77AD9A1E}" type="datetime1">
               <a:rPr lang="ko-KR" altLang="en-US" smtClean="0"/>
-              <a:t>2026-02-12</a:t>
+              <a:t>2026-02-13</a:t>
             </a:fld>
             <a:endParaRPr lang="ko-KR" altLang="en-US"/>
           </a:p>
@@ -16831,7 +16830,7 @@
           <a:p>
             <a:fld id="{0F78D9C4-20C1-4B15-A116-16DC77AD9A1E}" type="datetime1">
               <a:rPr lang="ko-KR" altLang="en-US" smtClean="0"/>
-              <a:t>2026-02-12</a:t>
+              <a:t>2026-02-13</a:t>
             </a:fld>
             <a:endParaRPr lang="ko-KR" altLang="en-US"/>
           </a:p>
@@ -17440,7 +17439,7 @@
           <a:p>
             <a:fld id="{0F78D9C4-20C1-4B15-A116-16DC77AD9A1E}" type="datetime1">
               <a:rPr lang="ko-KR" altLang="en-US" smtClean="0"/>
-              <a:t>2026-02-12</a:t>
+              <a:t>2026-02-13</a:t>
             </a:fld>
             <a:endParaRPr lang="ko-KR" altLang="en-US"/>
           </a:p>
@@ -17573,7 +17572,7 @@
           <a:p>
             <a:fld id="{0F78D9C4-20C1-4B15-A116-16DC77AD9A1E}" type="datetime1">
               <a:rPr lang="ko-KR" altLang="en-US" smtClean="0"/>
-              <a:t>2026-02-12</a:t>
+              <a:t>2026-02-13</a:t>
             </a:fld>
             <a:endParaRPr lang="ko-KR" altLang="en-US"/>
           </a:p>
@@ -17978,7 +17977,7 @@
           <a:p>
             <a:fld id="{0F78D9C4-20C1-4B15-A116-16DC77AD9A1E}" type="datetime1">
               <a:rPr lang="ko-KR" altLang="en-US" smtClean="0"/>
-              <a:t>2026-02-12</a:t>
+              <a:t>2026-02-13</a:t>
             </a:fld>
             <a:endParaRPr lang="ko-KR" altLang="en-US"/>
           </a:p>
@@ -18286,7 +18285,7 @@
           <a:p>
             <a:fld id="{0F78D9C4-20C1-4B15-A116-16DC77AD9A1E}" type="datetime1">
               <a:rPr lang="ko-KR" altLang="en-US" smtClean="0"/>
-              <a:t>2026-02-12</a:t>
+              <a:t>2026-02-13</a:t>
             </a:fld>
             <a:endParaRPr lang="ko-KR" altLang="en-US"/>
           </a:p>
@@ -18434,7 +18433,13 @@
   <p:cSld>
     <p:spTree>
       <p:nvGrpSpPr>
-        <p:cNvPr id="1" name=""/>
+        <p:cNvPr id="1" name="">
+          <a:extLst>
+            <a:ext uri="{FF2B5EF4-FFF2-40B4-BE49-F238E27FC236}">
+              <a16:creationId xmlns:a16="http://schemas.microsoft.com/office/drawing/2014/main" id="{B7171936-481C-71EB-7D96-6C9DFC6F979D}"/>
+            </a:ext>
+          </a:extLst>
+        </p:cNvPr>
         <p:cNvGrpSpPr/>
         <p:nvPr/>
       </p:nvGrpSpPr>
@@ -18448,73 +18453,68 @@
       </p:grpSpPr>
       <p:sp>
         <p:nvSpPr>
-          <p:cNvPr id="2" name="제목 1">
+          <p:cNvPr id="4" name="제목 1">
             <a:extLst>
               <a:ext uri="{FF2B5EF4-FFF2-40B4-BE49-F238E27FC236}">
-                <a16:creationId xmlns:a16="http://schemas.microsoft.com/office/drawing/2014/main" id="{FC0A2AB7-4D5E-6614-0E8C-D87C787D466A}"/>
+                <a16:creationId xmlns:a16="http://schemas.microsoft.com/office/drawing/2014/main" id="{100005ED-53E3-BFC8-AFAA-7BAFFA3752AB}"/>
               </a:ext>
             </a:extLst>
           </p:cNvPr>
-          <p:cNvSpPr>
-            <a:spLocks noGrp="1"/>
+          <p:cNvSpPr txBox="1">
+            <a:spLocks/>
           </p:cNvSpPr>
-          <p:nvPr>
-            <p:ph type="title"/>
-          </p:nvPr>
+          <p:nvPr/>
         </p:nvSpPr>
-        <p:spPr/>
+        <p:spPr>
+          <a:xfrm>
+            <a:off x="1524000" y="2555530"/>
+            <a:ext cx="9144000" cy="1116107"/>
+          </a:xfrm>
+          <a:prstGeom prst="rect">
+            <a:avLst/>
+          </a:prstGeom>
+        </p:spPr>
         <p:txBody>
-          <a:bodyPr/>
-          <a:lstStyle/>
-          <a:p>
-            <a:r>
-              <a:rPr lang="ko-KR" altLang="en-US" dirty="0"/>
-              <a:t>실습</a:t>
-            </a:r>
-            <a:r>
-              <a:rPr lang="en-US" altLang="ko-KR" dirty="0"/>
-              <a:t>1. </a:t>
-            </a:r>
-            <a:r>
-              <a:rPr lang="ko-KR" altLang="en-US" dirty="0" err="1"/>
-              <a:t>경사하강법</a:t>
-            </a:r>
-            <a:r>
-              <a:rPr lang="ko-KR" altLang="en-US"/>
-              <a:t> 구현</a:t>
-            </a:r>
-          </a:p>
-        </p:txBody>
-      </p:sp>
-      <p:sp>
-        <p:nvSpPr>
-          <p:cNvPr id="3" name="내용 개체 틀 2">
-            <a:extLst>
-              <a:ext uri="{FF2B5EF4-FFF2-40B4-BE49-F238E27FC236}">
-                <a16:creationId xmlns:a16="http://schemas.microsoft.com/office/drawing/2014/main" id="{CFE2628F-1AD1-7A7C-57EC-83570A962913}"/>
-              </a:ext>
-            </a:extLst>
-          </p:cNvPr>
-          <p:cNvSpPr>
-            <a:spLocks noGrp="1"/>
-          </p:cNvSpPr>
-          <p:nvPr>
-            <p:ph idx="1"/>
-          </p:nvPr>
-        </p:nvSpPr>
-        <p:spPr/>
-        <p:txBody>
-          <a:bodyPr/>
-          <a:lstStyle/>
-          <a:p>
-            <a:endParaRPr lang="ko-KR" altLang="en-US"/>
+          <a:bodyPr vert="horz" lIns="91440" tIns="45720" rIns="91440" bIns="45720" rtlCol="0" anchor="b">
+            <a:normAutofit/>
+          </a:bodyPr>
+          <a:lstStyle>
+            <a:lvl1pPr algn="ctr" defTabSz="914400" rtl="0" eaLnBrk="1" latinLnBrk="1" hangingPunct="1">
+              <a:lnSpc>
+                <a:spcPct val="90000"/>
+              </a:lnSpc>
+              <a:spcBef>
+                <a:spcPct val="0"/>
+              </a:spcBef>
+              <a:buNone/>
+              <a:defRPr sz="6000" kern="1200">
+                <a:solidFill>
+                  <a:schemeClr val="tx1"/>
+                </a:solidFill>
+                <a:latin typeface="+mj-lt"/>
+                <a:ea typeface="+mj-ea"/>
+                <a:cs typeface="+mj-cs"/>
+              </a:defRPr>
+            </a:lvl1pPr>
+          </a:lstStyle>
+          <a:p>
+            <a:r>
+              <a:rPr lang="ko-KR" altLang="en-US" dirty="0">
+                <a:solidFill>
+                  <a:schemeClr val="accent2"/>
+                </a:solidFill>
+                <a:latin typeface="G마켓 산스 TTF Bold" panose="02000000000000000000" pitchFamily="2" charset="-127"/>
+                <a:ea typeface="G마켓 산스 TTF Bold" panose="02000000000000000000" pitchFamily="2" charset="-127"/>
+              </a:rPr>
+              <a:t>감사합니다</a:t>
+            </a:r>
           </a:p>
         </p:txBody>
       </p:sp>
     </p:spTree>
     <p:extLst>
       <p:ext uri="{BB962C8B-B14F-4D97-AF65-F5344CB8AC3E}">
-        <p14:creationId xmlns:p14="http://schemas.microsoft.com/office/powerpoint/2010/main" val="3539734480"/>
+        <p14:creationId xmlns:p14="http://schemas.microsoft.com/office/powerpoint/2010/main" val="4171818688"/>
       </p:ext>
     </p:extLst>
   </p:cSld>
@@ -18823,7 +18823,7 @@
           <a:p>
             <a:fld id="{0F78D9C4-20C1-4B15-A116-16DC77AD9A1E}" type="datetime1">
               <a:rPr lang="ko-KR" altLang="en-US" smtClean="0"/>
-              <a:t>2026-02-12</a:t>
+              <a:t>2026-02-13</a:t>
             </a:fld>
             <a:endParaRPr lang="ko-KR" altLang="en-US"/>
           </a:p>
@@ -18899,102 +18899,6 @@
     <p:extLst>
       <p:ext uri="{BB962C8B-B14F-4D97-AF65-F5344CB8AC3E}">
         <p14:creationId xmlns:p14="http://schemas.microsoft.com/office/powerpoint/2010/main" val="1915908932"/>
-      </p:ext>
-    </p:extLst>
-  </p:cSld>
-  <p:clrMapOvr>
-    <a:masterClrMapping/>
-  </p:clrMapOvr>
-</p:sld>
-</file>
-
-<file path=ppt/slides/slide40.xml><?xml version="1.0" encoding="utf-8"?>
-<p:sld xmlns:a="http://schemas.openxmlformats.org/drawingml/2006/main" xmlns:r="http://schemas.openxmlformats.org/officeDocument/2006/relationships" xmlns:p="http://schemas.openxmlformats.org/presentationml/2006/main">
-  <p:cSld>
-    <p:spTree>
-      <p:nvGrpSpPr>
-        <p:cNvPr id="1" name="">
-          <a:extLst>
-            <a:ext uri="{FF2B5EF4-FFF2-40B4-BE49-F238E27FC236}">
-              <a16:creationId xmlns:a16="http://schemas.microsoft.com/office/drawing/2014/main" id="{B7171936-481C-71EB-7D96-6C9DFC6F979D}"/>
-            </a:ext>
-          </a:extLst>
-        </p:cNvPr>
-        <p:cNvGrpSpPr/>
-        <p:nvPr/>
-      </p:nvGrpSpPr>
-      <p:grpSpPr>
-        <a:xfrm>
-          <a:off x="0" y="0"/>
-          <a:ext cx="0" cy="0"/>
-          <a:chOff x="0" y="0"/>
-          <a:chExt cx="0" cy="0"/>
-        </a:xfrm>
-      </p:grpSpPr>
-      <p:sp>
-        <p:nvSpPr>
-          <p:cNvPr id="4" name="제목 1">
-            <a:extLst>
-              <a:ext uri="{FF2B5EF4-FFF2-40B4-BE49-F238E27FC236}">
-                <a16:creationId xmlns:a16="http://schemas.microsoft.com/office/drawing/2014/main" id="{100005ED-53E3-BFC8-AFAA-7BAFFA3752AB}"/>
-              </a:ext>
-            </a:extLst>
-          </p:cNvPr>
-          <p:cNvSpPr txBox="1">
-            <a:spLocks/>
-          </p:cNvSpPr>
-          <p:nvPr/>
-        </p:nvSpPr>
-        <p:spPr>
-          <a:xfrm>
-            <a:off x="1524000" y="2555530"/>
-            <a:ext cx="9144000" cy="1116107"/>
-          </a:xfrm>
-          <a:prstGeom prst="rect">
-            <a:avLst/>
-          </a:prstGeom>
-        </p:spPr>
-        <p:txBody>
-          <a:bodyPr vert="horz" lIns="91440" tIns="45720" rIns="91440" bIns="45720" rtlCol="0" anchor="b">
-            <a:normAutofit/>
-          </a:bodyPr>
-          <a:lstStyle>
-            <a:lvl1pPr algn="ctr" defTabSz="914400" rtl="0" eaLnBrk="1" latinLnBrk="1" hangingPunct="1">
-              <a:lnSpc>
-                <a:spcPct val="90000"/>
-              </a:lnSpc>
-              <a:spcBef>
-                <a:spcPct val="0"/>
-              </a:spcBef>
-              <a:buNone/>
-              <a:defRPr sz="6000" kern="1200">
-                <a:solidFill>
-                  <a:schemeClr val="tx1"/>
-                </a:solidFill>
-                <a:latin typeface="+mj-lt"/>
-                <a:ea typeface="+mj-ea"/>
-                <a:cs typeface="+mj-cs"/>
-              </a:defRPr>
-            </a:lvl1pPr>
-          </a:lstStyle>
-          <a:p>
-            <a:r>
-              <a:rPr lang="ko-KR" altLang="en-US" dirty="0">
-                <a:solidFill>
-                  <a:schemeClr val="accent2"/>
-                </a:solidFill>
-                <a:latin typeface="G마켓 산스 TTF Bold" panose="02000000000000000000" pitchFamily="2" charset="-127"/>
-                <a:ea typeface="G마켓 산스 TTF Bold" panose="02000000000000000000" pitchFamily="2" charset="-127"/>
-              </a:rPr>
-              <a:t>감사합니다</a:t>
-            </a:r>
-          </a:p>
-        </p:txBody>
-      </p:sp>
-    </p:spTree>
-    <p:extLst>
-      <p:ext uri="{BB962C8B-B14F-4D97-AF65-F5344CB8AC3E}">
-        <p14:creationId xmlns:p14="http://schemas.microsoft.com/office/powerpoint/2010/main" val="4171818688"/>
       </p:ext>
     </p:extLst>
   </p:cSld>
@@ -19050,7 +18954,7 @@
           <a:p>
             <a:fld id="{0F78D9C4-20C1-4B15-A116-16DC77AD9A1E}" type="datetime1">
               <a:rPr lang="ko-KR" altLang="en-US" smtClean="0"/>
-              <a:t>2026-02-12</a:t>
+              <a:t>2026-02-13</a:t>
             </a:fld>
             <a:endParaRPr lang="ko-KR" altLang="en-US"/>
           </a:p>
@@ -19537,7 +19441,7 @@
           <a:p>
             <a:fld id="{0F78D9C4-20C1-4B15-A116-16DC77AD9A1E}" type="datetime1">
               <a:rPr lang="ko-KR" altLang="en-US" smtClean="0"/>
-              <a:t>2026-02-12</a:t>
+              <a:t>2026-02-13</a:t>
             </a:fld>
             <a:endParaRPr lang="ko-KR" altLang="en-US"/>
           </a:p>
@@ -20181,7 +20085,7 @@
           <a:p>
             <a:fld id="{0F78D9C4-20C1-4B15-A116-16DC77AD9A1E}" type="datetime1">
               <a:rPr lang="ko-KR" altLang="en-US" smtClean="0"/>
-              <a:t>2026-02-12</a:t>
+              <a:t>2026-02-13</a:t>
             </a:fld>
             <a:endParaRPr lang="ko-KR" altLang="en-US"/>
           </a:p>
@@ -20476,7 +20380,7 @@
           <a:p>
             <a:fld id="{0F78D9C4-20C1-4B15-A116-16DC77AD9A1E}" type="datetime1">
               <a:rPr lang="ko-KR" altLang="en-US" smtClean="0"/>
-              <a:t>2026-02-12</a:t>
+              <a:t>2026-02-13</a:t>
             </a:fld>
             <a:endParaRPr lang="ko-KR" altLang="en-US"/>
           </a:p>
@@ -23751,7 +23655,7 @@
           <a:p>
             <a:fld id="{0F78D9C4-20C1-4B15-A116-16DC77AD9A1E}" type="datetime1">
               <a:rPr lang="ko-KR" altLang="en-US" smtClean="0"/>
-              <a:t>2026-02-12</a:t>
+              <a:t>2026-02-13</a:t>
             </a:fld>
             <a:endParaRPr lang="ko-KR" altLang="en-US"/>
           </a:p>
